--- a/汇报PPT/1.pptx
+++ b/汇报PPT/1.pptx
@@ -4,17 +4,20 @@
   <p:sldMasterIdLst>
     <p:sldMasterId id="2147483648" r:id="rId1"/>
   </p:sldMasterIdLst>
+  <p:notesMasterIdLst>
+    <p:notesMasterId r:id="rId10"/>
+  </p:notesMasterIdLst>
   <p:sldIdLst>
-    <p:sldId id="256" r:id="rId7"/>
-    <p:sldId id="257" r:id="rId9"/>
-    <p:sldId id="258" r:id="rId10"/>
-    <p:sldId id="259" r:id="rId11"/>
-    <p:sldId id="260" r:id="rId12"/>
-    <p:sldId id="261" r:id="rId13"/>
-    <p:sldId id="262" r:id="rId14"/>
-    <p:sldId id="263" r:id="rId15"/>
+    <p:sldId id="256" r:id="rId2"/>
+    <p:sldId id="257" r:id="rId3"/>
+    <p:sldId id="258" r:id="rId4"/>
+    <p:sldId id="259" r:id="rId5"/>
+    <p:sldId id="260" r:id="rId6"/>
+    <p:sldId id="261" r:id="rId7"/>
+    <p:sldId id="262" r:id="rId8"/>
+    <p:sldId id="263" r:id="rId9"/>
   </p:sldIdLst>
-  <p:sldSz cx="12191695" cy="6858000" type="screen4x3"/>
+  <p:sldSz cx="12192000" cy="6858000"/>
   <p:notesSz cx="6858000" cy="9144000"/>
   <p:defaultTextStyle>
     <a:defPPr>
@@ -111,11 +114,27 @@
       </a:defRPr>
     </a:lvl9pPr>
   </p:defaultTextStyle>
+  <p:extLst>
+    <p:ext uri="{EFAFB233-063F-42B5-8137-9DF3F51BA10A}">
+      <p15:sldGuideLst xmlns:p15="http://schemas.microsoft.com/office/powerpoint/2012/main">
+        <p15:guide id="1" orient="horz" pos="2160">
+          <p15:clr>
+            <a:srgbClr val="A4A3A4"/>
+          </p15:clr>
+        </p15:guide>
+        <p15:guide id="2" pos="2880">
+          <p15:clr>
+            <a:srgbClr val="A4A3A4"/>
+          </p15:clr>
+        </p15:guide>
+      </p15:sldGuideLst>
+    </p:ext>
+  </p:extLst>
 </p:presentation>
 </file>
 
 <file path=ppt/notesMasters/notesMaster1.xml><?xml version="1.0" encoding="utf-8"?>
-<p:notesMaster xmlns:a="http://schemas.openxmlformats.org/drawingml/2006/main" xmlns:p="http://schemas.openxmlformats.org/presentationml/2006/main" xmlns:r="http://schemas.openxmlformats.org/officeDocument/2006/relationships">
+<p:notesMaster xmlns:a="http://schemas.openxmlformats.org/drawingml/2006/main" xmlns:r="http://schemas.openxmlformats.org/officeDocument/2006/relationships" xmlns:p="http://schemas.openxmlformats.org/presentationml/2006/main">
   <p:cSld>
     <p:bg>
       <p:bgRef idx="1001">
@@ -136,241 +155,16 @@
           <a:chExt cx="0" cy="0"/>
         </a:xfrm>
       </p:grpSpPr>
-      <p:sp>
-        <p:nvSpPr>
-          <p:cNvPr id="2" name="Header Placeholder 1"/>
-          <p:cNvSpPr>
-            <a:spLocks noGrp="1"/>
-          </p:cNvSpPr>
-          <p:nvPr>
-            <p:ph type="hdr" sz="quarter"/>
-          </p:nvPr>
-        </p:nvSpPr>
-        <p:spPr>
-          <a:xfrm>
-            <a:off x="0" y="0"/>
-            <a:ext cx="2971800" cy="457200"/>
-          </a:xfrm>
-          <a:prstGeom prst="rect">
-            <a:avLst/>
-          </a:prstGeom>
-        </p:spPr>
-        <p:txBody>
-          <a:bodyPr vert="horz" lIns="91440" tIns="45720" rIns="91440" bIns="45720" rtlCol="0"/>
-          <a:lstStyle>
-            <a:lvl1pPr algn="l">
-              <a:defRPr sz="1200"/>
-            </a:lvl1pPr>
-          </a:lstStyle>
-          <a:p>
-            <a:endParaRPr lang="en-US"/>
-          </a:p>
-        </p:txBody>
-      </p:sp>
-      <p:sp>
-        <p:nvSpPr>
-          <p:cNvPr id="3" name="Date Placeholder 2"/>
-          <p:cNvSpPr>
-            <a:spLocks noGrp="1"/>
-          </p:cNvSpPr>
-          <p:nvPr>
-            <p:ph type="dt" idx="1"/>
-          </p:nvPr>
-        </p:nvSpPr>
-        <p:spPr>
-          <a:xfrm>
-            <a:off x="3884613" y="0"/>
-            <a:ext cx="2971800" cy="457200"/>
-          </a:xfrm>
-          <a:prstGeom prst="rect">
-            <a:avLst/>
-          </a:prstGeom>
-        </p:spPr>
-        <p:txBody>
-          <a:bodyPr vert="horz" lIns="91440" tIns="45720" rIns="91440" bIns="45720" rtlCol="0"/>
-          <a:lstStyle>
-            <a:lvl1pPr algn="r">
-              <a:defRPr sz="1200"/>
-            </a:lvl1pPr>
-          </a:lstStyle>
-          <a:p>
-            <a:fld id="{0F89C1C7-3DCD-1040-A9CF-14679D8B5DDD}" type="datetimeFigureOut">
-              <a:rPr lang="en-US" smtClean="0"/>
-              <a:t>10/17/16</a:t>
-            </a:fld>
-            <a:endParaRPr lang="en-US"/>
-          </a:p>
-        </p:txBody>
-      </p:sp>
-      <p:sp>
-        <p:nvSpPr>
-          <p:cNvPr id="4" name="Slide Image Placeholder 3"/>
-          <p:cNvSpPr>
-            <a:spLocks noGrp="1" noRot="1" noChangeAspect="1"/>
-          </p:cNvSpPr>
-          <p:nvPr>
-            <p:ph type="sldImg" idx="2"/>
-          </p:nvPr>
-        </p:nvSpPr>
-        <p:spPr>
-          <a:xfrm>
-            <a:off x="1143000" y="685800"/>
-            <a:ext cx="4572000" cy="3429000"/>
-          </a:xfrm>
-          <a:prstGeom prst="rect">
-            <a:avLst/>
-          </a:prstGeom>
-          <a:noFill/>
-          <a:ln w="12700">
-            <a:solidFill>
-              <a:prstClr val="black"/>
-            </a:solidFill>
-          </a:ln>
-        </p:spPr>
-        <p:txBody>
-          <a:bodyPr vert="horz" lIns="91440" tIns="45720" rIns="91440" bIns="45720" rtlCol="0" anchor="ctr"/>
-          <a:lstStyle/>
-          <a:p>
-            <a:endParaRPr lang="en-US"/>
-          </a:p>
-        </p:txBody>
-      </p:sp>
-      <p:sp>
-        <p:nvSpPr>
-          <p:cNvPr id="5" name="Notes Placeholder 4"/>
-          <p:cNvSpPr>
-            <a:spLocks noGrp="1"/>
-          </p:cNvSpPr>
-          <p:nvPr>
-            <p:ph type="body" sz="quarter" idx="3"/>
-          </p:nvPr>
-        </p:nvSpPr>
-        <p:spPr>
-          <a:xfrm>
-            <a:off x="685800" y="4343400"/>
-            <a:ext cx="5486400" cy="4114800"/>
-          </a:xfrm>
-          <a:prstGeom prst="rect">
-            <a:avLst/>
-          </a:prstGeom>
-        </p:spPr>
-        <p:txBody>
-          <a:bodyPr vert="horz" lIns="91440" tIns="45720" rIns="91440" bIns="45720" rtlCol="0"/>
-          <a:lstStyle/>
-          <a:p>
-            <a:pPr lvl="0"/>
-            <a:r>
-              <a:rPr lang="en-US" smtClean="0"/>
-              <a:t>Click to edit Master text styles</a:t>
-            </a:r>
-          </a:p>
-          <a:p>
-            <a:pPr lvl="1"/>
-            <a:r>
-              <a:rPr lang="en-US" smtClean="0"/>
-              <a:t>Second level</a:t>
-            </a:r>
-          </a:p>
-          <a:p>
-            <a:pPr lvl="2"/>
-            <a:r>
-              <a:rPr lang="en-US" smtClean="0"/>
-              <a:t>Third level</a:t>
-            </a:r>
-          </a:p>
-          <a:p>
-            <a:pPr lvl="3"/>
-            <a:r>
-              <a:rPr lang="en-US" smtClean="0"/>
-              <a:t>Fourth level</a:t>
-            </a:r>
-          </a:p>
-          <a:p>
-            <a:pPr lvl="4"/>
-            <a:r>
-              <a:rPr lang="en-US" smtClean="0"/>
-              <a:t>Fifth level</a:t>
-            </a:r>
-            <a:endParaRPr lang="en-US"/>
-          </a:p>
-        </p:txBody>
-      </p:sp>
-      <p:sp>
-        <p:nvSpPr>
-          <p:cNvPr id="6" name="Footer Placeholder 5"/>
-          <p:cNvSpPr>
-            <a:spLocks noGrp="1"/>
-          </p:cNvSpPr>
-          <p:nvPr>
-            <p:ph type="ftr" sz="quarter" idx="4"/>
-          </p:nvPr>
-        </p:nvSpPr>
-        <p:spPr>
-          <a:xfrm>
-            <a:off x="0" y="8685213"/>
-            <a:ext cx="2971800" cy="457200"/>
-          </a:xfrm>
-          <a:prstGeom prst="rect">
-            <a:avLst/>
-          </a:prstGeom>
-        </p:spPr>
-        <p:txBody>
-          <a:bodyPr vert="horz" lIns="91440" tIns="45720" rIns="91440" bIns="45720" rtlCol="0" anchor="b"/>
-          <a:lstStyle>
-            <a:lvl1pPr algn="l">
-              <a:defRPr sz="1200"/>
-            </a:lvl1pPr>
-          </a:lstStyle>
-          <a:p>
-            <a:endParaRPr lang="en-US"/>
-          </a:p>
-        </p:txBody>
-      </p:sp>
-      <p:sp>
-        <p:nvSpPr>
-          <p:cNvPr id="7" name="Slide Number Placeholder 6"/>
-          <p:cNvSpPr>
-            <a:spLocks noGrp="1"/>
-          </p:cNvSpPr>
-          <p:nvPr>
-            <p:ph type="sldNum" sz="quarter" idx="5"/>
-          </p:nvPr>
-        </p:nvSpPr>
-        <p:spPr>
-          <a:xfrm>
-            <a:off x="3884613" y="8685213"/>
-            <a:ext cx="2971800" cy="457200"/>
-          </a:xfrm>
-          <a:prstGeom prst="rect">
-            <a:avLst/>
-          </a:prstGeom>
-        </p:spPr>
-        <p:txBody>
-          <a:bodyPr vert="horz" lIns="91440" tIns="45720" rIns="91440" bIns="45720" rtlCol="0" anchor="b"/>
-          <a:lstStyle>
-            <a:lvl1pPr algn="r">
-              <a:defRPr sz="1200"/>
-            </a:lvl1pPr>
-          </a:lstStyle>
-          <a:p>
-            <a:fld id="{BB5E49A5-4136-284D-997B-48E1D791AD67}" type="slidenum">
-              <a:rPr lang="en-US" smtClean="0"/>
-              <a:t>‹#›</a:t>
-            </a:fld>
-            <a:endParaRPr lang="en-US"/>
-          </a:p>
-        </p:txBody>
-      </p:sp>
     </p:spTree>
     <p:extLst>
       <p:ext uri="{BB962C8B-B14F-4D97-AF65-F5344CB8AC3E}">
-        <p14:creationId xmlns:p14="http://schemas.microsoft.com/office/powerpoint/2010/main" val="2623252185"/>
+        <p14:creationId xmlns:p14="http://schemas.microsoft.com/office/powerpoint/2010/main" val="843602089"/>
       </p:ext>
     </p:extLst>
   </p:cSld>
   <p:clrMap bg1="lt1" tx1="dk1" bg2="lt2" tx2="dk2" accent1="accent1" accent2="accent2" accent3="accent3" accent4="accent4" accent5="accent5" accent6="accent6" hlink="hlink" folHlink="folHlink"/>
   <p:notesStyle>
-    <a:lvl1pPr marL="0" algn="l" defTabSz="457200" rtl="0" eaLnBrk="1" latinLnBrk="0" hangingPunct="1">
+    <a:lvl1pPr marL="0" algn="l" defTabSz="914400" rtl="0" eaLnBrk="1" latinLnBrk="0" hangingPunct="1">
       <a:defRPr sz="1200" kern="1200">
         <a:solidFill>
           <a:schemeClr val="tx1"/>
@@ -380,7 +174,7 @@
         <a:cs typeface="+mn-cs"/>
       </a:defRPr>
     </a:lvl1pPr>
-    <a:lvl2pPr marL="457200" algn="l" defTabSz="457200" rtl="0" eaLnBrk="1" latinLnBrk="0" hangingPunct="1">
+    <a:lvl2pPr marL="457200" algn="l" defTabSz="914400" rtl="0" eaLnBrk="1" latinLnBrk="0" hangingPunct="1">
       <a:defRPr sz="1200" kern="1200">
         <a:solidFill>
           <a:schemeClr val="tx1"/>
@@ -390,7 +184,7 @@
         <a:cs typeface="+mn-cs"/>
       </a:defRPr>
     </a:lvl2pPr>
-    <a:lvl3pPr marL="914400" algn="l" defTabSz="457200" rtl="0" eaLnBrk="1" latinLnBrk="0" hangingPunct="1">
+    <a:lvl3pPr marL="914400" algn="l" defTabSz="914400" rtl="0" eaLnBrk="1" latinLnBrk="0" hangingPunct="1">
       <a:defRPr sz="1200" kern="1200">
         <a:solidFill>
           <a:schemeClr val="tx1"/>
@@ -400,7 +194,7 @@
         <a:cs typeface="+mn-cs"/>
       </a:defRPr>
     </a:lvl3pPr>
-    <a:lvl4pPr marL="1371600" algn="l" defTabSz="457200" rtl="0" eaLnBrk="1" latinLnBrk="0" hangingPunct="1">
+    <a:lvl4pPr marL="1371600" algn="l" defTabSz="914400" rtl="0" eaLnBrk="1" latinLnBrk="0" hangingPunct="1">
       <a:defRPr sz="1200" kern="1200">
         <a:solidFill>
           <a:schemeClr val="tx1"/>
@@ -410,7 +204,7 @@
         <a:cs typeface="+mn-cs"/>
       </a:defRPr>
     </a:lvl4pPr>
-    <a:lvl5pPr marL="1828800" algn="l" defTabSz="457200" rtl="0" eaLnBrk="1" latinLnBrk="0" hangingPunct="1">
+    <a:lvl5pPr marL="1828800" algn="l" defTabSz="914400" rtl="0" eaLnBrk="1" latinLnBrk="0" hangingPunct="1">
       <a:defRPr sz="1200" kern="1200">
         <a:solidFill>
           <a:schemeClr val="tx1"/>
@@ -420,7 +214,7 @@
         <a:cs typeface="+mn-cs"/>
       </a:defRPr>
     </a:lvl5pPr>
-    <a:lvl6pPr marL="2286000" algn="l" defTabSz="457200" rtl="0" eaLnBrk="1" latinLnBrk="0" hangingPunct="1">
+    <a:lvl6pPr marL="2286000" algn="l" defTabSz="914400" rtl="0" eaLnBrk="1" latinLnBrk="0" hangingPunct="1">
       <a:defRPr sz="1200" kern="1200">
         <a:solidFill>
           <a:schemeClr val="tx1"/>
@@ -430,7 +224,7 @@
         <a:cs typeface="+mn-cs"/>
       </a:defRPr>
     </a:lvl6pPr>
-    <a:lvl7pPr marL="2743200" algn="l" defTabSz="457200" rtl="0" eaLnBrk="1" latinLnBrk="0" hangingPunct="1">
+    <a:lvl7pPr marL="2743200" algn="l" defTabSz="914400" rtl="0" eaLnBrk="1" latinLnBrk="0" hangingPunct="1">
       <a:defRPr sz="1200" kern="1200">
         <a:solidFill>
           <a:schemeClr val="tx1"/>
@@ -440,7 +234,7 @@
         <a:cs typeface="+mn-cs"/>
       </a:defRPr>
     </a:lvl7pPr>
-    <a:lvl8pPr marL="3200400" algn="l" defTabSz="457200" rtl="0" eaLnBrk="1" latinLnBrk="0" hangingPunct="1">
+    <a:lvl8pPr marL="3200400" algn="l" defTabSz="914400" rtl="0" eaLnBrk="1" latinLnBrk="0" hangingPunct="1">
       <a:defRPr sz="1200" kern="1200">
         <a:solidFill>
           <a:schemeClr val="tx1"/>
@@ -450,7 +244,7 @@
         <a:cs typeface="+mn-cs"/>
       </a:defRPr>
     </a:lvl8pPr>
-    <a:lvl9pPr marL="3657600" algn="l" defTabSz="457200" rtl="0" eaLnBrk="1" latinLnBrk="0" hangingPunct="1">
+    <a:lvl9pPr marL="3657600" algn="l" defTabSz="914400" rtl="0" eaLnBrk="1" latinLnBrk="0" hangingPunct="1">
       <a:defRPr sz="1200" kern="1200">
         <a:solidFill>
           <a:schemeClr val="tx1"/>
@@ -465,7 +259,7 @@
 </file>
 
 <file path=ppt/notesSlides/notesSlide1.xml><?xml version="1.0" encoding="utf-8"?>
-<p:notes xmlns:a="http://schemas.openxmlformats.org/drawingml/2006/main" xmlns:p="http://schemas.openxmlformats.org/presentationml/2006/main" xmlns:r="http://schemas.openxmlformats.org/officeDocument/2006/relationships">
+<p:notes xmlns:a="http://schemas.openxmlformats.org/drawingml/2006/main" xmlns:r="http://schemas.openxmlformats.org/officeDocument/2006/relationships" xmlns:p="http://schemas.openxmlformats.org/presentationml/2006/main">
   <p:cSld>
     <p:spTree>
       <p:nvGrpSpPr>
@@ -485,7 +279,7 @@
         <p:nvSpPr>
           <p:cNvPr id="2" name="Slide Image Placeholder 1"/>
           <p:cNvSpPr>
-            <a:spLocks noGrp="1"/>
+            <a:spLocks noGrp="1" noRot="1" noChangeAspect="1"/>
           </p:cNvSpPr>
           <p:nvPr>
             <p:ph type="sldImg" idx="2"/>
@@ -500,7 +294,7 @@
             <a:spLocks noGrp="1"/>
           </p:cNvSpPr>
           <p:nvPr>
-            <p:ph type="body" idx="3" sz="quarter"/>
+            <p:ph type="body" sz="quarter" idx="3"/>
           </p:nvPr>
         </p:nvSpPr>
         <p:spPr/>
@@ -521,7 +315,7 @@
             <a:spLocks noGrp="1"/>
           </p:cNvSpPr>
           <p:nvPr>
-            <p:ph type="sldNum" idx="5" sz="quarter"/>
+            <p:ph type="sldNum" sz="quarter" idx="5"/>
           </p:nvPr>
         </p:nvSpPr>
         <p:spPr/>
@@ -535,7 +329,7 @@
 </file>
 
 <file path=ppt/notesSlides/notesSlide2.xml><?xml version="1.0" encoding="utf-8"?>
-<p:notes xmlns:a="http://schemas.openxmlformats.org/drawingml/2006/main" xmlns:p="http://schemas.openxmlformats.org/presentationml/2006/main" xmlns:r="http://schemas.openxmlformats.org/officeDocument/2006/relationships">
+<p:notes xmlns:a="http://schemas.openxmlformats.org/drawingml/2006/main" xmlns:r="http://schemas.openxmlformats.org/officeDocument/2006/relationships" xmlns:p="http://schemas.openxmlformats.org/presentationml/2006/main">
   <p:cSld>
     <p:spTree>
       <p:nvGrpSpPr>
@@ -555,7 +349,7 @@
         <p:nvSpPr>
           <p:cNvPr id="2" name="Slide Image Placeholder 1"/>
           <p:cNvSpPr>
-            <a:spLocks noGrp="1"/>
+            <a:spLocks noGrp="1" noRot="1" noChangeAspect="1"/>
           </p:cNvSpPr>
           <p:nvPr>
             <p:ph type="sldImg" idx="2"/>
@@ -570,7 +364,7 @@
             <a:spLocks noGrp="1"/>
           </p:cNvSpPr>
           <p:nvPr>
-            <p:ph type="body" idx="3" sz="quarter"/>
+            <p:ph type="body" sz="quarter" idx="3"/>
           </p:nvPr>
         </p:nvSpPr>
         <p:spPr/>
@@ -591,7 +385,7 @@
             <a:spLocks noGrp="1"/>
           </p:cNvSpPr>
           <p:nvPr>
-            <p:ph type="sldNum" idx="5" sz="quarter"/>
+            <p:ph type="sldNum" sz="quarter" idx="5"/>
           </p:nvPr>
         </p:nvSpPr>
         <p:spPr/>
@@ -605,7 +399,7 @@
 </file>
 
 <file path=ppt/notesSlides/notesSlide3.xml><?xml version="1.0" encoding="utf-8"?>
-<p:notes xmlns:a="http://schemas.openxmlformats.org/drawingml/2006/main" xmlns:p="http://schemas.openxmlformats.org/presentationml/2006/main" xmlns:r="http://schemas.openxmlformats.org/officeDocument/2006/relationships">
+<p:notes xmlns:a="http://schemas.openxmlformats.org/drawingml/2006/main" xmlns:r="http://schemas.openxmlformats.org/officeDocument/2006/relationships" xmlns:p="http://schemas.openxmlformats.org/presentationml/2006/main">
   <p:cSld>
     <p:spTree>
       <p:nvGrpSpPr>
@@ -625,7 +419,7 @@
         <p:nvSpPr>
           <p:cNvPr id="2" name="Slide Image Placeholder 1"/>
           <p:cNvSpPr>
-            <a:spLocks noGrp="1"/>
+            <a:spLocks noGrp="1" noRot="1" noChangeAspect="1"/>
           </p:cNvSpPr>
           <p:nvPr>
             <p:ph type="sldImg" idx="2"/>
@@ -640,7 +434,7 @@
             <a:spLocks noGrp="1"/>
           </p:cNvSpPr>
           <p:nvPr>
-            <p:ph type="body" idx="3" sz="quarter"/>
+            <p:ph type="body" sz="quarter" idx="3"/>
           </p:nvPr>
         </p:nvSpPr>
         <p:spPr/>
@@ -661,7 +455,7 @@
             <a:spLocks noGrp="1"/>
           </p:cNvSpPr>
           <p:nvPr>
-            <p:ph type="sldNum" idx="5" sz="quarter"/>
+            <p:ph type="sldNum" sz="quarter" idx="5"/>
           </p:nvPr>
         </p:nvSpPr>
         <p:spPr/>
@@ -675,7 +469,7 @@
 </file>
 
 <file path=ppt/notesSlides/notesSlide4.xml><?xml version="1.0" encoding="utf-8"?>
-<p:notes xmlns:a="http://schemas.openxmlformats.org/drawingml/2006/main" xmlns:p="http://schemas.openxmlformats.org/presentationml/2006/main" xmlns:r="http://schemas.openxmlformats.org/officeDocument/2006/relationships">
+<p:notes xmlns:a="http://schemas.openxmlformats.org/drawingml/2006/main" xmlns:r="http://schemas.openxmlformats.org/officeDocument/2006/relationships" xmlns:p="http://schemas.openxmlformats.org/presentationml/2006/main">
   <p:cSld>
     <p:spTree>
       <p:nvGrpSpPr>
@@ -695,7 +489,7 @@
         <p:nvSpPr>
           <p:cNvPr id="2" name="Slide Image Placeholder 1"/>
           <p:cNvSpPr>
-            <a:spLocks noGrp="1"/>
+            <a:spLocks noGrp="1" noRot="1" noChangeAspect="1"/>
           </p:cNvSpPr>
           <p:nvPr>
             <p:ph type="sldImg" idx="2"/>
@@ -710,7 +504,7 @@
             <a:spLocks noGrp="1"/>
           </p:cNvSpPr>
           <p:nvPr>
-            <p:ph type="body" idx="3" sz="quarter"/>
+            <p:ph type="body" sz="quarter" idx="3"/>
           </p:nvPr>
         </p:nvSpPr>
         <p:spPr/>
@@ -731,7 +525,7 @@
             <a:spLocks noGrp="1"/>
           </p:cNvSpPr>
           <p:nvPr>
-            <p:ph type="sldNum" idx="5" sz="quarter"/>
+            <p:ph type="sldNum" sz="quarter" idx="5"/>
           </p:nvPr>
         </p:nvSpPr>
         <p:spPr/>
@@ -745,7 +539,7 @@
 </file>
 
 <file path=ppt/notesSlides/notesSlide5.xml><?xml version="1.0" encoding="utf-8"?>
-<p:notes xmlns:a="http://schemas.openxmlformats.org/drawingml/2006/main" xmlns:p="http://schemas.openxmlformats.org/presentationml/2006/main" xmlns:r="http://schemas.openxmlformats.org/officeDocument/2006/relationships">
+<p:notes xmlns:a="http://schemas.openxmlformats.org/drawingml/2006/main" xmlns:r="http://schemas.openxmlformats.org/officeDocument/2006/relationships" xmlns:p="http://schemas.openxmlformats.org/presentationml/2006/main">
   <p:cSld>
     <p:spTree>
       <p:nvGrpSpPr>
@@ -765,7 +559,7 @@
         <p:nvSpPr>
           <p:cNvPr id="2" name="Slide Image Placeholder 1"/>
           <p:cNvSpPr>
-            <a:spLocks noGrp="1"/>
+            <a:spLocks noGrp="1" noRot="1" noChangeAspect="1"/>
           </p:cNvSpPr>
           <p:nvPr>
             <p:ph type="sldImg" idx="2"/>
@@ -780,7 +574,7 @@
             <a:spLocks noGrp="1"/>
           </p:cNvSpPr>
           <p:nvPr>
-            <p:ph type="body" idx="3" sz="quarter"/>
+            <p:ph type="body" sz="quarter" idx="3"/>
           </p:nvPr>
         </p:nvSpPr>
         <p:spPr/>
@@ -801,7 +595,7 @@
             <a:spLocks noGrp="1"/>
           </p:cNvSpPr>
           <p:nvPr>
-            <p:ph type="sldNum" idx="5" sz="quarter"/>
+            <p:ph type="sldNum" sz="quarter" idx="5"/>
           </p:nvPr>
         </p:nvSpPr>
         <p:spPr/>
@@ -815,7 +609,7 @@
 </file>
 
 <file path=ppt/notesSlides/notesSlide6.xml><?xml version="1.0" encoding="utf-8"?>
-<p:notes xmlns:a="http://schemas.openxmlformats.org/drawingml/2006/main" xmlns:p="http://schemas.openxmlformats.org/presentationml/2006/main" xmlns:r="http://schemas.openxmlformats.org/officeDocument/2006/relationships">
+<p:notes xmlns:a="http://schemas.openxmlformats.org/drawingml/2006/main" xmlns:r="http://schemas.openxmlformats.org/officeDocument/2006/relationships" xmlns:p="http://schemas.openxmlformats.org/presentationml/2006/main">
   <p:cSld>
     <p:spTree>
       <p:nvGrpSpPr>
@@ -835,7 +629,7 @@
         <p:nvSpPr>
           <p:cNvPr id="2" name="Slide Image Placeholder 1"/>
           <p:cNvSpPr>
-            <a:spLocks noGrp="1"/>
+            <a:spLocks noGrp="1" noRot="1" noChangeAspect="1"/>
           </p:cNvSpPr>
           <p:nvPr>
             <p:ph type="sldImg" idx="2"/>
@@ -850,7 +644,7 @@
             <a:spLocks noGrp="1"/>
           </p:cNvSpPr>
           <p:nvPr>
-            <p:ph type="body" idx="3" sz="quarter"/>
+            <p:ph type="body" sz="quarter" idx="3"/>
           </p:nvPr>
         </p:nvSpPr>
         <p:spPr/>
@@ -871,7 +665,7 @@
             <a:spLocks noGrp="1"/>
           </p:cNvSpPr>
           <p:nvPr>
-            <p:ph type="sldNum" idx="5" sz="quarter"/>
+            <p:ph type="sldNum" sz="quarter" idx="5"/>
           </p:nvPr>
         </p:nvSpPr>
         <p:spPr/>
@@ -885,7 +679,7 @@
 </file>
 
 <file path=ppt/notesSlides/notesSlide7.xml><?xml version="1.0" encoding="utf-8"?>
-<p:notes xmlns:a="http://schemas.openxmlformats.org/drawingml/2006/main" xmlns:p="http://schemas.openxmlformats.org/presentationml/2006/main" xmlns:r="http://schemas.openxmlformats.org/officeDocument/2006/relationships">
+<p:notes xmlns:a="http://schemas.openxmlformats.org/drawingml/2006/main" xmlns:r="http://schemas.openxmlformats.org/officeDocument/2006/relationships" xmlns:p="http://schemas.openxmlformats.org/presentationml/2006/main">
   <p:cSld>
     <p:spTree>
       <p:nvGrpSpPr>
@@ -905,7 +699,7 @@
         <p:nvSpPr>
           <p:cNvPr id="2" name="Slide Image Placeholder 1"/>
           <p:cNvSpPr>
-            <a:spLocks noGrp="1"/>
+            <a:spLocks noGrp="1" noRot="1" noChangeAspect="1"/>
           </p:cNvSpPr>
           <p:nvPr>
             <p:ph type="sldImg" idx="2"/>
@@ -920,7 +714,7 @@
             <a:spLocks noGrp="1"/>
           </p:cNvSpPr>
           <p:nvPr>
-            <p:ph type="body" idx="3" sz="quarter"/>
+            <p:ph type="body" sz="quarter" idx="3"/>
           </p:nvPr>
         </p:nvSpPr>
         <p:spPr/>
@@ -941,7 +735,7 @@
             <a:spLocks noGrp="1"/>
           </p:cNvSpPr>
           <p:nvPr>
-            <p:ph type="sldNum" idx="5" sz="quarter"/>
+            <p:ph type="sldNum" sz="quarter" idx="5"/>
           </p:nvPr>
         </p:nvSpPr>
         <p:spPr/>
@@ -955,7 +749,7 @@
 </file>
 
 <file path=ppt/notesSlides/notesSlide8.xml><?xml version="1.0" encoding="utf-8"?>
-<p:notes xmlns:a="http://schemas.openxmlformats.org/drawingml/2006/main" xmlns:p="http://schemas.openxmlformats.org/presentationml/2006/main" xmlns:r="http://schemas.openxmlformats.org/officeDocument/2006/relationships">
+<p:notes xmlns:a="http://schemas.openxmlformats.org/drawingml/2006/main" xmlns:r="http://schemas.openxmlformats.org/officeDocument/2006/relationships" xmlns:p="http://schemas.openxmlformats.org/presentationml/2006/main">
   <p:cSld>
     <p:spTree>
       <p:nvGrpSpPr>
@@ -975,7 +769,7 @@
         <p:nvSpPr>
           <p:cNvPr id="2" name="Slide Image Placeholder 1"/>
           <p:cNvSpPr>
-            <a:spLocks noGrp="1"/>
+            <a:spLocks noGrp="1" noRot="1" noChangeAspect="1"/>
           </p:cNvSpPr>
           <p:nvPr>
             <p:ph type="sldImg" idx="2"/>
@@ -990,7 +784,7 @@
             <a:spLocks noGrp="1"/>
           </p:cNvSpPr>
           <p:nvPr>
-            <p:ph type="body" idx="3" sz="quarter"/>
+            <p:ph type="body" sz="quarter" idx="3"/>
           </p:nvPr>
         </p:nvSpPr>
         <p:spPr/>
@@ -1011,7 +805,7 @@
             <a:spLocks noGrp="1"/>
           </p:cNvSpPr>
           <p:nvPr>
-            <p:ph type="sldNum" idx="5" sz="quarter"/>
+            <p:ph type="sldNum" sz="quarter" idx="5"/>
           </p:nvPr>
         </p:nvSpPr>
         <p:spPr/>
@@ -1062,10 +856,9 @@
           <a:lstStyle/>
           <a:p>
             <a:r>
-              <a:rPr lang="en-US" smtClean="0"/>
+              <a:rPr lang="en-US"/>
               <a:t>Click to edit Master title style</a:t>
             </a:r>
-            <a:endParaRPr lang="en-US"/>
           </a:p>
         </p:txBody>
       </p:sp>
@@ -1181,10 +974,9 @@
           </a:lstStyle>
           <a:p>
             <a:r>
-              <a:rPr lang="en-US" smtClean="0"/>
+              <a:rPr lang="en-US"/>
               <a:t>Click to edit Master subtitle style</a:t>
             </a:r>
-            <a:endParaRPr lang="en-US"/>
           </a:p>
         </p:txBody>
       </p:sp>
@@ -1205,7 +997,7 @@
           <a:p>
             <a:fld id="{5BCAD085-E8A6-8845-BD4E-CB4CCA059FC4}" type="datetimeFigureOut">
               <a:rPr lang="en-US" smtClean="0"/>
-              <a:t>1/27/13</a:t>
+              <a:t>10/25/2026</a:t>
             </a:fld>
             <a:endParaRPr lang="en-US"/>
           </a:p>
@@ -1299,10 +1091,9 @@
           <a:lstStyle/>
           <a:p>
             <a:r>
-              <a:rPr lang="en-US" smtClean="0"/>
+              <a:rPr lang="en-US"/>
               <a:t>Click to edit Master title style</a:t>
             </a:r>
-            <a:endParaRPr lang="en-US"/>
           </a:p>
         </p:txBody>
       </p:sp>
@@ -1323,38 +1114,37 @@
           <a:p>
             <a:pPr lvl="0"/>
             <a:r>
-              <a:rPr lang="en-US" smtClean="0"/>
+              <a:rPr lang="en-US"/>
               <a:t>Click to edit Master text styles</a:t>
             </a:r>
           </a:p>
           <a:p>
             <a:pPr lvl="1"/>
             <a:r>
-              <a:rPr lang="en-US" smtClean="0"/>
+              <a:rPr lang="en-US"/>
               <a:t>Second level</a:t>
             </a:r>
           </a:p>
           <a:p>
             <a:pPr lvl="2"/>
             <a:r>
-              <a:rPr lang="en-US" smtClean="0"/>
+              <a:rPr lang="en-US"/>
               <a:t>Third level</a:t>
             </a:r>
           </a:p>
           <a:p>
             <a:pPr lvl="3"/>
             <a:r>
-              <a:rPr lang="en-US" smtClean="0"/>
+              <a:rPr lang="en-US"/>
               <a:t>Fourth level</a:t>
             </a:r>
           </a:p>
           <a:p>
             <a:pPr lvl="4"/>
             <a:r>
-              <a:rPr lang="en-US" smtClean="0"/>
+              <a:rPr lang="en-US"/>
               <a:t>Fifth level</a:t>
             </a:r>
-            <a:endParaRPr lang="en-US"/>
           </a:p>
         </p:txBody>
       </p:sp>
@@ -1375,7 +1165,7 @@
           <a:p>
             <a:fld id="{5BCAD085-E8A6-8845-BD4E-CB4CCA059FC4}" type="datetimeFigureOut">
               <a:rPr lang="en-US" smtClean="0"/>
-              <a:t>1/27/13</a:t>
+              <a:t>10/25/2026</a:t>
             </a:fld>
             <a:endParaRPr lang="en-US"/>
           </a:p>
@@ -1474,10 +1264,9 @@
           <a:lstStyle/>
           <a:p>
             <a:r>
-              <a:rPr lang="en-US" smtClean="0"/>
+              <a:rPr lang="en-US"/>
               <a:t>Click to edit Master title style</a:t>
             </a:r>
-            <a:endParaRPr lang="en-US"/>
           </a:p>
         </p:txBody>
       </p:sp>
@@ -1503,38 +1292,37 @@
           <a:p>
             <a:pPr lvl="0"/>
             <a:r>
-              <a:rPr lang="en-US" smtClean="0"/>
+              <a:rPr lang="en-US"/>
               <a:t>Click to edit Master text styles</a:t>
             </a:r>
           </a:p>
           <a:p>
             <a:pPr lvl="1"/>
             <a:r>
-              <a:rPr lang="en-US" smtClean="0"/>
+              <a:rPr lang="en-US"/>
               <a:t>Second level</a:t>
             </a:r>
           </a:p>
           <a:p>
             <a:pPr lvl="2"/>
             <a:r>
-              <a:rPr lang="en-US" smtClean="0"/>
+              <a:rPr lang="en-US"/>
               <a:t>Third level</a:t>
             </a:r>
           </a:p>
           <a:p>
             <a:pPr lvl="3"/>
             <a:r>
-              <a:rPr lang="en-US" smtClean="0"/>
+              <a:rPr lang="en-US"/>
               <a:t>Fourth level</a:t>
             </a:r>
           </a:p>
           <a:p>
             <a:pPr lvl="4"/>
             <a:r>
-              <a:rPr lang="en-US" smtClean="0"/>
+              <a:rPr lang="en-US"/>
               <a:t>Fifth level</a:t>
             </a:r>
-            <a:endParaRPr lang="en-US"/>
           </a:p>
         </p:txBody>
       </p:sp>
@@ -1555,7 +1343,7 @@
           <a:p>
             <a:fld id="{5BCAD085-E8A6-8845-BD4E-CB4CCA059FC4}" type="datetimeFigureOut">
               <a:rPr lang="en-US" smtClean="0"/>
-              <a:t>1/27/13</a:t>
+              <a:t>10/25/2026</a:t>
             </a:fld>
             <a:endParaRPr lang="en-US"/>
           </a:p>
@@ -1649,10 +1437,9 @@
           <a:lstStyle/>
           <a:p>
             <a:r>
-              <a:rPr lang="en-US" smtClean="0"/>
+              <a:rPr lang="en-US"/>
               <a:t>Click to edit Master title style</a:t>
             </a:r>
-            <a:endParaRPr lang="en-US"/>
           </a:p>
         </p:txBody>
       </p:sp>
@@ -1673,38 +1460,37 @@
           <a:p>
             <a:pPr lvl="0"/>
             <a:r>
-              <a:rPr lang="en-US" smtClean="0"/>
+              <a:rPr lang="en-US"/>
               <a:t>Click to edit Master text styles</a:t>
             </a:r>
           </a:p>
           <a:p>
             <a:pPr lvl="1"/>
             <a:r>
-              <a:rPr lang="en-US" smtClean="0"/>
+              <a:rPr lang="en-US"/>
               <a:t>Second level</a:t>
             </a:r>
           </a:p>
           <a:p>
             <a:pPr lvl="2"/>
             <a:r>
-              <a:rPr lang="en-US" smtClean="0"/>
+              <a:rPr lang="en-US"/>
               <a:t>Third level</a:t>
             </a:r>
           </a:p>
           <a:p>
             <a:pPr lvl="3"/>
             <a:r>
-              <a:rPr lang="en-US" smtClean="0"/>
+              <a:rPr lang="en-US"/>
               <a:t>Fourth level</a:t>
             </a:r>
           </a:p>
           <a:p>
             <a:pPr lvl="4"/>
             <a:r>
-              <a:rPr lang="en-US" smtClean="0"/>
+              <a:rPr lang="en-US"/>
               <a:t>Fifth level</a:t>
             </a:r>
-            <a:endParaRPr lang="en-US"/>
           </a:p>
         </p:txBody>
       </p:sp>
@@ -1725,7 +1511,7 @@
           <a:p>
             <a:fld id="{5BCAD085-E8A6-8845-BD4E-CB4CCA059FC4}" type="datetimeFigureOut">
               <a:rPr lang="en-US" smtClean="0"/>
-              <a:t>1/27/13</a:t>
+              <a:t>10/25/2026</a:t>
             </a:fld>
             <a:endParaRPr lang="en-US"/>
           </a:p>
@@ -1828,10 +1614,9 @@
           </a:lstStyle>
           <a:p>
             <a:r>
-              <a:rPr lang="en-US" smtClean="0"/>
+              <a:rPr lang="en-US"/>
               <a:t>Click to edit Master title style</a:t>
             </a:r>
-            <a:endParaRPr lang="en-US"/>
           </a:p>
         </p:txBody>
       </p:sp>
@@ -1948,7 +1733,7 @@
           <a:p>
             <a:pPr lvl="0"/>
             <a:r>
-              <a:rPr lang="en-US" smtClean="0"/>
+              <a:rPr lang="en-US"/>
               <a:t>Click to edit Master text styles</a:t>
             </a:r>
           </a:p>
@@ -1971,7 +1756,7 @@
           <a:p>
             <a:fld id="{5BCAD085-E8A6-8845-BD4E-CB4CCA059FC4}" type="datetimeFigureOut">
               <a:rPr lang="en-US" smtClean="0"/>
-              <a:t>1/27/13</a:t>
+              <a:t>10/25/2026</a:t>
             </a:fld>
             <a:endParaRPr lang="en-US"/>
           </a:p>
@@ -2065,10 +1850,9 @@
           <a:lstStyle/>
           <a:p>
             <a:r>
-              <a:rPr lang="en-US" smtClean="0"/>
+              <a:rPr lang="en-US"/>
               <a:t>Click to edit Master title style</a:t>
             </a:r>
-            <a:endParaRPr lang="en-US"/>
           </a:p>
         </p:txBody>
       </p:sp>
@@ -2122,38 +1906,37 @@
           <a:p>
             <a:pPr lvl="0"/>
             <a:r>
-              <a:rPr lang="en-US" smtClean="0"/>
+              <a:rPr lang="en-US"/>
               <a:t>Click to edit Master text styles</a:t>
             </a:r>
           </a:p>
           <a:p>
             <a:pPr lvl="1"/>
             <a:r>
-              <a:rPr lang="en-US" smtClean="0"/>
+              <a:rPr lang="en-US"/>
               <a:t>Second level</a:t>
             </a:r>
           </a:p>
           <a:p>
             <a:pPr lvl="2"/>
             <a:r>
-              <a:rPr lang="en-US" smtClean="0"/>
+              <a:rPr lang="en-US"/>
               <a:t>Third level</a:t>
             </a:r>
           </a:p>
           <a:p>
             <a:pPr lvl="3"/>
             <a:r>
-              <a:rPr lang="en-US" smtClean="0"/>
+              <a:rPr lang="en-US"/>
               <a:t>Fourth level</a:t>
             </a:r>
           </a:p>
           <a:p>
             <a:pPr lvl="4"/>
             <a:r>
-              <a:rPr lang="en-US" smtClean="0"/>
+              <a:rPr lang="en-US"/>
               <a:t>Fifth level</a:t>
             </a:r>
-            <a:endParaRPr lang="en-US"/>
           </a:p>
         </p:txBody>
       </p:sp>
@@ -2207,38 +1990,37 @@
           <a:p>
             <a:pPr lvl="0"/>
             <a:r>
-              <a:rPr lang="en-US" smtClean="0"/>
+              <a:rPr lang="en-US"/>
               <a:t>Click to edit Master text styles</a:t>
             </a:r>
           </a:p>
           <a:p>
             <a:pPr lvl="1"/>
             <a:r>
-              <a:rPr lang="en-US" smtClean="0"/>
+              <a:rPr lang="en-US"/>
               <a:t>Second level</a:t>
             </a:r>
           </a:p>
           <a:p>
             <a:pPr lvl="2"/>
             <a:r>
-              <a:rPr lang="en-US" smtClean="0"/>
+              <a:rPr lang="en-US"/>
               <a:t>Third level</a:t>
             </a:r>
           </a:p>
           <a:p>
             <a:pPr lvl="3"/>
             <a:r>
-              <a:rPr lang="en-US" smtClean="0"/>
+              <a:rPr lang="en-US"/>
               <a:t>Fourth level</a:t>
             </a:r>
           </a:p>
           <a:p>
             <a:pPr lvl="4"/>
             <a:r>
-              <a:rPr lang="en-US" smtClean="0"/>
+              <a:rPr lang="en-US"/>
               <a:t>Fifth level</a:t>
             </a:r>
-            <a:endParaRPr lang="en-US"/>
           </a:p>
         </p:txBody>
       </p:sp>
@@ -2259,7 +2041,7 @@
           <a:p>
             <a:fld id="{5BCAD085-E8A6-8845-BD4E-CB4CCA059FC4}" type="datetimeFigureOut">
               <a:rPr lang="en-US" smtClean="0"/>
-              <a:t>1/27/13</a:t>
+              <a:t>10/25/2026</a:t>
             </a:fld>
             <a:endParaRPr lang="en-US"/>
           </a:p>
@@ -2357,10 +2139,9 @@
           </a:lstStyle>
           <a:p>
             <a:r>
-              <a:rPr lang="en-US" smtClean="0"/>
+              <a:rPr lang="en-US"/>
               <a:t>Click to edit Master title style</a:t>
             </a:r>
-            <a:endParaRPr lang="en-US"/>
           </a:p>
         </p:txBody>
       </p:sp>
@@ -2423,7 +2204,7 @@
           <a:p>
             <a:pPr lvl="0"/>
             <a:r>
-              <a:rPr lang="en-US" smtClean="0"/>
+              <a:rPr lang="en-US"/>
               <a:t>Click to edit Master text styles</a:t>
             </a:r>
           </a:p>
@@ -2479,38 +2260,37 @@
           <a:p>
             <a:pPr lvl="0"/>
             <a:r>
-              <a:rPr lang="en-US" smtClean="0"/>
+              <a:rPr lang="en-US"/>
               <a:t>Click to edit Master text styles</a:t>
             </a:r>
           </a:p>
           <a:p>
             <a:pPr lvl="1"/>
             <a:r>
-              <a:rPr lang="en-US" smtClean="0"/>
+              <a:rPr lang="en-US"/>
               <a:t>Second level</a:t>
             </a:r>
           </a:p>
           <a:p>
             <a:pPr lvl="2"/>
             <a:r>
-              <a:rPr lang="en-US" smtClean="0"/>
+              <a:rPr lang="en-US"/>
               <a:t>Third level</a:t>
             </a:r>
           </a:p>
           <a:p>
             <a:pPr lvl="3"/>
             <a:r>
-              <a:rPr lang="en-US" smtClean="0"/>
+              <a:rPr lang="en-US"/>
               <a:t>Fourth level</a:t>
             </a:r>
           </a:p>
           <a:p>
             <a:pPr lvl="4"/>
             <a:r>
-              <a:rPr lang="en-US" smtClean="0"/>
+              <a:rPr lang="en-US"/>
               <a:t>Fifth level</a:t>
             </a:r>
-            <a:endParaRPr lang="en-US"/>
           </a:p>
         </p:txBody>
       </p:sp>
@@ -2573,7 +2353,7 @@
           <a:p>
             <a:pPr lvl="0"/>
             <a:r>
-              <a:rPr lang="en-US" smtClean="0"/>
+              <a:rPr lang="en-US"/>
               <a:t>Click to edit Master text styles</a:t>
             </a:r>
           </a:p>
@@ -2629,38 +2409,37 @@
           <a:p>
             <a:pPr lvl="0"/>
             <a:r>
-              <a:rPr lang="en-US" smtClean="0"/>
+              <a:rPr lang="en-US"/>
               <a:t>Click to edit Master text styles</a:t>
             </a:r>
           </a:p>
           <a:p>
             <a:pPr lvl="1"/>
             <a:r>
-              <a:rPr lang="en-US" smtClean="0"/>
+              <a:rPr lang="en-US"/>
               <a:t>Second level</a:t>
             </a:r>
           </a:p>
           <a:p>
             <a:pPr lvl="2"/>
             <a:r>
-              <a:rPr lang="en-US" smtClean="0"/>
+              <a:rPr lang="en-US"/>
               <a:t>Third level</a:t>
             </a:r>
           </a:p>
           <a:p>
             <a:pPr lvl="3"/>
             <a:r>
-              <a:rPr lang="en-US" smtClean="0"/>
+              <a:rPr lang="en-US"/>
               <a:t>Fourth level</a:t>
             </a:r>
           </a:p>
           <a:p>
             <a:pPr lvl="4"/>
             <a:r>
-              <a:rPr lang="en-US" smtClean="0"/>
+              <a:rPr lang="en-US"/>
               <a:t>Fifth level</a:t>
             </a:r>
-            <a:endParaRPr lang="en-US"/>
           </a:p>
         </p:txBody>
       </p:sp>
@@ -2681,7 +2460,7 @@
           <a:p>
             <a:fld id="{5BCAD085-E8A6-8845-BD4E-CB4CCA059FC4}" type="datetimeFigureOut">
               <a:rPr lang="en-US" smtClean="0"/>
-              <a:t>1/27/13</a:t>
+              <a:t>10/25/2026</a:t>
             </a:fld>
             <a:endParaRPr lang="en-US"/>
           </a:p>
@@ -2775,10 +2554,9 @@
           <a:lstStyle/>
           <a:p>
             <a:r>
-              <a:rPr lang="en-US" smtClean="0"/>
+              <a:rPr lang="en-US"/>
               <a:t>Click to edit Master title style</a:t>
             </a:r>
-            <a:endParaRPr lang="en-US"/>
           </a:p>
         </p:txBody>
       </p:sp>
@@ -2799,7 +2577,7 @@
           <a:p>
             <a:fld id="{5BCAD085-E8A6-8845-BD4E-CB4CCA059FC4}" type="datetimeFigureOut">
               <a:rPr lang="en-US" smtClean="0"/>
-              <a:t>1/27/13</a:t>
+              <a:t>10/25/2026</a:t>
             </a:fld>
             <a:endParaRPr lang="en-US"/>
           </a:p>
@@ -2894,7 +2672,7 @@
           <a:p>
             <a:fld id="{5BCAD085-E8A6-8845-BD4E-CB4CCA059FC4}" type="datetimeFigureOut">
               <a:rPr lang="en-US" smtClean="0"/>
-              <a:t>1/27/13</a:t>
+              <a:t>10/25/2026</a:t>
             </a:fld>
             <a:endParaRPr lang="en-US"/>
           </a:p>
@@ -2997,10 +2775,9 @@
           </a:lstStyle>
           <a:p>
             <a:r>
-              <a:rPr lang="en-US" smtClean="0"/>
+              <a:rPr lang="en-US"/>
               <a:t>Click to edit Master title style</a:t>
             </a:r>
-            <a:endParaRPr lang="en-US"/>
           </a:p>
         </p:txBody>
       </p:sp>
@@ -3054,38 +2831,37 @@
           <a:p>
             <a:pPr lvl="0"/>
             <a:r>
-              <a:rPr lang="en-US" smtClean="0"/>
+              <a:rPr lang="en-US"/>
               <a:t>Click to edit Master text styles</a:t>
             </a:r>
           </a:p>
           <a:p>
             <a:pPr lvl="1"/>
             <a:r>
-              <a:rPr lang="en-US" smtClean="0"/>
+              <a:rPr lang="en-US"/>
               <a:t>Second level</a:t>
             </a:r>
           </a:p>
           <a:p>
             <a:pPr lvl="2"/>
             <a:r>
-              <a:rPr lang="en-US" smtClean="0"/>
+              <a:rPr lang="en-US"/>
               <a:t>Third level</a:t>
             </a:r>
           </a:p>
           <a:p>
             <a:pPr lvl="3"/>
             <a:r>
-              <a:rPr lang="en-US" smtClean="0"/>
+              <a:rPr lang="en-US"/>
               <a:t>Fourth level</a:t>
             </a:r>
           </a:p>
           <a:p>
             <a:pPr lvl="4"/>
             <a:r>
-              <a:rPr lang="en-US" smtClean="0"/>
+              <a:rPr lang="en-US"/>
               <a:t>Fifth level</a:t>
             </a:r>
-            <a:endParaRPr lang="en-US"/>
           </a:p>
         </p:txBody>
       </p:sp>
@@ -3148,7 +2924,7 @@
           <a:p>
             <a:pPr lvl="0"/>
             <a:r>
-              <a:rPr lang="en-US" smtClean="0"/>
+              <a:rPr lang="en-US"/>
               <a:t>Click to edit Master text styles</a:t>
             </a:r>
           </a:p>
@@ -3171,7 +2947,7 @@
           <a:p>
             <a:fld id="{5BCAD085-E8A6-8845-BD4E-CB4CCA059FC4}" type="datetimeFigureOut">
               <a:rPr lang="en-US" smtClean="0"/>
-              <a:t>1/27/13</a:t>
+              <a:t>10/25/2026</a:t>
             </a:fld>
             <a:endParaRPr lang="en-US"/>
           </a:p>
@@ -3274,10 +3050,9 @@
           </a:lstStyle>
           <a:p>
             <a:r>
-              <a:rPr lang="en-US" smtClean="0"/>
+              <a:rPr lang="en-US"/>
               <a:t>Click to edit Master title style</a:t>
             </a:r>
-            <a:endParaRPr lang="en-US"/>
           </a:p>
         </p:txBody>
       </p:sp>
@@ -3401,7 +3176,7 @@
           <a:p>
             <a:pPr lvl="0"/>
             <a:r>
-              <a:rPr lang="en-US" smtClean="0"/>
+              <a:rPr lang="en-US"/>
               <a:t>Click to edit Master text styles</a:t>
             </a:r>
           </a:p>
@@ -3424,7 +3199,7 @@
           <a:p>
             <a:fld id="{5BCAD085-E8A6-8845-BD4E-CB4CCA059FC4}" type="datetimeFigureOut">
               <a:rPr lang="en-US" smtClean="0"/>
-              <a:t>1/27/13</a:t>
+              <a:t>10/25/2026</a:t>
             </a:fld>
             <a:endParaRPr lang="en-US"/>
           </a:p>
@@ -3533,10 +3308,9 @@
           <a:lstStyle/>
           <a:p>
             <a:r>
-              <a:rPr lang="en-US" smtClean="0"/>
+              <a:rPr lang="en-US"/>
               <a:t>Click to edit Master title style</a:t>
             </a:r>
-            <a:endParaRPr lang="en-US"/>
           </a:p>
         </p:txBody>
       </p:sp>
@@ -3567,38 +3341,37 @@
           <a:p>
             <a:pPr lvl="0"/>
             <a:r>
-              <a:rPr lang="en-US" smtClean="0"/>
+              <a:rPr lang="en-US"/>
               <a:t>Click to edit Master text styles</a:t>
             </a:r>
           </a:p>
           <a:p>
             <a:pPr lvl="1"/>
             <a:r>
-              <a:rPr lang="en-US" smtClean="0"/>
+              <a:rPr lang="en-US"/>
               <a:t>Second level</a:t>
             </a:r>
           </a:p>
           <a:p>
             <a:pPr lvl="2"/>
             <a:r>
-              <a:rPr lang="en-US" smtClean="0"/>
+              <a:rPr lang="en-US"/>
               <a:t>Third level</a:t>
             </a:r>
           </a:p>
           <a:p>
             <a:pPr lvl="3"/>
             <a:r>
-              <a:rPr lang="en-US" smtClean="0"/>
+              <a:rPr lang="en-US"/>
               <a:t>Fourth level</a:t>
             </a:r>
           </a:p>
           <a:p>
             <a:pPr lvl="4"/>
             <a:r>
-              <a:rPr lang="en-US" smtClean="0"/>
+              <a:rPr lang="en-US"/>
               <a:t>Fifth level</a:t>
             </a:r>
-            <a:endParaRPr lang="en-US"/>
           </a:p>
         </p:txBody>
       </p:sp>
@@ -3637,7 +3410,7 @@
           <a:p>
             <a:fld id="{5BCAD085-E8A6-8845-BD4E-CB4CCA059FC4}" type="datetimeFigureOut">
               <a:rPr lang="en-US" smtClean="0"/>
-              <a:t>1/27/13</a:t>
+              <a:t>10/25/2026</a:t>
             </a:fld>
             <a:endParaRPr lang="en-US"/>
           </a:p>
@@ -3996,7 +3769,7 @@
 </file>
 
 <file path=ppt/slides/slide1.xml><?xml version="1.0" encoding="utf-8"?>
-<p:sld xmlns:a="http://schemas.openxmlformats.org/drawingml/2006/main" xmlns:p="http://schemas.openxmlformats.org/presentationml/2006/main" xmlns:r="http://schemas.openxmlformats.org/officeDocument/2006/relationships">
+<p:sld xmlns:a="http://schemas.openxmlformats.org/drawingml/2006/main" xmlns:r="http://schemas.openxmlformats.org/officeDocument/2006/relationships" xmlns:p="http://schemas.openxmlformats.org/presentationml/2006/main">
   <p:cSld>
     <p:bg>
       <p:bgPr>
@@ -4012,7 +3785,14 @@
         <p:cNvGrpSpPr/>
         <p:nvPr/>
       </p:nvGrpSpPr>
-      <p:grpSpPr/>
+      <p:grpSpPr>
+        <a:xfrm>
+          <a:off x="0" y="0"/>
+          <a:ext cx="0" cy="0"/>
+          <a:chOff x="0" y="0"/>
+          <a:chExt cx="0" cy="0"/>
+        </a:xfrm>
+      </p:grpSpPr>
       <p:sp>
         <p:nvSpPr>
           <p:cNvPr id="2" name="Rectangle 1"/>
@@ -4040,6 +3820,7 @@
           <a:lstStyle/>
           <a:p>
             <a:pPr algn="ctr"/>
+            <a:endParaRPr/>
           </a:p>
         </p:txBody>
       </p:sp>
@@ -4060,7 +3841,7 @@
           <a:noFill/>
         </p:spPr>
         <p:txBody>
-          <a:bodyPr wrap="square" lIns="0" rIns="0" tIns="0" bIns="0" anchor="t">
+          <a:bodyPr wrap="square" lIns="0" tIns="0" rIns="0" bIns="0" anchor="t">
             <a:noAutofit/>
           </a:bodyPr>
           <a:lstStyle/>
@@ -4106,7 +3887,7 @@
           <a:noFill/>
         </p:spPr>
         <p:txBody>
-          <a:bodyPr wrap="square" lIns="0" rIns="0" tIns="0" bIns="0" anchor="t">
+          <a:bodyPr wrap="square" lIns="0" tIns="0" rIns="0" bIns="0" anchor="t">
             <a:noAutofit/>
           </a:bodyPr>
           <a:lstStyle/>
@@ -4175,7 +3956,7 @@
           <a:noFill/>
         </p:spPr>
         <p:txBody>
-          <a:bodyPr wrap="square" lIns="0" rIns="0" tIns="0" bIns="0" anchor="t">
+          <a:bodyPr wrap="square" lIns="0" tIns="0" rIns="0" bIns="0" anchor="t">
             <a:noAutofit/>
           </a:bodyPr>
           <a:lstStyle/>
@@ -4192,7 +3973,7 @@
               </a:spcAft>
             </a:pPr>
             <a:r>
-              <a:rPr sz="1800" b="0" i="0">
+              <a:rPr sz="1800" b="0" i="0" dirty="0" err="1">
                 <a:solidFill>
                   <a:srgbClr val="3A4A50"/>
                 </a:solidFill>
@@ -4201,6 +3982,13 @@
               </a:rPr>
               <a:t>理论学习完成情况与下一步计划</a:t>
             </a:r>
+            <a:endParaRPr sz="1800" b="0" i="0" dirty="0">
+              <a:solidFill>
+                <a:srgbClr val="3A4A50"/>
+              </a:solidFill>
+              <a:latin typeface="Segoe UI"/>
+              <a:ea typeface="Microsoft YaHei"/>
+            </a:endParaRPr>
           </a:p>
         </p:txBody>
       </p:sp>
@@ -4221,7 +4009,7 @@
           <a:noFill/>
         </p:spPr>
         <p:txBody>
-          <a:bodyPr wrap="square" lIns="0" rIns="0" tIns="0" bIns="0" anchor="t">
+          <a:bodyPr wrap="square" lIns="0" tIns="0" rIns="0" bIns="0" anchor="t">
             <a:noAutofit/>
           </a:bodyPr>
           <a:lstStyle/>
@@ -4279,6 +4067,7 @@
           <a:lstStyle/>
           <a:p>
             <a:pPr algn="ctr"/>
+            <a:endParaRPr/>
           </a:p>
         </p:txBody>
       </p:sp>
@@ -4309,6 +4098,7 @@
           <a:lstStyle/>
           <a:p>
             <a:pPr algn="ctr"/>
+            <a:endParaRPr/>
           </a:p>
         </p:txBody>
       </p:sp>
@@ -4339,6 +4129,7 @@
           <a:lstStyle/>
           <a:p>
             <a:pPr algn="ctr"/>
+            <a:endParaRPr/>
           </a:p>
         </p:txBody>
       </p:sp>
@@ -4359,7 +4150,7 @@
           <a:noFill/>
         </p:spPr>
         <p:txBody>
-          <a:bodyPr wrap="square" lIns="0" rIns="0" tIns="0" bIns="0" anchor="t">
+          <a:bodyPr wrap="square" lIns="0" tIns="0" rIns="0" bIns="0" anchor="t">
             <a:noAutofit/>
           </a:bodyPr>
           <a:lstStyle/>
@@ -4415,6 +4206,7 @@
           <a:lstStyle/>
           <a:p>
             <a:pPr algn="ctr"/>
+            <a:endParaRPr/>
           </a:p>
         </p:txBody>
       </p:sp>
@@ -4435,7 +4227,7 @@
           <a:noFill/>
         </p:spPr>
         <p:txBody>
-          <a:bodyPr wrap="square" lIns="0" rIns="0" tIns="0" bIns="0" anchor="t">
+          <a:bodyPr wrap="square" lIns="0" tIns="0" rIns="0" bIns="0" anchor="t">
             <a:noAutofit/>
           </a:bodyPr>
           <a:lstStyle/>
@@ -4491,7 +4283,7 @@
           <a:noFill/>
         </p:spPr>
         <p:txBody>
-          <a:bodyPr wrap="square" lIns="0" rIns="0" tIns="0" bIns="0" anchor="t">
+          <a:bodyPr wrap="square" lIns="0" tIns="0" rIns="0" bIns="0" anchor="t">
             <a:noAutofit/>
           </a:bodyPr>
           <a:lstStyle/>
@@ -4551,6 +4343,7 @@
           <a:lstStyle/>
           <a:p>
             <a:pPr algn="ctr"/>
+            <a:endParaRPr/>
           </a:p>
         </p:txBody>
       </p:sp>
@@ -4571,7 +4364,7 @@
           <a:noFill/>
         </p:spPr>
         <p:txBody>
-          <a:bodyPr wrap="square" lIns="0" rIns="0" tIns="0" bIns="0" anchor="ctr">
+          <a:bodyPr wrap="square" lIns="0" tIns="0" rIns="0" bIns="0" anchor="ctr">
             <a:noAutofit/>
           </a:bodyPr>
           <a:lstStyle/>
@@ -4605,17 +4398,7 @@
                 <a:latin typeface="Segoe UI"/>
                 <a:ea typeface="Microsoft YaHei"/>
               </a:rPr>
-              <a:t>    </a:t>
-            </a:r>
-            <a:r>
-              <a:rPr sz="1200" b="0" i="0">
-                <a:solidFill>
-                  <a:srgbClr val="3A4A50"/>
-                </a:solidFill>
-                <a:latin typeface="Segoe UI"/>
-                <a:ea typeface="Microsoft YaHei"/>
-              </a:rPr>
-              <a:t>份专题资料</a:t>
+              <a:t>    份专题资料</a:t>
             </a:r>
           </a:p>
         </p:txBody>
@@ -4651,6 +4434,7 @@
           <a:lstStyle/>
           <a:p>
             <a:pPr algn="ctr"/>
+            <a:endParaRPr/>
           </a:p>
         </p:txBody>
       </p:sp>
@@ -4671,7 +4455,7 @@
           <a:noFill/>
         </p:spPr>
         <p:txBody>
-          <a:bodyPr wrap="square" lIns="0" rIns="0" tIns="0" bIns="0" anchor="ctr">
+          <a:bodyPr wrap="square" lIns="0" tIns="0" rIns="0" bIns="0" anchor="ctr">
             <a:noAutofit/>
           </a:bodyPr>
           <a:lstStyle/>
@@ -4705,17 +4489,7 @@
                 <a:latin typeface="Segoe UI"/>
                 <a:ea typeface="Microsoft YaHei"/>
               </a:rPr>
-              <a:t>    </a:t>
-            </a:r>
-            <a:r>
-              <a:rPr sz="1200" b="0" i="0">
-                <a:solidFill>
-                  <a:srgbClr val="3A4A50"/>
-                </a:solidFill>
-                <a:latin typeface="Segoe UI"/>
-                <a:ea typeface="Microsoft YaHei"/>
-              </a:rPr>
-              <a:t>项数值校验通过</a:t>
+              <a:t>    项数值校验通过</a:t>
             </a:r>
           </a:p>
         </p:txBody>
@@ -4751,6 +4525,7 @@
           <a:lstStyle/>
           <a:p>
             <a:pPr algn="ctr"/>
+            <a:endParaRPr/>
           </a:p>
         </p:txBody>
       </p:sp>
@@ -4771,7 +4546,7 @@
           <a:noFill/>
         </p:spPr>
         <p:txBody>
-          <a:bodyPr wrap="square" lIns="0" rIns="0" tIns="0" bIns="0" anchor="ctr">
+          <a:bodyPr wrap="square" lIns="0" tIns="0" rIns="0" bIns="0" anchor="ctr">
             <a:noAutofit/>
           </a:bodyPr>
           <a:lstStyle/>
@@ -4805,17 +4580,7 @@
                 <a:latin typeface="Segoe UI"/>
                 <a:ea typeface="Microsoft YaHei"/>
               </a:rPr>
-              <a:t>    </a:t>
-            </a:r>
-            <a:r>
-              <a:rPr sz="1200" b="0" i="0">
-                <a:solidFill>
-                  <a:srgbClr val="3A4A50"/>
-                </a:solidFill>
-                <a:latin typeface="Segoe UI"/>
-                <a:ea typeface="Microsoft YaHei"/>
-              </a:rPr>
-              <a:t>种几何退磁因子已算</a:t>
+              <a:t>    种几何退磁因子已算</a:t>
             </a:r>
           </a:p>
         </p:txBody>
@@ -4837,7 +4602,7 @@
           <a:noFill/>
         </p:spPr>
         <p:txBody>
-          <a:bodyPr wrap="square" lIns="0" rIns="0" tIns="0" bIns="0" anchor="t">
+          <a:bodyPr wrap="square" lIns="0" tIns="0" rIns="0" bIns="0" anchor="t">
             <a:noAutofit/>
           </a:bodyPr>
           <a:lstStyle/>
@@ -4862,6 +4627,45 @@
                 <a:ea typeface="Microsoft YaHei"/>
               </a:rPr>
               <a:t>1 / 8</a:t>
+            </a:r>
+          </a:p>
+        </p:txBody>
+      </p:sp>
+      <p:sp>
+        <p:nvSpPr>
+          <p:cNvPr id="21" name="文本框 20">
+            <a:extLst>
+              <a:ext uri="{FF2B5EF4-FFF2-40B4-BE49-F238E27FC236}">
+                <a16:creationId xmlns:a16="http://schemas.microsoft.com/office/drawing/2014/main" id="{E3BFD788-036C-66FA-C8BA-6072D3FBA456}"/>
+              </a:ext>
+            </a:extLst>
+          </p:cNvPr>
+          <p:cNvSpPr txBox="1"/>
+          <p:nvPr/>
+        </p:nvSpPr>
+        <p:spPr>
+          <a:xfrm>
+            <a:off x="777240" y="4352544"/>
+            <a:ext cx="3745665" cy="384048"/>
+          </a:xfrm>
+          <a:prstGeom prst="rect">
+            <a:avLst/>
+          </a:prstGeom>
+          <a:noFill/>
+        </p:spPr>
+        <p:txBody>
+          <a:bodyPr wrap="square" rtlCol="0">
+            <a:spAutoFit/>
+          </a:bodyPr>
+          <a:lstStyle/>
+          <a:p>
+            <a:r>
+              <a:rPr lang="zh-CN" altLang="en-US" dirty="0">
+                <a:latin typeface="Segoe UI" panose="020B0502040204020203" pitchFamily="34" charset="0"/>
+                <a:ea typeface="华文行楷" panose="02010800040101010101" pitchFamily="2" charset="-122"/>
+                <a:cs typeface="Segoe UI" panose="020B0502040204020203" pitchFamily="34" charset="0"/>
+              </a:rPr>
+              <a:t>孙煜凡  韦中天</a:t>
             </a:r>
           </a:p>
         </p:txBody>
@@ -4875,7 +4679,7 @@
 </file>
 
 <file path=ppt/slides/slide2.xml><?xml version="1.0" encoding="utf-8"?>
-<p:sld xmlns:a="http://schemas.openxmlformats.org/drawingml/2006/main" xmlns:p="http://schemas.openxmlformats.org/presentationml/2006/main" xmlns:r="http://schemas.openxmlformats.org/officeDocument/2006/relationships">
+<p:sld xmlns:a="http://schemas.openxmlformats.org/drawingml/2006/main" xmlns:r="http://schemas.openxmlformats.org/officeDocument/2006/relationships" xmlns:p="http://schemas.openxmlformats.org/presentationml/2006/main">
   <p:cSld>
     <p:bg>
       <p:bgPr>
@@ -4891,7 +4695,14 @@
         <p:cNvGrpSpPr/>
         <p:nvPr/>
       </p:nvGrpSpPr>
-      <p:grpSpPr/>
+      <p:grpSpPr>
+        <a:xfrm>
+          <a:off x="0" y="0"/>
+          <a:ext cx="0" cy="0"/>
+          <a:chOff x="0" y="0"/>
+          <a:chExt cx="0" cy="0"/>
+        </a:xfrm>
+      </p:grpSpPr>
       <p:sp>
         <p:nvSpPr>
           <p:cNvPr id="2" name="TextBox 1"/>
@@ -4909,7 +4720,7 @@
           <a:noFill/>
         </p:spPr>
         <p:txBody>
-          <a:bodyPr wrap="square" lIns="0" rIns="0" tIns="0" bIns="0" anchor="t">
+          <a:bodyPr wrap="square" lIns="0" tIns="0" rIns="0" bIns="0" anchor="t">
             <a:noAutofit/>
           </a:bodyPr>
           <a:lstStyle/>
@@ -4975,7 +4786,7 @@
           <a:noFill/>
         </p:spPr>
         <p:txBody>
-          <a:bodyPr wrap="square" lIns="0" rIns="0" tIns="0" bIns="0" anchor="ctr">
+          <a:bodyPr wrap="square" lIns="0" tIns="0" rIns="0" bIns="0" anchor="ctr">
             <a:noAutofit/>
           </a:bodyPr>
           <a:lstStyle/>
@@ -5031,6 +4842,7 @@
           <a:lstStyle/>
           <a:p>
             <a:pPr algn="ctr"/>
+            <a:endParaRPr/>
           </a:p>
         </p:txBody>
       </p:sp>
@@ -5065,6 +4877,7 @@
           <a:lstStyle/>
           <a:p>
             <a:pPr algn="ctr"/>
+            <a:endParaRPr/>
           </a:p>
         </p:txBody>
       </p:sp>
@@ -5085,7 +4898,7 @@
           <a:noFill/>
         </p:spPr>
         <p:txBody>
-          <a:bodyPr wrap="square" lIns="0" rIns="0" tIns="0" bIns="0" anchor="t">
+          <a:bodyPr wrap="square" lIns="0" tIns="0" rIns="0" bIns="0" anchor="t">
             <a:noAutofit/>
           </a:bodyPr>
           <a:lstStyle/>
@@ -5131,7 +4944,7 @@
           <a:noFill/>
         </p:spPr>
         <p:txBody>
-          <a:bodyPr wrap="square" lIns="0" rIns="0" tIns="0" bIns="0" anchor="t">
+          <a:bodyPr wrap="square" lIns="0" tIns="0" rIns="0" bIns="0" anchor="t">
             <a:noAutofit/>
           </a:bodyPr>
           <a:lstStyle/>
@@ -5177,7 +4990,7 @@
           <a:noFill/>
         </p:spPr>
         <p:txBody>
-          <a:bodyPr wrap="square" lIns="0" rIns="0" tIns="0" bIns="0" anchor="t">
+          <a:bodyPr wrap="square" lIns="0" tIns="0" rIns="0" bIns="0" anchor="t">
             <a:noAutofit/>
           </a:bodyPr>
           <a:lstStyle/>
@@ -5233,6 +5046,7 @@
           <a:lstStyle/>
           <a:p>
             <a:pPr algn="ctr"/>
+            <a:endParaRPr/>
           </a:p>
         </p:txBody>
       </p:sp>
@@ -5267,6 +5081,7 @@
           <a:lstStyle/>
           <a:p>
             <a:pPr algn="ctr"/>
+            <a:endParaRPr/>
           </a:p>
         </p:txBody>
       </p:sp>
@@ -5287,7 +5102,7 @@
           <a:noFill/>
         </p:spPr>
         <p:txBody>
-          <a:bodyPr wrap="square" lIns="0" rIns="0" tIns="0" bIns="0" anchor="t">
+          <a:bodyPr wrap="square" lIns="0" tIns="0" rIns="0" bIns="0" anchor="t">
             <a:noAutofit/>
           </a:bodyPr>
           <a:lstStyle/>
@@ -5333,7 +5148,7 @@
           <a:noFill/>
         </p:spPr>
         <p:txBody>
-          <a:bodyPr wrap="square" lIns="0" rIns="0" tIns="0" bIns="0" anchor="t">
+          <a:bodyPr wrap="square" lIns="0" tIns="0" rIns="0" bIns="0" anchor="t">
             <a:noAutofit/>
           </a:bodyPr>
           <a:lstStyle/>
@@ -5379,7 +5194,7 @@
           <a:noFill/>
         </p:spPr>
         <p:txBody>
-          <a:bodyPr wrap="square" lIns="0" rIns="0" tIns="0" bIns="0" anchor="t">
+          <a:bodyPr wrap="square" lIns="0" tIns="0" rIns="0" bIns="0" anchor="t">
             <a:noAutofit/>
           </a:bodyPr>
           <a:lstStyle/>
@@ -5475,6 +5290,7 @@
           <a:lstStyle/>
           <a:p>
             <a:pPr algn="ctr"/>
+            <a:endParaRPr/>
           </a:p>
         </p:txBody>
       </p:sp>
@@ -5509,6 +5325,7 @@
           <a:lstStyle/>
           <a:p>
             <a:pPr algn="ctr"/>
+            <a:endParaRPr/>
           </a:p>
         </p:txBody>
       </p:sp>
@@ -5529,7 +5346,7 @@
           <a:noFill/>
         </p:spPr>
         <p:txBody>
-          <a:bodyPr wrap="square" lIns="0" rIns="0" tIns="0" bIns="0" anchor="t">
+          <a:bodyPr wrap="square" lIns="0" tIns="0" rIns="0" bIns="0" anchor="t">
             <a:noAutofit/>
           </a:bodyPr>
           <a:lstStyle/>
@@ -5575,7 +5392,7 @@
           <a:noFill/>
         </p:spPr>
         <p:txBody>
-          <a:bodyPr wrap="square" lIns="0" rIns="0" tIns="0" bIns="0" anchor="t">
+          <a:bodyPr wrap="square" lIns="0" tIns="0" rIns="0" bIns="0" anchor="t">
             <a:noAutofit/>
           </a:bodyPr>
           <a:lstStyle/>
@@ -5621,7 +5438,7 @@
           <a:noFill/>
         </p:spPr>
         <p:txBody>
-          <a:bodyPr wrap="square" lIns="0" rIns="0" tIns="0" bIns="0" anchor="t">
+          <a:bodyPr wrap="square" lIns="0" tIns="0" rIns="0" bIns="0" anchor="t">
             <a:noAutofit/>
           </a:bodyPr>
           <a:lstStyle/>
@@ -5677,6 +5494,7 @@
           <a:lstStyle/>
           <a:p>
             <a:pPr algn="ctr"/>
+            <a:endParaRPr/>
           </a:p>
         </p:txBody>
       </p:sp>
@@ -5711,6 +5529,7 @@
           <a:lstStyle/>
           <a:p>
             <a:pPr algn="ctr"/>
+            <a:endParaRPr/>
           </a:p>
         </p:txBody>
       </p:sp>
@@ -5731,7 +5550,7 @@
           <a:noFill/>
         </p:spPr>
         <p:txBody>
-          <a:bodyPr wrap="square" lIns="0" rIns="0" tIns="0" bIns="0" anchor="t">
+          <a:bodyPr wrap="square" lIns="0" tIns="0" rIns="0" bIns="0" anchor="t">
             <a:noAutofit/>
           </a:bodyPr>
           <a:lstStyle/>
@@ -5777,7 +5596,7 @@
           <a:noFill/>
         </p:spPr>
         <p:txBody>
-          <a:bodyPr wrap="square" lIns="0" rIns="0" tIns="0" bIns="0" anchor="t">
+          <a:bodyPr wrap="square" lIns="0" tIns="0" rIns="0" bIns="0" anchor="t">
             <a:noAutofit/>
           </a:bodyPr>
           <a:lstStyle/>
@@ -5823,7 +5642,7 @@
           <a:noFill/>
         </p:spPr>
         <p:txBody>
-          <a:bodyPr wrap="square" lIns="0" rIns="0" tIns="0" bIns="0" anchor="t">
+          <a:bodyPr wrap="square" lIns="0" tIns="0" rIns="0" bIns="0" anchor="t">
             <a:noAutofit/>
           </a:bodyPr>
           <a:lstStyle/>
@@ -5884,6 +5703,7 @@
           <a:lstStyle/>
           <a:p>
             <a:pPr algn="ctr"/>
+            <a:endParaRPr/>
           </a:p>
         </p:txBody>
       </p:sp>
@@ -5904,7 +5724,7 @@
           <a:noFill/>
         </p:spPr>
         <p:txBody>
-          <a:bodyPr wrap="square" lIns="0" rIns="0" tIns="0" bIns="0" anchor="t">
+          <a:bodyPr wrap="square" lIns="0" tIns="0" rIns="0" bIns="0" anchor="t">
             <a:noAutofit/>
           </a:bodyPr>
           <a:lstStyle/>
@@ -5950,7 +5770,7 @@
           <a:noFill/>
         </p:spPr>
         <p:txBody>
-          <a:bodyPr wrap="square" lIns="0" rIns="0" tIns="0" bIns="0" anchor="t">
+          <a:bodyPr wrap="square" lIns="0" tIns="0" rIns="0" bIns="0" anchor="t">
             <a:noAutofit/>
           </a:bodyPr>
           <a:lstStyle/>
@@ -5996,7 +5816,7 @@
           <a:noFill/>
         </p:spPr>
         <p:txBody>
-          <a:bodyPr wrap="square" lIns="0" rIns="0" tIns="0" bIns="0" anchor="t">
+          <a:bodyPr wrap="square" lIns="0" tIns="0" rIns="0" bIns="0" anchor="t">
             <a:noAutofit/>
           </a:bodyPr>
           <a:lstStyle/>
@@ -6056,6 +5876,7 @@
           <a:lstStyle/>
           <a:p>
             <a:pPr algn="ctr"/>
+            <a:endParaRPr/>
           </a:p>
         </p:txBody>
       </p:sp>
@@ -6086,6 +5907,7 @@
           <a:lstStyle/>
           <a:p>
             <a:pPr algn="ctr"/>
+            <a:endParaRPr/>
           </a:p>
         </p:txBody>
       </p:sp>
@@ -6106,7 +5928,7 @@
           <a:noFill/>
         </p:spPr>
         <p:txBody>
-          <a:bodyPr wrap="square" lIns="0" rIns="0" tIns="0" bIns="0" anchor="t">
+          <a:bodyPr wrap="square" lIns="0" tIns="0" rIns="0" bIns="0" anchor="t">
             <a:noAutofit/>
           </a:bodyPr>
           <a:lstStyle/>
@@ -6152,7 +5974,7 @@
           <a:noFill/>
         </p:spPr>
         <p:txBody>
-          <a:bodyPr wrap="square" lIns="0" rIns="0" tIns="0" bIns="0" anchor="t">
+          <a:bodyPr wrap="square" lIns="0" tIns="0" rIns="0" bIns="0" anchor="t">
             <a:noAutofit/>
           </a:bodyPr>
           <a:lstStyle/>
@@ -6206,52 +6028,6 @@
       </p:sp>
       <p:sp>
         <p:nvSpPr>
-          <p:cNvPr id="32" name="TextBox 31"/>
-          <p:cNvSpPr txBox="1"/>
-          <p:nvPr/>
-        </p:nvSpPr>
-        <p:spPr>
-          <a:xfrm>
-            <a:off x="640080" y="6419088"/>
-            <a:ext cx="8869680" cy="237744"/>
-          </a:xfrm>
-          <a:prstGeom prst="rect">
-            <a:avLst/>
-          </a:prstGeom>
-          <a:noFill/>
-        </p:spPr>
-        <p:txBody>
-          <a:bodyPr wrap="square" lIns="0" rIns="0" tIns="0" bIns="0" anchor="t">
-            <a:noAutofit/>
-          </a:bodyPr>
-          <a:lstStyle/>
-          <a:p>
-            <a:pPr algn="l">
-              <a:lnSpc>
-                <a:spcPct val="115000"/>
-              </a:lnSpc>
-              <a:spcBef>
-                <a:spcPts val="0"/>
-              </a:spcBef>
-              <a:spcAft>
-                <a:spcPts val="0"/>
-              </a:spcAft>
-            </a:pPr>
-            <a:r>
-              <a:rPr sz="850" b="0" i="0">
-                <a:solidFill>
-                  <a:srgbClr val="53676D"/>
-                </a:solidFill>
-                <a:latin typeface="Segoe UI"/>
-                <a:ea typeface="Microsoft YaHei"/>
-              </a:rPr>
-              <a:t>研究范围见 README.md 与 4-QAH基本概念与面外磁化学习指南.md</a:t>
-            </a:r>
-          </a:p>
-        </p:txBody>
-      </p:sp>
-      <p:sp>
-        <p:nvSpPr>
           <p:cNvPr id="33" name="TextBox 32"/>
           <p:cNvSpPr txBox="1"/>
           <p:nvPr/>
@@ -6267,7 +6043,7 @@
           <a:noFill/>
         </p:spPr>
         <p:txBody>
-          <a:bodyPr wrap="square" lIns="0" rIns="0" tIns="0" bIns="0" anchor="t">
+          <a:bodyPr wrap="square" lIns="0" tIns="0" rIns="0" bIns="0" anchor="t">
             <a:noAutofit/>
           </a:bodyPr>
           <a:lstStyle/>
@@ -6305,7 +6081,7 @@
 </file>
 
 <file path=ppt/slides/slide3.xml><?xml version="1.0" encoding="utf-8"?>
-<p:sld xmlns:a="http://schemas.openxmlformats.org/drawingml/2006/main" xmlns:p="http://schemas.openxmlformats.org/presentationml/2006/main" xmlns:r="http://schemas.openxmlformats.org/officeDocument/2006/relationships">
+<p:sld xmlns:a="http://schemas.openxmlformats.org/drawingml/2006/main" xmlns:r="http://schemas.openxmlformats.org/officeDocument/2006/relationships" xmlns:p="http://schemas.openxmlformats.org/presentationml/2006/main">
   <p:cSld>
     <p:bg>
       <p:bgPr>
@@ -6321,7 +6097,14 @@
         <p:cNvGrpSpPr/>
         <p:nvPr/>
       </p:nvGrpSpPr>
-      <p:grpSpPr/>
+      <p:grpSpPr>
+        <a:xfrm>
+          <a:off x="0" y="0"/>
+          <a:ext cx="0" cy="0"/>
+          <a:chOff x="0" y="0"/>
+          <a:chExt cx="0" cy="0"/>
+        </a:xfrm>
+      </p:grpSpPr>
       <p:sp>
         <p:nvSpPr>
           <p:cNvPr id="2" name="TextBox 1"/>
@@ -6339,7 +6122,7 @@
           <a:noFill/>
         </p:spPr>
         <p:txBody>
-          <a:bodyPr wrap="square" lIns="0" rIns="0" tIns="0" bIns="0" anchor="t">
+          <a:bodyPr wrap="square" lIns="0" tIns="0" rIns="0" bIns="0" anchor="t">
             <a:noAutofit/>
           </a:bodyPr>
           <a:lstStyle/>
@@ -6405,7 +6188,7 @@
           <a:noFill/>
         </p:spPr>
         <p:txBody>
-          <a:bodyPr wrap="square" lIns="0" rIns="0" tIns="0" bIns="0" anchor="ctr">
+          <a:bodyPr wrap="square" lIns="0" tIns="0" rIns="0" bIns="0" anchor="ctr">
             <a:noAutofit/>
           </a:bodyPr>
           <a:lstStyle/>
@@ -6461,6 +6244,7 @@
           <a:lstStyle/>
           <a:p>
             <a:pPr algn="ctr"/>
+            <a:endParaRPr/>
           </a:p>
         </p:txBody>
       </p:sp>
@@ -6493,6 +6277,7 @@
           <a:lstStyle/>
           <a:p>
             <a:pPr algn="ctr"/>
+            <a:endParaRPr/>
           </a:p>
         </p:txBody>
       </p:sp>
@@ -6513,7 +6298,7 @@
           <a:noFill/>
         </p:spPr>
         <p:txBody>
-          <a:bodyPr wrap="square" lIns="0" rIns="0" tIns="0" bIns="0" anchor="t">
+          <a:bodyPr wrap="square" lIns="0" tIns="0" rIns="0" bIns="0" anchor="t">
             <a:noAutofit/>
           </a:bodyPr>
           <a:lstStyle/>
@@ -6559,7 +6344,7 @@
           <a:noFill/>
         </p:spPr>
         <p:txBody>
-          <a:bodyPr wrap="square" lIns="0" rIns="0" tIns="0" bIns="0" anchor="t">
+          <a:bodyPr wrap="square" lIns="0" tIns="0" rIns="0" bIns="0" anchor="t">
             <a:noAutofit/>
           </a:bodyPr>
           <a:lstStyle/>
@@ -6619,6 +6404,7 @@
           <a:lstStyle/>
           <a:p>
             <a:pPr algn="ctr"/>
+            <a:endParaRPr/>
           </a:p>
         </p:txBody>
       </p:sp>
@@ -6639,7 +6425,7 @@
           <a:noFill/>
         </p:spPr>
         <p:txBody>
-          <a:bodyPr wrap="square" lIns="0" rIns="0" tIns="0" bIns="0" anchor="t">
+          <a:bodyPr wrap="square" lIns="0" tIns="0" rIns="0" bIns="0" anchor="t">
             <a:noAutofit/>
           </a:bodyPr>
           <a:lstStyle/>
@@ -6685,7 +6471,7 @@
           <a:noFill/>
         </p:spPr>
         <p:txBody>
-          <a:bodyPr wrap="square" lIns="0" rIns="0" tIns="0" bIns="0" anchor="t">
+          <a:bodyPr wrap="square" lIns="0" tIns="0" rIns="0" bIns="0" anchor="t">
             <a:noAutofit/>
           </a:bodyPr>
           <a:lstStyle/>
@@ -6745,6 +6531,7 @@
           <a:lstStyle/>
           <a:p>
             <a:pPr algn="ctr"/>
+            <a:endParaRPr/>
           </a:p>
         </p:txBody>
       </p:sp>
@@ -6765,7 +6552,7 @@
           <a:noFill/>
         </p:spPr>
         <p:txBody>
-          <a:bodyPr wrap="square" lIns="0" rIns="0" tIns="0" bIns="0" anchor="t">
+          <a:bodyPr wrap="square" lIns="0" tIns="0" rIns="0" bIns="0" anchor="t">
             <a:noAutofit/>
           </a:bodyPr>
           <a:lstStyle/>
@@ -6811,7 +6598,7 @@
           <a:noFill/>
         </p:spPr>
         <p:txBody>
-          <a:bodyPr wrap="square" lIns="0" rIns="0" tIns="0" bIns="0" anchor="t">
+          <a:bodyPr wrap="square" lIns="0" tIns="0" rIns="0" bIns="0" anchor="t">
             <a:noAutofit/>
           </a:bodyPr>
           <a:lstStyle/>
@@ -6871,6 +6658,7 @@
           <a:lstStyle/>
           <a:p>
             <a:pPr algn="ctr"/>
+            <a:endParaRPr/>
           </a:p>
         </p:txBody>
       </p:sp>
@@ -6891,7 +6679,7 @@
           <a:noFill/>
         </p:spPr>
         <p:txBody>
-          <a:bodyPr wrap="square" lIns="0" rIns="0" tIns="0" bIns="0" anchor="t">
+          <a:bodyPr wrap="square" lIns="0" tIns="0" rIns="0" bIns="0" anchor="t">
             <a:noAutofit/>
           </a:bodyPr>
           <a:lstStyle/>
@@ -6937,7 +6725,7 @@
           <a:noFill/>
         </p:spPr>
         <p:txBody>
-          <a:bodyPr wrap="square" lIns="0" rIns="0" tIns="0" bIns="0" anchor="t">
+          <a:bodyPr wrap="square" lIns="0" tIns="0" rIns="0" bIns="0" anchor="t">
             <a:noAutofit/>
           </a:bodyPr>
           <a:lstStyle/>
@@ -6997,6 +6785,7 @@
           <a:lstStyle/>
           <a:p>
             <a:pPr algn="ctr"/>
+            <a:endParaRPr/>
           </a:p>
         </p:txBody>
       </p:sp>
@@ -7017,7 +6806,7 @@
           <a:noFill/>
         </p:spPr>
         <p:txBody>
-          <a:bodyPr wrap="square" lIns="0" rIns="0" tIns="0" bIns="0" anchor="t">
+          <a:bodyPr wrap="square" lIns="0" tIns="0" rIns="0" bIns="0" anchor="t">
             <a:noAutofit/>
           </a:bodyPr>
           <a:lstStyle/>
@@ -7063,7 +6852,7 @@
           <a:noFill/>
         </p:spPr>
         <p:txBody>
-          <a:bodyPr wrap="square" lIns="0" rIns="0" tIns="0" bIns="0" anchor="t">
+          <a:bodyPr wrap="square" lIns="0" tIns="0" rIns="0" bIns="0" anchor="t">
             <a:noAutofit/>
           </a:bodyPr>
           <a:lstStyle/>
@@ -7123,6 +6912,7 @@
           <a:lstStyle/>
           <a:p>
             <a:pPr algn="ctr"/>
+            <a:endParaRPr/>
           </a:p>
         </p:txBody>
       </p:sp>
@@ -7153,6 +6943,7 @@
           <a:lstStyle/>
           <a:p>
             <a:pPr algn="ctr"/>
+            <a:endParaRPr/>
           </a:p>
         </p:txBody>
       </p:sp>
@@ -7173,7 +6964,7 @@
           <a:noFill/>
         </p:spPr>
         <p:txBody>
-          <a:bodyPr wrap="square" lIns="0" rIns="0" tIns="0" bIns="0" anchor="t">
+          <a:bodyPr wrap="square" lIns="0" tIns="0" rIns="0" bIns="0" anchor="t">
             <a:noAutofit/>
           </a:bodyPr>
           <a:lstStyle/>
@@ -7219,7 +7010,7 @@
           <a:noFill/>
         </p:spPr>
         <p:txBody>
-          <a:bodyPr wrap="square" lIns="0" rIns="0" tIns="0" bIns="0" anchor="t">
+          <a:bodyPr wrap="square" lIns="0" tIns="0" rIns="0" bIns="0" anchor="t">
             <a:noAutofit/>
           </a:bodyPr>
           <a:lstStyle/>
@@ -7293,52 +7084,6 @@
       </p:sp>
       <p:sp>
         <p:nvSpPr>
-          <p:cNvPr id="24" name="TextBox 23"/>
-          <p:cNvSpPr txBox="1"/>
-          <p:nvPr/>
-        </p:nvSpPr>
-        <p:spPr>
-          <a:xfrm>
-            <a:off x="640080" y="6419088"/>
-            <a:ext cx="8869680" cy="237744"/>
-          </a:xfrm>
-          <a:prstGeom prst="rect">
-            <a:avLst/>
-          </a:prstGeom>
-          <a:noFill/>
-        </p:spPr>
-        <p:txBody>
-          <a:bodyPr wrap="square" lIns="0" rIns="0" tIns="0" bIns="0" anchor="t">
-            <a:noAutofit/>
-          </a:bodyPr>
-          <a:lstStyle/>
-          <a:p>
-            <a:pPr algn="l">
-              <a:lnSpc>
-                <a:spcPct val="115000"/>
-              </a:lnSpc>
-              <a:spcBef>
-                <a:spcPts val="0"/>
-              </a:spcBef>
-              <a:spcAft>
-                <a:spcPts val="0"/>
-              </a:spcAft>
-            </a:pPr>
-            <a:r>
-              <a:rPr sz="850" b="0" i="0">
-                <a:solidFill>
-                  <a:srgbClr val="53676D"/>
-                </a:solidFill>
-                <a:latin typeface="Segoe UI"/>
-                <a:ea typeface="Microsoft YaHei"/>
-              </a:rPr>
-              <a:t>阶段划分见 README.md 第 8 节；求解器与 GPU 检查于 2026-10-25</a:t>
-            </a:r>
-          </a:p>
-        </p:txBody>
-      </p:sp>
-      <p:sp>
-        <p:nvSpPr>
           <p:cNvPr id="25" name="TextBox 24"/>
           <p:cNvSpPr txBox="1"/>
           <p:nvPr/>
@@ -7354,7 +7099,7 @@
           <a:noFill/>
         </p:spPr>
         <p:txBody>
-          <a:bodyPr wrap="square" lIns="0" rIns="0" tIns="0" bIns="0" anchor="t">
+          <a:bodyPr wrap="square" lIns="0" tIns="0" rIns="0" bIns="0" anchor="t">
             <a:noAutofit/>
           </a:bodyPr>
           <a:lstStyle/>
@@ -7392,7 +7137,7 @@
 </file>
 
 <file path=ppt/slides/slide4.xml><?xml version="1.0" encoding="utf-8"?>
-<p:sld xmlns:a="http://schemas.openxmlformats.org/drawingml/2006/main" xmlns:p="http://schemas.openxmlformats.org/presentationml/2006/main" xmlns:r="http://schemas.openxmlformats.org/officeDocument/2006/relationships">
+<p:sld xmlns:a="http://schemas.openxmlformats.org/drawingml/2006/main" xmlns:r="http://schemas.openxmlformats.org/officeDocument/2006/relationships" xmlns:p="http://schemas.openxmlformats.org/presentationml/2006/main">
   <p:cSld>
     <p:bg>
       <p:bgPr>
@@ -7408,7 +7153,14 @@
         <p:cNvGrpSpPr/>
         <p:nvPr/>
       </p:nvGrpSpPr>
-      <p:grpSpPr/>
+      <p:grpSpPr>
+        <a:xfrm>
+          <a:off x="0" y="0"/>
+          <a:ext cx="0" cy="0"/>
+          <a:chOff x="0" y="0"/>
+          <a:chExt cx="0" cy="0"/>
+        </a:xfrm>
+      </p:grpSpPr>
       <p:sp>
         <p:nvSpPr>
           <p:cNvPr id="2" name="TextBox 1"/>
@@ -7426,7 +7178,7 @@
           <a:noFill/>
         </p:spPr>
         <p:txBody>
-          <a:bodyPr wrap="square" lIns="0" rIns="0" tIns="0" bIns="0" anchor="t">
+          <a:bodyPr wrap="square" lIns="0" tIns="0" rIns="0" bIns="0" anchor="t">
             <a:noAutofit/>
           </a:bodyPr>
           <a:lstStyle/>
@@ -7492,7 +7244,7 @@
           <a:noFill/>
         </p:spPr>
         <p:txBody>
-          <a:bodyPr wrap="square" lIns="0" rIns="0" tIns="0" bIns="0" anchor="ctr">
+          <a:bodyPr wrap="square" lIns="0" tIns="0" rIns="0" bIns="0" anchor="ctr">
             <a:noAutofit/>
           </a:bodyPr>
           <a:lstStyle/>
@@ -7548,6 +7300,7 @@
           <a:lstStyle/>
           <a:p>
             <a:pPr algn="ctr"/>
+            <a:endParaRPr/>
           </a:p>
         </p:txBody>
       </p:sp>
@@ -7582,6 +7335,7 @@
           <a:lstStyle/>
           <a:p>
             <a:pPr algn="ctr"/>
+            <a:endParaRPr/>
           </a:p>
         </p:txBody>
       </p:sp>
@@ -7602,7 +7356,7 @@
           <a:noFill/>
         </p:spPr>
         <p:txBody>
-          <a:bodyPr wrap="square" lIns="0" rIns="0" tIns="0" bIns="0" anchor="t">
+          <a:bodyPr wrap="square" lIns="0" tIns="0" rIns="0" bIns="0" anchor="t">
             <a:noAutofit/>
           </a:bodyPr>
           <a:lstStyle/>
@@ -7648,7 +7402,7 @@
           <a:noFill/>
         </p:spPr>
         <p:txBody>
-          <a:bodyPr wrap="square" lIns="0" rIns="0" tIns="0" bIns="0" anchor="t">
+          <a:bodyPr wrap="square" lIns="0" tIns="0" rIns="0" bIns="0" anchor="t">
             <a:noAutofit/>
           </a:bodyPr>
           <a:lstStyle/>
@@ -7694,7 +7448,7 @@
           <a:noFill/>
         </p:spPr>
         <p:txBody>
-          <a:bodyPr wrap="square" lIns="0" rIns="0" tIns="0" bIns="0" anchor="t">
+          <a:bodyPr wrap="square" lIns="0" tIns="0" rIns="0" bIns="0" anchor="t">
             <a:noAutofit/>
           </a:bodyPr>
           <a:lstStyle/>
@@ -7740,7 +7494,7 @@
           <a:noFill/>
         </p:spPr>
         <p:txBody>
-          <a:bodyPr wrap="square" lIns="0" rIns="0" tIns="0" bIns="0" anchor="t">
+          <a:bodyPr wrap="square" lIns="0" tIns="0" rIns="0" bIns="0" anchor="t">
             <a:noAutofit/>
           </a:bodyPr>
           <a:lstStyle/>
@@ -7810,6 +7564,7 @@
           <a:lstStyle/>
           <a:p>
             <a:pPr algn="ctr"/>
+            <a:endParaRPr/>
           </a:p>
         </p:txBody>
       </p:sp>
@@ -7830,7 +7585,7 @@
           <a:noFill/>
         </p:spPr>
         <p:txBody>
-          <a:bodyPr wrap="square" lIns="0" rIns="0" tIns="0" bIns="0" anchor="t">
+          <a:bodyPr wrap="square" lIns="0" tIns="0" rIns="0" bIns="0" anchor="t">
             <a:noAutofit/>
           </a:bodyPr>
           <a:lstStyle/>
@@ -7876,7 +7631,7 @@
           <a:noFill/>
         </p:spPr>
         <p:txBody>
-          <a:bodyPr wrap="square" lIns="0" rIns="0" tIns="0" bIns="0" anchor="t">
+          <a:bodyPr wrap="square" lIns="0" tIns="0" rIns="0" bIns="0" anchor="t">
             <a:noAutofit/>
           </a:bodyPr>
           <a:lstStyle/>
@@ -7922,7 +7677,7 @@
           <a:noFill/>
         </p:spPr>
         <p:txBody>
-          <a:bodyPr wrap="square" lIns="0" rIns="0" tIns="0" bIns="0" anchor="t">
+          <a:bodyPr wrap="square" lIns="0" tIns="0" rIns="0" bIns="0" anchor="t">
             <a:noAutofit/>
           </a:bodyPr>
           <a:lstStyle/>
@@ -7968,7 +7723,7 @@
           <a:noFill/>
         </p:spPr>
         <p:txBody>
-          <a:bodyPr wrap="square" lIns="0" rIns="0" tIns="0" bIns="0" anchor="t">
+          <a:bodyPr wrap="square" lIns="0" tIns="0" rIns="0" bIns="0" anchor="t">
             <a:noAutofit/>
           </a:bodyPr>
           <a:lstStyle/>
@@ -8038,6 +7793,7 @@
           <a:lstStyle/>
           <a:p>
             <a:pPr algn="ctr"/>
+            <a:endParaRPr/>
           </a:p>
         </p:txBody>
       </p:sp>
@@ -8058,7 +7814,7 @@
           <a:noFill/>
         </p:spPr>
         <p:txBody>
-          <a:bodyPr wrap="square" lIns="0" rIns="0" tIns="0" bIns="0" anchor="t">
+          <a:bodyPr wrap="square" lIns="0" tIns="0" rIns="0" bIns="0" anchor="t">
             <a:noAutofit/>
           </a:bodyPr>
           <a:lstStyle/>
@@ -8104,7 +7860,7 @@
           <a:noFill/>
         </p:spPr>
         <p:txBody>
-          <a:bodyPr wrap="square" lIns="0" rIns="0" tIns="0" bIns="0" anchor="t">
+          <a:bodyPr wrap="square" lIns="0" tIns="0" rIns="0" bIns="0" anchor="t">
             <a:noAutofit/>
           </a:bodyPr>
           <a:lstStyle/>
@@ -8150,7 +7906,7 @@
           <a:noFill/>
         </p:spPr>
         <p:txBody>
-          <a:bodyPr wrap="square" lIns="0" rIns="0" tIns="0" bIns="0" anchor="t">
+          <a:bodyPr wrap="square" lIns="0" tIns="0" rIns="0" bIns="0" anchor="t">
             <a:noAutofit/>
           </a:bodyPr>
           <a:lstStyle/>
@@ -8196,7 +7952,7 @@
           <a:noFill/>
         </p:spPr>
         <p:txBody>
-          <a:bodyPr wrap="square" lIns="0" rIns="0" tIns="0" bIns="0" anchor="t">
+          <a:bodyPr wrap="square" lIns="0" tIns="0" rIns="0" bIns="0" anchor="t">
             <a:noAutofit/>
           </a:bodyPr>
           <a:lstStyle/>
@@ -8266,6 +8022,7 @@
           <a:lstStyle/>
           <a:p>
             <a:pPr algn="ctr"/>
+            <a:endParaRPr/>
           </a:p>
         </p:txBody>
       </p:sp>
@@ -8286,7 +8043,7 @@
           <a:noFill/>
         </p:spPr>
         <p:txBody>
-          <a:bodyPr wrap="square" lIns="0" rIns="0" tIns="0" bIns="0" anchor="t">
+          <a:bodyPr wrap="square" lIns="0" tIns="0" rIns="0" bIns="0" anchor="t">
             <a:noAutofit/>
           </a:bodyPr>
           <a:lstStyle/>
@@ -8332,7 +8089,7 @@
           <a:noFill/>
         </p:spPr>
         <p:txBody>
-          <a:bodyPr wrap="square" lIns="0" rIns="0" tIns="0" bIns="0" anchor="t">
+          <a:bodyPr wrap="square" lIns="0" tIns="0" rIns="0" bIns="0" anchor="t">
             <a:noAutofit/>
           </a:bodyPr>
           <a:lstStyle/>
@@ -8378,7 +8135,7 @@
           <a:noFill/>
         </p:spPr>
         <p:txBody>
-          <a:bodyPr wrap="square" lIns="0" rIns="0" tIns="0" bIns="0" anchor="t">
+          <a:bodyPr wrap="square" lIns="0" tIns="0" rIns="0" bIns="0" anchor="t">
             <a:noAutofit/>
           </a:bodyPr>
           <a:lstStyle/>
@@ -8424,7 +8181,7 @@
           <a:noFill/>
         </p:spPr>
         <p:txBody>
-          <a:bodyPr wrap="square" lIns="0" rIns="0" tIns="0" bIns="0" anchor="t">
+          <a:bodyPr wrap="square" lIns="0" tIns="0" rIns="0" bIns="0" anchor="t">
             <a:noAutofit/>
           </a:bodyPr>
           <a:lstStyle/>
@@ -8494,6 +8251,7 @@
           <a:lstStyle/>
           <a:p>
             <a:pPr algn="ctr"/>
+            <a:endParaRPr/>
           </a:p>
         </p:txBody>
       </p:sp>
@@ -8514,7 +8272,7 @@
           <a:noFill/>
         </p:spPr>
         <p:txBody>
-          <a:bodyPr wrap="square" lIns="0" rIns="0" tIns="0" bIns="0" anchor="t">
+          <a:bodyPr wrap="square" lIns="0" tIns="0" rIns="0" bIns="0" anchor="t">
             <a:noAutofit/>
           </a:bodyPr>
           <a:lstStyle/>
@@ -8560,7 +8318,7 @@
           <a:noFill/>
         </p:spPr>
         <p:txBody>
-          <a:bodyPr wrap="square" lIns="0" rIns="0" tIns="0" bIns="0" anchor="t">
+          <a:bodyPr wrap="square" lIns="0" tIns="0" rIns="0" bIns="0" anchor="t">
             <a:noAutofit/>
           </a:bodyPr>
           <a:lstStyle/>
@@ -8606,7 +8364,7 @@
           <a:noFill/>
         </p:spPr>
         <p:txBody>
-          <a:bodyPr wrap="square" lIns="0" rIns="0" tIns="0" bIns="0" anchor="t">
+          <a:bodyPr wrap="square" lIns="0" tIns="0" rIns="0" bIns="0" anchor="t">
             <a:noAutofit/>
           </a:bodyPr>
           <a:lstStyle/>
@@ -8652,7 +8410,7 @@
           <a:noFill/>
         </p:spPr>
         <p:txBody>
-          <a:bodyPr wrap="square" lIns="0" rIns="0" tIns="0" bIns="0" anchor="t">
+          <a:bodyPr wrap="square" lIns="0" tIns="0" rIns="0" bIns="0" anchor="t">
             <a:noAutofit/>
           </a:bodyPr>
           <a:lstStyle/>
@@ -8720,6 +8478,7 @@
           <a:lstStyle/>
           <a:p>
             <a:pPr algn="ctr"/>
+            <a:endParaRPr/>
           </a:p>
         </p:txBody>
       </p:sp>
@@ -8740,7 +8499,7 @@
           <a:noFill/>
         </p:spPr>
         <p:txBody>
-          <a:bodyPr wrap="square" lIns="0" rIns="0" tIns="0" bIns="0" anchor="t">
+          <a:bodyPr wrap="square" lIns="0" tIns="0" rIns="0" bIns="0" anchor="t">
             <a:noAutofit/>
           </a:bodyPr>
           <a:lstStyle/>
@@ -8786,7 +8545,7 @@
           <a:noFill/>
         </p:spPr>
         <p:txBody>
-          <a:bodyPr wrap="square" lIns="0" rIns="0" tIns="0" bIns="0" anchor="t">
+          <a:bodyPr wrap="square" lIns="0" tIns="0" rIns="0" bIns="0" anchor="t">
             <a:noAutofit/>
           </a:bodyPr>
           <a:lstStyle/>
@@ -8832,7 +8591,7 @@
           <a:noFill/>
         </p:spPr>
         <p:txBody>
-          <a:bodyPr wrap="square" lIns="0" rIns="0" tIns="0" bIns="0" anchor="t">
+          <a:bodyPr wrap="square" lIns="0" tIns="0" rIns="0" bIns="0" anchor="t">
             <a:noAutofit/>
           </a:bodyPr>
           <a:lstStyle/>
@@ -8878,7 +8637,7 @@
           <a:noFill/>
         </p:spPr>
         <p:txBody>
-          <a:bodyPr wrap="square" lIns="0" rIns="0" tIns="0" bIns="0" anchor="t">
+          <a:bodyPr wrap="square" lIns="0" tIns="0" rIns="0" bIns="0" anchor="t">
             <a:noAutofit/>
           </a:bodyPr>
           <a:lstStyle/>
@@ -8902,63 +8661,7 @@
                 <a:latin typeface="Segoe UI"/>
                 <a:ea typeface="Microsoft YaHei"/>
               </a:rPr>
-              <a:t>→ </a:t>
-            </a:r>
-            <a:r>
-              <a:rPr sz="900" b="0" i="0">
-                <a:solidFill>
-                  <a:srgbClr val="136C69"/>
-                </a:solidFill>
-                <a:latin typeface="Segoe UI"/>
-                <a:ea typeface="Microsoft YaHei"/>
-              </a:rPr>
-              <a:t>三格式可读、来源可查</a:t>
-            </a:r>
-          </a:p>
-        </p:txBody>
-      </p:sp>
-      <p:sp>
-        <p:nvSpPr>
-          <p:cNvPr id="35" name="TextBox 34"/>
-          <p:cNvSpPr txBox="1"/>
-          <p:nvPr/>
-        </p:nvSpPr>
-        <p:spPr>
-          <a:xfrm>
-            <a:off x="640080" y="6419088"/>
-            <a:ext cx="8869680" cy="237744"/>
-          </a:xfrm>
-          <a:prstGeom prst="rect">
-            <a:avLst/>
-          </a:prstGeom>
-          <a:noFill/>
-        </p:spPr>
-        <p:txBody>
-          <a:bodyPr wrap="square" lIns="0" rIns="0" tIns="0" bIns="0" anchor="t">
-            <a:noAutofit/>
-          </a:bodyPr>
-          <a:lstStyle/>
-          <a:p>
-            <a:pPr algn="l">
-              <a:lnSpc>
-                <a:spcPct val="115000"/>
-              </a:lnSpc>
-              <a:spcBef>
-                <a:spcPts val="0"/>
-              </a:spcBef>
-              <a:spcAft>
-                <a:spcPts val="0"/>
-              </a:spcAft>
-            </a:pPr>
-            <a:r>
-              <a:rPr sz="850" b="0" i="0">
-                <a:solidFill>
-                  <a:srgbClr val="53676D"/>
-                </a:solidFill>
-                <a:latin typeface="Segoe UI"/>
-                <a:ea typeface="Microsoft YaHei"/>
-              </a:rPr>
-              <a:t>详细内容见 理论学习资料/ 下五份专题文档</a:t>
+              <a:t>→ 三格式可读、来源可查</a:t>
             </a:r>
           </a:p>
         </p:txBody>
@@ -8980,7 +8683,7 @@
           <a:noFill/>
         </p:spPr>
         <p:txBody>
-          <a:bodyPr wrap="square" lIns="0" rIns="0" tIns="0" bIns="0" anchor="t">
+          <a:bodyPr wrap="square" lIns="0" tIns="0" rIns="0" bIns="0" anchor="t">
             <a:noAutofit/>
           </a:bodyPr>
           <a:lstStyle/>
@@ -9018,7 +8721,7 @@
 </file>
 
 <file path=ppt/slides/slide5.xml><?xml version="1.0" encoding="utf-8"?>
-<p:sld xmlns:a="http://schemas.openxmlformats.org/drawingml/2006/main" xmlns:p="http://schemas.openxmlformats.org/presentationml/2006/main" xmlns:r="http://schemas.openxmlformats.org/officeDocument/2006/relationships">
+<p:sld xmlns:a="http://schemas.openxmlformats.org/drawingml/2006/main" xmlns:r="http://schemas.openxmlformats.org/officeDocument/2006/relationships" xmlns:p="http://schemas.openxmlformats.org/presentationml/2006/main">
   <p:cSld>
     <p:bg>
       <p:bgPr>
@@ -9034,7 +8737,14 @@
         <p:cNvGrpSpPr/>
         <p:nvPr/>
       </p:nvGrpSpPr>
-      <p:grpSpPr/>
+      <p:grpSpPr>
+        <a:xfrm>
+          <a:off x="0" y="0"/>
+          <a:ext cx="0" cy="0"/>
+          <a:chOff x="0" y="0"/>
+          <a:chExt cx="0" cy="0"/>
+        </a:xfrm>
+      </p:grpSpPr>
       <p:sp>
         <p:nvSpPr>
           <p:cNvPr id="2" name="TextBox 1"/>
@@ -9052,7 +8762,7 @@
           <a:noFill/>
         </p:spPr>
         <p:txBody>
-          <a:bodyPr wrap="square" lIns="0" rIns="0" tIns="0" bIns="0" anchor="t">
+          <a:bodyPr wrap="square" lIns="0" tIns="0" rIns="0" bIns="0" anchor="t">
             <a:noAutofit/>
           </a:bodyPr>
           <a:lstStyle/>
@@ -9118,7 +8828,7 @@
           <a:noFill/>
         </p:spPr>
         <p:txBody>
-          <a:bodyPr wrap="square" lIns="0" rIns="0" tIns="0" bIns="0" anchor="ctr">
+          <a:bodyPr wrap="square" lIns="0" tIns="0" rIns="0" bIns="0" anchor="ctr">
             <a:noAutofit/>
           </a:bodyPr>
           <a:lstStyle/>
@@ -9142,17 +8852,7 @@
                 <a:latin typeface="Segoe UI"/>
                 <a:ea typeface="Microsoft YaHei"/>
               </a:rPr>
-              <a:t>面外是否有利，看 </a:t>
-            </a:r>
-            <a:r>
-              <a:rPr sz="2800" b="1" i="0">
-                <a:solidFill>
-                  <a:srgbClr val="172E36"/>
-                </a:solidFill>
-                <a:latin typeface="Segoe UI"/>
-                <a:ea typeface="Microsoft YaHei"/>
-              </a:rPr>
-              <a:t>K</a:t>
+              <a:t>面外是否有利，看 K</a:t>
             </a:r>
             <a:r>
               <a:rPr sz="2016" b="1" i="0" baseline="-25000">
@@ -9204,6 +8904,7 @@
           <a:lstStyle/>
           <a:p>
             <a:pPr algn="ctr"/>
+            <a:endParaRPr/>
           </a:p>
         </p:txBody>
       </p:sp>
@@ -9234,6 +8935,7 @@
           <a:lstStyle/>
           <a:p>
             <a:pPr algn="ctr"/>
+            <a:endParaRPr/>
           </a:p>
         </p:txBody>
       </p:sp>
@@ -9254,7 +8956,7 @@
           <a:noFill/>
         </p:spPr>
         <p:txBody>
-          <a:bodyPr wrap="square" lIns="0" rIns="0" tIns="0" bIns="0" anchor="t">
+          <a:bodyPr wrap="square" lIns="0" tIns="0" rIns="0" bIns="0" anchor="t">
             <a:noAutofit/>
           </a:bodyPr>
           <a:lstStyle/>
@@ -9300,7 +9002,7 @@
           <a:noFill/>
         </p:spPr>
         <p:txBody>
-          <a:bodyPr wrap="square" lIns="0" rIns="0" tIns="0" bIns="0" anchor="t">
+          <a:bodyPr wrap="square" lIns="0" tIns="0" rIns="0" bIns="0" anchor="t">
             <a:noAutofit/>
           </a:bodyPr>
           <a:lstStyle/>
@@ -9356,6 +9058,7 @@
           <a:lstStyle/>
           <a:p>
             <a:pPr algn="ctr"/>
+            <a:endParaRPr/>
           </a:p>
         </p:txBody>
       </p:sp>
@@ -9376,7 +9079,7 @@
           <a:noFill/>
         </p:spPr>
         <p:txBody>
-          <a:bodyPr wrap="square" lIns="0" rIns="0" tIns="0" bIns="0" anchor="t">
+          <a:bodyPr wrap="square" lIns="0" tIns="0" rIns="0" bIns="0" anchor="t">
             <a:noAutofit/>
           </a:bodyPr>
           <a:lstStyle/>
@@ -9422,7 +9125,7 @@
           <a:noFill/>
         </p:spPr>
         <p:txBody>
-          <a:bodyPr wrap="square" lIns="0" rIns="0" tIns="0" bIns="0" anchor="t">
+          <a:bodyPr wrap="square" lIns="0" tIns="0" rIns="0" bIns="0" anchor="t">
             <a:noAutofit/>
           </a:bodyPr>
           <a:lstStyle/>
@@ -9498,6 +9201,7 @@
           <a:lstStyle/>
           <a:p>
             <a:pPr algn="ctr"/>
+            <a:endParaRPr/>
           </a:p>
         </p:txBody>
       </p:sp>
@@ -9518,7 +9222,7 @@
           <a:noFill/>
         </p:spPr>
         <p:txBody>
-          <a:bodyPr wrap="square" lIns="0" rIns="0" tIns="0" bIns="0" anchor="t">
+          <a:bodyPr wrap="square" lIns="0" tIns="0" rIns="0" bIns="0" anchor="t">
             <a:noAutofit/>
           </a:bodyPr>
           <a:lstStyle/>
@@ -9564,7 +9268,7 @@
           <a:noFill/>
         </p:spPr>
         <p:txBody>
-          <a:bodyPr wrap="square" lIns="0" rIns="0" tIns="0" bIns="0" anchor="t">
+          <a:bodyPr wrap="square" lIns="0" tIns="0" rIns="0" bIns="0" anchor="t">
             <a:noAutofit/>
           </a:bodyPr>
           <a:lstStyle/>
@@ -9620,6 +9324,7 @@
           <a:lstStyle/>
           <a:p>
             <a:pPr algn="ctr"/>
+            <a:endParaRPr/>
           </a:p>
         </p:txBody>
       </p:sp>
@@ -9640,7 +9345,7 @@
           <a:noFill/>
         </p:spPr>
         <p:txBody>
-          <a:bodyPr wrap="square" lIns="0" rIns="0" tIns="0" bIns="0" anchor="t">
+          <a:bodyPr wrap="square" lIns="0" tIns="0" rIns="0" bIns="0" anchor="t">
             <a:noAutofit/>
           </a:bodyPr>
           <a:lstStyle/>
@@ -9686,7 +9391,7 @@
           <a:noFill/>
         </p:spPr>
         <p:txBody>
-          <a:bodyPr wrap="square" lIns="0" rIns="0" tIns="0" bIns="0" anchor="t">
+          <a:bodyPr wrap="square" lIns="0" tIns="0" rIns="0" bIns="0" anchor="t">
             <a:noAutofit/>
           </a:bodyPr>
           <a:lstStyle/>
@@ -9744,6 +9449,7 @@
           <a:lstStyle/>
           <a:p>
             <a:pPr algn="ctr"/>
+            <a:endParaRPr/>
           </a:p>
         </p:txBody>
       </p:sp>
@@ -9764,7 +9470,7 @@
           <a:noFill/>
         </p:spPr>
         <p:txBody>
-          <a:bodyPr wrap="square" lIns="0" rIns="0" tIns="0" bIns="0" anchor="t">
+          <a:bodyPr wrap="square" lIns="0" tIns="0" rIns="0" bIns="0" anchor="t">
             <a:noAutofit/>
           </a:bodyPr>
           <a:lstStyle/>
@@ -9810,7 +9516,7 @@
           <a:noFill/>
         </p:spPr>
         <p:txBody>
-          <a:bodyPr wrap="square" lIns="0" rIns="0" tIns="0" bIns="0" anchor="ctr">
+          <a:bodyPr wrap="square" lIns="0" tIns="0" rIns="0" bIns="0" anchor="ctr">
             <a:noAutofit/>
           </a:bodyPr>
           <a:lstStyle/>
@@ -9990,6 +9696,7 @@
           <a:lstStyle/>
           <a:p>
             <a:pPr algn="ctr"/>
+            <a:endParaRPr/>
           </a:p>
         </p:txBody>
       </p:sp>
@@ -10010,7 +9717,7 @@
           <a:noFill/>
         </p:spPr>
         <p:txBody>
-          <a:bodyPr wrap="square" lIns="0" rIns="0" tIns="0" bIns="0" anchor="t">
+          <a:bodyPr wrap="square" lIns="0" tIns="0" rIns="0" bIns="0" anchor="t">
             <a:noAutofit/>
           </a:bodyPr>
           <a:lstStyle/>
@@ -10056,7 +9763,7 @@
           <a:noFill/>
         </p:spPr>
         <p:txBody>
-          <a:bodyPr wrap="square" lIns="0" rIns="0" tIns="0" bIns="0" anchor="t">
+          <a:bodyPr wrap="square" lIns="0" tIns="0" rIns="0" bIns="0" anchor="t">
             <a:noAutofit/>
           </a:bodyPr>
           <a:lstStyle/>
@@ -10223,7 +9930,17 @@
                 <a:latin typeface="Segoe UI"/>
                 <a:ea typeface="Microsoft YaHei"/>
               </a:rPr>
-              <a:t>²/2 = </a:t>
+              <a:t>²/2 = 5.65×10</a:t>
+            </a:r>
+            <a:r>
+              <a:rPr sz="827" b="0" i="0" baseline="30000">
+                <a:solidFill>
+                  <a:srgbClr val="3A4A50"/>
+                </a:solidFill>
+                <a:latin typeface="Segoe UI"/>
+                <a:ea typeface="Microsoft YaHei"/>
+              </a:rPr>
+              <a:t>4</a:t>
             </a:r>
             <a:r>
               <a:rPr sz="1150" b="0" i="0">
@@ -10233,17 +9950,17 @@
                 <a:latin typeface="Segoe UI"/>
                 <a:ea typeface="Microsoft YaHei"/>
               </a:rPr>
-              <a:t>5.65×10</a:t>
-            </a:r>
-            <a:r>
-              <a:rPr sz="827" b="0" i="0" baseline="30000">
+              <a:t> J/m³，N</a:t>
+            </a:r>
+            <a:r>
+              <a:rPr sz="827" b="0" i="0" baseline="-25000">
                 <a:solidFill>
                   <a:srgbClr val="3A4A50"/>
                 </a:solidFill>
                 <a:latin typeface="Segoe UI"/>
                 <a:ea typeface="Microsoft YaHei"/>
               </a:rPr>
-              <a:t>4</a:t>
+              <a:t>z</a:t>
             </a:r>
             <a:r>
               <a:rPr sz="1150" b="0" i="0">
@@ -10253,7 +9970,7 @@
                 <a:latin typeface="Segoe UI"/>
                 <a:ea typeface="Microsoft YaHei"/>
               </a:rPr>
-              <a:t> J/m³，N</a:t>
+              <a:t> − N</a:t>
             </a:r>
             <a:r>
               <a:rPr sz="827" b="0" i="0" baseline="-25000">
@@ -10263,7 +9980,7 @@
                 <a:latin typeface="Segoe UI"/>
                 <a:ea typeface="Microsoft YaHei"/>
               </a:rPr>
-              <a:t>z</a:t>
+              <a:t>x</a:t>
             </a:r>
             <a:r>
               <a:rPr sz="1150" b="0" i="0">
@@ -10273,37 +9990,7 @@
                 <a:latin typeface="Segoe UI"/>
                 <a:ea typeface="Microsoft YaHei"/>
               </a:rPr>
-              <a:t> − N</a:t>
-            </a:r>
-            <a:r>
-              <a:rPr sz="827" b="0" i="0" baseline="-25000">
-                <a:solidFill>
-                  <a:srgbClr val="3A4A50"/>
-                </a:solidFill>
-                <a:latin typeface="Segoe UI"/>
-                <a:ea typeface="Microsoft YaHei"/>
-              </a:rPr>
-              <a:t>x</a:t>
-            </a:r>
-            <a:r>
-              <a:rPr sz="1150" b="0" i="0">
-                <a:solidFill>
-                  <a:srgbClr val="3A4A50"/>
-                </a:solidFill>
-                <a:latin typeface="Segoe UI"/>
-                <a:ea typeface="Microsoft YaHei"/>
-              </a:rPr>
-              <a:t> = </a:t>
-            </a:r>
-            <a:r>
-              <a:rPr sz="1150" b="0" i="0">
-                <a:solidFill>
-                  <a:srgbClr val="3A4A50"/>
-                </a:solidFill>
-                <a:latin typeface="Segoe UI"/>
-                <a:ea typeface="Microsoft YaHei"/>
-              </a:rPr>
-              <a:t>0.911</a:t>
+              <a:t> = 0.911</a:t>
             </a:r>
           </a:p>
           <a:p>
@@ -10326,7 +10013,17 @@
                 <a:latin typeface="Segoe UI"/>
                 <a:ea typeface="Microsoft YaHei"/>
               </a:rPr>
-              <a:t>阈值 </a:t>
+              <a:t>阈值 5.15×10</a:t>
+            </a:r>
+            <a:r>
+              <a:rPr sz="827" b="0" i="0" baseline="30000">
+                <a:solidFill>
+                  <a:srgbClr val="3A4A50"/>
+                </a:solidFill>
+                <a:latin typeface="Segoe UI"/>
+                <a:ea typeface="Microsoft YaHei"/>
+              </a:rPr>
+              <a:t>4</a:t>
             </a:r>
             <a:r>
               <a:rPr sz="1150" b="0" i="0">
@@ -10336,17 +10033,17 @@
                 <a:latin typeface="Segoe UI"/>
                 <a:ea typeface="Microsoft YaHei"/>
               </a:rPr>
-              <a:t>5.15×10</a:t>
-            </a:r>
-            <a:r>
-              <a:rPr sz="827" b="0" i="0" baseline="30000">
+              <a:t> &lt; K</a:t>
+            </a:r>
+            <a:r>
+              <a:rPr sz="827" b="0" i="0" baseline="-25000">
                 <a:solidFill>
                   <a:srgbClr val="3A4A50"/>
                 </a:solidFill>
                 <a:latin typeface="Segoe UI"/>
                 <a:ea typeface="Microsoft YaHei"/>
               </a:rPr>
-              <a:t>4</a:t>
+              <a:t>u</a:t>
             </a:r>
             <a:r>
               <a:rPr sz="1150" b="0" i="0">
@@ -10356,7 +10053,7 @@
                 <a:latin typeface="Segoe UI"/>
                 <a:ea typeface="Microsoft YaHei"/>
               </a:rPr>
-              <a:t> &lt; K</a:t>
+              <a:t>  ⇒  K</a:t>
             </a:r>
             <a:r>
               <a:rPr sz="827" b="0" i="0" baseline="-25000">
@@ -10366,7 +10063,7 @@
                 <a:latin typeface="Segoe UI"/>
                 <a:ea typeface="Microsoft YaHei"/>
               </a:rPr>
-              <a:t>u</a:t>
+              <a:t>eff</a:t>
             </a:r>
             <a:r>
               <a:rPr sz="1150" b="0" i="0">
@@ -10376,37 +10073,7 @@
                 <a:latin typeface="Segoe UI"/>
                 <a:ea typeface="Microsoft YaHei"/>
               </a:rPr>
-              <a:t>  ⇒  K</a:t>
-            </a:r>
-            <a:r>
-              <a:rPr sz="827" b="0" i="0" baseline="-25000">
-                <a:solidFill>
-                  <a:srgbClr val="3A4A50"/>
-                </a:solidFill>
-                <a:latin typeface="Segoe UI"/>
-                <a:ea typeface="Microsoft YaHei"/>
-              </a:rPr>
-              <a:t>eff</a:t>
-            </a:r>
-            <a:r>
-              <a:rPr sz="1150" b="0" i="0">
-                <a:solidFill>
-                  <a:srgbClr val="3A4A50"/>
-                </a:solidFill>
-                <a:latin typeface="Segoe UI"/>
-                <a:ea typeface="Microsoft YaHei"/>
-              </a:rPr>
-              <a:t> = </a:t>
-            </a:r>
-            <a:r>
-              <a:rPr sz="1150" b="0" i="0">
-                <a:solidFill>
-                  <a:srgbClr val="3A4A50"/>
-                </a:solidFill>
-                <a:latin typeface="Segoe UI"/>
-                <a:ea typeface="Microsoft YaHei"/>
-              </a:rPr>
-              <a:t>2.85×10</a:t>
+              <a:t> = 2.85×10</a:t>
             </a:r>
             <a:r>
               <a:rPr sz="827" b="0" i="0" baseline="30000">
@@ -10469,27 +10136,7 @@
                 <a:latin typeface="Segoe UI"/>
                 <a:ea typeface="Microsoft YaHei"/>
               </a:rPr>
-              <a:t> = </a:t>
-            </a:r>
-            <a:r>
-              <a:rPr sz="1150" b="0" i="0">
-                <a:solidFill>
-                  <a:srgbClr val="3A4A50"/>
-                </a:solidFill>
-                <a:latin typeface="Segoe UI"/>
-                <a:ea typeface="Microsoft YaHei"/>
-              </a:rPr>
-              <a:t>9.4</a:t>
-            </a:r>
-            <a:r>
-              <a:rPr sz="1150" b="0" i="0">
-                <a:solidFill>
-                  <a:srgbClr val="3A4A50"/>
-                </a:solidFill>
-                <a:latin typeface="Segoe UI"/>
-                <a:ea typeface="Microsoft YaHei"/>
-              </a:rPr>
-              <a:t> nm  ⇒ 网格 2 nm 起步，再以 1 nm 复算</a:t>
+              <a:t> = 9.4 nm  ⇒ 网格 2 nm 起步，再以 1 nm 复算</a:t>
             </a:r>
           </a:p>
         </p:txBody>
@@ -10511,7 +10158,7 @@
           <a:noFill/>
         </p:spPr>
         <p:txBody>
-          <a:bodyPr wrap="square" lIns="0" rIns="0" tIns="0" bIns="0" anchor="t">
+          <a:bodyPr wrap="square" lIns="0" tIns="0" rIns="0" bIns="0" anchor="t">
             <a:noAutofit/>
           </a:bodyPr>
           <a:lstStyle/>
@@ -10622,52 +10269,6 @@
       </p:sp>
       <p:sp>
         <p:nvSpPr>
-          <p:cNvPr id="24" name="TextBox 23"/>
-          <p:cNvSpPr txBox="1"/>
-          <p:nvPr/>
-        </p:nvSpPr>
-        <p:spPr>
-          <a:xfrm>
-            <a:off x="640080" y="6419088"/>
-            <a:ext cx="8869680" cy="237744"/>
-          </a:xfrm>
-          <a:prstGeom prst="rect">
-            <a:avLst/>
-          </a:prstGeom>
-          <a:noFill/>
-        </p:spPr>
-        <p:txBody>
-          <a:bodyPr wrap="square" lIns="0" rIns="0" tIns="0" bIns="0" anchor="t">
-            <a:noAutofit/>
-          </a:bodyPr>
-          <a:lstStyle/>
-          <a:p>
-            <a:pPr algn="l">
-              <a:lnSpc>
-                <a:spcPct val="115000"/>
-              </a:lnSpc>
-              <a:spcBef>
-                <a:spcPts val="0"/>
-              </a:spcBef>
-              <a:spcAft>
-                <a:spcPts val="0"/>
-              </a:spcAft>
-            </a:pPr>
-            <a:r>
-              <a:rPr sz="850" b="0" i="0">
-                <a:solidFill>
-                  <a:srgbClr val="53676D"/>
-                </a:solidFill>
-                <a:latin typeface="Segoe UI"/>
-                <a:ea typeface="Microsoft YaHei"/>
-              </a:rPr>
-              <a:t>推导见 2-微磁学四种能量竞争_学习笔记.md §8；参数见 3-Fidimag…md §7</a:t>
-            </a:r>
-          </a:p>
-        </p:txBody>
-      </p:sp>
-      <p:sp>
-        <p:nvSpPr>
           <p:cNvPr id="25" name="TextBox 24"/>
           <p:cNvSpPr txBox="1"/>
           <p:nvPr/>
@@ -10683,7 +10284,7 @@
           <a:noFill/>
         </p:spPr>
         <p:txBody>
-          <a:bodyPr wrap="square" lIns="0" rIns="0" tIns="0" bIns="0" anchor="t">
+          <a:bodyPr wrap="square" lIns="0" tIns="0" rIns="0" bIns="0" anchor="t">
             <a:noAutofit/>
           </a:bodyPr>
           <a:lstStyle/>
@@ -10721,7 +10322,7 @@
 </file>
 
 <file path=ppt/slides/slide6.xml><?xml version="1.0" encoding="utf-8"?>
-<p:sld xmlns:a="http://schemas.openxmlformats.org/drawingml/2006/main" xmlns:p="http://schemas.openxmlformats.org/presentationml/2006/main" xmlns:r="http://schemas.openxmlformats.org/officeDocument/2006/relationships">
+<p:sld xmlns:a="http://schemas.openxmlformats.org/drawingml/2006/main" xmlns:r="http://schemas.openxmlformats.org/officeDocument/2006/relationships" xmlns:p="http://schemas.openxmlformats.org/presentationml/2006/main">
   <p:cSld>
     <p:bg>
       <p:bgPr>
@@ -10737,7 +10338,14 @@
         <p:cNvGrpSpPr/>
         <p:nvPr/>
       </p:nvGrpSpPr>
-      <p:grpSpPr/>
+      <p:grpSpPr>
+        <a:xfrm>
+          <a:off x="0" y="0"/>
+          <a:ext cx="0" cy="0"/>
+          <a:chOff x="0" y="0"/>
+          <a:chExt cx="0" cy="0"/>
+        </a:xfrm>
+      </p:grpSpPr>
       <p:sp>
         <p:nvSpPr>
           <p:cNvPr id="2" name="TextBox 1"/>
@@ -10755,7 +10363,7 @@
           <a:noFill/>
         </p:spPr>
         <p:txBody>
-          <a:bodyPr wrap="square" lIns="0" rIns="0" tIns="0" bIns="0" anchor="t">
+          <a:bodyPr wrap="square" lIns="0" tIns="0" rIns="0" bIns="0" anchor="t">
             <a:noAutofit/>
           </a:bodyPr>
           <a:lstStyle/>
@@ -10821,7 +10429,7 @@
           <a:noFill/>
         </p:spPr>
         <p:txBody>
-          <a:bodyPr wrap="square" lIns="0" rIns="0" tIns="0" bIns="0" anchor="ctr">
+          <a:bodyPr wrap="square" lIns="0" tIns="0" rIns="0" bIns="0" anchor="ctr">
             <a:noAutofit/>
           </a:bodyPr>
           <a:lstStyle/>
@@ -10845,17 +10453,7 @@
                 <a:latin typeface="Segoe UI"/>
                 <a:ea typeface="Microsoft YaHei"/>
               </a:rPr>
-              <a:t>平面形状改的是面内各向异性，厚度才主导 </a:t>
-            </a:r>
-            <a:r>
-              <a:rPr sz="2800" b="1" i="0">
-                <a:solidFill>
-                  <a:srgbClr val="172E36"/>
-                </a:solidFill>
-                <a:latin typeface="Segoe UI"/>
-                <a:ea typeface="Microsoft YaHei"/>
-              </a:rPr>
-              <a:t>N</a:t>
+              <a:t>平面形状改的是面内各向异性，厚度才主导 N</a:t>
             </a:r>
             <a:r>
               <a:rPr sz="2016" b="1" i="0" baseline="-25000">
@@ -10897,6 +10495,7 @@
           <a:lstStyle/>
           <a:p>
             <a:pPr algn="ctr"/>
+            <a:endParaRPr/>
           </a:p>
         </p:txBody>
       </p:sp>
@@ -10917,15 +10516,39 @@
             <a:tbl>
               <a:tblPr firstRow="1" bandRow="1"/>
               <a:tblGrid>
-                <a:gridCol w="2194560"/>
-                <a:gridCol w="1371600"/>
-                <a:gridCol w="1371600"/>
-                <a:gridCol w="1371600"/>
+                <a:gridCol w="2194560">
+                  <a:extLst>
+                    <a:ext uri="{9D8B030D-6E8A-4147-A177-3AD203B41FA5}">
+                      <a16:colId xmlns:a16="http://schemas.microsoft.com/office/drawing/2014/main" val="20000"/>
+                    </a:ext>
+                  </a:extLst>
+                </a:gridCol>
+                <a:gridCol w="1371600">
+                  <a:extLst>
+                    <a:ext uri="{9D8B030D-6E8A-4147-A177-3AD203B41FA5}">
+                      <a16:colId xmlns:a16="http://schemas.microsoft.com/office/drawing/2014/main" val="20001"/>
+                    </a:ext>
+                  </a:extLst>
+                </a:gridCol>
+                <a:gridCol w="1371600">
+                  <a:extLst>
+                    <a:ext uri="{9D8B030D-6E8A-4147-A177-3AD203B41FA5}">
+                      <a16:colId xmlns:a16="http://schemas.microsoft.com/office/drawing/2014/main" val="20002"/>
+                    </a:ext>
+                  </a:extLst>
+                </a:gridCol>
+                <a:gridCol w="1371600">
+                  <a:extLst>
+                    <a:ext uri="{9D8B030D-6E8A-4147-A177-3AD203B41FA5}">
+                      <a16:colId xmlns:a16="http://schemas.microsoft.com/office/drawing/2014/main" val="20003"/>
+                    </a:ext>
+                  </a:extLst>
+                </a:gridCol>
               </a:tblGrid>
               <a:tr h="411480">
                 <a:tc>
                   <a:txBody>
-                    <a:bodyPr wrap="none"/>
+                    <a:bodyPr/>
                     <a:lstStyle/>
                     <a:p>
                       <a:pPr algn="l"/>
@@ -10949,7 +10572,7 @@
                 </a:tc>
                 <a:tc>
                   <a:txBody>
-                    <a:bodyPr wrap="none"/>
+                    <a:bodyPr/>
                     <a:lstStyle/>
                     <a:p>
                       <a:pPr algn="ctr"/>
@@ -10983,7 +10606,7 @@
                 </a:tc>
                 <a:tc>
                   <a:txBody>
-                    <a:bodyPr wrap="none"/>
+                    <a:bodyPr/>
                     <a:lstStyle/>
                     <a:p>
                       <a:pPr algn="ctr"/>
@@ -11017,7 +10640,7 @@
                 </a:tc>
                 <a:tc>
                   <a:txBody>
-                    <a:bodyPr wrap="none"/>
+                    <a:bodyPr/>
                     <a:lstStyle/>
                     <a:p>
                       <a:pPr algn="ctr"/>
@@ -11049,11 +10672,16 @@
                     </a:solidFill>
                   </a:tcPr>
                 </a:tc>
+                <a:extLst>
+                  <a:ext uri="{0D108BD9-81ED-4DB2-BD59-A6C34878D82A}">
+                    <a16:rowId xmlns:a16="http://schemas.microsoft.com/office/drawing/2014/main" val="10000"/>
+                  </a:ext>
+                </a:extLst>
               </a:tr>
               <a:tr h="411480">
                 <a:tc>
                   <a:txBody>
-                    <a:bodyPr wrap="none"/>
+                    <a:bodyPr/>
                     <a:lstStyle/>
                     <a:p>
                       <a:pPr algn="l"/>
@@ -11077,7 +10705,7 @@
                 </a:tc>
                 <a:tc>
                   <a:txBody>
-                    <a:bodyPr wrap="none"/>
+                    <a:bodyPr/>
                     <a:lstStyle/>
                     <a:p>
                       <a:pPr algn="ctr"/>
@@ -11101,7 +10729,7 @@
                 </a:tc>
                 <a:tc>
                   <a:txBody>
-                    <a:bodyPr wrap="none"/>
+                    <a:bodyPr/>
                     <a:lstStyle/>
                     <a:p>
                       <a:pPr algn="ctr"/>
@@ -11125,7 +10753,7 @@
                 </a:tc>
                 <a:tc>
                   <a:txBody>
-                    <a:bodyPr wrap="none"/>
+                    <a:bodyPr/>
                     <a:lstStyle/>
                     <a:p>
                       <a:pPr algn="ctr"/>
@@ -11147,11 +10775,16 @@
                     </a:solidFill>
                   </a:tcPr>
                 </a:tc>
+                <a:extLst>
+                  <a:ext uri="{0D108BD9-81ED-4DB2-BD59-A6C34878D82A}">
+                    <a16:rowId xmlns:a16="http://schemas.microsoft.com/office/drawing/2014/main" val="10001"/>
+                  </a:ext>
+                </a:extLst>
               </a:tr>
               <a:tr h="411480">
                 <a:tc>
                   <a:txBody>
-                    <a:bodyPr wrap="none"/>
+                    <a:bodyPr/>
                     <a:lstStyle/>
                     <a:p>
                       <a:pPr algn="l"/>
@@ -11175,7 +10808,7 @@
                 </a:tc>
                 <a:tc>
                   <a:txBody>
-                    <a:bodyPr wrap="none"/>
+                    <a:bodyPr/>
                     <a:lstStyle/>
                     <a:p>
                       <a:pPr algn="ctr"/>
@@ -11199,7 +10832,7 @@
                 </a:tc>
                 <a:tc>
                   <a:txBody>
-                    <a:bodyPr wrap="none"/>
+                    <a:bodyPr/>
                     <a:lstStyle/>
                     <a:p>
                       <a:pPr algn="ctr"/>
@@ -11223,7 +10856,7 @@
                 </a:tc>
                 <a:tc>
                   <a:txBody>
-                    <a:bodyPr wrap="none"/>
+                    <a:bodyPr/>
                     <a:lstStyle/>
                     <a:p>
                       <a:pPr algn="ctr"/>
@@ -11245,11 +10878,16 @@
                     </a:solidFill>
                   </a:tcPr>
                 </a:tc>
+                <a:extLst>
+                  <a:ext uri="{0D108BD9-81ED-4DB2-BD59-A6C34878D82A}">
+                    <a16:rowId xmlns:a16="http://schemas.microsoft.com/office/drawing/2014/main" val="10002"/>
+                  </a:ext>
+                </a:extLst>
               </a:tr>
               <a:tr h="411480">
                 <a:tc>
                   <a:txBody>
-                    <a:bodyPr wrap="none"/>
+                    <a:bodyPr/>
                     <a:lstStyle/>
                     <a:p>
                       <a:pPr algn="l"/>
@@ -11273,7 +10911,7 @@
                 </a:tc>
                 <a:tc>
                   <a:txBody>
-                    <a:bodyPr wrap="none"/>
+                    <a:bodyPr/>
                     <a:lstStyle/>
                     <a:p>
                       <a:pPr algn="ctr"/>
@@ -11297,7 +10935,7 @@
                 </a:tc>
                 <a:tc>
                   <a:txBody>
-                    <a:bodyPr wrap="none"/>
+                    <a:bodyPr/>
                     <a:lstStyle/>
                     <a:p>
                       <a:pPr algn="ctr"/>
@@ -11321,7 +10959,7 @@
                 </a:tc>
                 <a:tc>
                   <a:txBody>
-                    <a:bodyPr wrap="none"/>
+                    <a:bodyPr/>
                     <a:lstStyle/>
                     <a:p>
                       <a:pPr algn="ctr"/>
@@ -11343,6 +10981,11 @@
                     </a:solidFill>
                   </a:tcPr>
                 </a:tc>
+                <a:extLst>
+                  <a:ext uri="{0D108BD9-81ED-4DB2-BD59-A6C34878D82A}">
+                    <a16:rowId xmlns:a16="http://schemas.microsoft.com/office/drawing/2014/main" val="10003"/>
+                  </a:ext>
+                </a:extLst>
               </a:tr>
             </a:tbl>
           </a:graphicData>
@@ -11365,7 +11008,7 @@
           <a:noFill/>
         </p:spPr>
         <p:txBody>
-          <a:bodyPr wrap="square" lIns="0" rIns="0" tIns="0" bIns="0" anchor="t">
+          <a:bodyPr wrap="square" lIns="0" tIns="0" rIns="0" bIns="0" anchor="t">
             <a:noAutofit/>
           </a:bodyPr>
           <a:lstStyle/>
@@ -11421,6 +11064,7 @@
           <a:lstStyle/>
           <a:p>
             <a:pPr algn="ctr"/>
+            <a:endParaRPr/>
           </a:p>
         </p:txBody>
       </p:sp>
@@ -11451,6 +11095,7 @@
           <a:lstStyle/>
           <a:p>
             <a:pPr algn="ctr"/>
+            <a:endParaRPr/>
           </a:p>
         </p:txBody>
       </p:sp>
@@ -11481,6 +11126,7 @@
           <a:lstStyle/>
           <a:p>
             <a:pPr algn="ctr"/>
+            <a:endParaRPr/>
           </a:p>
         </p:txBody>
       </p:sp>
@@ -11501,7 +11147,7 @@
           <a:noFill/>
         </p:spPr>
         <p:txBody>
-          <a:bodyPr wrap="square" lIns="0" rIns="0" tIns="0" bIns="0" anchor="ctr">
+          <a:bodyPr wrap="square" lIns="0" tIns="0" rIns="0" bIns="0" anchor="ctr">
             <a:noAutofit/>
           </a:bodyPr>
           <a:lstStyle/>
@@ -11567,7 +11213,7 @@
           <a:noFill/>
         </p:spPr>
         <p:txBody>
-          <a:bodyPr wrap="square" lIns="0" rIns="0" tIns="0" bIns="0" anchor="t">
+          <a:bodyPr wrap="square" lIns="0" tIns="0" rIns="0" bIns="0" anchor="t">
             <a:noAutofit/>
           </a:bodyPr>
           <a:lstStyle/>
@@ -11653,7 +11299,7 @@
           <a:noFill/>
         </p:spPr>
         <p:txBody>
-          <a:bodyPr wrap="square" lIns="0" rIns="0" tIns="0" bIns="0" anchor="t">
+          <a:bodyPr wrap="square" lIns="0" tIns="0" rIns="0" bIns="0" anchor="t">
             <a:noAutofit/>
           </a:bodyPr>
           <a:lstStyle/>
@@ -11729,7 +11375,7 @@
           <a:noFill/>
         </p:spPr>
         <p:txBody>
-          <a:bodyPr wrap="square" lIns="0" rIns="0" tIns="0" bIns="0" anchor="t">
+          <a:bodyPr wrap="square" lIns="0" tIns="0" rIns="0" bIns="0" anchor="t">
             <a:noAutofit/>
           </a:bodyPr>
           <a:lstStyle/>
@@ -11775,7 +11421,7 @@
           <a:noFill/>
         </p:spPr>
         <p:txBody>
-          <a:bodyPr wrap="square" lIns="0" rIns="0" tIns="0" bIns="0" anchor="t">
+          <a:bodyPr wrap="square" lIns="0" tIns="0" rIns="0" bIns="0" anchor="t">
             <a:noAutofit/>
           </a:bodyPr>
           <a:lstStyle/>
@@ -11799,7 +11445,17 @@
                 <a:latin typeface="Segoe UI"/>
                 <a:ea typeface="Microsoft YaHei"/>
               </a:rPr>
-              <a:t>同面积同厚度，方形改长条：</a:t>
+              <a:t>同面积同厚度，方形改长条：N</a:t>
+            </a:r>
+            <a:r>
+              <a:rPr sz="756" b="0" i="0" baseline="-25000">
+                <a:solidFill>
+                  <a:srgbClr val="3A4A50"/>
+                </a:solidFill>
+                <a:latin typeface="Segoe UI"/>
+                <a:ea typeface="Microsoft YaHei"/>
+              </a:rPr>
+              <a:t>z</a:t>
             </a:r>
             <a:r>
               <a:rPr sz="1050" b="0" i="0">
@@ -11809,7 +11465,7 @@
                 <a:latin typeface="Segoe UI"/>
                 <a:ea typeface="Microsoft YaHei"/>
               </a:rPr>
-              <a:t>N</a:t>
+              <a:t> 几乎不变，变的是面内 N</a:t>
             </a:r>
             <a:r>
               <a:rPr sz="756" b="0" i="0" baseline="-25000">
@@ -11819,7 +11475,7 @@
                 <a:latin typeface="Segoe UI"/>
                 <a:ea typeface="Microsoft YaHei"/>
               </a:rPr>
-              <a:t>z</a:t>
+              <a:t>x</a:t>
             </a:r>
             <a:r>
               <a:rPr sz="1050" b="0" i="0">
@@ -11829,47 +11485,7 @@
                 <a:latin typeface="Segoe UI"/>
                 <a:ea typeface="Microsoft YaHei"/>
               </a:rPr>
-              <a:t> 几乎不变，变的是面内 </a:t>
-            </a:r>
-            <a:r>
-              <a:rPr sz="1050" b="0" i="0">
-                <a:solidFill>
-                  <a:srgbClr val="3A4A50"/>
-                </a:solidFill>
-                <a:latin typeface="Segoe UI"/>
-                <a:ea typeface="Microsoft YaHei"/>
-              </a:rPr>
-              <a:t>N</a:t>
-            </a:r>
-            <a:r>
-              <a:rPr sz="756" b="0" i="0" baseline="-25000">
-                <a:solidFill>
-                  <a:srgbClr val="3A4A50"/>
-                </a:solidFill>
-                <a:latin typeface="Segoe UI"/>
-                <a:ea typeface="Microsoft YaHei"/>
-              </a:rPr>
-              <a:t>x</a:t>
-            </a:r>
-            <a:r>
-              <a:rPr sz="1050" b="0" i="0">
-                <a:solidFill>
-                  <a:srgbClr val="3A4A50"/>
-                </a:solidFill>
-                <a:latin typeface="Segoe UI"/>
-                <a:ea typeface="Microsoft YaHei"/>
-              </a:rPr>
-              <a:t> 0.030→0.014、</a:t>
-            </a:r>
-            <a:r>
-              <a:rPr sz="1050" b="0" i="0">
-                <a:solidFill>
-                  <a:srgbClr val="3A4A50"/>
-                </a:solidFill>
-                <a:latin typeface="Segoe UI"/>
-                <a:ea typeface="Microsoft YaHei"/>
-              </a:rPr>
-              <a:t>N</a:t>
+              <a:t> 0.030→0.014、N</a:t>
             </a:r>
             <a:r>
               <a:rPr sz="756" b="0" i="0" baseline="-25000">
@@ -11921,6 +11537,7 @@
           <a:lstStyle/>
           <a:p>
             <a:pPr algn="ctr"/>
+            <a:endParaRPr/>
           </a:p>
         </p:txBody>
       </p:sp>
@@ -11941,7 +11558,7 @@
           <a:noFill/>
         </p:spPr>
         <p:txBody>
-          <a:bodyPr wrap="square" lIns="0" rIns="0" tIns="0" bIns="0" anchor="t">
+          <a:bodyPr wrap="square" lIns="0" tIns="0" rIns="0" bIns="0" anchor="t">
             <a:noAutofit/>
           </a:bodyPr>
           <a:lstStyle/>
@@ -11987,7 +11604,7 @@
           <a:noFill/>
         </p:spPr>
         <p:txBody>
-          <a:bodyPr wrap="square" lIns="0" rIns="0" tIns="0" bIns="0" anchor="t">
+          <a:bodyPr wrap="square" lIns="0" tIns="0" rIns="0" bIns="0" anchor="t">
             <a:noAutofit/>
           </a:bodyPr>
           <a:lstStyle/>
@@ -12011,7 +11628,17 @@
                 <a:latin typeface="Segoe UI"/>
                 <a:ea typeface="Microsoft YaHei"/>
               </a:rPr>
-              <a:t>厚度 4 → 20 nm：</a:t>
+              <a:t>厚度 4 → 20 nm：N</a:t>
+            </a:r>
+            <a:r>
+              <a:rPr sz="756" b="0" i="0" baseline="-25000">
+                <a:solidFill>
+                  <a:srgbClr val="3A4A50"/>
+                </a:solidFill>
+                <a:latin typeface="Segoe UI"/>
+                <a:ea typeface="Microsoft YaHei"/>
+              </a:rPr>
+              <a:t>z</a:t>
             </a:r>
             <a:r>
               <a:rPr sz="1050" b="0" i="0">
@@ -12021,37 +11648,7 @@
                 <a:latin typeface="Segoe UI"/>
                 <a:ea typeface="Microsoft YaHei"/>
               </a:rPr>
-              <a:t>N</a:t>
-            </a:r>
-            <a:r>
-              <a:rPr sz="756" b="0" i="0" baseline="-25000">
-                <a:solidFill>
-                  <a:srgbClr val="3A4A50"/>
-                </a:solidFill>
-                <a:latin typeface="Segoe UI"/>
-                <a:ea typeface="Microsoft YaHei"/>
-              </a:rPr>
-              <a:t>z</a:t>
-            </a:r>
-            <a:r>
-              <a:rPr sz="1050" b="0" i="0">
-                <a:solidFill>
-                  <a:srgbClr val="3A4A50"/>
-                </a:solidFill>
-                <a:latin typeface="Segoe UI"/>
-                <a:ea typeface="Microsoft YaHei"/>
-              </a:rPr>
-              <a:t> 明显下降，厚度才是 </a:t>
-            </a:r>
-            <a:r>
-              <a:rPr sz="1050" b="0" i="0">
-                <a:solidFill>
-                  <a:srgbClr val="3A4A50"/>
-                </a:solidFill>
-                <a:latin typeface="Segoe UI"/>
-                <a:ea typeface="Microsoft YaHei"/>
-              </a:rPr>
-              <a:t>N</a:t>
+              <a:t> 明显下降，厚度才是 N</a:t>
             </a:r>
             <a:r>
               <a:rPr sz="756" b="0" i="0" baseline="-25000">
@@ -12103,6 +11700,7 @@
           <a:lstStyle/>
           <a:p>
             <a:pPr algn="ctr"/>
+            <a:endParaRPr/>
           </a:p>
         </p:txBody>
       </p:sp>
@@ -12123,7 +11721,7 @@
           <a:noFill/>
         </p:spPr>
         <p:txBody>
-          <a:bodyPr wrap="square" lIns="0" rIns="0" tIns="0" bIns="0" anchor="t">
+          <a:bodyPr wrap="square" lIns="0" tIns="0" rIns="0" bIns="0" anchor="t">
             <a:noAutofit/>
           </a:bodyPr>
           <a:lstStyle/>
@@ -12169,7 +11767,7 @@
           <a:noFill/>
         </p:spPr>
         <p:txBody>
-          <a:bodyPr wrap="square" lIns="0" rIns="0" tIns="0" bIns="0" anchor="t">
+          <a:bodyPr wrap="square" lIns="0" tIns="0" rIns="0" bIns="0" anchor="t">
             <a:noAutofit/>
           </a:bodyPr>
           <a:lstStyle/>
@@ -12193,7 +11791,17 @@
                 <a:latin typeface="Segoe UI"/>
                 <a:ea typeface="Microsoft YaHei"/>
               </a:rPr>
-              <a:t>中心点 </a:t>
+              <a:t>中心点 N</a:t>
+            </a:r>
+            <a:r>
+              <a:rPr sz="756" b="0" i="0" baseline="-25000">
+                <a:solidFill>
+                  <a:srgbClr val="3A4A50"/>
+                </a:solidFill>
+                <a:latin typeface="Segoe UI"/>
+                <a:ea typeface="Microsoft YaHei"/>
+              </a:rPr>
+              <a:t>z</a:t>
             </a:r>
             <a:r>
               <a:rPr sz="1050" b="0" i="0">
@@ -12203,37 +11811,7 @@
                 <a:latin typeface="Segoe UI"/>
                 <a:ea typeface="Microsoft YaHei"/>
               </a:rPr>
-              <a:t>N</a:t>
-            </a:r>
-            <a:r>
-              <a:rPr sz="756" b="0" i="0" baseline="-25000">
-                <a:solidFill>
-                  <a:srgbClr val="3A4A50"/>
-                </a:solidFill>
-                <a:latin typeface="Segoe UI"/>
-                <a:ea typeface="Microsoft YaHei"/>
-              </a:rPr>
-              <a:t>z</a:t>
-            </a:r>
-            <a:r>
-              <a:rPr sz="1050" b="0" i="0">
-                <a:solidFill>
-                  <a:srgbClr val="3A4A50"/>
-                </a:solidFill>
-                <a:latin typeface="Segoe UI"/>
-                <a:ea typeface="Microsoft YaHei"/>
-              </a:rPr>
-              <a:t> 比体积平均高 4.37%；用无限薄膜 </a:t>
-            </a:r>
-            <a:r>
-              <a:rPr sz="1050" b="0" i="0">
-                <a:solidFill>
-                  <a:srgbClr val="3A4A50"/>
-                </a:solidFill>
-                <a:latin typeface="Segoe UI"/>
-                <a:ea typeface="Microsoft YaHei"/>
-              </a:rPr>
-              <a:t>N</a:t>
+              <a:t> 比体积平均高 4.37%；用无限薄膜 N</a:t>
             </a:r>
             <a:r>
               <a:rPr sz="756" b="0" i="0" baseline="-25000">
@@ -12275,7 +11853,7 @@
           <a:noFill/>
         </p:spPr>
         <p:txBody>
-          <a:bodyPr wrap="square" lIns="0" rIns="0" tIns="0" bIns="0" anchor="t">
+          <a:bodyPr wrap="square" lIns="0" tIns="0" rIns="0" bIns="0" anchor="t">
             <a:noAutofit/>
           </a:bodyPr>
           <a:lstStyle/>
@@ -12321,7 +11899,7 @@
           <a:noFill/>
         </p:spPr>
         <p:txBody>
-          <a:bodyPr wrap="square" lIns="0" rIns="0" tIns="0" bIns="0" anchor="t">
+          <a:bodyPr wrap="square" lIns="0" tIns="0" rIns="0" bIns="0" anchor="t">
             <a:noAutofit/>
           </a:bodyPr>
           <a:lstStyle/>
@@ -12359,7 +11937,7 @@
 </file>
 
 <file path=ppt/slides/slide7.xml><?xml version="1.0" encoding="utf-8"?>
-<p:sld xmlns:a="http://schemas.openxmlformats.org/drawingml/2006/main" xmlns:p="http://schemas.openxmlformats.org/presentationml/2006/main" xmlns:r="http://schemas.openxmlformats.org/officeDocument/2006/relationships">
+<p:sld xmlns:a="http://schemas.openxmlformats.org/drawingml/2006/main" xmlns:r="http://schemas.openxmlformats.org/officeDocument/2006/relationships" xmlns:p="http://schemas.openxmlformats.org/presentationml/2006/main">
   <p:cSld>
     <p:bg>
       <p:bgPr>
@@ -12375,7 +11953,14 @@
         <p:cNvGrpSpPr/>
         <p:nvPr/>
       </p:nvGrpSpPr>
-      <p:grpSpPr/>
+      <p:grpSpPr>
+        <a:xfrm>
+          <a:off x="0" y="0"/>
+          <a:ext cx="0" cy="0"/>
+          <a:chOff x="0" y="0"/>
+          <a:chExt cx="0" cy="0"/>
+        </a:xfrm>
+      </p:grpSpPr>
       <p:sp>
         <p:nvSpPr>
           <p:cNvPr id="2" name="TextBox 1"/>
@@ -12393,7 +11978,7 @@
           <a:noFill/>
         </p:spPr>
         <p:txBody>
-          <a:bodyPr wrap="square" lIns="0" rIns="0" tIns="0" bIns="0" anchor="t">
+          <a:bodyPr wrap="square" lIns="0" tIns="0" rIns="0" bIns="0" anchor="t">
             <a:noAutofit/>
           </a:bodyPr>
           <a:lstStyle/>
@@ -12459,7 +12044,7 @@
           <a:noFill/>
         </p:spPr>
         <p:txBody>
-          <a:bodyPr wrap="square" lIns="0" rIns="0" tIns="0" bIns="0" anchor="ctr">
+          <a:bodyPr wrap="square" lIns="0" tIns="0" rIns="0" bIns="0" anchor="ctr">
             <a:noAutofit/>
           </a:bodyPr>
           <a:lstStyle/>
@@ -12515,6 +12100,7 @@
           <a:lstStyle/>
           <a:p>
             <a:pPr algn="ctr"/>
+            <a:endParaRPr/>
           </a:p>
         </p:txBody>
       </p:sp>
@@ -12549,6 +12135,7 @@
           <a:lstStyle/>
           <a:p>
             <a:pPr algn="ctr"/>
+            <a:endParaRPr/>
           </a:p>
         </p:txBody>
       </p:sp>
@@ -12579,6 +12166,7 @@
           <a:lstStyle/>
           <a:p>
             <a:pPr algn="ctr"/>
+            <a:endParaRPr/>
           </a:p>
         </p:txBody>
       </p:sp>
@@ -12599,7 +12187,7 @@
           <a:noFill/>
         </p:spPr>
         <p:txBody>
-          <a:bodyPr wrap="square" lIns="0" rIns="0" tIns="0" bIns="0" anchor="t">
+          <a:bodyPr wrap="square" lIns="0" tIns="0" rIns="0" bIns="0" anchor="t">
             <a:noAutofit/>
           </a:bodyPr>
           <a:lstStyle/>
@@ -12645,7 +12233,7 @@
           <a:noFill/>
         </p:spPr>
         <p:txBody>
-          <a:bodyPr wrap="square" lIns="0" rIns="0" tIns="0" bIns="0" anchor="t">
+          <a:bodyPr wrap="square" lIns="0" tIns="0" rIns="0" bIns="0" anchor="t">
             <a:noAutofit/>
           </a:bodyPr>
           <a:lstStyle/>
@@ -12691,7 +12279,7 @@
           <a:noFill/>
         </p:spPr>
         <p:txBody>
-          <a:bodyPr wrap="square" lIns="0" rIns="0" tIns="0" bIns="0" anchor="t">
+          <a:bodyPr wrap="square" lIns="0" tIns="0" rIns="0" bIns="0" anchor="t">
             <a:noAutofit/>
           </a:bodyPr>
           <a:lstStyle/>
@@ -12715,17 +12303,7 @@
                 <a:latin typeface="Segoe UI"/>
                 <a:ea typeface="Microsoft YaHei"/>
               </a:rPr>
-              <a:t>对 OOMMF 基准：</a:t>
-            </a:r>
-            <a:r>
-              <a:rPr sz="1150" b="0" i="0">
-                <a:solidFill>
-                  <a:srgbClr val="3A4A50"/>
-                </a:solidFill>
-                <a:latin typeface="Segoe UI"/>
-                <a:ea typeface="Microsoft YaHei"/>
-              </a:rPr>
-              <a:t>7.49×10</a:t>
+              <a:t>对 OOMMF 基准：7.49×10</a:t>
             </a:r>
             <a:r>
               <a:rPr sz="827" b="0" i="0" baseline="30000">
@@ -12758,17 +12336,7 @@
                 <a:latin typeface="Segoe UI"/>
                 <a:ea typeface="Microsoft YaHei"/>
               </a:rPr>
-              <a:t>迹误差：</a:t>
-            </a:r>
-            <a:r>
-              <a:rPr sz="1150" b="0" i="0">
-                <a:solidFill>
-                  <a:srgbClr val="3A4A50"/>
-                </a:solidFill>
-                <a:latin typeface="Segoe UI"/>
-                <a:ea typeface="Microsoft YaHei"/>
-              </a:rPr>
-              <a:t>4.02×10</a:t>
+              <a:t>迹误差：4.02×10</a:t>
             </a:r>
             <a:r>
               <a:rPr sz="827" b="0" i="0" baseline="30000">
@@ -12801,17 +12369,7 @@
                 <a:latin typeface="Segoe UI"/>
                 <a:ea typeface="Microsoft YaHei"/>
               </a:rPr>
-              <a:t>独立积分交叉验证：</a:t>
-            </a:r>
-            <a:r>
-              <a:rPr sz="1150" b="0" i="0">
-                <a:solidFill>
-                  <a:srgbClr val="3A4A50"/>
-                </a:solidFill>
-                <a:latin typeface="Segoe UI"/>
-                <a:ea typeface="Microsoft YaHei"/>
-              </a:rPr>
-              <a:t>1.84×10</a:t>
+              <a:t>独立积分交叉验证：1.84×10</a:t>
             </a:r>
             <a:r>
               <a:rPr sz="827" b="0" i="0" baseline="30000">
@@ -12843,7 +12401,7 @@
           <a:noFill/>
         </p:spPr>
         <p:txBody>
-          <a:bodyPr wrap="square" lIns="0" rIns="0" tIns="0" bIns="0" anchor="t">
+          <a:bodyPr wrap="square" lIns="0" tIns="0" rIns="0" bIns="0" anchor="t">
             <a:noAutofit/>
           </a:bodyPr>
           <a:lstStyle/>
@@ -12903,6 +12461,7 @@
           <a:lstStyle/>
           <a:p>
             <a:pPr algn="ctr"/>
+            <a:endParaRPr/>
           </a:p>
         </p:txBody>
       </p:sp>
@@ -12933,6 +12492,7 @@
           <a:lstStyle/>
           <a:p>
             <a:pPr algn="ctr"/>
+            <a:endParaRPr/>
           </a:p>
         </p:txBody>
       </p:sp>
@@ -12953,7 +12513,7 @@
           <a:noFill/>
         </p:spPr>
         <p:txBody>
-          <a:bodyPr wrap="square" lIns="0" rIns="0" tIns="0" bIns="0" anchor="t">
+          <a:bodyPr wrap="square" lIns="0" tIns="0" rIns="0" bIns="0" anchor="t">
             <a:noAutofit/>
           </a:bodyPr>
           <a:lstStyle/>
@@ -12999,7 +12559,7 @@
           <a:noFill/>
         </p:spPr>
         <p:txBody>
-          <a:bodyPr wrap="square" lIns="0" rIns="0" tIns="0" bIns="0" anchor="t">
+          <a:bodyPr wrap="square" lIns="0" tIns="0" rIns="0" bIns="0" anchor="t">
             <a:noAutofit/>
           </a:bodyPr>
           <a:lstStyle/>
@@ -13045,7 +12605,7 @@
           <a:noFill/>
         </p:spPr>
         <p:txBody>
-          <a:bodyPr wrap="square" lIns="0" rIns="0" tIns="0" bIns="0" anchor="t">
+          <a:bodyPr wrap="square" lIns="0" tIns="0" rIns="0" bIns="0" anchor="t">
             <a:noAutofit/>
           </a:bodyPr>
           <a:lstStyle/>
@@ -13069,17 +12629,7 @@
                 <a:latin typeface="Segoe UI"/>
                 <a:ea typeface="Microsoft YaHei"/>
               </a:rPr>
-              <a:t>与解析解：</a:t>
-            </a:r>
-            <a:r>
-              <a:rPr sz="1150" b="0" i="0">
-                <a:solidFill>
-                  <a:srgbClr val="3A4A50"/>
-                </a:solidFill>
-                <a:latin typeface="Segoe UI"/>
-                <a:ea typeface="Microsoft YaHei"/>
-              </a:rPr>
-              <a:t>2.76×10</a:t>
+              <a:t>与解析解：2.76×10</a:t>
             </a:r>
             <a:r>
               <a:rPr sz="827" b="0" i="0" baseline="30000">
@@ -13112,17 +12662,7 @@
                 <a:latin typeface="Segoe UI"/>
                 <a:ea typeface="Microsoft YaHei"/>
               </a:rPr>
-              <a:t>模长误差：</a:t>
-            </a:r>
-            <a:r>
-              <a:rPr sz="1150" b="0" i="0">
-                <a:solidFill>
-                  <a:srgbClr val="3A4A50"/>
-                </a:solidFill>
-                <a:latin typeface="Segoe UI"/>
-                <a:ea typeface="Microsoft YaHei"/>
-              </a:rPr>
-              <a:t>1.02×10</a:t>
+              <a:t>模长误差：1.02×10</a:t>
             </a:r>
             <a:r>
               <a:rPr sz="827" b="0" i="0" baseline="30000">
@@ -13155,17 +12695,7 @@
                 <a:latin typeface="Segoe UI"/>
                 <a:ea typeface="Microsoft YaHei"/>
               </a:rPr>
-              <a:t>步长减半差：</a:t>
-            </a:r>
-            <a:r>
-              <a:rPr sz="1150" b="0" i="0">
-                <a:solidFill>
-                  <a:srgbClr val="3A4A50"/>
-                </a:solidFill>
-                <a:latin typeface="Segoe UI"/>
-                <a:ea typeface="Microsoft YaHei"/>
-              </a:rPr>
-              <a:t>2.59×10</a:t>
+              <a:t>步长减半差：2.59×10</a:t>
             </a:r>
             <a:r>
               <a:rPr sz="827" b="0" i="0" baseline="30000">
@@ -13197,7 +12727,7 @@
           <a:noFill/>
         </p:spPr>
         <p:txBody>
-          <a:bodyPr wrap="square" lIns="0" rIns="0" tIns="0" bIns="0" anchor="t">
+          <a:bodyPr wrap="square" lIns="0" tIns="0" rIns="0" bIns="0" anchor="t">
             <a:noAutofit/>
           </a:bodyPr>
           <a:lstStyle/>
@@ -13255,6 +12785,7 @@
           <a:lstStyle/>
           <a:p>
             <a:pPr algn="ctr"/>
+            <a:endParaRPr/>
           </a:p>
         </p:txBody>
       </p:sp>
@@ -13285,6 +12816,7 @@
           <a:lstStyle/>
           <a:p>
             <a:pPr algn="ctr"/>
+            <a:endParaRPr/>
           </a:p>
         </p:txBody>
       </p:sp>
@@ -13305,7 +12837,7 @@
           <a:noFill/>
         </p:spPr>
         <p:txBody>
-          <a:bodyPr wrap="square" lIns="0" rIns="0" tIns="0" bIns="0" anchor="t">
+          <a:bodyPr wrap="square" lIns="0" tIns="0" rIns="0" bIns="0" anchor="t">
             <a:noAutofit/>
           </a:bodyPr>
           <a:lstStyle/>
@@ -13351,7 +12883,7 @@
           <a:noFill/>
         </p:spPr>
         <p:txBody>
-          <a:bodyPr wrap="square" lIns="0" rIns="0" tIns="0" bIns="0" anchor="t">
+          <a:bodyPr wrap="square" lIns="0" tIns="0" rIns="0" bIns="0" anchor="t">
             <a:noAutofit/>
           </a:bodyPr>
           <a:lstStyle/>
@@ -13397,7 +12929,7 @@
           <a:noFill/>
         </p:spPr>
         <p:txBody>
-          <a:bodyPr wrap="square" lIns="0" rIns="0" tIns="0" bIns="0" anchor="t">
+          <a:bodyPr wrap="square" lIns="0" tIns="0" rIns="0" bIns="0" anchor="t">
             <a:noAutofit/>
           </a:bodyPr>
           <a:lstStyle/>
@@ -13414,24 +12946,54 @@
               </a:spcAft>
             </a:pPr>
             <a:r>
-              <a:rPr sz="1150" b="0" i="0">
+              <a:rPr sz="1150" b="0" i="0" dirty="0" err="1">
                 <a:solidFill>
                   <a:srgbClr val="3A4A50"/>
                 </a:solidFill>
                 <a:latin typeface="Segoe UI"/>
                 <a:ea typeface="Microsoft YaHei"/>
               </a:rPr>
-              <a:t>接口与语法已核对，但本机没有 Fidimag，尚未运行：目前没有任何薄膜模拟结果，</a:t>
-            </a:r>
-            <a:r>
-              <a:rPr sz="1150" b="1" i="0">
+              <a:t>接口与语法已核对，但本机没有</a:t>
+            </a:r>
+            <a:r>
+              <a:rPr sz="1150" b="0" i="0" dirty="0">
+                <a:solidFill>
+                  <a:srgbClr val="3A4A50"/>
+                </a:solidFill>
+                <a:latin typeface="Segoe UI"/>
+                <a:ea typeface="Microsoft YaHei"/>
+              </a:rPr>
+              <a:t> </a:t>
+            </a:r>
+            <a:r>
+              <a:rPr sz="1150" b="0" i="0" dirty="0" err="1">
+                <a:solidFill>
+                  <a:srgbClr val="3A4A50"/>
+                </a:solidFill>
+                <a:latin typeface="Segoe UI"/>
+                <a:ea typeface="Microsoft YaHei"/>
+              </a:rPr>
+              <a:t>Fidimag，尚未运行：目前没有任何薄膜模拟结果，</a:t>
+            </a:r>
+            <a:r>
+              <a:rPr sz="1150" b="1" i="0" dirty="0" err="1">
                 <a:solidFill>
                   <a:srgbClr val="B45309"/>
                 </a:solidFill>
                 <a:latin typeface="Segoe UI"/>
                 <a:ea typeface="Microsoft YaHei"/>
               </a:rPr>
-              <a:t>这一步的结论还不能写。</a:t>
+              <a:t>这一步的结论还不能写</a:t>
+            </a:r>
+            <a:r>
+              <a:rPr sz="1150" b="1" i="0" dirty="0">
+                <a:solidFill>
+                  <a:srgbClr val="B45309"/>
+                </a:solidFill>
+                <a:latin typeface="Segoe UI"/>
+                <a:ea typeface="Microsoft YaHei"/>
+              </a:rPr>
+              <a:t>。</a:t>
             </a:r>
           </a:p>
         </p:txBody>
@@ -13453,7 +13015,7 @@
           <a:noFill/>
         </p:spPr>
         <p:txBody>
-          <a:bodyPr wrap="square" lIns="0" rIns="0" tIns="0" bIns="0" anchor="t">
+          <a:bodyPr wrap="square" lIns="0" tIns="0" rIns="0" bIns="0" anchor="t">
             <a:noAutofit/>
           </a:bodyPr>
           <a:lstStyle/>
@@ -13484,52 +13046,6 @@
       </p:sp>
       <p:sp>
         <p:nvSpPr>
-          <p:cNvPr id="23" name="TextBox 22"/>
-          <p:cNvSpPr txBox="1"/>
-          <p:nvPr/>
-        </p:nvSpPr>
-        <p:spPr>
-          <a:xfrm>
-            <a:off x="640080" y="6419088"/>
-            <a:ext cx="8869680" cy="237744"/>
-          </a:xfrm>
-          <a:prstGeom prst="rect">
-            <a:avLst/>
-          </a:prstGeom>
-          <a:noFill/>
-        </p:spPr>
-        <p:txBody>
-          <a:bodyPr wrap="square" lIns="0" rIns="0" tIns="0" bIns="0" anchor="t">
-            <a:noAutofit/>
-          </a:bodyPr>
-          <a:lstStyle/>
-          <a:p>
-            <a:pPr algn="l">
-              <a:lnSpc>
-                <a:spcPct val="115000"/>
-              </a:lnSpc>
-              <a:spcBef>
-                <a:spcPts val="0"/>
-              </a:spcBef>
-              <a:spcAft>
-                <a:spcPts val="0"/>
-              </a:spcAft>
-            </a:pPr>
-            <a:r>
-              <a:rPr sz="850" b="0" i="0">
-                <a:solidFill>
-                  <a:srgbClr val="53676D"/>
-                </a:solidFill>
-                <a:latin typeface="Segoe UI"/>
-                <a:ea typeface="Microsoft YaHei"/>
-              </a:rPr>
-              <a:t>结果来自 rectangular_demag.py 与 macrospin_results/verification.json</a:t>
-            </a:r>
-          </a:p>
-        </p:txBody>
-      </p:sp>
-      <p:sp>
-        <p:nvSpPr>
           <p:cNvPr id="24" name="TextBox 23"/>
           <p:cNvSpPr txBox="1"/>
           <p:nvPr/>
@@ -13545,7 +13061,7 @@
           <a:noFill/>
         </p:spPr>
         <p:txBody>
-          <a:bodyPr wrap="square" lIns="0" rIns="0" tIns="0" bIns="0" anchor="t">
+          <a:bodyPr wrap="square" lIns="0" tIns="0" rIns="0" bIns="0" anchor="t">
             <a:noAutofit/>
           </a:bodyPr>
           <a:lstStyle/>
@@ -13583,7 +13099,7 @@
 </file>
 
 <file path=ppt/slides/slide8.xml><?xml version="1.0" encoding="utf-8"?>
-<p:sld xmlns:a="http://schemas.openxmlformats.org/drawingml/2006/main" xmlns:p="http://schemas.openxmlformats.org/presentationml/2006/main" xmlns:r="http://schemas.openxmlformats.org/officeDocument/2006/relationships">
+<p:sld xmlns:a="http://schemas.openxmlformats.org/drawingml/2006/main" xmlns:r="http://schemas.openxmlformats.org/officeDocument/2006/relationships" xmlns:p="http://schemas.openxmlformats.org/presentationml/2006/main">
   <p:cSld>
     <p:bg>
       <p:bgPr>
@@ -13599,7 +13115,14 @@
         <p:cNvGrpSpPr/>
         <p:nvPr/>
       </p:nvGrpSpPr>
-      <p:grpSpPr/>
+      <p:grpSpPr>
+        <a:xfrm>
+          <a:off x="0" y="0"/>
+          <a:ext cx="0" cy="0"/>
+          <a:chOff x="0" y="0"/>
+          <a:chExt cx="0" cy="0"/>
+        </a:xfrm>
+      </p:grpSpPr>
       <p:sp>
         <p:nvSpPr>
           <p:cNvPr id="2" name="TextBox 1"/>
@@ -13617,7 +13140,7 @@
           <a:noFill/>
         </p:spPr>
         <p:txBody>
-          <a:bodyPr wrap="square" lIns="0" rIns="0" tIns="0" bIns="0" anchor="t">
+          <a:bodyPr wrap="square" lIns="0" tIns="0" rIns="0" bIns="0" anchor="t">
             <a:noAutofit/>
           </a:bodyPr>
           <a:lstStyle/>
@@ -13683,7 +13206,7 @@
           <a:noFill/>
         </p:spPr>
         <p:txBody>
-          <a:bodyPr wrap="square" lIns="0" rIns="0" tIns="0" bIns="0" anchor="ctr">
+          <a:bodyPr wrap="square" lIns="0" tIns="0" rIns="0" bIns="0" anchor="ctr">
             <a:noAutofit/>
           </a:bodyPr>
           <a:lstStyle/>
@@ -13739,6 +13262,7 @@
           <a:lstStyle/>
           <a:p>
             <a:pPr algn="ctr"/>
+            <a:endParaRPr/>
           </a:p>
         </p:txBody>
       </p:sp>
@@ -13759,7 +13283,7 @@
           <a:noFill/>
         </p:spPr>
         <p:txBody>
-          <a:bodyPr wrap="square" lIns="0" rIns="0" tIns="0" bIns="0" anchor="t">
+          <a:bodyPr wrap="square" lIns="0" tIns="0" rIns="0" bIns="0" anchor="t">
             <a:noAutofit/>
           </a:bodyPr>
           <a:lstStyle/>
@@ -13805,7 +13329,7 @@
           <a:noFill/>
         </p:spPr>
         <p:txBody>
-          <a:bodyPr wrap="square" lIns="0" rIns="0" tIns="0" bIns="0" anchor="t">
+          <a:bodyPr wrap="square" lIns="0" tIns="0" rIns="0" bIns="0" anchor="t">
             <a:noAutofit/>
           </a:bodyPr>
           <a:lstStyle/>
@@ -13851,7 +13375,7 @@
           <a:noFill/>
         </p:spPr>
         <p:txBody>
-          <a:bodyPr wrap="square" lIns="0" rIns="0" tIns="0" bIns="0" anchor="t">
+          <a:bodyPr wrap="square" lIns="0" tIns="0" rIns="0" bIns="0" anchor="t">
             <a:noAutofit/>
           </a:bodyPr>
           <a:lstStyle/>
@@ -13897,7 +13421,7 @@
           <a:noFill/>
         </p:spPr>
         <p:txBody>
-          <a:bodyPr wrap="square" lIns="0" rIns="0" tIns="0" bIns="0" anchor="t">
+          <a:bodyPr wrap="square" lIns="0" tIns="0" rIns="0" bIns="0" anchor="t">
             <a:noAutofit/>
           </a:bodyPr>
           <a:lstStyle/>
@@ -13943,7 +13467,7 @@
           <a:noFill/>
         </p:spPr>
         <p:txBody>
-          <a:bodyPr wrap="square" lIns="0" rIns="0" tIns="0" bIns="0" anchor="t">
+          <a:bodyPr wrap="square" lIns="0" tIns="0" rIns="0" bIns="0" anchor="t">
             <a:noAutofit/>
           </a:bodyPr>
           <a:lstStyle/>
@@ -13989,7 +13513,7 @@
           <a:noFill/>
         </p:spPr>
         <p:txBody>
-          <a:bodyPr wrap="square" lIns="0" rIns="0" tIns="0" bIns="0" anchor="t">
+          <a:bodyPr wrap="square" lIns="0" tIns="0" rIns="0" bIns="0" anchor="t">
             <a:noAutofit/>
           </a:bodyPr>
           <a:lstStyle/>
@@ -14035,7 +13559,7 @@
           <a:noFill/>
         </p:spPr>
         <p:txBody>
-          <a:bodyPr wrap="square" lIns="0" rIns="0" tIns="0" bIns="0" anchor="t">
+          <a:bodyPr wrap="square" lIns="0" tIns="0" rIns="0" bIns="0" anchor="t">
             <a:noAutofit/>
           </a:bodyPr>
           <a:lstStyle/>
@@ -14081,7 +13605,7 @@
           <a:noFill/>
         </p:spPr>
         <p:txBody>
-          <a:bodyPr wrap="square" lIns="0" rIns="0" tIns="0" bIns="0" anchor="t">
+          <a:bodyPr wrap="square" lIns="0" tIns="0" rIns="0" bIns="0" anchor="t">
             <a:noAutofit/>
           </a:bodyPr>
           <a:lstStyle/>
@@ -14127,7 +13651,7 @@
           <a:noFill/>
         </p:spPr>
         <p:txBody>
-          <a:bodyPr wrap="square" lIns="0" rIns="0" tIns="0" bIns="0" anchor="t">
+          <a:bodyPr wrap="square" lIns="0" tIns="0" rIns="0" bIns="0" anchor="t">
             <a:noAutofit/>
           </a:bodyPr>
           <a:lstStyle/>
@@ -14193,7 +13717,7 @@
           <a:noFill/>
         </p:spPr>
         <p:txBody>
-          <a:bodyPr wrap="square" lIns="0" rIns="0" tIns="0" bIns="0" anchor="t">
+          <a:bodyPr wrap="square" lIns="0" tIns="0" rIns="0" bIns="0" anchor="t">
             <a:noAutofit/>
           </a:bodyPr>
           <a:lstStyle/>
@@ -14239,7 +13763,7 @@
           <a:noFill/>
         </p:spPr>
         <p:txBody>
-          <a:bodyPr wrap="square" lIns="0" rIns="0" tIns="0" bIns="0" anchor="t">
+          <a:bodyPr wrap="square" lIns="0" tIns="0" rIns="0" bIns="0" anchor="t">
             <a:noAutofit/>
           </a:bodyPr>
           <a:lstStyle/>
@@ -14285,7 +13809,7 @@
           <a:noFill/>
         </p:spPr>
         <p:txBody>
-          <a:bodyPr wrap="square" lIns="0" rIns="0" tIns="0" bIns="0" anchor="t">
+          <a:bodyPr wrap="square" lIns="0" tIns="0" rIns="0" bIns="0" anchor="t">
             <a:noAutofit/>
           </a:bodyPr>
           <a:lstStyle/>
@@ -14345,6 +13869,7 @@
           <a:lstStyle/>
           <a:p>
             <a:pPr algn="ctr"/>
+            <a:endParaRPr/>
           </a:p>
         </p:txBody>
       </p:sp>
@@ -14365,7 +13890,7 @@
           <a:noFill/>
         </p:spPr>
         <p:txBody>
-          <a:bodyPr wrap="square" lIns="0" rIns="0" tIns="0" bIns="0" anchor="t">
+          <a:bodyPr wrap="square" lIns="0" tIns="0" rIns="0" bIns="0" anchor="t">
             <a:noAutofit/>
           </a:bodyPr>
           <a:lstStyle/>
@@ -14411,7 +13936,7 @@
           <a:noFill/>
         </p:spPr>
         <p:txBody>
-          <a:bodyPr wrap="square" lIns="0" rIns="0" tIns="0" bIns="0" anchor="t">
+          <a:bodyPr wrap="square" lIns="0" tIns="0" rIns="0" bIns="0" anchor="t">
             <a:noAutofit/>
           </a:bodyPr>
           <a:lstStyle/>
@@ -14503,7 +14028,7 @@
           <a:noFill/>
         </p:spPr>
         <p:txBody>
-          <a:bodyPr wrap="square" lIns="0" rIns="0" tIns="0" bIns="0" anchor="t">
+          <a:bodyPr wrap="square" lIns="0" tIns="0" rIns="0" bIns="0" anchor="t">
             <a:noAutofit/>
           </a:bodyPr>
           <a:lstStyle/>
@@ -14571,6 +14096,7 @@
           <a:lstStyle/>
           <a:p>
             <a:pPr algn="ctr"/>
+            <a:endParaRPr/>
           </a:p>
         </p:txBody>
       </p:sp>
@@ -14591,7 +14117,7 @@
           <a:noFill/>
         </p:spPr>
         <p:txBody>
-          <a:bodyPr wrap="square" lIns="0" rIns="0" tIns="0" bIns="0" anchor="ctr">
+          <a:bodyPr wrap="square" lIns="0" tIns="0" rIns="0" bIns="0" anchor="ctr">
             <a:noAutofit/>
           </a:bodyPr>
           <a:lstStyle/>
@@ -14637,7 +14163,7 @@
           <a:noFill/>
         </p:spPr>
         <p:txBody>
-          <a:bodyPr wrap="square" lIns="0" rIns="0" tIns="0" bIns="0" anchor="t">
+          <a:bodyPr wrap="square" lIns="0" tIns="0" rIns="0" bIns="0" anchor="t">
             <a:noAutofit/>
           </a:bodyPr>
           <a:lstStyle/>
@@ -14995,7 +14521,7 @@
 </file>
 
 <file path=ppt/theme/theme2.xml><?xml version="1.0" encoding="utf-8"?>
-<a:theme xmlns:a="http://schemas.openxmlformats.org/drawingml/2006/main" name="Office Theme">
+<a:theme xmlns:a="http://schemas.openxmlformats.org/drawingml/2006/main" name="Office 主题​​">
   <a:themeElements>
     <a:clrScheme name="Office">
       <a:dk1>
@@ -15005,44 +14531,44 @@
         <a:sysClr val="window" lastClr="FFFFFF"/>
       </a:lt1>
       <a:dk2>
-        <a:srgbClr val="1F497D"/>
+        <a:srgbClr val="0E2841"/>
       </a:dk2>
       <a:lt2>
-        <a:srgbClr val="EEECE1"/>
+        <a:srgbClr val="E8E8E8"/>
       </a:lt2>
       <a:accent1>
-        <a:srgbClr val="4F81BD"/>
+        <a:srgbClr val="156082"/>
       </a:accent1>
       <a:accent2>
-        <a:srgbClr val="C0504D"/>
+        <a:srgbClr val="E97132"/>
       </a:accent2>
       <a:accent3>
-        <a:srgbClr val="9BBB59"/>
+        <a:srgbClr val="196B24"/>
       </a:accent3>
       <a:accent4>
-        <a:srgbClr val="8064A2"/>
+        <a:srgbClr val="0F9ED5"/>
       </a:accent4>
       <a:accent5>
-        <a:srgbClr val="4BACC6"/>
+        <a:srgbClr val="A02B93"/>
       </a:accent5>
       <a:accent6>
-        <a:srgbClr val="F79646"/>
+        <a:srgbClr val="4EA72E"/>
       </a:accent6>
       <a:hlink>
-        <a:srgbClr val="0000FF"/>
+        <a:srgbClr val="467886"/>
       </a:hlink>
       <a:folHlink>
-        <a:srgbClr val="800080"/>
+        <a:srgbClr val="96607D"/>
       </a:folHlink>
     </a:clrScheme>
     <a:fontScheme name="Office">
       <a:majorFont>
-        <a:latin typeface="Calibri"/>
+        <a:latin typeface="等线 Light" panose="02110004020202020204"/>
         <a:ea typeface=""/>
         <a:cs typeface=""/>
-        <a:font script="Jpan" typeface="ＭＳ Ｐゴシック"/>
+        <a:font script="Jpan" typeface="游ゴシック Light"/>
         <a:font script="Hang" typeface="맑은 고딕"/>
-        <a:font script="Hans" typeface="宋体"/>
+        <a:font script="Hans" typeface="等线 Light"/>
         <a:font script="Hant" typeface="新細明體"/>
         <a:font script="Arab" typeface="Times New Roman"/>
         <a:font script="Hebr" typeface="Times New Roman"/>
@@ -15070,14 +14596,31 @@
         <a:font script="Viet" typeface="Times New Roman"/>
         <a:font script="Uigh" typeface="Microsoft Uighur"/>
         <a:font script="Geor" typeface="Sylfaen"/>
+        <a:font script="Armn" typeface="Arial"/>
+        <a:font script="Bugi" typeface="Leelawadee UI"/>
+        <a:font script="Bopo" typeface="Microsoft JhengHei"/>
+        <a:font script="Java" typeface="Javanese Text"/>
+        <a:font script="Lisu" typeface="Segoe UI"/>
+        <a:font script="Mymr" typeface="Myanmar Text"/>
+        <a:font script="Nkoo" typeface="Ebrima"/>
+        <a:font script="Olck" typeface="Nirmala UI"/>
+        <a:font script="Osma" typeface="Ebrima"/>
+        <a:font script="Phag" typeface="Phagspa"/>
+        <a:font script="Syrn" typeface="Estrangelo Edessa"/>
+        <a:font script="Syrj" typeface="Estrangelo Edessa"/>
+        <a:font script="Syre" typeface="Estrangelo Edessa"/>
+        <a:font script="Sora" typeface="Nirmala UI"/>
+        <a:font script="Tale" typeface="Microsoft Tai Le"/>
+        <a:font script="Talu" typeface="Microsoft New Tai Lue"/>
+        <a:font script="Tfng" typeface="Ebrima"/>
       </a:majorFont>
       <a:minorFont>
-        <a:latin typeface="Calibri"/>
+        <a:latin typeface="等线" panose="02110004020202020204"/>
         <a:ea typeface=""/>
         <a:cs typeface=""/>
-        <a:font script="Jpan" typeface="ＭＳ Ｐゴシック"/>
+        <a:font script="Jpan" typeface="游ゴシック"/>
         <a:font script="Hang" typeface="맑은 고딕"/>
-        <a:font script="Hans" typeface="宋体"/>
+        <a:font script="Hans" typeface="等线"/>
         <a:font script="Hant" typeface="新細明體"/>
         <a:font script="Arab" typeface="Arial"/>
         <a:font script="Hebr" typeface="Arial"/>
@@ -15105,6 +14648,23 @@
         <a:font script="Viet" typeface="Arial"/>
         <a:font script="Uigh" typeface="Microsoft Uighur"/>
         <a:font script="Geor" typeface="Sylfaen"/>
+        <a:font script="Armn" typeface="Arial"/>
+        <a:font script="Bugi" typeface="Leelawadee UI"/>
+        <a:font script="Bopo" typeface="Microsoft JhengHei"/>
+        <a:font script="Java" typeface="Javanese Text"/>
+        <a:font script="Lisu" typeface="Segoe UI"/>
+        <a:font script="Mymr" typeface="Myanmar Text"/>
+        <a:font script="Nkoo" typeface="Ebrima"/>
+        <a:font script="Olck" typeface="Nirmala UI"/>
+        <a:font script="Osma" typeface="Ebrima"/>
+        <a:font script="Phag" typeface="Phagspa"/>
+        <a:font script="Syrn" typeface="Estrangelo Edessa"/>
+        <a:font script="Syrj" typeface="Estrangelo Edessa"/>
+        <a:font script="Syre" typeface="Estrangelo Edessa"/>
+        <a:font script="Sora" typeface="Nirmala UI"/>
+        <a:font script="Tale" typeface="Microsoft Tai Le"/>
+        <a:font script="Talu" typeface="Microsoft New Tai Lue"/>
+        <a:font script="Tfng" typeface="Ebrima"/>
       </a:minorFont>
     </a:fontScheme>
     <a:fmtScheme name="Office">
@@ -15116,180 +14676,136 @@
           <a:gsLst>
             <a:gs pos="0">
               <a:schemeClr val="phClr">
-                <a:tint val="50000"/>
-                <a:satMod val="300000"/>
+                <a:lumMod val="110000"/>
+                <a:satMod val="105000"/>
+                <a:tint val="67000"/>
               </a:schemeClr>
             </a:gs>
-            <a:gs pos="35000">
+            <a:gs pos="50000">
               <a:schemeClr val="phClr">
-                <a:tint val="37000"/>
-                <a:satMod val="300000"/>
+                <a:lumMod val="105000"/>
+                <a:satMod val="103000"/>
+                <a:tint val="73000"/>
               </a:schemeClr>
             </a:gs>
             <a:gs pos="100000">
               <a:schemeClr val="phClr">
-                <a:tint val="15000"/>
-                <a:satMod val="350000"/>
+                <a:lumMod val="105000"/>
+                <a:satMod val="109000"/>
+                <a:tint val="81000"/>
               </a:schemeClr>
             </a:gs>
           </a:gsLst>
-          <a:lin ang="16200000" scaled="1"/>
+          <a:lin ang="5400000" scaled="0"/>
         </a:gradFill>
         <a:gradFill rotWithShape="1">
           <a:gsLst>
             <a:gs pos="0">
               <a:schemeClr val="phClr">
-                <a:tint val="100000"/>
+                <a:satMod val="103000"/>
+                <a:lumMod val="102000"/>
+                <a:tint val="94000"/>
+              </a:schemeClr>
+            </a:gs>
+            <a:gs pos="50000">
+              <a:schemeClr val="phClr">
+                <a:satMod val="110000"/>
+                <a:lumMod val="100000"/>
                 <a:shade val="100000"/>
-                <a:satMod val="130000"/>
               </a:schemeClr>
             </a:gs>
             <a:gs pos="100000">
               <a:schemeClr val="phClr">
-                <a:tint val="50000"/>
-                <a:shade val="100000"/>
-                <a:satMod val="350000"/>
+                <a:lumMod val="99000"/>
+                <a:satMod val="120000"/>
+                <a:shade val="78000"/>
               </a:schemeClr>
             </a:gs>
           </a:gsLst>
-          <a:lin ang="16200000" scaled="0"/>
+          <a:lin ang="5400000" scaled="0"/>
         </a:gradFill>
       </a:fillStyleLst>
       <a:lnStyleLst>
-        <a:ln w="9525" cap="flat" cmpd="sng" algn="ctr">
+        <a:ln w="12700" cap="flat" cmpd="sng" algn="ctr">
           <a:solidFill>
-            <a:schemeClr val="phClr">
-              <a:shade val="95000"/>
-              <a:satMod val="105000"/>
-            </a:schemeClr>
+            <a:schemeClr val="phClr"/>
           </a:solidFill>
           <a:prstDash val="solid"/>
+          <a:miter lim="800000"/>
+        </a:ln>
+        <a:ln w="19050" cap="flat" cmpd="sng" algn="ctr">
+          <a:solidFill>
+            <a:schemeClr val="phClr"/>
+          </a:solidFill>
+          <a:prstDash val="solid"/>
+          <a:miter lim="800000"/>
         </a:ln>
         <a:ln w="25400" cap="flat" cmpd="sng" algn="ctr">
           <a:solidFill>
             <a:schemeClr val="phClr"/>
           </a:solidFill>
           <a:prstDash val="solid"/>
-        </a:ln>
-        <a:ln w="38100" cap="flat" cmpd="sng" algn="ctr">
-          <a:solidFill>
-            <a:schemeClr val="phClr"/>
-          </a:solidFill>
-          <a:prstDash val="solid"/>
+          <a:miter lim="800000"/>
         </a:ln>
       </a:lnStyleLst>
       <a:effectStyleLst>
         <a:effectStyle>
+          <a:effectLst/>
+        </a:effectStyle>
+        <a:effectStyle>
+          <a:effectLst/>
+        </a:effectStyle>
+        <a:effectStyle>
           <a:effectLst>
-            <a:outerShdw blurRad="40000" dist="20000" dir="5400000" rotWithShape="0">
+            <a:outerShdw blurRad="57150" dist="19050" dir="5400000" algn="ctr" rotWithShape="0">
               <a:srgbClr val="000000">
-                <a:alpha val="38000"/>
+                <a:alpha val="63000"/>
               </a:srgbClr>
             </a:outerShdw>
           </a:effectLst>
-        </a:effectStyle>
-        <a:effectStyle>
-          <a:effectLst>
-            <a:outerShdw blurRad="40000" dist="23000" dir="5400000" rotWithShape="0">
-              <a:srgbClr val="000000">
-                <a:alpha val="35000"/>
-              </a:srgbClr>
-            </a:outerShdw>
-          </a:effectLst>
-        </a:effectStyle>
-        <a:effectStyle>
-          <a:effectLst>
-            <a:outerShdw blurRad="40000" dist="23000" dir="5400000" rotWithShape="0">
-              <a:srgbClr val="000000">
-                <a:alpha val="35000"/>
-              </a:srgbClr>
-            </a:outerShdw>
-          </a:effectLst>
-          <a:scene3d>
-            <a:camera prst="orthographicFront">
-              <a:rot lat="0" lon="0" rev="0"/>
-            </a:camera>
-            <a:lightRig rig="threePt" dir="t">
-              <a:rot lat="0" lon="0" rev="1200000"/>
-            </a:lightRig>
-          </a:scene3d>
-          <a:sp3d>
-            <a:bevelT w="63500" h="25400"/>
-          </a:sp3d>
         </a:effectStyle>
       </a:effectStyleLst>
       <a:bgFillStyleLst>
         <a:solidFill>
           <a:schemeClr val="phClr"/>
         </a:solidFill>
+        <a:solidFill>
+          <a:schemeClr val="phClr">
+            <a:tint val="95000"/>
+            <a:satMod val="170000"/>
+          </a:schemeClr>
+        </a:solidFill>
         <a:gradFill rotWithShape="1">
           <a:gsLst>
             <a:gs pos="0">
               <a:schemeClr val="phClr">
-                <a:tint val="40000"/>
-                <a:satMod val="350000"/>
+                <a:tint val="93000"/>
+                <a:satMod val="150000"/>
+                <a:shade val="98000"/>
+                <a:lumMod val="102000"/>
               </a:schemeClr>
             </a:gs>
-            <a:gs pos="40000">
+            <a:gs pos="50000">
               <a:schemeClr val="phClr">
-                <a:tint val="45000"/>
-                <a:shade val="99000"/>
-                <a:satMod val="350000"/>
+                <a:tint val="98000"/>
+                <a:satMod val="130000"/>
+                <a:shade val="90000"/>
+                <a:lumMod val="103000"/>
               </a:schemeClr>
             </a:gs>
             <a:gs pos="100000">
               <a:schemeClr val="phClr">
-                <a:shade val="20000"/>
-                <a:satMod val="255000"/>
+                <a:shade val="63000"/>
+                <a:satMod val="120000"/>
               </a:schemeClr>
             </a:gs>
           </a:gsLst>
-          <a:path path="circle">
-            <a:fillToRect l="50000" t="-80000" r="50000" b="180000"/>
-          </a:path>
-        </a:gradFill>
-        <a:gradFill rotWithShape="1">
-          <a:gsLst>
-            <a:gs pos="0">
-              <a:schemeClr val="phClr">
-                <a:tint val="80000"/>
-                <a:satMod val="300000"/>
-              </a:schemeClr>
-            </a:gs>
-            <a:gs pos="100000">
-              <a:schemeClr val="phClr">
-                <a:shade val="30000"/>
-                <a:satMod val="200000"/>
-              </a:schemeClr>
-            </a:gs>
-          </a:gsLst>
-          <a:path path="circle">
-            <a:fillToRect l="50000" t="50000" r="50000" b="50000"/>
-          </a:path>
+          <a:lin ang="5400000" scaled="0"/>
         </a:gradFill>
       </a:bgFillStyleLst>
     </a:fmtScheme>
   </a:themeElements>
   <a:objectDefaults>
-    <a:spDef>
-      <a:spPr/>
-      <a:bodyPr/>
-      <a:lstStyle/>
-      <a:style>
-        <a:lnRef idx="1">
-          <a:schemeClr val="accent1"/>
-        </a:lnRef>
-        <a:fillRef idx="3">
-          <a:schemeClr val="accent1"/>
-        </a:fillRef>
-        <a:effectRef idx="2">
-          <a:schemeClr val="accent1"/>
-        </a:effectRef>
-        <a:fontRef idx="minor">
-          <a:schemeClr val="lt1"/>
-        </a:fontRef>
-      </a:style>
-    </a:spDef>
     <a:lnDef>
       <a:spPr/>
       <a:bodyPr/>
@@ -15311,5 +14827,10 @@
     </a:lnDef>
   </a:objectDefaults>
   <a:extraClrSchemeLst/>
+  <a:extLst>
+    <a:ext uri="{05A4C25C-085E-4340-85A3-A5531E510DB2}">
+      <thm15:themeFamily xmlns:thm15="http://schemas.microsoft.com/office/thememl/2012/main" name="Office Theme" id="{2E142A2C-CD16-42D6-873A-C26D2A0506FA}" vid="{1BDDFF52-6CD6-40A5-AB3C-68EB2F1E4D0A}"/>
+    </a:ext>
+  </a:extLst>
 </a:theme>
 </file>
--- a/汇报PPT/1.pptx
+++ b/汇报PPT/1.pptx
@@ -4,20 +4,17 @@
   <p:sldMasterIdLst>
     <p:sldMasterId id="2147483648" r:id="rId1"/>
   </p:sldMasterIdLst>
-  <p:notesMasterIdLst>
-    <p:notesMasterId r:id="rId10"/>
-  </p:notesMasterIdLst>
   <p:sldIdLst>
-    <p:sldId id="256" r:id="rId2"/>
-    <p:sldId id="257" r:id="rId3"/>
-    <p:sldId id="258" r:id="rId4"/>
-    <p:sldId id="259" r:id="rId5"/>
-    <p:sldId id="260" r:id="rId6"/>
-    <p:sldId id="261" r:id="rId7"/>
-    <p:sldId id="262" r:id="rId8"/>
-    <p:sldId id="263" r:id="rId9"/>
+    <p:sldId id="256" r:id="rId7"/>
+    <p:sldId id="257" r:id="rId9"/>
+    <p:sldId id="258" r:id="rId10"/>
+    <p:sldId id="259" r:id="rId11"/>
+    <p:sldId id="260" r:id="rId12"/>
+    <p:sldId id="261" r:id="rId13"/>
+    <p:sldId id="262" r:id="rId14"/>
+    <p:sldId id="263" r:id="rId15"/>
   </p:sldIdLst>
-  <p:sldSz cx="12192000" cy="6858000"/>
+  <p:sldSz cx="12191695" cy="6858000" type="screen4x3"/>
   <p:notesSz cx="6858000" cy="9144000"/>
   <p:defaultTextStyle>
     <a:defPPr>
@@ -114,27 +111,11 @@
       </a:defRPr>
     </a:lvl9pPr>
   </p:defaultTextStyle>
-  <p:extLst>
-    <p:ext uri="{EFAFB233-063F-42B5-8137-9DF3F51BA10A}">
-      <p15:sldGuideLst xmlns:p15="http://schemas.microsoft.com/office/powerpoint/2012/main">
-        <p15:guide id="1" orient="horz" pos="2160">
-          <p15:clr>
-            <a:srgbClr val="A4A3A4"/>
-          </p15:clr>
-        </p15:guide>
-        <p15:guide id="2" pos="2880">
-          <p15:clr>
-            <a:srgbClr val="A4A3A4"/>
-          </p15:clr>
-        </p15:guide>
-      </p15:sldGuideLst>
-    </p:ext>
-  </p:extLst>
 </p:presentation>
 </file>
 
 <file path=ppt/notesMasters/notesMaster1.xml><?xml version="1.0" encoding="utf-8"?>
-<p:notesMaster xmlns:a="http://schemas.openxmlformats.org/drawingml/2006/main" xmlns:r="http://schemas.openxmlformats.org/officeDocument/2006/relationships" xmlns:p="http://schemas.openxmlformats.org/presentationml/2006/main">
+<p:notesMaster xmlns:a="http://schemas.openxmlformats.org/drawingml/2006/main" xmlns:p="http://schemas.openxmlformats.org/presentationml/2006/main" xmlns:r="http://schemas.openxmlformats.org/officeDocument/2006/relationships">
   <p:cSld>
     <p:bg>
       <p:bgRef idx="1001">
@@ -155,16 +136,241 @@
           <a:chExt cx="0" cy="0"/>
         </a:xfrm>
       </p:grpSpPr>
+      <p:sp>
+        <p:nvSpPr>
+          <p:cNvPr id="2" name="Header Placeholder 1"/>
+          <p:cNvSpPr>
+            <a:spLocks noGrp="1"/>
+          </p:cNvSpPr>
+          <p:nvPr>
+            <p:ph type="hdr" sz="quarter"/>
+          </p:nvPr>
+        </p:nvSpPr>
+        <p:spPr>
+          <a:xfrm>
+            <a:off x="0" y="0"/>
+            <a:ext cx="2971800" cy="457200"/>
+          </a:xfrm>
+          <a:prstGeom prst="rect">
+            <a:avLst/>
+          </a:prstGeom>
+        </p:spPr>
+        <p:txBody>
+          <a:bodyPr vert="horz" lIns="91440" tIns="45720" rIns="91440" bIns="45720" rtlCol="0"/>
+          <a:lstStyle>
+            <a:lvl1pPr algn="l">
+              <a:defRPr sz="1200"/>
+            </a:lvl1pPr>
+          </a:lstStyle>
+          <a:p>
+            <a:endParaRPr lang="en-US"/>
+          </a:p>
+        </p:txBody>
+      </p:sp>
+      <p:sp>
+        <p:nvSpPr>
+          <p:cNvPr id="3" name="Date Placeholder 2"/>
+          <p:cNvSpPr>
+            <a:spLocks noGrp="1"/>
+          </p:cNvSpPr>
+          <p:nvPr>
+            <p:ph type="dt" idx="1"/>
+          </p:nvPr>
+        </p:nvSpPr>
+        <p:spPr>
+          <a:xfrm>
+            <a:off x="3884613" y="0"/>
+            <a:ext cx="2971800" cy="457200"/>
+          </a:xfrm>
+          <a:prstGeom prst="rect">
+            <a:avLst/>
+          </a:prstGeom>
+        </p:spPr>
+        <p:txBody>
+          <a:bodyPr vert="horz" lIns="91440" tIns="45720" rIns="91440" bIns="45720" rtlCol="0"/>
+          <a:lstStyle>
+            <a:lvl1pPr algn="r">
+              <a:defRPr sz="1200"/>
+            </a:lvl1pPr>
+          </a:lstStyle>
+          <a:p>
+            <a:fld id="{0F89C1C7-3DCD-1040-A9CF-14679D8B5DDD}" type="datetimeFigureOut">
+              <a:rPr lang="en-US" smtClean="0"/>
+              <a:t>10/17/16</a:t>
+            </a:fld>
+            <a:endParaRPr lang="en-US"/>
+          </a:p>
+        </p:txBody>
+      </p:sp>
+      <p:sp>
+        <p:nvSpPr>
+          <p:cNvPr id="4" name="Slide Image Placeholder 3"/>
+          <p:cNvSpPr>
+            <a:spLocks noGrp="1" noRot="1" noChangeAspect="1"/>
+          </p:cNvSpPr>
+          <p:nvPr>
+            <p:ph type="sldImg" idx="2"/>
+          </p:nvPr>
+        </p:nvSpPr>
+        <p:spPr>
+          <a:xfrm>
+            <a:off x="1143000" y="685800"/>
+            <a:ext cx="4572000" cy="3429000"/>
+          </a:xfrm>
+          <a:prstGeom prst="rect">
+            <a:avLst/>
+          </a:prstGeom>
+          <a:noFill/>
+          <a:ln w="12700">
+            <a:solidFill>
+              <a:prstClr val="black"/>
+            </a:solidFill>
+          </a:ln>
+        </p:spPr>
+        <p:txBody>
+          <a:bodyPr vert="horz" lIns="91440" tIns="45720" rIns="91440" bIns="45720" rtlCol="0" anchor="ctr"/>
+          <a:lstStyle/>
+          <a:p>
+            <a:endParaRPr lang="en-US"/>
+          </a:p>
+        </p:txBody>
+      </p:sp>
+      <p:sp>
+        <p:nvSpPr>
+          <p:cNvPr id="5" name="Notes Placeholder 4"/>
+          <p:cNvSpPr>
+            <a:spLocks noGrp="1"/>
+          </p:cNvSpPr>
+          <p:nvPr>
+            <p:ph type="body" sz="quarter" idx="3"/>
+          </p:nvPr>
+        </p:nvSpPr>
+        <p:spPr>
+          <a:xfrm>
+            <a:off x="685800" y="4343400"/>
+            <a:ext cx="5486400" cy="4114800"/>
+          </a:xfrm>
+          <a:prstGeom prst="rect">
+            <a:avLst/>
+          </a:prstGeom>
+        </p:spPr>
+        <p:txBody>
+          <a:bodyPr vert="horz" lIns="91440" tIns="45720" rIns="91440" bIns="45720" rtlCol="0"/>
+          <a:lstStyle/>
+          <a:p>
+            <a:pPr lvl="0"/>
+            <a:r>
+              <a:rPr lang="en-US" smtClean="0"/>
+              <a:t>Click to edit Master text styles</a:t>
+            </a:r>
+          </a:p>
+          <a:p>
+            <a:pPr lvl="1"/>
+            <a:r>
+              <a:rPr lang="en-US" smtClean="0"/>
+              <a:t>Second level</a:t>
+            </a:r>
+          </a:p>
+          <a:p>
+            <a:pPr lvl="2"/>
+            <a:r>
+              <a:rPr lang="en-US" smtClean="0"/>
+              <a:t>Third level</a:t>
+            </a:r>
+          </a:p>
+          <a:p>
+            <a:pPr lvl="3"/>
+            <a:r>
+              <a:rPr lang="en-US" smtClean="0"/>
+              <a:t>Fourth level</a:t>
+            </a:r>
+          </a:p>
+          <a:p>
+            <a:pPr lvl="4"/>
+            <a:r>
+              <a:rPr lang="en-US" smtClean="0"/>
+              <a:t>Fifth level</a:t>
+            </a:r>
+            <a:endParaRPr lang="en-US"/>
+          </a:p>
+        </p:txBody>
+      </p:sp>
+      <p:sp>
+        <p:nvSpPr>
+          <p:cNvPr id="6" name="Footer Placeholder 5"/>
+          <p:cNvSpPr>
+            <a:spLocks noGrp="1"/>
+          </p:cNvSpPr>
+          <p:nvPr>
+            <p:ph type="ftr" sz="quarter" idx="4"/>
+          </p:nvPr>
+        </p:nvSpPr>
+        <p:spPr>
+          <a:xfrm>
+            <a:off x="0" y="8685213"/>
+            <a:ext cx="2971800" cy="457200"/>
+          </a:xfrm>
+          <a:prstGeom prst="rect">
+            <a:avLst/>
+          </a:prstGeom>
+        </p:spPr>
+        <p:txBody>
+          <a:bodyPr vert="horz" lIns="91440" tIns="45720" rIns="91440" bIns="45720" rtlCol="0" anchor="b"/>
+          <a:lstStyle>
+            <a:lvl1pPr algn="l">
+              <a:defRPr sz="1200"/>
+            </a:lvl1pPr>
+          </a:lstStyle>
+          <a:p>
+            <a:endParaRPr lang="en-US"/>
+          </a:p>
+        </p:txBody>
+      </p:sp>
+      <p:sp>
+        <p:nvSpPr>
+          <p:cNvPr id="7" name="Slide Number Placeholder 6"/>
+          <p:cNvSpPr>
+            <a:spLocks noGrp="1"/>
+          </p:cNvSpPr>
+          <p:nvPr>
+            <p:ph type="sldNum" sz="quarter" idx="5"/>
+          </p:nvPr>
+        </p:nvSpPr>
+        <p:spPr>
+          <a:xfrm>
+            <a:off x="3884613" y="8685213"/>
+            <a:ext cx="2971800" cy="457200"/>
+          </a:xfrm>
+          <a:prstGeom prst="rect">
+            <a:avLst/>
+          </a:prstGeom>
+        </p:spPr>
+        <p:txBody>
+          <a:bodyPr vert="horz" lIns="91440" tIns="45720" rIns="91440" bIns="45720" rtlCol="0" anchor="b"/>
+          <a:lstStyle>
+            <a:lvl1pPr algn="r">
+              <a:defRPr sz="1200"/>
+            </a:lvl1pPr>
+          </a:lstStyle>
+          <a:p>
+            <a:fld id="{BB5E49A5-4136-284D-997B-48E1D791AD67}" type="slidenum">
+              <a:rPr lang="en-US" smtClean="0"/>
+              <a:t>‹#›</a:t>
+            </a:fld>
+            <a:endParaRPr lang="en-US"/>
+          </a:p>
+        </p:txBody>
+      </p:sp>
     </p:spTree>
     <p:extLst>
       <p:ext uri="{BB962C8B-B14F-4D97-AF65-F5344CB8AC3E}">
-        <p14:creationId xmlns:p14="http://schemas.microsoft.com/office/powerpoint/2010/main" val="843602089"/>
+        <p14:creationId xmlns:p14="http://schemas.microsoft.com/office/powerpoint/2010/main" val="2623252185"/>
       </p:ext>
     </p:extLst>
   </p:cSld>
   <p:clrMap bg1="lt1" tx1="dk1" bg2="lt2" tx2="dk2" accent1="accent1" accent2="accent2" accent3="accent3" accent4="accent4" accent5="accent5" accent6="accent6" hlink="hlink" folHlink="folHlink"/>
   <p:notesStyle>
-    <a:lvl1pPr marL="0" algn="l" defTabSz="914400" rtl="0" eaLnBrk="1" latinLnBrk="0" hangingPunct="1">
+    <a:lvl1pPr marL="0" algn="l" defTabSz="457200" rtl="0" eaLnBrk="1" latinLnBrk="0" hangingPunct="1">
       <a:defRPr sz="1200" kern="1200">
         <a:solidFill>
           <a:schemeClr val="tx1"/>
@@ -174,7 +380,7 @@
         <a:cs typeface="+mn-cs"/>
       </a:defRPr>
     </a:lvl1pPr>
-    <a:lvl2pPr marL="457200" algn="l" defTabSz="914400" rtl="0" eaLnBrk="1" latinLnBrk="0" hangingPunct="1">
+    <a:lvl2pPr marL="457200" algn="l" defTabSz="457200" rtl="0" eaLnBrk="1" latinLnBrk="0" hangingPunct="1">
       <a:defRPr sz="1200" kern="1200">
         <a:solidFill>
           <a:schemeClr val="tx1"/>
@@ -184,7 +390,7 @@
         <a:cs typeface="+mn-cs"/>
       </a:defRPr>
     </a:lvl2pPr>
-    <a:lvl3pPr marL="914400" algn="l" defTabSz="914400" rtl="0" eaLnBrk="1" latinLnBrk="0" hangingPunct="1">
+    <a:lvl3pPr marL="914400" algn="l" defTabSz="457200" rtl="0" eaLnBrk="1" latinLnBrk="0" hangingPunct="1">
       <a:defRPr sz="1200" kern="1200">
         <a:solidFill>
           <a:schemeClr val="tx1"/>
@@ -194,7 +400,7 @@
         <a:cs typeface="+mn-cs"/>
       </a:defRPr>
     </a:lvl3pPr>
-    <a:lvl4pPr marL="1371600" algn="l" defTabSz="914400" rtl="0" eaLnBrk="1" latinLnBrk="0" hangingPunct="1">
+    <a:lvl4pPr marL="1371600" algn="l" defTabSz="457200" rtl="0" eaLnBrk="1" latinLnBrk="0" hangingPunct="1">
       <a:defRPr sz="1200" kern="1200">
         <a:solidFill>
           <a:schemeClr val="tx1"/>
@@ -204,7 +410,7 @@
         <a:cs typeface="+mn-cs"/>
       </a:defRPr>
     </a:lvl4pPr>
-    <a:lvl5pPr marL="1828800" algn="l" defTabSz="914400" rtl="0" eaLnBrk="1" latinLnBrk="0" hangingPunct="1">
+    <a:lvl5pPr marL="1828800" algn="l" defTabSz="457200" rtl="0" eaLnBrk="1" latinLnBrk="0" hangingPunct="1">
       <a:defRPr sz="1200" kern="1200">
         <a:solidFill>
           <a:schemeClr val="tx1"/>
@@ -214,7 +420,7 @@
         <a:cs typeface="+mn-cs"/>
       </a:defRPr>
     </a:lvl5pPr>
-    <a:lvl6pPr marL="2286000" algn="l" defTabSz="914400" rtl="0" eaLnBrk="1" latinLnBrk="0" hangingPunct="1">
+    <a:lvl6pPr marL="2286000" algn="l" defTabSz="457200" rtl="0" eaLnBrk="1" latinLnBrk="0" hangingPunct="1">
       <a:defRPr sz="1200" kern="1200">
         <a:solidFill>
           <a:schemeClr val="tx1"/>
@@ -224,7 +430,7 @@
         <a:cs typeface="+mn-cs"/>
       </a:defRPr>
     </a:lvl6pPr>
-    <a:lvl7pPr marL="2743200" algn="l" defTabSz="914400" rtl="0" eaLnBrk="1" latinLnBrk="0" hangingPunct="1">
+    <a:lvl7pPr marL="2743200" algn="l" defTabSz="457200" rtl="0" eaLnBrk="1" latinLnBrk="0" hangingPunct="1">
       <a:defRPr sz="1200" kern="1200">
         <a:solidFill>
           <a:schemeClr val="tx1"/>
@@ -234,7 +440,7 @@
         <a:cs typeface="+mn-cs"/>
       </a:defRPr>
     </a:lvl7pPr>
-    <a:lvl8pPr marL="3200400" algn="l" defTabSz="914400" rtl="0" eaLnBrk="1" latinLnBrk="0" hangingPunct="1">
+    <a:lvl8pPr marL="3200400" algn="l" defTabSz="457200" rtl="0" eaLnBrk="1" latinLnBrk="0" hangingPunct="1">
       <a:defRPr sz="1200" kern="1200">
         <a:solidFill>
           <a:schemeClr val="tx1"/>
@@ -244,7 +450,7 @@
         <a:cs typeface="+mn-cs"/>
       </a:defRPr>
     </a:lvl8pPr>
-    <a:lvl9pPr marL="3657600" algn="l" defTabSz="914400" rtl="0" eaLnBrk="1" latinLnBrk="0" hangingPunct="1">
+    <a:lvl9pPr marL="3657600" algn="l" defTabSz="457200" rtl="0" eaLnBrk="1" latinLnBrk="0" hangingPunct="1">
       <a:defRPr sz="1200" kern="1200">
         <a:solidFill>
           <a:schemeClr val="tx1"/>
@@ -259,7 +465,7 @@
 </file>
 
 <file path=ppt/notesSlides/notesSlide1.xml><?xml version="1.0" encoding="utf-8"?>
-<p:notes xmlns:a="http://schemas.openxmlformats.org/drawingml/2006/main" xmlns:r="http://schemas.openxmlformats.org/officeDocument/2006/relationships" xmlns:p="http://schemas.openxmlformats.org/presentationml/2006/main">
+<p:notes xmlns:a="http://schemas.openxmlformats.org/drawingml/2006/main" xmlns:p="http://schemas.openxmlformats.org/presentationml/2006/main" xmlns:r="http://schemas.openxmlformats.org/officeDocument/2006/relationships">
   <p:cSld>
     <p:spTree>
       <p:nvGrpSpPr>
@@ -279,7 +485,7 @@
         <p:nvSpPr>
           <p:cNvPr id="2" name="Slide Image Placeholder 1"/>
           <p:cNvSpPr>
-            <a:spLocks noGrp="1" noRot="1" noChangeAspect="1"/>
+            <a:spLocks noGrp="1"/>
           </p:cNvSpPr>
           <p:nvPr>
             <p:ph type="sldImg" idx="2"/>
@@ -294,7 +500,7 @@
             <a:spLocks noGrp="1"/>
           </p:cNvSpPr>
           <p:nvPr>
-            <p:ph type="body" sz="quarter" idx="3"/>
+            <p:ph type="body" idx="3" sz="quarter"/>
           </p:nvPr>
         </p:nvSpPr>
         <p:spPr/>
@@ -315,7 +521,7 @@
             <a:spLocks noGrp="1"/>
           </p:cNvSpPr>
           <p:nvPr>
-            <p:ph type="sldNum" sz="quarter" idx="5"/>
+            <p:ph type="sldNum" idx="5" sz="quarter"/>
           </p:nvPr>
         </p:nvSpPr>
         <p:spPr/>
@@ -329,7 +535,7 @@
 </file>
 
 <file path=ppt/notesSlides/notesSlide2.xml><?xml version="1.0" encoding="utf-8"?>
-<p:notes xmlns:a="http://schemas.openxmlformats.org/drawingml/2006/main" xmlns:r="http://schemas.openxmlformats.org/officeDocument/2006/relationships" xmlns:p="http://schemas.openxmlformats.org/presentationml/2006/main">
+<p:notes xmlns:a="http://schemas.openxmlformats.org/drawingml/2006/main" xmlns:p="http://schemas.openxmlformats.org/presentationml/2006/main" xmlns:r="http://schemas.openxmlformats.org/officeDocument/2006/relationships">
   <p:cSld>
     <p:spTree>
       <p:nvGrpSpPr>
@@ -349,7 +555,7 @@
         <p:nvSpPr>
           <p:cNvPr id="2" name="Slide Image Placeholder 1"/>
           <p:cNvSpPr>
-            <a:spLocks noGrp="1" noRot="1" noChangeAspect="1"/>
+            <a:spLocks noGrp="1"/>
           </p:cNvSpPr>
           <p:nvPr>
             <p:ph type="sldImg" idx="2"/>
@@ -364,7 +570,7 @@
             <a:spLocks noGrp="1"/>
           </p:cNvSpPr>
           <p:nvPr>
-            <p:ph type="body" sz="quarter" idx="3"/>
+            <p:ph type="body" idx="3" sz="quarter"/>
           </p:nvPr>
         </p:nvSpPr>
         <p:spPr/>
@@ -385,7 +591,7 @@
             <a:spLocks noGrp="1"/>
           </p:cNvSpPr>
           <p:nvPr>
-            <p:ph type="sldNum" sz="quarter" idx="5"/>
+            <p:ph type="sldNum" idx="5" sz="quarter"/>
           </p:nvPr>
         </p:nvSpPr>
         <p:spPr/>
@@ -399,7 +605,7 @@
 </file>
 
 <file path=ppt/notesSlides/notesSlide3.xml><?xml version="1.0" encoding="utf-8"?>
-<p:notes xmlns:a="http://schemas.openxmlformats.org/drawingml/2006/main" xmlns:r="http://schemas.openxmlformats.org/officeDocument/2006/relationships" xmlns:p="http://schemas.openxmlformats.org/presentationml/2006/main">
+<p:notes xmlns:a="http://schemas.openxmlformats.org/drawingml/2006/main" xmlns:p="http://schemas.openxmlformats.org/presentationml/2006/main" xmlns:r="http://schemas.openxmlformats.org/officeDocument/2006/relationships">
   <p:cSld>
     <p:spTree>
       <p:nvGrpSpPr>
@@ -419,7 +625,7 @@
         <p:nvSpPr>
           <p:cNvPr id="2" name="Slide Image Placeholder 1"/>
           <p:cNvSpPr>
-            <a:spLocks noGrp="1" noRot="1" noChangeAspect="1"/>
+            <a:spLocks noGrp="1"/>
           </p:cNvSpPr>
           <p:nvPr>
             <p:ph type="sldImg" idx="2"/>
@@ -434,7 +640,7 @@
             <a:spLocks noGrp="1"/>
           </p:cNvSpPr>
           <p:nvPr>
-            <p:ph type="body" sz="quarter" idx="3"/>
+            <p:ph type="body" idx="3" sz="quarter"/>
           </p:nvPr>
         </p:nvSpPr>
         <p:spPr/>
@@ -455,7 +661,7 @@
             <a:spLocks noGrp="1"/>
           </p:cNvSpPr>
           <p:nvPr>
-            <p:ph type="sldNum" sz="quarter" idx="5"/>
+            <p:ph type="sldNum" idx="5" sz="quarter"/>
           </p:nvPr>
         </p:nvSpPr>
         <p:spPr/>
@@ -469,7 +675,7 @@
 </file>
 
 <file path=ppt/notesSlides/notesSlide4.xml><?xml version="1.0" encoding="utf-8"?>
-<p:notes xmlns:a="http://schemas.openxmlformats.org/drawingml/2006/main" xmlns:r="http://schemas.openxmlformats.org/officeDocument/2006/relationships" xmlns:p="http://schemas.openxmlformats.org/presentationml/2006/main">
+<p:notes xmlns:a="http://schemas.openxmlformats.org/drawingml/2006/main" xmlns:p="http://schemas.openxmlformats.org/presentationml/2006/main" xmlns:r="http://schemas.openxmlformats.org/officeDocument/2006/relationships">
   <p:cSld>
     <p:spTree>
       <p:nvGrpSpPr>
@@ -489,7 +695,7 @@
         <p:nvSpPr>
           <p:cNvPr id="2" name="Slide Image Placeholder 1"/>
           <p:cNvSpPr>
-            <a:spLocks noGrp="1" noRot="1" noChangeAspect="1"/>
+            <a:spLocks noGrp="1"/>
           </p:cNvSpPr>
           <p:nvPr>
             <p:ph type="sldImg" idx="2"/>
@@ -504,7 +710,7 @@
             <a:spLocks noGrp="1"/>
           </p:cNvSpPr>
           <p:nvPr>
-            <p:ph type="body" sz="quarter" idx="3"/>
+            <p:ph type="body" idx="3" sz="quarter"/>
           </p:nvPr>
         </p:nvSpPr>
         <p:spPr/>
@@ -525,7 +731,7 @@
             <a:spLocks noGrp="1"/>
           </p:cNvSpPr>
           <p:nvPr>
-            <p:ph type="sldNum" sz="quarter" idx="5"/>
+            <p:ph type="sldNum" idx="5" sz="quarter"/>
           </p:nvPr>
         </p:nvSpPr>
         <p:spPr/>
@@ -539,7 +745,7 @@
 </file>
 
 <file path=ppt/notesSlides/notesSlide5.xml><?xml version="1.0" encoding="utf-8"?>
-<p:notes xmlns:a="http://schemas.openxmlformats.org/drawingml/2006/main" xmlns:r="http://schemas.openxmlformats.org/officeDocument/2006/relationships" xmlns:p="http://schemas.openxmlformats.org/presentationml/2006/main">
+<p:notes xmlns:a="http://schemas.openxmlformats.org/drawingml/2006/main" xmlns:p="http://schemas.openxmlformats.org/presentationml/2006/main" xmlns:r="http://schemas.openxmlformats.org/officeDocument/2006/relationships">
   <p:cSld>
     <p:spTree>
       <p:nvGrpSpPr>
@@ -559,7 +765,7 @@
         <p:nvSpPr>
           <p:cNvPr id="2" name="Slide Image Placeholder 1"/>
           <p:cNvSpPr>
-            <a:spLocks noGrp="1" noRot="1" noChangeAspect="1"/>
+            <a:spLocks noGrp="1"/>
           </p:cNvSpPr>
           <p:nvPr>
             <p:ph type="sldImg" idx="2"/>
@@ -574,7 +780,7 @@
             <a:spLocks noGrp="1"/>
           </p:cNvSpPr>
           <p:nvPr>
-            <p:ph type="body" sz="quarter" idx="3"/>
+            <p:ph type="body" idx="3" sz="quarter"/>
           </p:nvPr>
         </p:nvSpPr>
         <p:spPr/>
@@ -595,7 +801,7 @@
             <a:spLocks noGrp="1"/>
           </p:cNvSpPr>
           <p:nvPr>
-            <p:ph type="sldNum" sz="quarter" idx="5"/>
+            <p:ph type="sldNum" idx="5" sz="quarter"/>
           </p:nvPr>
         </p:nvSpPr>
         <p:spPr/>
@@ -609,7 +815,7 @@
 </file>
 
 <file path=ppt/notesSlides/notesSlide6.xml><?xml version="1.0" encoding="utf-8"?>
-<p:notes xmlns:a="http://schemas.openxmlformats.org/drawingml/2006/main" xmlns:r="http://schemas.openxmlformats.org/officeDocument/2006/relationships" xmlns:p="http://schemas.openxmlformats.org/presentationml/2006/main">
+<p:notes xmlns:a="http://schemas.openxmlformats.org/drawingml/2006/main" xmlns:p="http://schemas.openxmlformats.org/presentationml/2006/main" xmlns:r="http://schemas.openxmlformats.org/officeDocument/2006/relationships">
   <p:cSld>
     <p:spTree>
       <p:nvGrpSpPr>
@@ -629,7 +835,7 @@
         <p:nvSpPr>
           <p:cNvPr id="2" name="Slide Image Placeholder 1"/>
           <p:cNvSpPr>
-            <a:spLocks noGrp="1" noRot="1" noChangeAspect="1"/>
+            <a:spLocks noGrp="1"/>
           </p:cNvSpPr>
           <p:nvPr>
             <p:ph type="sldImg" idx="2"/>
@@ -644,7 +850,7 @@
             <a:spLocks noGrp="1"/>
           </p:cNvSpPr>
           <p:nvPr>
-            <p:ph type="body" sz="quarter" idx="3"/>
+            <p:ph type="body" idx="3" sz="quarter"/>
           </p:nvPr>
         </p:nvSpPr>
         <p:spPr/>
@@ -665,7 +871,7 @@
             <a:spLocks noGrp="1"/>
           </p:cNvSpPr>
           <p:nvPr>
-            <p:ph type="sldNum" sz="quarter" idx="5"/>
+            <p:ph type="sldNum" idx="5" sz="quarter"/>
           </p:nvPr>
         </p:nvSpPr>
         <p:spPr/>
@@ -679,7 +885,7 @@
 </file>
 
 <file path=ppt/notesSlides/notesSlide7.xml><?xml version="1.0" encoding="utf-8"?>
-<p:notes xmlns:a="http://schemas.openxmlformats.org/drawingml/2006/main" xmlns:r="http://schemas.openxmlformats.org/officeDocument/2006/relationships" xmlns:p="http://schemas.openxmlformats.org/presentationml/2006/main">
+<p:notes xmlns:a="http://schemas.openxmlformats.org/drawingml/2006/main" xmlns:p="http://schemas.openxmlformats.org/presentationml/2006/main" xmlns:r="http://schemas.openxmlformats.org/officeDocument/2006/relationships">
   <p:cSld>
     <p:spTree>
       <p:nvGrpSpPr>
@@ -699,7 +905,7 @@
         <p:nvSpPr>
           <p:cNvPr id="2" name="Slide Image Placeholder 1"/>
           <p:cNvSpPr>
-            <a:spLocks noGrp="1" noRot="1" noChangeAspect="1"/>
+            <a:spLocks noGrp="1"/>
           </p:cNvSpPr>
           <p:nvPr>
             <p:ph type="sldImg" idx="2"/>
@@ -714,7 +920,7 @@
             <a:spLocks noGrp="1"/>
           </p:cNvSpPr>
           <p:nvPr>
-            <p:ph type="body" sz="quarter" idx="3"/>
+            <p:ph type="body" idx="3" sz="quarter"/>
           </p:nvPr>
         </p:nvSpPr>
         <p:spPr/>
@@ -735,7 +941,7 @@
             <a:spLocks noGrp="1"/>
           </p:cNvSpPr>
           <p:nvPr>
-            <p:ph type="sldNum" sz="quarter" idx="5"/>
+            <p:ph type="sldNum" idx="5" sz="quarter"/>
           </p:nvPr>
         </p:nvSpPr>
         <p:spPr/>
@@ -749,7 +955,7 @@
 </file>
 
 <file path=ppt/notesSlides/notesSlide8.xml><?xml version="1.0" encoding="utf-8"?>
-<p:notes xmlns:a="http://schemas.openxmlformats.org/drawingml/2006/main" xmlns:r="http://schemas.openxmlformats.org/officeDocument/2006/relationships" xmlns:p="http://schemas.openxmlformats.org/presentationml/2006/main">
+<p:notes xmlns:a="http://schemas.openxmlformats.org/drawingml/2006/main" xmlns:p="http://schemas.openxmlformats.org/presentationml/2006/main" xmlns:r="http://schemas.openxmlformats.org/officeDocument/2006/relationships">
   <p:cSld>
     <p:spTree>
       <p:nvGrpSpPr>
@@ -769,7 +975,7 @@
         <p:nvSpPr>
           <p:cNvPr id="2" name="Slide Image Placeholder 1"/>
           <p:cNvSpPr>
-            <a:spLocks noGrp="1" noRot="1" noChangeAspect="1"/>
+            <a:spLocks noGrp="1"/>
           </p:cNvSpPr>
           <p:nvPr>
             <p:ph type="sldImg" idx="2"/>
@@ -784,7 +990,7 @@
             <a:spLocks noGrp="1"/>
           </p:cNvSpPr>
           <p:nvPr>
-            <p:ph type="body" sz="quarter" idx="3"/>
+            <p:ph type="body" idx="3" sz="quarter"/>
           </p:nvPr>
         </p:nvSpPr>
         <p:spPr/>
@@ -805,7 +1011,7 @@
             <a:spLocks noGrp="1"/>
           </p:cNvSpPr>
           <p:nvPr>
-            <p:ph type="sldNum" sz="quarter" idx="5"/>
+            <p:ph type="sldNum" idx="5" sz="quarter"/>
           </p:nvPr>
         </p:nvSpPr>
         <p:spPr/>
@@ -856,9 +1062,10 @@
           <a:lstStyle/>
           <a:p>
             <a:r>
-              <a:rPr lang="en-US"/>
+              <a:rPr lang="en-US" smtClean="0"/>
               <a:t>Click to edit Master title style</a:t>
             </a:r>
+            <a:endParaRPr lang="en-US"/>
           </a:p>
         </p:txBody>
       </p:sp>
@@ -974,9 +1181,10 @@
           </a:lstStyle>
           <a:p>
             <a:r>
-              <a:rPr lang="en-US"/>
+              <a:rPr lang="en-US" smtClean="0"/>
               <a:t>Click to edit Master subtitle style</a:t>
             </a:r>
+            <a:endParaRPr lang="en-US"/>
           </a:p>
         </p:txBody>
       </p:sp>
@@ -997,7 +1205,7 @@
           <a:p>
             <a:fld id="{5BCAD085-E8A6-8845-BD4E-CB4CCA059FC4}" type="datetimeFigureOut">
               <a:rPr lang="en-US" smtClean="0"/>
-              <a:t>10/25/2026</a:t>
+              <a:t>1/27/13</a:t>
             </a:fld>
             <a:endParaRPr lang="en-US"/>
           </a:p>
@@ -1091,9 +1299,10 @@
           <a:lstStyle/>
           <a:p>
             <a:r>
-              <a:rPr lang="en-US"/>
+              <a:rPr lang="en-US" smtClean="0"/>
               <a:t>Click to edit Master title style</a:t>
             </a:r>
+            <a:endParaRPr lang="en-US"/>
           </a:p>
         </p:txBody>
       </p:sp>
@@ -1114,37 +1323,38 @@
           <a:p>
             <a:pPr lvl="0"/>
             <a:r>
-              <a:rPr lang="en-US"/>
+              <a:rPr lang="en-US" smtClean="0"/>
               <a:t>Click to edit Master text styles</a:t>
             </a:r>
           </a:p>
           <a:p>
             <a:pPr lvl="1"/>
             <a:r>
-              <a:rPr lang="en-US"/>
+              <a:rPr lang="en-US" smtClean="0"/>
               <a:t>Second level</a:t>
             </a:r>
           </a:p>
           <a:p>
             <a:pPr lvl="2"/>
             <a:r>
-              <a:rPr lang="en-US"/>
+              <a:rPr lang="en-US" smtClean="0"/>
               <a:t>Third level</a:t>
             </a:r>
           </a:p>
           <a:p>
             <a:pPr lvl="3"/>
             <a:r>
-              <a:rPr lang="en-US"/>
+              <a:rPr lang="en-US" smtClean="0"/>
               <a:t>Fourth level</a:t>
             </a:r>
           </a:p>
           <a:p>
             <a:pPr lvl="4"/>
             <a:r>
-              <a:rPr lang="en-US"/>
+              <a:rPr lang="en-US" smtClean="0"/>
               <a:t>Fifth level</a:t>
             </a:r>
+            <a:endParaRPr lang="en-US"/>
           </a:p>
         </p:txBody>
       </p:sp>
@@ -1165,7 +1375,7 @@
           <a:p>
             <a:fld id="{5BCAD085-E8A6-8845-BD4E-CB4CCA059FC4}" type="datetimeFigureOut">
               <a:rPr lang="en-US" smtClean="0"/>
-              <a:t>10/25/2026</a:t>
+              <a:t>1/27/13</a:t>
             </a:fld>
             <a:endParaRPr lang="en-US"/>
           </a:p>
@@ -1264,9 +1474,10 @@
           <a:lstStyle/>
           <a:p>
             <a:r>
-              <a:rPr lang="en-US"/>
+              <a:rPr lang="en-US" smtClean="0"/>
               <a:t>Click to edit Master title style</a:t>
             </a:r>
+            <a:endParaRPr lang="en-US"/>
           </a:p>
         </p:txBody>
       </p:sp>
@@ -1292,37 +1503,38 @@
           <a:p>
             <a:pPr lvl="0"/>
             <a:r>
-              <a:rPr lang="en-US"/>
+              <a:rPr lang="en-US" smtClean="0"/>
               <a:t>Click to edit Master text styles</a:t>
             </a:r>
           </a:p>
           <a:p>
             <a:pPr lvl="1"/>
             <a:r>
-              <a:rPr lang="en-US"/>
+              <a:rPr lang="en-US" smtClean="0"/>
               <a:t>Second level</a:t>
             </a:r>
           </a:p>
           <a:p>
             <a:pPr lvl="2"/>
             <a:r>
-              <a:rPr lang="en-US"/>
+              <a:rPr lang="en-US" smtClean="0"/>
               <a:t>Third level</a:t>
             </a:r>
           </a:p>
           <a:p>
             <a:pPr lvl="3"/>
             <a:r>
-              <a:rPr lang="en-US"/>
+              <a:rPr lang="en-US" smtClean="0"/>
               <a:t>Fourth level</a:t>
             </a:r>
           </a:p>
           <a:p>
             <a:pPr lvl="4"/>
             <a:r>
-              <a:rPr lang="en-US"/>
+              <a:rPr lang="en-US" smtClean="0"/>
               <a:t>Fifth level</a:t>
             </a:r>
+            <a:endParaRPr lang="en-US"/>
           </a:p>
         </p:txBody>
       </p:sp>
@@ -1343,7 +1555,7 @@
           <a:p>
             <a:fld id="{5BCAD085-E8A6-8845-BD4E-CB4CCA059FC4}" type="datetimeFigureOut">
               <a:rPr lang="en-US" smtClean="0"/>
-              <a:t>10/25/2026</a:t>
+              <a:t>1/27/13</a:t>
             </a:fld>
             <a:endParaRPr lang="en-US"/>
           </a:p>
@@ -1437,9 +1649,10 @@
           <a:lstStyle/>
           <a:p>
             <a:r>
-              <a:rPr lang="en-US"/>
+              <a:rPr lang="en-US" smtClean="0"/>
               <a:t>Click to edit Master title style</a:t>
             </a:r>
+            <a:endParaRPr lang="en-US"/>
           </a:p>
         </p:txBody>
       </p:sp>
@@ -1460,37 +1673,38 @@
           <a:p>
             <a:pPr lvl="0"/>
             <a:r>
-              <a:rPr lang="en-US"/>
+              <a:rPr lang="en-US" smtClean="0"/>
               <a:t>Click to edit Master text styles</a:t>
             </a:r>
           </a:p>
           <a:p>
             <a:pPr lvl="1"/>
             <a:r>
-              <a:rPr lang="en-US"/>
+              <a:rPr lang="en-US" smtClean="0"/>
               <a:t>Second level</a:t>
             </a:r>
           </a:p>
           <a:p>
             <a:pPr lvl="2"/>
             <a:r>
-              <a:rPr lang="en-US"/>
+              <a:rPr lang="en-US" smtClean="0"/>
               <a:t>Third level</a:t>
             </a:r>
           </a:p>
           <a:p>
             <a:pPr lvl="3"/>
             <a:r>
-              <a:rPr lang="en-US"/>
+              <a:rPr lang="en-US" smtClean="0"/>
               <a:t>Fourth level</a:t>
             </a:r>
           </a:p>
           <a:p>
             <a:pPr lvl="4"/>
             <a:r>
-              <a:rPr lang="en-US"/>
+              <a:rPr lang="en-US" smtClean="0"/>
               <a:t>Fifth level</a:t>
             </a:r>
+            <a:endParaRPr lang="en-US"/>
           </a:p>
         </p:txBody>
       </p:sp>
@@ -1511,7 +1725,7 @@
           <a:p>
             <a:fld id="{5BCAD085-E8A6-8845-BD4E-CB4CCA059FC4}" type="datetimeFigureOut">
               <a:rPr lang="en-US" smtClean="0"/>
-              <a:t>10/25/2026</a:t>
+              <a:t>1/27/13</a:t>
             </a:fld>
             <a:endParaRPr lang="en-US"/>
           </a:p>
@@ -1614,9 +1828,10 @@
           </a:lstStyle>
           <a:p>
             <a:r>
-              <a:rPr lang="en-US"/>
+              <a:rPr lang="en-US" smtClean="0"/>
               <a:t>Click to edit Master title style</a:t>
             </a:r>
+            <a:endParaRPr lang="en-US"/>
           </a:p>
         </p:txBody>
       </p:sp>
@@ -1733,7 +1948,7 @@
           <a:p>
             <a:pPr lvl="0"/>
             <a:r>
-              <a:rPr lang="en-US"/>
+              <a:rPr lang="en-US" smtClean="0"/>
               <a:t>Click to edit Master text styles</a:t>
             </a:r>
           </a:p>
@@ -1756,7 +1971,7 @@
           <a:p>
             <a:fld id="{5BCAD085-E8A6-8845-BD4E-CB4CCA059FC4}" type="datetimeFigureOut">
               <a:rPr lang="en-US" smtClean="0"/>
-              <a:t>10/25/2026</a:t>
+              <a:t>1/27/13</a:t>
             </a:fld>
             <a:endParaRPr lang="en-US"/>
           </a:p>
@@ -1850,9 +2065,10 @@
           <a:lstStyle/>
           <a:p>
             <a:r>
-              <a:rPr lang="en-US"/>
+              <a:rPr lang="en-US" smtClean="0"/>
               <a:t>Click to edit Master title style</a:t>
             </a:r>
+            <a:endParaRPr lang="en-US"/>
           </a:p>
         </p:txBody>
       </p:sp>
@@ -1906,37 +2122,38 @@
           <a:p>
             <a:pPr lvl="0"/>
             <a:r>
-              <a:rPr lang="en-US"/>
+              <a:rPr lang="en-US" smtClean="0"/>
               <a:t>Click to edit Master text styles</a:t>
             </a:r>
           </a:p>
           <a:p>
             <a:pPr lvl="1"/>
             <a:r>
-              <a:rPr lang="en-US"/>
+              <a:rPr lang="en-US" smtClean="0"/>
               <a:t>Second level</a:t>
             </a:r>
           </a:p>
           <a:p>
             <a:pPr lvl="2"/>
             <a:r>
-              <a:rPr lang="en-US"/>
+              <a:rPr lang="en-US" smtClean="0"/>
               <a:t>Third level</a:t>
             </a:r>
           </a:p>
           <a:p>
             <a:pPr lvl="3"/>
             <a:r>
-              <a:rPr lang="en-US"/>
+              <a:rPr lang="en-US" smtClean="0"/>
               <a:t>Fourth level</a:t>
             </a:r>
           </a:p>
           <a:p>
             <a:pPr lvl="4"/>
             <a:r>
-              <a:rPr lang="en-US"/>
+              <a:rPr lang="en-US" smtClean="0"/>
               <a:t>Fifth level</a:t>
             </a:r>
+            <a:endParaRPr lang="en-US"/>
           </a:p>
         </p:txBody>
       </p:sp>
@@ -1990,37 +2207,38 @@
           <a:p>
             <a:pPr lvl="0"/>
             <a:r>
-              <a:rPr lang="en-US"/>
+              <a:rPr lang="en-US" smtClean="0"/>
               <a:t>Click to edit Master text styles</a:t>
             </a:r>
           </a:p>
           <a:p>
             <a:pPr lvl="1"/>
             <a:r>
-              <a:rPr lang="en-US"/>
+              <a:rPr lang="en-US" smtClean="0"/>
               <a:t>Second level</a:t>
             </a:r>
           </a:p>
           <a:p>
             <a:pPr lvl="2"/>
             <a:r>
-              <a:rPr lang="en-US"/>
+              <a:rPr lang="en-US" smtClean="0"/>
               <a:t>Third level</a:t>
             </a:r>
           </a:p>
           <a:p>
             <a:pPr lvl="3"/>
             <a:r>
-              <a:rPr lang="en-US"/>
+              <a:rPr lang="en-US" smtClean="0"/>
               <a:t>Fourth level</a:t>
             </a:r>
           </a:p>
           <a:p>
             <a:pPr lvl="4"/>
             <a:r>
-              <a:rPr lang="en-US"/>
+              <a:rPr lang="en-US" smtClean="0"/>
               <a:t>Fifth level</a:t>
             </a:r>
+            <a:endParaRPr lang="en-US"/>
           </a:p>
         </p:txBody>
       </p:sp>
@@ -2041,7 +2259,7 @@
           <a:p>
             <a:fld id="{5BCAD085-E8A6-8845-BD4E-CB4CCA059FC4}" type="datetimeFigureOut">
               <a:rPr lang="en-US" smtClean="0"/>
-              <a:t>10/25/2026</a:t>
+              <a:t>1/27/13</a:t>
             </a:fld>
             <a:endParaRPr lang="en-US"/>
           </a:p>
@@ -2139,9 +2357,10 @@
           </a:lstStyle>
           <a:p>
             <a:r>
-              <a:rPr lang="en-US"/>
+              <a:rPr lang="en-US" smtClean="0"/>
               <a:t>Click to edit Master title style</a:t>
             </a:r>
+            <a:endParaRPr lang="en-US"/>
           </a:p>
         </p:txBody>
       </p:sp>
@@ -2204,7 +2423,7 @@
           <a:p>
             <a:pPr lvl="0"/>
             <a:r>
-              <a:rPr lang="en-US"/>
+              <a:rPr lang="en-US" smtClean="0"/>
               <a:t>Click to edit Master text styles</a:t>
             </a:r>
           </a:p>
@@ -2260,37 +2479,38 @@
           <a:p>
             <a:pPr lvl="0"/>
             <a:r>
-              <a:rPr lang="en-US"/>
+              <a:rPr lang="en-US" smtClean="0"/>
               <a:t>Click to edit Master text styles</a:t>
             </a:r>
           </a:p>
           <a:p>
             <a:pPr lvl="1"/>
             <a:r>
-              <a:rPr lang="en-US"/>
+              <a:rPr lang="en-US" smtClean="0"/>
               <a:t>Second level</a:t>
             </a:r>
           </a:p>
           <a:p>
             <a:pPr lvl="2"/>
             <a:r>
-              <a:rPr lang="en-US"/>
+              <a:rPr lang="en-US" smtClean="0"/>
               <a:t>Third level</a:t>
             </a:r>
           </a:p>
           <a:p>
             <a:pPr lvl="3"/>
             <a:r>
-              <a:rPr lang="en-US"/>
+              <a:rPr lang="en-US" smtClean="0"/>
               <a:t>Fourth level</a:t>
             </a:r>
           </a:p>
           <a:p>
             <a:pPr lvl="4"/>
             <a:r>
-              <a:rPr lang="en-US"/>
+              <a:rPr lang="en-US" smtClean="0"/>
               <a:t>Fifth level</a:t>
             </a:r>
+            <a:endParaRPr lang="en-US"/>
           </a:p>
         </p:txBody>
       </p:sp>
@@ -2353,7 +2573,7 @@
           <a:p>
             <a:pPr lvl="0"/>
             <a:r>
-              <a:rPr lang="en-US"/>
+              <a:rPr lang="en-US" smtClean="0"/>
               <a:t>Click to edit Master text styles</a:t>
             </a:r>
           </a:p>
@@ -2409,37 +2629,38 @@
           <a:p>
             <a:pPr lvl="0"/>
             <a:r>
-              <a:rPr lang="en-US"/>
+              <a:rPr lang="en-US" smtClean="0"/>
               <a:t>Click to edit Master text styles</a:t>
             </a:r>
           </a:p>
           <a:p>
             <a:pPr lvl="1"/>
             <a:r>
-              <a:rPr lang="en-US"/>
+              <a:rPr lang="en-US" smtClean="0"/>
               <a:t>Second level</a:t>
             </a:r>
           </a:p>
           <a:p>
             <a:pPr lvl="2"/>
             <a:r>
-              <a:rPr lang="en-US"/>
+              <a:rPr lang="en-US" smtClean="0"/>
               <a:t>Third level</a:t>
             </a:r>
           </a:p>
           <a:p>
             <a:pPr lvl="3"/>
             <a:r>
-              <a:rPr lang="en-US"/>
+              <a:rPr lang="en-US" smtClean="0"/>
               <a:t>Fourth level</a:t>
             </a:r>
           </a:p>
           <a:p>
             <a:pPr lvl="4"/>
             <a:r>
-              <a:rPr lang="en-US"/>
+              <a:rPr lang="en-US" smtClean="0"/>
               <a:t>Fifth level</a:t>
             </a:r>
+            <a:endParaRPr lang="en-US"/>
           </a:p>
         </p:txBody>
       </p:sp>
@@ -2460,7 +2681,7 @@
           <a:p>
             <a:fld id="{5BCAD085-E8A6-8845-BD4E-CB4CCA059FC4}" type="datetimeFigureOut">
               <a:rPr lang="en-US" smtClean="0"/>
-              <a:t>10/25/2026</a:t>
+              <a:t>1/27/13</a:t>
             </a:fld>
             <a:endParaRPr lang="en-US"/>
           </a:p>
@@ -2554,9 +2775,10 @@
           <a:lstStyle/>
           <a:p>
             <a:r>
-              <a:rPr lang="en-US"/>
+              <a:rPr lang="en-US" smtClean="0"/>
               <a:t>Click to edit Master title style</a:t>
             </a:r>
+            <a:endParaRPr lang="en-US"/>
           </a:p>
         </p:txBody>
       </p:sp>
@@ -2577,7 +2799,7 @@
           <a:p>
             <a:fld id="{5BCAD085-E8A6-8845-BD4E-CB4CCA059FC4}" type="datetimeFigureOut">
               <a:rPr lang="en-US" smtClean="0"/>
-              <a:t>10/25/2026</a:t>
+              <a:t>1/27/13</a:t>
             </a:fld>
             <a:endParaRPr lang="en-US"/>
           </a:p>
@@ -2672,7 +2894,7 @@
           <a:p>
             <a:fld id="{5BCAD085-E8A6-8845-BD4E-CB4CCA059FC4}" type="datetimeFigureOut">
               <a:rPr lang="en-US" smtClean="0"/>
-              <a:t>10/25/2026</a:t>
+              <a:t>1/27/13</a:t>
             </a:fld>
             <a:endParaRPr lang="en-US"/>
           </a:p>
@@ -2775,9 +2997,10 @@
           </a:lstStyle>
           <a:p>
             <a:r>
-              <a:rPr lang="en-US"/>
+              <a:rPr lang="en-US" smtClean="0"/>
               <a:t>Click to edit Master title style</a:t>
             </a:r>
+            <a:endParaRPr lang="en-US"/>
           </a:p>
         </p:txBody>
       </p:sp>
@@ -2831,37 +3054,38 @@
           <a:p>
             <a:pPr lvl="0"/>
             <a:r>
-              <a:rPr lang="en-US"/>
+              <a:rPr lang="en-US" smtClean="0"/>
               <a:t>Click to edit Master text styles</a:t>
             </a:r>
           </a:p>
           <a:p>
             <a:pPr lvl="1"/>
             <a:r>
-              <a:rPr lang="en-US"/>
+              <a:rPr lang="en-US" smtClean="0"/>
               <a:t>Second level</a:t>
             </a:r>
           </a:p>
           <a:p>
             <a:pPr lvl="2"/>
             <a:r>
-              <a:rPr lang="en-US"/>
+              <a:rPr lang="en-US" smtClean="0"/>
               <a:t>Third level</a:t>
             </a:r>
           </a:p>
           <a:p>
             <a:pPr lvl="3"/>
             <a:r>
-              <a:rPr lang="en-US"/>
+              <a:rPr lang="en-US" smtClean="0"/>
               <a:t>Fourth level</a:t>
             </a:r>
           </a:p>
           <a:p>
             <a:pPr lvl="4"/>
             <a:r>
-              <a:rPr lang="en-US"/>
+              <a:rPr lang="en-US" smtClean="0"/>
               <a:t>Fifth level</a:t>
             </a:r>
+            <a:endParaRPr lang="en-US"/>
           </a:p>
         </p:txBody>
       </p:sp>
@@ -2924,7 +3148,7 @@
           <a:p>
             <a:pPr lvl="0"/>
             <a:r>
-              <a:rPr lang="en-US"/>
+              <a:rPr lang="en-US" smtClean="0"/>
               <a:t>Click to edit Master text styles</a:t>
             </a:r>
           </a:p>
@@ -2947,7 +3171,7 @@
           <a:p>
             <a:fld id="{5BCAD085-E8A6-8845-BD4E-CB4CCA059FC4}" type="datetimeFigureOut">
               <a:rPr lang="en-US" smtClean="0"/>
-              <a:t>10/25/2026</a:t>
+              <a:t>1/27/13</a:t>
             </a:fld>
             <a:endParaRPr lang="en-US"/>
           </a:p>
@@ -3050,9 +3274,10 @@
           </a:lstStyle>
           <a:p>
             <a:r>
-              <a:rPr lang="en-US"/>
+              <a:rPr lang="en-US" smtClean="0"/>
               <a:t>Click to edit Master title style</a:t>
             </a:r>
+            <a:endParaRPr lang="en-US"/>
           </a:p>
         </p:txBody>
       </p:sp>
@@ -3176,7 +3401,7 @@
           <a:p>
             <a:pPr lvl="0"/>
             <a:r>
-              <a:rPr lang="en-US"/>
+              <a:rPr lang="en-US" smtClean="0"/>
               <a:t>Click to edit Master text styles</a:t>
             </a:r>
           </a:p>
@@ -3199,7 +3424,7 @@
           <a:p>
             <a:fld id="{5BCAD085-E8A6-8845-BD4E-CB4CCA059FC4}" type="datetimeFigureOut">
               <a:rPr lang="en-US" smtClean="0"/>
-              <a:t>10/25/2026</a:t>
+              <a:t>1/27/13</a:t>
             </a:fld>
             <a:endParaRPr lang="en-US"/>
           </a:p>
@@ -3308,9 +3533,10 @@
           <a:lstStyle/>
           <a:p>
             <a:r>
-              <a:rPr lang="en-US"/>
+              <a:rPr lang="en-US" smtClean="0"/>
               <a:t>Click to edit Master title style</a:t>
             </a:r>
+            <a:endParaRPr lang="en-US"/>
           </a:p>
         </p:txBody>
       </p:sp>
@@ -3341,37 +3567,38 @@
           <a:p>
             <a:pPr lvl="0"/>
             <a:r>
-              <a:rPr lang="en-US"/>
+              <a:rPr lang="en-US" smtClean="0"/>
               <a:t>Click to edit Master text styles</a:t>
             </a:r>
           </a:p>
           <a:p>
             <a:pPr lvl="1"/>
             <a:r>
-              <a:rPr lang="en-US"/>
+              <a:rPr lang="en-US" smtClean="0"/>
               <a:t>Second level</a:t>
             </a:r>
           </a:p>
           <a:p>
             <a:pPr lvl="2"/>
             <a:r>
-              <a:rPr lang="en-US"/>
+              <a:rPr lang="en-US" smtClean="0"/>
               <a:t>Third level</a:t>
             </a:r>
           </a:p>
           <a:p>
             <a:pPr lvl="3"/>
             <a:r>
-              <a:rPr lang="en-US"/>
+              <a:rPr lang="en-US" smtClean="0"/>
               <a:t>Fourth level</a:t>
             </a:r>
           </a:p>
           <a:p>
             <a:pPr lvl="4"/>
             <a:r>
-              <a:rPr lang="en-US"/>
+              <a:rPr lang="en-US" smtClean="0"/>
               <a:t>Fifth level</a:t>
             </a:r>
+            <a:endParaRPr lang="en-US"/>
           </a:p>
         </p:txBody>
       </p:sp>
@@ -3410,7 +3637,7 @@
           <a:p>
             <a:fld id="{5BCAD085-E8A6-8845-BD4E-CB4CCA059FC4}" type="datetimeFigureOut">
               <a:rPr lang="en-US" smtClean="0"/>
-              <a:t>10/25/2026</a:t>
+              <a:t>1/27/13</a:t>
             </a:fld>
             <a:endParaRPr lang="en-US"/>
           </a:p>
@@ -3769,7 +3996,7 @@
 </file>
 
 <file path=ppt/slides/slide1.xml><?xml version="1.0" encoding="utf-8"?>
-<p:sld xmlns:a="http://schemas.openxmlformats.org/drawingml/2006/main" xmlns:r="http://schemas.openxmlformats.org/officeDocument/2006/relationships" xmlns:p="http://schemas.openxmlformats.org/presentationml/2006/main">
+<p:sld xmlns:a="http://schemas.openxmlformats.org/drawingml/2006/main" xmlns:p="http://schemas.openxmlformats.org/presentationml/2006/main" xmlns:r="http://schemas.openxmlformats.org/officeDocument/2006/relationships">
   <p:cSld>
     <p:bg>
       <p:bgPr>
@@ -3785,14 +4012,7 @@
         <p:cNvGrpSpPr/>
         <p:nvPr/>
       </p:nvGrpSpPr>
-      <p:grpSpPr>
-        <a:xfrm>
-          <a:off x="0" y="0"/>
-          <a:ext cx="0" cy="0"/>
-          <a:chOff x="0" y="0"/>
-          <a:chExt cx="0" cy="0"/>
-        </a:xfrm>
-      </p:grpSpPr>
+      <p:grpSpPr/>
       <p:sp>
         <p:nvSpPr>
           <p:cNvPr id="2" name="Rectangle 1"/>
@@ -3820,7 +4040,6 @@
           <a:lstStyle/>
           <a:p>
             <a:pPr algn="ctr"/>
-            <a:endParaRPr/>
           </a:p>
         </p:txBody>
       </p:sp>
@@ -3841,7 +4060,7 @@
           <a:noFill/>
         </p:spPr>
         <p:txBody>
-          <a:bodyPr wrap="square" lIns="0" tIns="0" rIns="0" bIns="0" anchor="t">
+          <a:bodyPr wrap="square" lIns="0" rIns="0" tIns="0" bIns="0" anchor="t">
             <a:noAutofit/>
           </a:bodyPr>
           <a:lstStyle/>
@@ -3887,7 +4106,7 @@
           <a:noFill/>
         </p:spPr>
         <p:txBody>
-          <a:bodyPr wrap="square" lIns="0" tIns="0" rIns="0" bIns="0" anchor="t">
+          <a:bodyPr wrap="square" lIns="0" rIns="0" tIns="0" bIns="0" anchor="t">
             <a:noAutofit/>
           </a:bodyPr>
           <a:lstStyle/>
@@ -3956,7 +4175,7 @@
           <a:noFill/>
         </p:spPr>
         <p:txBody>
-          <a:bodyPr wrap="square" lIns="0" tIns="0" rIns="0" bIns="0" anchor="t">
+          <a:bodyPr wrap="square" lIns="0" rIns="0" tIns="0" bIns="0" anchor="t">
             <a:noAutofit/>
           </a:bodyPr>
           <a:lstStyle/>
@@ -3973,7 +4192,7 @@
               </a:spcAft>
             </a:pPr>
             <a:r>
-              <a:rPr sz="1800" b="0" i="0" dirty="0" err="1">
+              <a:rPr sz="1800" b="0" i="0">
                 <a:solidFill>
                   <a:srgbClr val="3A4A50"/>
                 </a:solidFill>
@@ -3982,13 +4201,6 @@
               </a:rPr>
               <a:t>理论学习完成情况与下一步计划</a:t>
             </a:r>
-            <a:endParaRPr sz="1800" b="0" i="0" dirty="0">
-              <a:solidFill>
-                <a:srgbClr val="3A4A50"/>
-              </a:solidFill>
-              <a:latin typeface="Segoe UI"/>
-              <a:ea typeface="Microsoft YaHei"/>
-            </a:endParaRPr>
           </a:p>
         </p:txBody>
       </p:sp>
@@ -4009,7 +4221,7 @@
           <a:noFill/>
         </p:spPr>
         <p:txBody>
-          <a:bodyPr wrap="square" lIns="0" tIns="0" rIns="0" bIns="0" anchor="t">
+          <a:bodyPr wrap="square" lIns="0" rIns="0" tIns="0" bIns="0" anchor="t">
             <a:noAutofit/>
           </a:bodyPr>
           <a:lstStyle/>
@@ -4067,7 +4279,6 @@
           <a:lstStyle/>
           <a:p>
             <a:pPr algn="ctr"/>
-            <a:endParaRPr/>
           </a:p>
         </p:txBody>
       </p:sp>
@@ -4098,7 +4309,6 @@
           <a:lstStyle/>
           <a:p>
             <a:pPr algn="ctr"/>
-            <a:endParaRPr/>
           </a:p>
         </p:txBody>
       </p:sp>
@@ -4129,7 +4339,6 @@
           <a:lstStyle/>
           <a:p>
             <a:pPr algn="ctr"/>
-            <a:endParaRPr/>
           </a:p>
         </p:txBody>
       </p:sp>
@@ -4150,7 +4359,7 @@
           <a:noFill/>
         </p:spPr>
         <p:txBody>
-          <a:bodyPr wrap="square" lIns="0" tIns="0" rIns="0" bIns="0" anchor="t">
+          <a:bodyPr wrap="square" lIns="0" rIns="0" tIns="0" bIns="0" anchor="t">
             <a:noAutofit/>
           </a:bodyPr>
           <a:lstStyle/>
@@ -4206,7 +4415,6 @@
           <a:lstStyle/>
           <a:p>
             <a:pPr algn="ctr"/>
-            <a:endParaRPr/>
           </a:p>
         </p:txBody>
       </p:sp>
@@ -4227,7 +4435,7 @@
           <a:noFill/>
         </p:spPr>
         <p:txBody>
-          <a:bodyPr wrap="square" lIns="0" tIns="0" rIns="0" bIns="0" anchor="t">
+          <a:bodyPr wrap="square" lIns="0" rIns="0" tIns="0" bIns="0" anchor="t">
             <a:noAutofit/>
           </a:bodyPr>
           <a:lstStyle/>
@@ -4283,7 +4491,7 @@
           <a:noFill/>
         </p:spPr>
         <p:txBody>
-          <a:bodyPr wrap="square" lIns="0" tIns="0" rIns="0" bIns="0" anchor="t">
+          <a:bodyPr wrap="square" lIns="0" rIns="0" tIns="0" bIns="0" anchor="t">
             <a:noAutofit/>
           </a:bodyPr>
           <a:lstStyle/>
@@ -4343,7 +4551,6 @@
           <a:lstStyle/>
           <a:p>
             <a:pPr algn="ctr"/>
-            <a:endParaRPr/>
           </a:p>
         </p:txBody>
       </p:sp>
@@ -4364,7 +4571,7 @@
           <a:noFill/>
         </p:spPr>
         <p:txBody>
-          <a:bodyPr wrap="square" lIns="0" tIns="0" rIns="0" bIns="0" anchor="ctr">
+          <a:bodyPr wrap="square" lIns="0" rIns="0" tIns="0" bIns="0" anchor="ctr">
             <a:noAutofit/>
           </a:bodyPr>
           <a:lstStyle/>
@@ -4398,7 +4605,17 @@
                 <a:latin typeface="Segoe UI"/>
                 <a:ea typeface="Microsoft YaHei"/>
               </a:rPr>
-              <a:t>    份专题资料</a:t>
+              <a:t>    </a:t>
+            </a:r>
+            <a:r>
+              <a:rPr sz="1200" b="0" i="0">
+                <a:solidFill>
+                  <a:srgbClr val="3A4A50"/>
+                </a:solidFill>
+                <a:latin typeface="Segoe UI"/>
+                <a:ea typeface="Microsoft YaHei"/>
+              </a:rPr>
+              <a:t>份专题资料</a:t>
             </a:r>
           </a:p>
         </p:txBody>
@@ -4434,7 +4651,6 @@
           <a:lstStyle/>
           <a:p>
             <a:pPr algn="ctr"/>
-            <a:endParaRPr/>
           </a:p>
         </p:txBody>
       </p:sp>
@@ -4455,7 +4671,7 @@
           <a:noFill/>
         </p:spPr>
         <p:txBody>
-          <a:bodyPr wrap="square" lIns="0" tIns="0" rIns="0" bIns="0" anchor="ctr">
+          <a:bodyPr wrap="square" lIns="0" rIns="0" tIns="0" bIns="0" anchor="ctr">
             <a:noAutofit/>
           </a:bodyPr>
           <a:lstStyle/>
@@ -4489,7 +4705,17 @@
                 <a:latin typeface="Segoe UI"/>
                 <a:ea typeface="Microsoft YaHei"/>
               </a:rPr>
-              <a:t>    项数值校验通过</a:t>
+              <a:t>    </a:t>
+            </a:r>
+            <a:r>
+              <a:rPr sz="1200" b="0" i="0">
+                <a:solidFill>
+                  <a:srgbClr val="3A4A50"/>
+                </a:solidFill>
+                <a:latin typeface="Segoe UI"/>
+                <a:ea typeface="Microsoft YaHei"/>
+              </a:rPr>
+              <a:t>项数值校验通过</a:t>
             </a:r>
           </a:p>
         </p:txBody>
@@ -4525,7 +4751,6 @@
           <a:lstStyle/>
           <a:p>
             <a:pPr algn="ctr"/>
-            <a:endParaRPr/>
           </a:p>
         </p:txBody>
       </p:sp>
@@ -4546,7 +4771,7 @@
           <a:noFill/>
         </p:spPr>
         <p:txBody>
-          <a:bodyPr wrap="square" lIns="0" tIns="0" rIns="0" bIns="0" anchor="ctr">
+          <a:bodyPr wrap="square" lIns="0" rIns="0" tIns="0" bIns="0" anchor="ctr">
             <a:noAutofit/>
           </a:bodyPr>
           <a:lstStyle/>
@@ -4580,7 +4805,17 @@
                 <a:latin typeface="Segoe UI"/>
                 <a:ea typeface="Microsoft YaHei"/>
               </a:rPr>
-              <a:t>    种几何退磁因子已算</a:t>
+              <a:t>    </a:t>
+            </a:r>
+            <a:r>
+              <a:rPr sz="1200" b="0" i="0">
+                <a:solidFill>
+                  <a:srgbClr val="3A4A50"/>
+                </a:solidFill>
+                <a:latin typeface="Segoe UI"/>
+                <a:ea typeface="Microsoft YaHei"/>
+              </a:rPr>
+              <a:t>种几何退磁因子已算</a:t>
             </a:r>
           </a:p>
         </p:txBody>
@@ -4602,7 +4837,7 @@
           <a:noFill/>
         </p:spPr>
         <p:txBody>
-          <a:bodyPr wrap="square" lIns="0" tIns="0" rIns="0" bIns="0" anchor="t">
+          <a:bodyPr wrap="square" lIns="0" rIns="0" tIns="0" bIns="0" anchor="t">
             <a:noAutofit/>
           </a:bodyPr>
           <a:lstStyle/>
@@ -4627,45 +4862,6 @@
                 <a:ea typeface="Microsoft YaHei"/>
               </a:rPr>
               <a:t>1 / 8</a:t>
-            </a:r>
-          </a:p>
-        </p:txBody>
-      </p:sp>
-      <p:sp>
-        <p:nvSpPr>
-          <p:cNvPr id="21" name="文本框 20">
-            <a:extLst>
-              <a:ext uri="{FF2B5EF4-FFF2-40B4-BE49-F238E27FC236}">
-                <a16:creationId xmlns:a16="http://schemas.microsoft.com/office/drawing/2014/main" id="{E3BFD788-036C-66FA-C8BA-6072D3FBA456}"/>
-              </a:ext>
-            </a:extLst>
-          </p:cNvPr>
-          <p:cNvSpPr txBox="1"/>
-          <p:nvPr/>
-        </p:nvSpPr>
-        <p:spPr>
-          <a:xfrm>
-            <a:off x="777240" y="4352544"/>
-            <a:ext cx="3745665" cy="384048"/>
-          </a:xfrm>
-          <a:prstGeom prst="rect">
-            <a:avLst/>
-          </a:prstGeom>
-          <a:noFill/>
-        </p:spPr>
-        <p:txBody>
-          <a:bodyPr wrap="square" rtlCol="0">
-            <a:spAutoFit/>
-          </a:bodyPr>
-          <a:lstStyle/>
-          <a:p>
-            <a:r>
-              <a:rPr lang="zh-CN" altLang="en-US" dirty="0">
-                <a:latin typeface="Segoe UI" panose="020B0502040204020203" pitchFamily="34" charset="0"/>
-                <a:ea typeface="华文行楷" panose="02010800040101010101" pitchFamily="2" charset="-122"/>
-                <a:cs typeface="Segoe UI" panose="020B0502040204020203" pitchFamily="34" charset="0"/>
-              </a:rPr>
-              <a:t>孙煜凡  韦中天</a:t>
             </a:r>
           </a:p>
         </p:txBody>
@@ -4679,7 +4875,7 @@
 </file>
 
 <file path=ppt/slides/slide2.xml><?xml version="1.0" encoding="utf-8"?>
-<p:sld xmlns:a="http://schemas.openxmlformats.org/drawingml/2006/main" xmlns:r="http://schemas.openxmlformats.org/officeDocument/2006/relationships" xmlns:p="http://schemas.openxmlformats.org/presentationml/2006/main">
+<p:sld xmlns:a="http://schemas.openxmlformats.org/drawingml/2006/main" xmlns:p="http://schemas.openxmlformats.org/presentationml/2006/main" xmlns:r="http://schemas.openxmlformats.org/officeDocument/2006/relationships">
   <p:cSld>
     <p:bg>
       <p:bgPr>
@@ -4695,14 +4891,7 @@
         <p:cNvGrpSpPr/>
         <p:nvPr/>
       </p:nvGrpSpPr>
-      <p:grpSpPr>
-        <a:xfrm>
-          <a:off x="0" y="0"/>
-          <a:ext cx="0" cy="0"/>
-          <a:chOff x="0" y="0"/>
-          <a:chExt cx="0" cy="0"/>
-        </a:xfrm>
-      </p:grpSpPr>
+      <p:grpSpPr/>
       <p:sp>
         <p:nvSpPr>
           <p:cNvPr id="2" name="TextBox 1"/>
@@ -4720,7 +4909,7 @@
           <a:noFill/>
         </p:spPr>
         <p:txBody>
-          <a:bodyPr wrap="square" lIns="0" tIns="0" rIns="0" bIns="0" anchor="t">
+          <a:bodyPr wrap="square" lIns="0" rIns="0" tIns="0" bIns="0" anchor="t">
             <a:noAutofit/>
           </a:bodyPr>
           <a:lstStyle/>
@@ -4786,7 +4975,7 @@
           <a:noFill/>
         </p:spPr>
         <p:txBody>
-          <a:bodyPr wrap="square" lIns="0" tIns="0" rIns="0" bIns="0" anchor="ctr">
+          <a:bodyPr wrap="square" lIns="0" rIns="0" tIns="0" bIns="0" anchor="ctr">
             <a:noAutofit/>
           </a:bodyPr>
           <a:lstStyle/>
@@ -4842,7 +5031,6 @@
           <a:lstStyle/>
           <a:p>
             <a:pPr algn="ctr"/>
-            <a:endParaRPr/>
           </a:p>
         </p:txBody>
       </p:sp>
@@ -4877,7 +5065,6 @@
           <a:lstStyle/>
           <a:p>
             <a:pPr algn="ctr"/>
-            <a:endParaRPr/>
           </a:p>
         </p:txBody>
       </p:sp>
@@ -4898,7 +5085,7 @@
           <a:noFill/>
         </p:spPr>
         <p:txBody>
-          <a:bodyPr wrap="square" lIns="0" tIns="0" rIns="0" bIns="0" anchor="t">
+          <a:bodyPr wrap="square" lIns="0" rIns="0" tIns="0" bIns="0" anchor="t">
             <a:noAutofit/>
           </a:bodyPr>
           <a:lstStyle/>
@@ -4944,7 +5131,7 @@
           <a:noFill/>
         </p:spPr>
         <p:txBody>
-          <a:bodyPr wrap="square" lIns="0" tIns="0" rIns="0" bIns="0" anchor="t">
+          <a:bodyPr wrap="square" lIns="0" rIns="0" tIns="0" bIns="0" anchor="t">
             <a:noAutofit/>
           </a:bodyPr>
           <a:lstStyle/>
@@ -4990,7 +5177,7 @@
           <a:noFill/>
         </p:spPr>
         <p:txBody>
-          <a:bodyPr wrap="square" lIns="0" tIns="0" rIns="0" bIns="0" anchor="t">
+          <a:bodyPr wrap="square" lIns="0" rIns="0" tIns="0" bIns="0" anchor="t">
             <a:noAutofit/>
           </a:bodyPr>
           <a:lstStyle/>
@@ -5046,7 +5233,6 @@
           <a:lstStyle/>
           <a:p>
             <a:pPr algn="ctr"/>
-            <a:endParaRPr/>
           </a:p>
         </p:txBody>
       </p:sp>
@@ -5081,7 +5267,6 @@
           <a:lstStyle/>
           <a:p>
             <a:pPr algn="ctr"/>
-            <a:endParaRPr/>
           </a:p>
         </p:txBody>
       </p:sp>
@@ -5102,7 +5287,7 @@
           <a:noFill/>
         </p:spPr>
         <p:txBody>
-          <a:bodyPr wrap="square" lIns="0" tIns="0" rIns="0" bIns="0" anchor="t">
+          <a:bodyPr wrap="square" lIns="0" rIns="0" tIns="0" bIns="0" anchor="t">
             <a:noAutofit/>
           </a:bodyPr>
           <a:lstStyle/>
@@ -5148,7 +5333,7 @@
           <a:noFill/>
         </p:spPr>
         <p:txBody>
-          <a:bodyPr wrap="square" lIns="0" tIns="0" rIns="0" bIns="0" anchor="t">
+          <a:bodyPr wrap="square" lIns="0" rIns="0" tIns="0" bIns="0" anchor="t">
             <a:noAutofit/>
           </a:bodyPr>
           <a:lstStyle/>
@@ -5194,7 +5379,7 @@
           <a:noFill/>
         </p:spPr>
         <p:txBody>
-          <a:bodyPr wrap="square" lIns="0" tIns="0" rIns="0" bIns="0" anchor="t">
+          <a:bodyPr wrap="square" lIns="0" rIns="0" tIns="0" bIns="0" anchor="t">
             <a:noAutofit/>
           </a:bodyPr>
           <a:lstStyle/>
@@ -5290,7 +5475,6 @@
           <a:lstStyle/>
           <a:p>
             <a:pPr algn="ctr"/>
-            <a:endParaRPr/>
           </a:p>
         </p:txBody>
       </p:sp>
@@ -5325,7 +5509,6 @@
           <a:lstStyle/>
           <a:p>
             <a:pPr algn="ctr"/>
-            <a:endParaRPr/>
           </a:p>
         </p:txBody>
       </p:sp>
@@ -5346,7 +5529,7 @@
           <a:noFill/>
         </p:spPr>
         <p:txBody>
-          <a:bodyPr wrap="square" lIns="0" tIns="0" rIns="0" bIns="0" anchor="t">
+          <a:bodyPr wrap="square" lIns="0" rIns="0" tIns="0" bIns="0" anchor="t">
             <a:noAutofit/>
           </a:bodyPr>
           <a:lstStyle/>
@@ -5392,7 +5575,7 @@
           <a:noFill/>
         </p:spPr>
         <p:txBody>
-          <a:bodyPr wrap="square" lIns="0" tIns="0" rIns="0" bIns="0" anchor="t">
+          <a:bodyPr wrap="square" lIns="0" rIns="0" tIns="0" bIns="0" anchor="t">
             <a:noAutofit/>
           </a:bodyPr>
           <a:lstStyle/>
@@ -5438,7 +5621,7 @@
           <a:noFill/>
         </p:spPr>
         <p:txBody>
-          <a:bodyPr wrap="square" lIns="0" tIns="0" rIns="0" bIns="0" anchor="t">
+          <a:bodyPr wrap="square" lIns="0" rIns="0" tIns="0" bIns="0" anchor="t">
             <a:noAutofit/>
           </a:bodyPr>
           <a:lstStyle/>
@@ -5494,7 +5677,6 @@
           <a:lstStyle/>
           <a:p>
             <a:pPr algn="ctr"/>
-            <a:endParaRPr/>
           </a:p>
         </p:txBody>
       </p:sp>
@@ -5529,7 +5711,6 @@
           <a:lstStyle/>
           <a:p>
             <a:pPr algn="ctr"/>
-            <a:endParaRPr/>
           </a:p>
         </p:txBody>
       </p:sp>
@@ -5550,7 +5731,7 @@
           <a:noFill/>
         </p:spPr>
         <p:txBody>
-          <a:bodyPr wrap="square" lIns="0" tIns="0" rIns="0" bIns="0" anchor="t">
+          <a:bodyPr wrap="square" lIns="0" rIns="0" tIns="0" bIns="0" anchor="t">
             <a:noAutofit/>
           </a:bodyPr>
           <a:lstStyle/>
@@ -5596,7 +5777,7 @@
           <a:noFill/>
         </p:spPr>
         <p:txBody>
-          <a:bodyPr wrap="square" lIns="0" tIns="0" rIns="0" bIns="0" anchor="t">
+          <a:bodyPr wrap="square" lIns="0" rIns="0" tIns="0" bIns="0" anchor="t">
             <a:noAutofit/>
           </a:bodyPr>
           <a:lstStyle/>
@@ -5642,7 +5823,7 @@
           <a:noFill/>
         </p:spPr>
         <p:txBody>
-          <a:bodyPr wrap="square" lIns="0" tIns="0" rIns="0" bIns="0" anchor="t">
+          <a:bodyPr wrap="square" lIns="0" rIns="0" tIns="0" bIns="0" anchor="t">
             <a:noAutofit/>
           </a:bodyPr>
           <a:lstStyle/>
@@ -5703,7 +5884,6 @@
           <a:lstStyle/>
           <a:p>
             <a:pPr algn="ctr"/>
-            <a:endParaRPr/>
           </a:p>
         </p:txBody>
       </p:sp>
@@ -5724,7 +5904,7 @@
           <a:noFill/>
         </p:spPr>
         <p:txBody>
-          <a:bodyPr wrap="square" lIns="0" tIns="0" rIns="0" bIns="0" anchor="t">
+          <a:bodyPr wrap="square" lIns="0" rIns="0" tIns="0" bIns="0" anchor="t">
             <a:noAutofit/>
           </a:bodyPr>
           <a:lstStyle/>
@@ -5770,7 +5950,7 @@
           <a:noFill/>
         </p:spPr>
         <p:txBody>
-          <a:bodyPr wrap="square" lIns="0" tIns="0" rIns="0" bIns="0" anchor="t">
+          <a:bodyPr wrap="square" lIns="0" rIns="0" tIns="0" bIns="0" anchor="t">
             <a:noAutofit/>
           </a:bodyPr>
           <a:lstStyle/>
@@ -5816,7 +5996,7 @@
           <a:noFill/>
         </p:spPr>
         <p:txBody>
-          <a:bodyPr wrap="square" lIns="0" tIns="0" rIns="0" bIns="0" anchor="t">
+          <a:bodyPr wrap="square" lIns="0" rIns="0" tIns="0" bIns="0" anchor="t">
             <a:noAutofit/>
           </a:bodyPr>
           <a:lstStyle/>
@@ -5876,7 +6056,6 @@
           <a:lstStyle/>
           <a:p>
             <a:pPr algn="ctr"/>
-            <a:endParaRPr/>
           </a:p>
         </p:txBody>
       </p:sp>
@@ -5907,7 +6086,6 @@
           <a:lstStyle/>
           <a:p>
             <a:pPr algn="ctr"/>
-            <a:endParaRPr/>
           </a:p>
         </p:txBody>
       </p:sp>
@@ -5928,7 +6106,7 @@
           <a:noFill/>
         </p:spPr>
         <p:txBody>
-          <a:bodyPr wrap="square" lIns="0" tIns="0" rIns="0" bIns="0" anchor="t">
+          <a:bodyPr wrap="square" lIns="0" rIns="0" tIns="0" bIns="0" anchor="t">
             <a:noAutofit/>
           </a:bodyPr>
           <a:lstStyle/>
@@ -5974,7 +6152,7 @@
           <a:noFill/>
         </p:spPr>
         <p:txBody>
-          <a:bodyPr wrap="square" lIns="0" tIns="0" rIns="0" bIns="0" anchor="t">
+          <a:bodyPr wrap="square" lIns="0" rIns="0" tIns="0" bIns="0" anchor="t">
             <a:noAutofit/>
           </a:bodyPr>
           <a:lstStyle/>
@@ -6028,6 +6206,52 @@
       </p:sp>
       <p:sp>
         <p:nvSpPr>
+          <p:cNvPr id="32" name="TextBox 31"/>
+          <p:cNvSpPr txBox="1"/>
+          <p:nvPr/>
+        </p:nvSpPr>
+        <p:spPr>
+          <a:xfrm>
+            <a:off x="640080" y="6419088"/>
+            <a:ext cx="8869680" cy="237744"/>
+          </a:xfrm>
+          <a:prstGeom prst="rect">
+            <a:avLst/>
+          </a:prstGeom>
+          <a:noFill/>
+        </p:spPr>
+        <p:txBody>
+          <a:bodyPr wrap="square" lIns="0" rIns="0" tIns="0" bIns="0" anchor="t">
+            <a:noAutofit/>
+          </a:bodyPr>
+          <a:lstStyle/>
+          <a:p>
+            <a:pPr algn="l">
+              <a:lnSpc>
+                <a:spcPct val="115000"/>
+              </a:lnSpc>
+              <a:spcBef>
+                <a:spcPts val="0"/>
+              </a:spcBef>
+              <a:spcAft>
+                <a:spcPts val="0"/>
+              </a:spcAft>
+            </a:pPr>
+            <a:r>
+              <a:rPr sz="850" b="0" i="0">
+                <a:solidFill>
+                  <a:srgbClr val="53676D"/>
+                </a:solidFill>
+                <a:latin typeface="Segoe UI"/>
+                <a:ea typeface="Microsoft YaHei"/>
+              </a:rPr>
+              <a:t>研究范围见 README.md 与 4-QAH基本概念与面外磁化学习指南.md</a:t>
+            </a:r>
+          </a:p>
+        </p:txBody>
+      </p:sp>
+      <p:sp>
+        <p:nvSpPr>
           <p:cNvPr id="33" name="TextBox 32"/>
           <p:cNvSpPr txBox="1"/>
           <p:nvPr/>
@@ -6043,7 +6267,7 @@
           <a:noFill/>
         </p:spPr>
         <p:txBody>
-          <a:bodyPr wrap="square" lIns="0" tIns="0" rIns="0" bIns="0" anchor="t">
+          <a:bodyPr wrap="square" lIns="0" rIns="0" tIns="0" bIns="0" anchor="t">
             <a:noAutofit/>
           </a:bodyPr>
           <a:lstStyle/>
@@ -6081,7 +6305,7 @@
 </file>
 
 <file path=ppt/slides/slide3.xml><?xml version="1.0" encoding="utf-8"?>
-<p:sld xmlns:a="http://schemas.openxmlformats.org/drawingml/2006/main" xmlns:r="http://schemas.openxmlformats.org/officeDocument/2006/relationships" xmlns:p="http://schemas.openxmlformats.org/presentationml/2006/main">
+<p:sld xmlns:a="http://schemas.openxmlformats.org/drawingml/2006/main" xmlns:p="http://schemas.openxmlformats.org/presentationml/2006/main" xmlns:r="http://schemas.openxmlformats.org/officeDocument/2006/relationships">
   <p:cSld>
     <p:bg>
       <p:bgPr>
@@ -6097,14 +6321,7 @@
         <p:cNvGrpSpPr/>
         <p:nvPr/>
       </p:nvGrpSpPr>
-      <p:grpSpPr>
-        <a:xfrm>
-          <a:off x="0" y="0"/>
-          <a:ext cx="0" cy="0"/>
-          <a:chOff x="0" y="0"/>
-          <a:chExt cx="0" cy="0"/>
-        </a:xfrm>
-      </p:grpSpPr>
+      <p:grpSpPr/>
       <p:sp>
         <p:nvSpPr>
           <p:cNvPr id="2" name="TextBox 1"/>
@@ -6122,7 +6339,7 @@
           <a:noFill/>
         </p:spPr>
         <p:txBody>
-          <a:bodyPr wrap="square" lIns="0" tIns="0" rIns="0" bIns="0" anchor="t">
+          <a:bodyPr wrap="square" lIns="0" rIns="0" tIns="0" bIns="0" anchor="t">
             <a:noAutofit/>
           </a:bodyPr>
           <a:lstStyle/>
@@ -6188,7 +6405,7 @@
           <a:noFill/>
         </p:spPr>
         <p:txBody>
-          <a:bodyPr wrap="square" lIns="0" tIns="0" rIns="0" bIns="0" anchor="ctr">
+          <a:bodyPr wrap="square" lIns="0" rIns="0" tIns="0" bIns="0" anchor="ctr">
             <a:noAutofit/>
           </a:bodyPr>
           <a:lstStyle/>
@@ -6244,7 +6461,6 @@
           <a:lstStyle/>
           <a:p>
             <a:pPr algn="ctr"/>
-            <a:endParaRPr/>
           </a:p>
         </p:txBody>
       </p:sp>
@@ -6277,7 +6493,6 @@
           <a:lstStyle/>
           <a:p>
             <a:pPr algn="ctr"/>
-            <a:endParaRPr/>
           </a:p>
         </p:txBody>
       </p:sp>
@@ -6298,7 +6513,7 @@
           <a:noFill/>
         </p:spPr>
         <p:txBody>
-          <a:bodyPr wrap="square" lIns="0" tIns="0" rIns="0" bIns="0" anchor="t">
+          <a:bodyPr wrap="square" lIns="0" rIns="0" tIns="0" bIns="0" anchor="t">
             <a:noAutofit/>
           </a:bodyPr>
           <a:lstStyle/>
@@ -6344,7 +6559,7 @@
           <a:noFill/>
         </p:spPr>
         <p:txBody>
-          <a:bodyPr wrap="square" lIns="0" tIns="0" rIns="0" bIns="0" anchor="t">
+          <a:bodyPr wrap="square" lIns="0" rIns="0" tIns="0" bIns="0" anchor="t">
             <a:noAutofit/>
           </a:bodyPr>
           <a:lstStyle/>
@@ -6404,7 +6619,6 @@
           <a:lstStyle/>
           <a:p>
             <a:pPr algn="ctr"/>
-            <a:endParaRPr/>
           </a:p>
         </p:txBody>
       </p:sp>
@@ -6425,7 +6639,7 @@
           <a:noFill/>
         </p:spPr>
         <p:txBody>
-          <a:bodyPr wrap="square" lIns="0" tIns="0" rIns="0" bIns="0" anchor="t">
+          <a:bodyPr wrap="square" lIns="0" rIns="0" tIns="0" bIns="0" anchor="t">
             <a:noAutofit/>
           </a:bodyPr>
           <a:lstStyle/>
@@ -6471,7 +6685,7 @@
           <a:noFill/>
         </p:spPr>
         <p:txBody>
-          <a:bodyPr wrap="square" lIns="0" tIns="0" rIns="0" bIns="0" anchor="t">
+          <a:bodyPr wrap="square" lIns="0" rIns="0" tIns="0" bIns="0" anchor="t">
             <a:noAutofit/>
           </a:bodyPr>
           <a:lstStyle/>
@@ -6531,7 +6745,6 @@
           <a:lstStyle/>
           <a:p>
             <a:pPr algn="ctr"/>
-            <a:endParaRPr/>
           </a:p>
         </p:txBody>
       </p:sp>
@@ -6552,7 +6765,7 @@
           <a:noFill/>
         </p:spPr>
         <p:txBody>
-          <a:bodyPr wrap="square" lIns="0" tIns="0" rIns="0" bIns="0" anchor="t">
+          <a:bodyPr wrap="square" lIns="0" rIns="0" tIns="0" bIns="0" anchor="t">
             <a:noAutofit/>
           </a:bodyPr>
           <a:lstStyle/>
@@ -6598,7 +6811,7 @@
           <a:noFill/>
         </p:spPr>
         <p:txBody>
-          <a:bodyPr wrap="square" lIns="0" tIns="0" rIns="0" bIns="0" anchor="t">
+          <a:bodyPr wrap="square" lIns="0" rIns="0" tIns="0" bIns="0" anchor="t">
             <a:noAutofit/>
           </a:bodyPr>
           <a:lstStyle/>
@@ -6658,7 +6871,6 @@
           <a:lstStyle/>
           <a:p>
             <a:pPr algn="ctr"/>
-            <a:endParaRPr/>
           </a:p>
         </p:txBody>
       </p:sp>
@@ -6679,7 +6891,7 @@
           <a:noFill/>
         </p:spPr>
         <p:txBody>
-          <a:bodyPr wrap="square" lIns="0" tIns="0" rIns="0" bIns="0" anchor="t">
+          <a:bodyPr wrap="square" lIns="0" rIns="0" tIns="0" bIns="0" anchor="t">
             <a:noAutofit/>
           </a:bodyPr>
           <a:lstStyle/>
@@ -6725,7 +6937,7 @@
           <a:noFill/>
         </p:spPr>
         <p:txBody>
-          <a:bodyPr wrap="square" lIns="0" tIns="0" rIns="0" bIns="0" anchor="t">
+          <a:bodyPr wrap="square" lIns="0" rIns="0" tIns="0" bIns="0" anchor="t">
             <a:noAutofit/>
           </a:bodyPr>
           <a:lstStyle/>
@@ -6785,7 +6997,6 @@
           <a:lstStyle/>
           <a:p>
             <a:pPr algn="ctr"/>
-            <a:endParaRPr/>
           </a:p>
         </p:txBody>
       </p:sp>
@@ -6806,7 +7017,7 @@
           <a:noFill/>
         </p:spPr>
         <p:txBody>
-          <a:bodyPr wrap="square" lIns="0" tIns="0" rIns="0" bIns="0" anchor="t">
+          <a:bodyPr wrap="square" lIns="0" rIns="0" tIns="0" bIns="0" anchor="t">
             <a:noAutofit/>
           </a:bodyPr>
           <a:lstStyle/>
@@ -6852,7 +7063,7 @@
           <a:noFill/>
         </p:spPr>
         <p:txBody>
-          <a:bodyPr wrap="square" lIns="0" tIns="0" rIns="0" bIns="0" anchor="t">
+          <a:bodyPr wrap="square" lIns="0" rIns="0" tIns="0" bIns="0" anchor="t">
             <a:noAutofit/>
           </a:bodyPr>
           <a:lstStyle/>
@@ -6912,7 +7123,6 @@
           <a:lstStyle/>
           <a:p>
             <a:pPr algn="ctr"/>
-            <a:endParaRPr/>
           </a:p>
         </p:txBody>
       </p:sp>
@@ -6943,7 +7153,6 @@
           <a:lstStyle/>
           <a:p>
             <a:pPr algn="ctr"/>
-            <a:endParaRPr/>
           </a:p>
         </p:txBody>
       </p:sp>
@@ -6964,7 +7173,7 @@
           <a:noFill/>
         </p:spPr>
         <p:txBody>
-          <a:bodyPr wrap="square" lIns="0" tIns="0" rIns="0" bIns="0" anchor="t">
+          <a:bodyPr wrap="square" lIns="0" rIns="0" tIns="0" bIns="0" anchor="t">
             <a:noAutofit/>
           </a:bodyPr>
           <a:lstStyle/>
@@ -7010,7 +7219,7 @@
           <a:noFill/>
         </p:spPr>
         <p:txBody>
-          <a:bodyPr wrap="square" lIns="0" tIns="0" rIns="0" bIns="0" anchor="t">
+          <a:bodyPr wrap="square" lIns="0" rIns="0" tIns="0" bIns="0" anchor="t">
             <a:noAutofit/>
           </a:bodyPr>
           <a:lstStyle/>
@@ -7084,6 +7293,52 @@
       </p:sp>
       <p:sp>
         <p:nvSpPr>
+          <p:cNvPr id="24" name="TextBox 23"/>
+          <p:cNvSpPr txBox="1"/>
+          <p:nvPr/>
+        </p:nvSpPr>
+        <p:spPr>
+          <a:xfrm>
+            <a:off x="640080" y="6419088"/>
+            <a:ext cx="8869680" cy="237744"/>
+          </a:xfrm>
+          <a:prstGeom prst="rect">
+            <a:avLst/>
+          </a:prstGeom>
+          <a:noFill/>
+        </p:spPr>
+        <p:txBody>
+          <a:bodyPr wrap="square" lIns="0" rIns="0" tIns="0" bIns="0" anchor="t">
+            <a:noAutofit/>
+          </a:bodyPr>
+          <a:lstStyle/>
+          <a:p>
+            <a:pPr algn="l">
+              <a:lnSpc>
+                <a:spcPct val="115000"/>
+              </a:lnSpc>
+              <a:spcBef>
+                <a:spcPts val="0"/>
+              </a:spcBef>
+              <a:spcAft>
+                <a:spcPts val="0"/>
+              </a:spcAft>
+            </a:pPr>
+            <a:r>
+              <a:rPr sz="850" b="0" i="0">
+                <a:solidFill>
+                  <a:srgbClr val="53676D"/>
+                </a:solidFill>
+                <a:latin typeface="Segoe UI"/>
+                <a:ea typeface="Microsoft YaHei"/>
+              </a:rPr>
+              <a:t>阶段划分见 README.md 第 8 节；求解器与 GPU 检查于 2026-10-25</a:t>
+            </a:r>
+          </a:p>
+        </p:txBody>
+      </p:sp>
+      <p:sp>
+        <p:nvSpPr>
           <p:cNvPr id="25" name="TextBox 24"/>
           <p:cNvSpPr txBox="1"/>
           <p:nvPr/>
@@ -7099,7 +7354,7 @@
           <a:noFill/>
         </p:spPr>
         <p:txBody>
-          <a:bodyPr wrap="square" lIns="0" tIns="0" rIns="0" bIns="0" anchor="t">
+          <a:bodyPr wrap="square" lIns="0" rIns="0" tIns="0" bIns="0" anchor="t">
             <a:noAutofit/>
           </a:bodyPr>
           <a:lstStyle/>
@@ -7137,7 +7392,7 @@
 </file>
 
 <file path=ppt/slides/slide4.xml><?xml version="1.0" encoding="utf-8"?>
-<p:sld xmlns:a="http://schemas.openxmlformats.org/drawingml/2006/main" xmlns:r="http://schemas.openxmlformats.org/officeDocument/2006/relationships" xmlns:p="http://schemas.openxmlformats.org/presentationml/2006/main">
+<p:sld xmlns:a="http://schemas.openxmlformats.org/drawingml/2006/main" xmlns:p="http://schemas.openxmlformats.org/presentationml/2006/main" xmlns:r="http://schemas.openxmlformats.org/officeDocument/2006/relationships">
   <p:cSld>
     <p:bg>
       <p:bgPr>
@@ -7153,14 +7408,7 @@
         <p:cNvGrpSpPr/>
         <p:nvPr/>
       </p:nvGrpSpPr>
-      <p:grpSpPr>
-        <a:xfrm>
-          <a:off x="0" y="0"/>
-          <a:ext cx="0" cy="0"/>
-          <a:chOff x="0" y="0"/>
-          <a:chExt cx="0" cy="0"/>
-        </a:xfrm>
-      </p:grpSpPr>
+      <p:grpSpPr/>
       <p:sp>
         <p:nvSpPr>
           <p:cNvPr id="2" name="TextBox 1"/>
@@ -7178,7 +7426,7 @@
           <a:noFill/>
         </p:spPr>
         <p:txBody>
-          <a:bodyPr wrap="square" lIns="0" tIns="0" rIns="0" bIns="0" anchor="t">
+          <a:bodyPr wrap="square" lIns="0" rIns="0" tIns="0" bIns="0" anchor="t">
             <a:noAutofit/>
           </a:bodyPr>
           <a:lstStyle/>
@@ -7244,7 +7492,7 @@
           <a:noFill/>
         </p:spPr>
         <p:txBody>
-          <a:bodyPr wrap="square" lIns="0" tIns="0" rIns="0" bIns="0" anchor="ctr">
+          <a:bodyPr wrap="square" lIns="0" rIns="0" tIns="0" bIns="0" anchor="ctr">
             <a:noAutofit/>
           </a:bodyPr>
           <a:lstStyle/>
@@ -7300,7 +7548,6 @@
           <a:lstStyle/>
           <a:p>
             <a:pPr algn="ctr"/>
-            <a:endParaRPr/>
           </a:p>
         </p:txBody>
       </p:sp>
@@ -7335,7 +7582,6 @@
           <a:lstStyle/>
           <a:p>
             <a:pPr algn="ctr"/>
-            <a:endParaRPr/>
           </a:p>
         </p:txBody>
       </p:sp>
@@ -7356,7 +7602,7 @@
           <a:noFill/>
         </p:spPr>
         <p:txBody>
-          <a:bodyPr wrap="square" lIns="0" tIns="0" rIns="0" bIns="0" anchor="t">
+          <a:bodyPr wrap="square" lIns="0" rIns="0" tIns="0" bIns="0" anchor="t">
             <a:noAutofit/>
           </a:bodyPr>
           <a:lstStyle/>
@@ -7402,7 +7648,7 @@
           <a:noFill/>
         </p:spPr>
         <p:txBody>
-          <a:bodyPr wrap="square" lIns="0" tIns="0" rIns="0" bIns="0" anchor="t">
+          <a:bodyPr wrap="square" lIns="0" rIns="0" tIns="0" bIns="0" anchor="t">
             <a:noAutofit/>
           </a:bodyPr>
           <a:lstStyle/>
@@ -7448,7 +7694,7 @@
           <a:noFill/>
         </p:spPr>
         <p:txBody>
-          <a:bodyPr wrap="square" lIns="0" tIns="0" rIns="0" bIns="0" anchor="t">
+          <a:bodyPr wrap="square" lIns="0" rIns="0" tIns="0" bIns="0" anchor="t">
             <a:noAutofit/>
           </a:bodyPr>
           <a:lstStyle/>
@@ -7494,7 +7740,7 @@
           <a:noFill/>
         </p:spPr>
         <p:txBody>
-          <a:bodyPr wrap="square" lIns="0" tIns="0" rIns="0" bIns="0" anchor="t">
+          <a:bodyPr wrap="square" lIns="0" rIns="0" tIns="0" bIns="0" anchor="t">
             <a:noAutofit/>
           </a:bodyPr>
           <a:lstStyle/>
@@ -7564,7 +7810,6 @@
           <a:lstStyle/>
           <a:p>
             <a:pPr algn="ctr"/>
-            <a:endParaRPr/>
           </a:p>
         </p:txBody>
       </p:sp>
@@ -7585,7 +7830,7 @@
           <a:noFill/>
         </p:spPr>
         <p:txBody>
-          <a:bodyPr wrap="square" lIns="0" tIns="0" rIns="0" bIns="0" anchor="t">
+          <a:bodyPr wrap="square" lIns="0" rIns="0" tIns="0" bIns="0" anchor="t">
             <a:noAutofit/>
           </a:bodyPr>
           <a:lstStyle/>
@@ -7631,7 +7876,7 @@
           <a:noFill/>
         </p:spPr>
         <p:txBody>
-          <a:bodyPr wrap="square" lIns="0" tIns="0" rIns="0" bIns="0" anchor="t">
+          <a:bodyPr wrap="square" lIns="0" rIns="0" tIns="0" bIns="0" anchor="t">
             <a:noAutofit/>
           </a:bodyPr>
           <a:lstStyle/>
@@ -7677,7 +7922,7 @@
           <a:noFill/>
         </p:spPr>
         <p:txBody>
-          <a:bodyPr wrap="square" lIns="0" tIns="0" rIns="0" bIns="0" anchor="t">
+          <a:bodyPr wrap="square" lIns="0" rIns="0" tIns="0" bIns="0" anchor="t">
             <a:noAutofit/>
           </a:bodyPr>
           <a:lstStyle/>
@@ -7723,7 +7968,7 @@
           <a:noFill/>
         </p:spPr>
         <p:txBody>
-          <a:bodyPr wrap="square" lIns="0" tIns="0" rIns="0" bIns="0" anchor="t">
+          <a:bodyPr wrap="square" lIns="0" rIns="0" tIns="0" bIns="0" anchor="t">
             <a:noAutofit/>
           </a:bodyPr>
           <a:lstStyle/>
@@ -7793,7 +8038,6 @@
           <a:lstStyle/>
           <a:p>
             <a:pPr algn="ctr"/>
-            <a:endParaRPr/>
           </a:p>
         </p:txBody>
       </p:sp>
@@ -7814,7 +8058,7 @@
           <a:noFill/>
         </p:spPr>
         <p:txBody>
-          <a:bodyPr wrap="square" lIns="0" tIns="0" rIns="0" bIns="0" anchor="t">
+          <a:bodyPr wrap="square" lIns="0" rIns="0" tIns="0" bIns="0" anchor="t">
             <a:noAutofit/>
           </a:bodyPr>
           <a:lstStyle/>
@@ -7860,7 +8104,7 @@
           <a:noFill/>
         </p:spPr>
         <p:txBody>
-          <a:bodyPr wrap="square" lIns="0" tIns="0" rIns="0" bIns="0" anchor="t">
+          <a:bodyPr wrap="square" lIns="0" rIns="0" tIns="0" bIns="0" anchor="t">
             <a:noAutofit/>
           </a:bodyPr>
           <a:lstStyle/>
@@ -7906,7 +8150,7 @@
           <a:noFill/>
         </p:spPr>
         <p:txBody>
-          <a:bodyPr wrap="square" lIns="0" tIns="0" rIns="0" bIns="0" anchor="t">
+          <a:bodyPr wrap="square" lIns="0" rIns="0" tIns="0" bIns="0" anchor="t">
             <a:noAutofit/>
           </a:bodyPr>
           <a:lstStyle/>
@@ -7952,7 +8196,7 @@
           <a:noFill/>
         </p:spPr>
         <p:txBody>
-          <a:bodyPr wrap="square" lIns="0" tIns="0" rIns="0" bIns="0" anchor="t">
+          <a:bodyPr wrap="square" lIns="0" rIns="0" tIns="0" bIns="0" anchor="t">
             <a:noAutofit/>
           </a:bodyPr>
           <a:lstStyle/>
@@ -8022,7 +8266,6 @@
           <a:lstStyle/>
           <a:p>
             <a:pPr algn="ctr"/>
-            <a:endParaRPr/>
           </a:p>
         </p:txBody>
       </p:sp>
@@ -8043,7 +8286,7 @@
           <a:noFill/>
         </p:spPr>
         <p:txBody>
-          <a:bodyPr wrap="square" lIns="0" tIns="0" rIns="0" bIns="0" anchor="t">
+          <a:bodyPr wrap="square" lIns="0" rIns="0" tIns="0" bIns="0" anchor="t">
             <a:noAutofit/>
           </a:bodyPr>
           <a:lstStyle/>
@@ -8089,7 +8332,7 @@
           <a:noFill/>
         </p:spPr>
         <p:txBody>
-          <a:bodyPr wrap="square" lIns="0" tIns="0" rIns="0" bIns="0" anchor="t">
+          <a:bodyPr wrap="square" lIns="0" rIns="0" tIns="0" bIns="0" anchor="t">
             <a:noAutofit/>
           </a:bodyPr>
           <a:lstStyle/>
@@ -8135,7 +8378,7 @@
           <a:noFill/>
         </p:spPr>
         <p:txBody>
-          <a:bodyPr wrap="square" lIns="0" tIns="0" rIns="0" bIns="0" anchor="t">
+          <a:bodyPr wrap="square" lIns="0" rIns="0" tIns="0" bIns="0" anchor="t">
             <a:noAutofit/>
           </a:bodyPr>
           <a:lstStyle/>
@@ -8181,7 +8424,7 @@
           <a:noFill/>
         </p:spPr>
         <p:txBody>
-          <a:bodyPr wrap="square" lIns="0" tIns="0" rIns="0" bIns="0" anchor="t">
+          <a:bodyPr wrap="square" lIns="0" rIns="0" tIns="0" bIns="0" anchor="t">
             <a:noAutofit/>
           </a:bodyPr>
           <a:lstStyle/>
@@ -8251,7 +8494,6 @@
           <a:lstStyle/>
           <a:p>
             <a:pPr algn="ctr"/>
-            <a:endParaRPr/>
           </a:p>
         </p:txBody>
       </p:sp>
@@ -8272,7 +8514,7 @@
           <a:noFill/>
         </p:spPr>
         <p:txBody>
-          <a:bodyPr wrap="square" lIns="0" tIns="0" rIns="0" bIns="0" anchor="t">
+          <a:bodyPr wrap="square" lIns="0" rIns="0" tIns="0" bIns="0" anchor="t">
             <a:noAutofit/>
           </a:bodyPr>
           <a:lstStyle/>
@@ -8318,7 +8560,7 @@
           <a:noFill/>
         </p:spPr>
         <p:txBody>
-          <a:bodyPr wrap="square" lIns="0" tIns="0" rIns="0" bIns="0" anchor="t">
+          <a:bodyPr wrap="square" lIns="0" rIns="0" tIns="0" bIns="0" anchor="t">
             <a:noAutofit/>
           </a:bodyPr>
           <a:lstStyle/>
@@ -8364,7 +8606,7 @@
           <a:noFill/>
         </p:spPr>
         <p:txBody>
-          <a:bodyPr wrap="square" lIns="0" tIns="0" rIns="0" bIns="0" anchor="t">
+          <a:bodyPr wrap="square" lIns="0" rIns="0" tIns="0" bIns="0" anchor="t">
             <a:noAutofit/>
           </a:bodyPr>
           <a:lstStyle/>
@@ -8410,7 +8652,7 @@
           <a:noFill/>
         </p:spPr>
         <p:txBody>
-          <a:bodyPr wrap="square" lIns="0" tIns="0" rIns="0" bIns="0" anchor="t">
+          <a:bodyPr wrap="square" lIns="0" rIns="0" tIns="0" bIns="0" anchor="t">
             <a:noAutofit/>
           </a:bodyPr>
           <a:lstStyle/>
@@ -8478,7 +8720,6 @@
           <a:lstStyle/>
           <a:p>
             <a:pPr algn="ctr"/>
-            <a:endParaRPr/>
           </a:p>
         </p:txBody>
       </p:sp>
@@ -8499,7 +8740,7 @@
           <a:noFill/>
         </p:spPr>
         <p:txBody>
-          <a:bodyPr wrap="square" lIns="0" tIns="0" rIns="0" bIns="0" anchor="t">
+          <a:bodyPr wrap="square" lIns="0" rIns="0" tIns="0" bIns="0" anchor="t">
             <a:noAutofit/>
           </a:bodyPr>
           <a:lstStyle/>
@@ -8545,7 +8786,7 @@
           <a:noFill/>
         </p:spPr>
         <p:txBody>
-          <a:bodyPr wrap="square" lIns="0" tIns="0" rIns="0" bIns="0" anchor="t">
+          <a:bodyPr wrap="square" lIns="0" rIns="0" tIns="0" bIns="0" anchor="t">
             <a:noAutofit/>
           </a:bodyPr>
           <a:lstStyle/>
@@ -8591,7 +8832,7 @@
           <a:noFill/>
         </p:spPr>
         <p:txBody>
-          <a:bodyPr wrap="square" lIns="0" tIns="0" rIns="0" bIns="0" anchor="t">
+          <a:bodyPr wrap="square" lIns="0" rIns="0" tIns="0" bIns="0" anchor="t">
             <a:noAutofit/>
           </a:bodyPr>
           <a:lstStyle/>
@@ -8637,7 +8878,7 @@
           <a:noFill/>
         </p:spPr>
         <p:txBody>
-          <a:bodyPr wrap="square" lIns="0" tIns="0" rIns="0" bIns="0" anchor="t">
+          <a:bodyPr wrap="square" lIns="0" rIns="0" tIns="0" bIns="0" anchor="t">
             <a:noAutofit/>
           </a:bodyPr>
           <a:lstStyle/>
@@ -8661,7 +8902,63 @@
                 <a:latin typeface="Segoe UI"/>
                 <a:ea typeface="Microsoft YaHei"/>
               </a:rPr>
-              <a:t>→ 三格式可读、来源可查</a:t>
+              <a:t>→ </a:t>
+            </a:r>
+            <a:r>
+              <a:rPr sz="900" b="0" i="0">
+                <a:solidFill>
+                  <a:srgbClr val="136C69"/>
+                </a:solidFill>
+                <a:latin typeface="Segoe UI"/>
+                <a:ea typeface="Microsoft YaHei"/>
+              </a:rPr>
+              <a:t>三格式可读、来源可查</a:t>
+            </a:r>
+          </a:p>
+        </p:txBody>
+      </p:sp>
+      <p:sp>
+        <p:nvSpPr>
+          <p:cNvPr id="35" name="TextBox 34"/>
+          <p:cNvSpPr txBox="1"/>
+          <p:nvPr/>
+        </p:nvSpPr>
+        <p:spPr>
+          <a:xfrm>
+            <a:off x="640080" y="6419088"/>
+            <a:ext cx="8869680" cy="237744"/>
+          </a:xfrm>
+          <a:prstGeom prst="rect">
+            <a:avLst/>
+          </a:prstGeom>
+          <a:noFill/>
+        </p:spPr>
+        <p:txBody>
+          <a:bodyPr wrap="square" lIns="0" rIns="0" tIns="0" bIns="0" anchor="t">
+            <a:noAutofit/>
+          </a:bodyPr>
+          <a:lstStyle/>
+          <a:p>
+            <a:pPr algn="l">
+              <a:lnSpc>
+                <a:spcPct val="115000"/>
+              </a:lnSpc>
+              <a:spcBef>
+                <a:spcPts val="0"/>
+              </a:spcBef>
+              <a:spcAft>
+                <a:spcPts val="0"/>
+              </a:spcAft>
+            </a:pPr>
+            <a:r>
+              <a:rPr sz="850" b="0" i="0">
+                <a:solidFill>
+                  <a:srgbClr val="53676D"/>
+                </a:solidFill>
+                <a:latin typeface="Segoe UI"/>
+                <a:ea typeface="Microsoft YaHei"/>
+              </a:rPr>
+              <a:t>详细内容见 理论学习资料/ 下五份专题文档</a:t>
             </a:r>
           </a:p>
         </p:txBody>
@@ -8683,7 +8980,7 @@
           <a:noFill/>
         </p:spPr>
         <p:txBody>
-          <a:bodyPr wrap="square" lIns="0" tIns="0" rIns="0" bIns="0" anchor="t">
+          <a:bodyPr wrap="square" lIns="0" rIns="0" tIns="0" bIns="0" anchor="t">
             <a:noAutofit/>
           </a:bodyPr>
           <a:lstStyle/>
@@ -8721,7 +9018,7 @@
 </file>
 
 <file path=ppt/slides/slide5.xml><?xml version="1.0" encoding="utf-8"?>
-<p:sld xmlns:a="http://schemas.openxmlformats.org/drawingml/2006/main" xmlns:r="http://schemas.openxmlformats.org/officeDocument/2006/relationships" xmlns:p="http://schemas.openxmlformats.org/presentationml/2006/main">
+<p:sld xmlns:a="http://schemas.openxmlformats.org/drawingml/2006/main" xmlns:p="http://schemas.openxmlformats.org/presentationml/2006/main" xmlns:r="http://schemas.openxmlformats.org/officeDocument/2006/relationships">
   <p:cSld>
     <p:bg>
       <p:bgPr>
@@ -8737,14 +9034,7 @@
         <p:cNvGrpSpPr/>
         <p:nvPr/>
       </p:nvGrpSpPr>
-      <p:grpSpPr>
-        <a:xfrm>
-          <a:off x="0" y="0"/>
-          <a:ext cx="0" cy="0"/>
-          <a:chOff x="0" y="0"/>
-          <a:chExt cx="0" cy="0"/>
-        </a:xfrm>
-      </p:grpSpPr>
+      <p:grpSpPr/>
       <p:sp>
         <p:nvSpPr>
           <p:cNvPr id="2" name="TextBox 1"/>
@@ -8762,7 +9052,7 @@
           <a:noFill/>
         </p:spPr>
         <p:txBody>
-          <a:bodyPr wrap="square" lIns="0" tIns="0" rIns="0" bIns="0" anchor="t">
+          <a:bodyPr wrap="square" lIns="0" rIns="0" tIns="0" bIns="0" anchor="t">
             <a:noAutofit/>
           </a:bodyPr>
           <a:lstStyle/>
@@ -8828,7 +9118,7 @@
           <a:noFill/>
         </p:spPr>
         <p:txBody>
-          <a:bodyPr wrap="square" lIns="0" tIns="0" rIns="0" bIns="0" anchor="ctr">
+          <a:bodyPr wrap="square" lIns="0" rIns="0" tIns="0" bIns="0" anchor="ctr">
             <a:noAutofit/>
           </a:bodyPr>
           <a:lstStyle/>
@@ -8852,7 +9142,17 @@
                 <a:latin typeface="Segoe UI"/>
                 <a:ea typeface="Microsoft YaHei"/>
               </a:rPr>
-              <a:t>面外是否有利，看 K</a:t>
+              <a:t>面外是否有利，看 </a:t>
+            </a:r>
+            <a:r>
+              <a:rPr sz="2800" b="1" i="0">
+                <a:solidFill>
+                  <a:srgbClr val="172E36"/>
+                </a:solidFill>
+                <a:latin typeface="Segoe UI"/>
+                <a:ea typeface="Microsoft YaHei"/>
+              </a:rPr>
+              <a:t>K</a:t>
             </a:r>
             <a:r>
               <a:rPr sz="2016" b="1" i="0" baseline="-25000">
@@ -8904,7 +9204,6 @@
           <a:lstStyle/>
           <a:p>
             <a:pPr algn="ctr"/>
-            <a:endParaRPr/>
           </a:p>
         </p:txBody>
       </p:sp>
@@ -8935,7 +9234,6 @@
           <a:lstStyle/>
           <a:p>
             <a:pPr algn="ctr"/>
-            <a:endParaRPr/>
           </a:p>
         </p:txBody>
       </p:sp>
@@ -8956,7 +9254,7 @@
           <a:noFill/>
         </p:spPr>
         <p:txBody>
-          <a:bodyPr wrap="square" lIns="0" tIns="0" rIns="0" bIns="0" anchor="t">
+          <a:bodyPr wrap="square" lIns="0" rIns="0" tIns="0" bIns="0" anchor="t">
             <a:noAutofit/>
           </a:bodyPr>
           <a:lstStyle/>
@@ -9002,7 +9300,7 @@
           <a:noFill/>
         </p:spPr>
         <p:txBody>
-          <a:bodyPr wrap="square" lIns="0" tIns="0" rIns="0" bIns="0" anchor="t">
+          <a:bodyPr wrap="square" lIns="0" rIns="0" tIns="0" bIns="0" anchor="t">
             <a:noAutofit/>
           </a:bodyPr>
           <a:lstStyle/>
@@ -9058,7 +9356,6 @@
           <a:lstStyle/>
           <a:p>
             <a:pPr algn="ctr"/>
-            <a:endParaRPr/>
           </a:p>
         </p:txBody>
       </p:sp>
@@ -9079,7 +9376,7 @@
           <a:noFill/>
         </p:spPr>
         <p:txBody>
-          <a:bodyPr wrap="square" lIns="0" tIns="0" rIns="0" bIns="0" anchor="t">
+          <a:bodyPr wrap="square" lIns="0" rIns="0" tIns="0" bIns="0" anchor="t">
             <a:noAutofit/>
           </a:bodyPr>
           <a:lstStyle/>
@@ -9125,7 +9422,7 @@
           <a:noFill/>
         </p:spPr>
         <p:txBody>
-          <a:bodyPr wrap="square" lIns="0" tIns="0" rIns="0" bIns="0" anchor="t">
+          <a:bodyPr wrap="square" lIns="0" rIns="0" tIns="0" bIns="0" anchor="t">
             <a:noAutofit/>
           </a:bodyPr>
           <a:lstStyle/>
@@ -9201,7 +9498,6 @@
           <a:lstStyle/>
           <a:p>
             <a:pPr algn="ctr"/>
-            <a:endParaRPr/>
           </a:p>
         </p:txBody>
       </p:sp>
@@ -9222,7 +9518,7 @@
           <a:noFill/>
         </p:spPr>
         <p:txBody>
-          <a:bodyPr wrap="square" lIns="0" tIns="0" rIns="0" bIns="0" anchor="t">
+          <a:bodyPr wrap="square" lIns="0" rIns="0" tIns="0" bIns="0" anchor="t">
             <a:noAutofit/>
           </a:bodyPr>
           <a:lstStyle/>
@@ -9268,7 +9564,7 @@
           <a:noFill/>
         </p:spPr>
         <p:txBody>
-          <a:bodyPr wrap="square" lIns="0" tIns="0" rIns="0" bIns="0" anchor="t">
+          <a:bodyPr wrap="square" lIns="0" rIns="0" tIns="0" bIns="0" anchor="t">
             <a:noAutofit/>
           </a:bodyPr>
           <a:lstStyle/>
@@ -9324,7 +9620,6 @@
           <a:lstStyle/>
           <a:p>
             <a:pPr algn="ctr"/>
-            <a:endParaRPr/>
           </a:p>
         </p:txBody>
       </p:sp>
@@ -9345,7 +9640,7 @@
           <a:noFill/>
         </p:spPr>
         <p:txBody>
-          <a:bodyPr wrap="square" lIns="0" tIns="0" rIns="0" bIns="0" anchor="t">
+          <a:bodyPr wrap="square" lIns="0" rIns="0" tIns="0" bIns="0" anchor="t">
             <a:noAutofit/>
           </a:bodyPr>
           <a:lstStyle/>
@@ -9391,7 +9686,7 @@
           <a:noFill/>
         </p:spPr>
         <p:txBody>
-          <a:bodyPr wrap="square" lIns="0" tIns="0" rIns="0" bIns="0" anchor="t">
+          <a:bodyPr wrap="square" lIns="0" rIns="0" tIns="0" bIns="0" anchor="t">
             <a:noAutofit/>
           </a:bodyPr>
           <a:lstStyle/>
@@ -9449,7 +9744,6 @@
           <a:lstStyle/>
           <a:p>
             <a:pPr algn="ctr"/>
-            <a:endParaRPr/>
           </a:p>
         </p:txBody>
       </p:sp>
@@ -9470,7 +9764,7 @@
           <a:noFill/>
         </p:spPr>
         <p:txBody>
-          <a:bodyPr wrap="square" lIns="0" tIns="0" rIns="0" bIns="0" anchor="t">
+          <a:bodyPr wrap="square" lIns="0" rIns="0" tIns="0" bIns="0" anchor="t">
             <a:noAutofit/>
           </a:bodyPr>
           <a:lstStyle/>
@@ -9516,7 +9810,7 @@
           <a:noFill/>
         </p:spPr>
         <p:txBody>
-          <a:bodyPr wrap="square" lIns="0" tIns="0" rIns="0" bIns="0" anchor="ctr">
+          <a:bodyPr wrap="square" lIns="0" rIns="0" tIns="0" bIns="0" anchor="ctr">
             <a:noAutofit/>
           </a:bodyPr>
           <a:lstStyle/>
@@ -9696,7 +9990,6 @@
           <a:lstStyle/>
           <a:p>
             <a:pPr algn="ctr"/>
-            <a:endParaRPr/>
           </a:p>
         </p:txBody>
       </p:sp>
@@ -9717,7 +10010,7 @@
           <a:noFill/>
         </p:spPr>
         <p:txBody>
-          <a:bodyPr wrap="square" lIns="0" tIns="0" rIns="0" bIns="0" anchor="t">
+          <a:bodyPr wrap="square" lIns="0" rIns="0" tIns="0" bIns="0" anchor="t">
             <a:noAutofit/>
           </a:bodyPr>
           <a:lstStyle/>
@@ -9763,7 +10056,7 @@
           <a:noFill/>
         </p:spPr>
         <p:txBody>
-          <a:bodyPr wrap="square" lIns="0" tIns="0" rIns="0" bIns="0" anchor="t">
+          <a:bodyPr wrap="square" lIns="0" rIns="0" tIns="0" bIns="0" anchor="t">
             <a:noAutofit/>
           </a:bodyPr>
           <a:lstStyle/>
@@ -9930,7 +10223,17 @@
                 <a:latin typeface="Segoe UI"/>
                 <a:ea typeface="Microsoft YaHei"/>
               </a:rPr>
-              <a:t>²/2 = 5.65×10</a:t>
+              <a:t>²/2 = </a:t>
+            </a:r>
+            <a:r>
+              <a:rPr sz="1150" b="0" i="0">
+                <a:solidFill>
+                  <a:srgbClr val="3A4A50"/>
+                </a:solidFill>
+                <a:latin typeface="Segoe UI"/>
+                <a:ea typeface="Microsoft YaHei"/>
+              </a:rPr>
+              <a:t>5.65×10</a:t>
             </a:r>
             <a:r>
               <a:rPr sz="827" b="0" i="0" baseline="30000">
@@ -9990,7 +10293,17 @@
                 <a:latin typeface="Segoe UI"/>
                 <a:ea typeface="Microsoft YaHei"/>
               </a:rPr>
-              <a:t> = 0.911</a:t>
+              <a:t> = </a:t>
+            </a:r>
+            <a:r>
+              <a:rPr sz="1150" b="0" i="0">
+                <a:solidFill>
+                  <a:srgbClr val="3A4A50"/>
+                </a:solidFill>
+                <a:latin typeface="Segoe UI"/>
+                <a:ea typeface="Microsoft YaHei"/>
+              </a:rPr>
+              <a:t>0.911</a:t>
             </a:r>
           </a:p>
           <a:p>
@@ -10013,7 +10326,17 @@
                 <a:latin typeface="Segoe UI"/>
                 <a:ea typeface="Microsoft YaHei"/>
               </a:rPr>
-              <a:t>阈值 5.15×10</a:t>
+              <a:t>阈值 </a:t>
+            </a:r>
+            <a:r>
+              <a:rPr sz="1150" b="0" i="0">
+                <a:solidFill>
+                  <a:srgbClr val="3A4A50"/>
+                </a:solidFill>
+                <a:latin typeface="Segoe UI"/>
+                <a:ea typeface="Microsoft YaHei"/>
+              </a:rPr>
+              <a:t>5.15×10</a:t>
             </a:r>
             <a:r>
               <a:rPr sz="827" b="0" i="0" baseline="30000">
@@ -10073,7 +10396,17 @@
                 <a:latin typeface="Segoe UI"/>
                 <a:ea typeface="Microsoft YaHei"/>
               </a:rPr>
-              <a:t> = 2.85×10</a:t>
+              <a:t> = </a:t>
+            </a:r>
+            <a:r>
+              <a:rPr sz="1150" b="0" i="0">
+                <a:solidFill>
+                  <a:srgbClr val="3A4A50"/>
+                </a:solidFill>
+                <a:latin typeface="Segoe UI"/>
+                <a:ea typeface="Microsoft YaHei"/>
+              </a:rPr>
+              <a:t>2.85×10</a:t>
             </a:r>
             <a:r>
               <a:rPr sz="827" b="0" i="0" baseline="30000">
@@ -10136,7 +10469,27 @@
                 <a:latin typeface="Segoe UI"/>
                 <a:ea typeface="Microsoft YaHei"/>
               </a:rPr>
-              <a:t> = 9.4 nm  ⇒ 网格 2 nm 起步，再以 1 nm 复算</a:t>
+              <a:t> = </a:t>
+            </a:r>
+            <a:r>
+              <a:rPr sz="1150" b="0" i="0">
+                <a:solidFill>
+                  <a:srgbClr val="3A4A50"/>
+                </a:solidFill>
+                <a:latin typeface="Segoe UI"/>
+                <a:ea typeface="Microsoft YaHei"/>
+              </a:rPr>
+              <a:t>9.4</a:t>
+            </a:r>
+            <a:r>
+              <a:rPr sz="1150" b="0" i="0">
+                <a:solidFill>
+                  <a:srgbClr val="3A4A50"/>
+                </a:solidFill>
+                <a:latin typeface="Segoe UI"/>
+                <a:ea typeface="Microsoft YaHei"/>
+              </a:rPr>
+              <a:t> nm  ⇒ 网格 2 nm 起步，再以 1 nm 复算</a:t>
             </a:r>
           </a:p>
         </p:txBody>
@@ -10158,7 +10511,7 @@
           <a:noFill/>
         </p:spPr>
         <p:txBody>
-          <a:bodyPr wrap="square" lIns="0" tIns="0" rIns="0" bIns="0" anchor="t">
+          <a:bodyPr wrap="square" lIns="0" rIns="0" tIns="0" bIns="0" anchor="t">
             <a:noAutofit/>
           </a:bodyPr>
           <a:lstStyle/>
@@ -10269,6 +10622,52 @@
       </p:sp>
       <p:sp>
         <p:nvSpPr>
+          <p:cNvPr id="24" name="TextBox 23"/>
+          <p:cNvSpPr txBox="1"/>
+          <p:nvPr/>
+        </p:nvSpPr>
+        <p:spPr>
+          <a:xfrm>
+            <a:off x="640080" y="6419088"/>
+            <a:ext cx="8869680" cy="237744"/>
+          </a:xfrm>
+          <a:prstGeom prst="rect">
+            <a:avLst/>
+          </a:prstGeom>
+          <a:noFill/>
+        </p:spPr>
+        <p:txBody>
+          <a:bodyPr wrap="square" lIns="0" rIns="0" tIns="0" bIns="0" anchor="t">
+            <a:noAutofit/>
+          </a:bodyPr>
+          <a:lstStyle/>
+          <a:p>
+            <a:pPr algn="l">
+              <a:lnSpc>
+                <a:spcPct val="115000"/>
+              </a:lnSpc>
+              <a:spcBef>
+                <a:spcPts val="0"/>
+              </a:spcBef>
+              <a:spcAft>
+                <a:spcPts val="0"/>
+              </a:spcAft>
+            </a:pPr>
+            <a:r>
+              <a:rPr sz="850" b="0" i="0">
+                <a:solidFill>
+                  <a:srgbClr val="53676D"/>
+                </a:solidFill>
+                <a:latin typeface="Segoe UI"/>
+                <a:ea typeface="Microsoft YaHei"/>
+              </a:rPr>
+              <a:t>推导见 2-微磁学四种能量竞争_学习笔记.md §8；参数见 3-Fidimag…md §7</a:t>
+            </a:r>
+          </a:p>
+        </p:txBody>
+      </p:sp>
+      <p:sp>
+        <p:nvSpPr>
           <p:cNvPr id="25" name="TextBox 24"/>
           <p:cNvSpPr txBox="1"/>
           <p:nvPr/>
@@ -10284,7 +10683,7 @@
           <a:noFill/>
         </p:spPr>
         <p:txBody>
-          <a:bodyPr wrap="square" lIns="0" tIns="0" rIns="0" bIns="0" anchor="t">
+          <a:bodyPr wrap="square" lIns="0" rIns="0" tIns="0" bIns="0" anchor="t">
             <a:noAutofit/>
           </a:bodyPr>
           <a:lstStyle/>
@@ -10322,7 +10721,7 @@
 </file>
 
 <file path=ppt/slides/slide6.xml><?xml version="1.0" encoding="utf-8"?>
-<p:sld xmlns:a="http://schemas.openxmlformats.org/drawingml/2006/main" xmlns:r="http://schemas.openxmlformats.org/officeDocument/2006/relationships" xmlns:p="http://schemas.openxmlformats.org/presentationml/2006/main">
+<p:sld xmlns:a="http://schemas.openxmlformats.org/drawingml/2006/main" xmlns:p="http://schemas.openxmlformats.org/presentationml/2006/main" xmlns:r="http://schemas.openxmlformats.org/officeDocument/2006/relationships">
   <p:cSld>
     <p:bg>
       <p:bgPr>
@@ -10338,14 +10737,7 @@
         <p:cNvGrpSpPr/>
         <p:nvPr/>
       </p:nvGrpSpPr>
-      <p:grpSpPr>
-        <a:xfrm>
-          <a:off x="0" y="0"/>
-          <a:ext cx="0" cy="0"/>
-          <a:chOff x="0" y="0"/>
-          <a:chExt cx="0" cy="0"/>
-        </a:xfrm>
-      </p:grpSpPr>
+      <p:grpSpPr/>
       <p:sp>
         <p:nvSpPr>
           <p:cNvPr id="2" name="TextBox 1"/>
@@ -10363,7 +10755,7 @@
           <a:noFill/>
         </p:spPr>
         <p:txBody>
-          <a:bodyPr wrap="square" lIns="0" tIns="0" rIns="0" bIns="0" anchor="t">
+          <a:bodyPr wrap="square" lIns="0" rIns="0" tIns="0" bIns="0" anchor="t">
             <a:noAutofit/>
           </a:bodyPr>
           <a:lstStyle/>
@@ -10429,7 +10821,7 @@
           <a:noFill/>
         </p:spPr>
         <p:txBody>
-          <a:bodyPr wrap="square" lIns="0" tIns="0" rIns="0" bIns="0" anchor="ctr">
+          <a:bodyPr wrap="square" lIns="0" rIns="0" tIns="0" bIns="0" anchor="ctr">
             <a:noAutofit/>
           </a:bodyPr>
           <a:lstStyle/>
@@ -10453,7 +10845,17 @@
                 <a:latin typeface="Segoe UI"/>
                 <a:ea typeface="Microsoft YaHei"/>
               </a:rPr>
-              <a:t>平面形状改的是面内各向异性，厚度才主导 N</a:t>
+              <a:t>平面形状改的是面内各向异性，厚度才主导 </a:t>
+            </a:r>
+            <a:r>
+              <a:rPr sz="2800" b="1" i="0">
+                <a:solidFill>
+                  <a:srgbClr val="172E36"/>
+                </a:solidFill>
+                <a:latin typeface="Segoe UI"/>
+                <a:ea typeface="Microsoft YaHei"/>
+              </a:rPr>
+              <a:t>N</a:t>
             </a:r>
             <a:r>
               <a:rPr sz="2016" b="1" i="0" baseline="-25000">
@@ -10495,7 +10897,6 @@
           <a:lstStyle/>
           <a:p>
             <a:pPr algn="ctr"/>
-            <a:endParaRPr/>
           </a:p>
         </p:txBody>
       </p:sp>
@@ -10516,39 +10917,15 @@
             <a:tbl>
               <a:tblPr firstRow="1" bandRow="1"/>
               <a:tblGrid>
-                <a:gridCol w="2194560">
-                  <a:extLst>
-                    <a:ext uri="{9D8B030D-6E8A-4147-A177-3AD203B41FA5}">
-                      <a16:colId xmlns:a16="http://schemas.microsoft.com/office/drawing/2014/main" val="20000"/>
-                    </a:ext>
-                  </a:extLst>
-                </a:gridCol>
-                <a:gridCol w="1371600">
-                  <a:extLst>
-                    <a:ext uri="{9D8B030D-6E8A-4147-A177-3AD203B41FA5}">
-                      <a16:colId xmlns:a16="http://schemas.microsoft.com/office/drawing/2014/main" val="20001"/>
-                    </a:ext>
-                  </a:extLst>
-                </a:gridCol>
-                <a:gridCol w="1371600">
-                  <a:extLst>
-                    <a:ext uri="{9D8B030D-6E8A-4147-A177-3AD203B41FA5}">
-                      <a16:colId xmlns:a16="http://schemas.microsoft.com/office/drawing/2014/main" val="20002"/>
-                    </a:ext>
-                  </a:extLst>
-                </a:gridCol>
-                <a:gridCol w="1371600">
-                  <a:extLst>
-                    <a:ext uri="{9D8B030D-6E8A-4147-A177-3AD203B41FA5}">
-                      <a16:colId xmlns:a16="http://schemas.microsoft.com/office/drawing/2014/main" val="20003"/>
-                    </a:ext>
-                  </a:extLst>
-                </a:gridCol>
+                <a:gridCol w="2194560"/>
+                <a:gridCol w="1371600"/>
+                <a:gridCol w="1371600"/>
+                <a:gridCol w="1371600"/>
               </a:tblGrid>
               <a:tr h="411480">
                 <a:tc>
                   <a:txBody>
-                    <a:bodyPr/>
+                    <a:bodyPr wrap="none"/>
                     <a:lstStyle/>
                     <a:p>
                       <a:pPr algn="l"/>
@@ -10572,7 +10949,7 @@
                 </a:tc>
                 <a:tc>
                   <a:txBody>
-                    <a:bodyPr/>
+                    <a:bodyPr wrap="none"/>
                     <a:lstStyle/>
                     <a:p>
                       <a:pPr algn="ctr"/>
@@ -10606,7 +10983,7 @@
                 </a:tc>
                 <a:tc>
                   <a:txBody>
-                    <a:bodyPr/>
+                    <a:bodyPr wrap="none"/>
                     <a:lstStyle/>
                     <a:p>
                       <a:pPr algn="ctr"/>
@@ -10640,7 +11017,7 @@
                 </a:tc>
                 <a:tc>
                   <a:txBody>
-                    <a:bodyPr/>
+                    <a:bodyPr wrap="none"/>
                     <a:lstStyle/>
                     <a:p>
                       <a:pPr algn="ctr"/>
@@ -10672,16 +11049,11 @@
                     </a:solidFill>
                   </a:tcPr>
                 </a:tc>
-                <a:extLst>
-                  <a:ext uri="{0D108BD9-81ED-4DB2-BD59-A6C34878D82A}">
-                    <a16:rowId xmlns:a16="http://schemas.microsoft.com/office/drawing/2014/main" val="10000"/>
-                  </a:ext>
-                </a:extLst>
               </a:tr>
               <a:tr h="411480">
                 <a:tc>
                   <a:txBody>
-                    <a:bodyPr/>
+                    <a:bodyPr wrap="none"/>
                     <a:lstStyle/>
                     <a:p>
                       <a:pPr algn="l"/>
@@ -10705,7 +11077,7 @@
                 </a:tc>
                 <a:tc>
                   <a:txBody>
-                    <a:bodyPr/>
+                    <a:bodyPr wrap="none"/>
                     <a:lstStyle/>
                     <a:p>
                       <a:pPr algn="ctr"/>
@@ -10729,7 +11101,7 @@
                 </a:tc>
                 <a:tc>
                   <a:txBody>
-                    <a:bodyPr/>
+                    <a:bodyPr wrap="none"/>
                     <a:lstStyle/>
                     <a:p>
                       <a:pPr algn="ctr"/>
@@ -10753,7 +11125,7 @@
                 </a:tc>
                 <a:tc>
                   <a:txBody>
-                    <a:bodyPr/>
+                    <a:bodyPr wrap="none"/>
                     <a:lstStyle/>
                     <a:p>
                       <a:pPr algn="ctr"/>
@@ -10775,16 +11147,11 @@
                     </a:solidFill>
                   </a:tcPr>
                 </a:tc>
-                <a:extLst>
-                  <a:ext uri="{0D108BD9-81ED-4DB2-BD59-A6C34878D82A}">
-                    <a16:rowId xmlns:a16="http://schemas.microsoft.com/office/drawing/2014/main" val="10001"/>
-                  </a:ext>
-                </a:extLst>
               </a:tr>
               <a:tr h="411480">
                 <a:tc>
                   <a:txBody>
-                    <a:bodyPr/>
+                    <a:bodyPr wrap="none"/>
                     <a:lstStyle/>
                     <a:p>
                       <a:pPr algn="l"/>
@@ -10808,7 +11175,7 @@
                 </a:tc>
                 <a:tc>
                   <a:txBody>
-                    <a:bodyPr/>
+                    <a:bodyPr wrap="none"/>
                     <a:lstStyle/>
                     <a:p>
                       <a:pPr algn="ctr"/>
@@ -10832,7 +11199,7 @@
                 </a:tc>
                 <a:tc>
                   <a:txBody>
-                    <a:bodyPr/>
+                    <a:bodyPr wrap="none"/>
                     <a:lstStyle/>
                     <a:p>
                       <a:pPr algn="ctr"/>
@@ -10856,7 +11223,7 @@
                 </a:tc>
                 <a:tc>
                   <a:txBody>
-                    <a:bodyPr/>
+                    <a:bodyPr wrap="none"/>
                     <a:lstStyle/>
                     <a:p>
                       <a:pPr algn="ctr"/>
@@ -10878,16 +11245,11 @@
                     </a:solidFill>
                   </a:tcPr>
                 </a:tc>
-                <a:extLst>
-                  <a:ext uri="{0D108BD9-81ED-4DB2-BD59-A6C34878D82A}">
-                    <a16:rowId xmlns:a16="http://schemas.microsoft.com/office/drawing/2014/main" val="10002"/>
-                  </a:ext>
-                </a:extLst>
               </a:tr>
               <a:tr h="411480">
                 <a:tc>
                   <a:txBody>
-                    <a:bodyPr/>
+                    <a:bodyPr wrap="none"/>
                     <a:lstStyle/>
                     <a:p>
                       <a:pPr algn="l"/>
@@ -10911,7 +11273,7 @@
                 </a:tc>
                 <a:tc>
                   <a:txBody>
-                    <a:bodyPr/>
+                    <a:bodyPr wrap="none"/>
                     <a:lstStyle/>
                     <a:p>
                       <a:pPr algn="ctr"/>
@@ -10935,7 +11297,7 @@
                 </a:tc>
                 <a:tc>
                   <a:txBody>
-                    <a:bodyPr/>
+                    <a:bodyPr wrap="none"/>
                     <a:lstStyle/>
                     <a:p>
                       <a:pPr algn="ctr"/>
@@ -10959,7 +11321,7 @@
                 </a:tc>
                 <a:tc>
                   <a:txBody>
-                    <a:bodyPr/>
+                    <a:bodyPr wrap="none"/>
                     <a:lstStyle/>
                     <a:p>
                       <a:pPr algn="ctr"/>
@@ -10981,11 +11343,6 @@
                     </a:solidFill>
                   </a:tcPr>
                 </a:tc>
-                <a:extLst>
-                  <a:ext uri="{0D108BD9-81ED-4DB2-BD59-A6C34878D82A}">
-                    <a16:rowId xmlns:a16="http://schemas.microsoft.com/office/drawing/2014/main" val="10003"/>
-                  </a:ext>
-                </a:extLst>
               </a:tr>
             </a:tbl>
           </a:graphicData>
@@ -11008,7 +11365,7 @@
           <a:noFill/>
         </p:spPr>
         <p:txBody>
-          <a:bodyPr wrap="square" lIns="0" tIns="0" rIns="0" bIns="0" anchor="t">
+          <a:bodyPr wrap="square" lIns="0" rIns="0" tIns="0" bIns="0" anchor="t">
             <a:noAutofit/>
           </a:bodyPr>
           <a:lstStyle/>
@@ -11064,7 +11421,6 @@
           <a:lstStyle/>
           <a:p>
             <a:pPr algn="ctr"/>
-            <a:endParaRPr/>
           </a:p>
         </p:txBody>
       </p:sp>
@@ -11095,7 +11451,6 @@
           <a:lstStyle/>
           <a:p>
             <a:pPr algn="ctr"/>
-            <a:endParaRPr/>
           </a:p>
         </p:txBody>
       </p:sp>
@@ -11126,7 +11481,6 @@
           <a:lstStyle/>
           <a:p>
             <a:pPr algn="ctr"/>
-            <a:endParaRPr/>
           </a:p>
         </p:txBody>
       </p:sp>
@@ -11147,7 +11501,7 @@
           <a:noFill/>
         </p:spPr>
         <p:txBody>
-          <a:bodyPr wrap="square" lIns="0" tIns="0" rIns="0" bIns="0" anchor="ctr">
+          <a:bodyPr wrap="square" lIns="0" rIns="0" tIns="0" bIns="0" anchor="ctr">
             <a:noAutofit/>
           </a:bodyPr>
           <a:lstStyle/>
@@ -11213,7 +11567,7 @@
           <a:noFill/>
         </p:spPr>
         <p:txBody>
-          <a:bodyPr wrap="square" lIns="0" tIns="0" rIns="0" bIns="0" anchor="t">
+          <a:bodyPr wrap="square" lIns="0" rIns="0" tIns="0" bIns="0" anchor="t">
             <a:noAutofit/>
           </a:bodyPr>
           <a:lstStyle/>
@@ -11299,7 +11653,7 @@
           <a:noFill/>
         </p:spPr>
         <p:txBody>
-          <a:bodyPr wrap="square" lIns="0" tIns="0" rIns="0" bIns="0" anchor="t">
+          <a:bodyPr wrap="square" lIns="0" rIns="0" tIns="0" bIns="0" anchor="t">
             <a:noAutofit/>
           </a:bodyPr>
           <a:lstStyle/>
@@ -11375,7 +11729,7 @@
           <a:noFill/>
         </p:spPr>
         <p:txBody>
-          <a:bodyPr wrap="square" lIns="0" tIns="0" rIns="0" bIns="0" anchor="t">
+          <a:bodyPr wrap="square" lIns="0" rIns="0" tIns="0" bIns="0" anchor="t">
             <a:noAutofit/>
           </a:bodyPr>
           <a:lstStyle/>
@@ -11421,7 +11775,7 @@
           <a:noFill/>
         </p:spPr>
         <p:txBody>
-          <a:bodyPr wrap="square" lIns="0" tIns="0" rIns="0" bIns="0" anchor="t">
+          <a:bodyPr wrap="square" lIns="0" rIns="0" tIns="0" bIns="0" anchor="t">
             <a:noAutofit/>
           </a:bodyPr>
           <a:lstStyle/>
@@ -11445,7 +11799,17 @@
                 <a:latin typeface="Segoe UI"/>
                 <a:ea typeface="Microsoft YaHei"/>
               </a:rPr>
-              <a:t>同面积同厚度，方形改长条：N</a:t>
+              <a:t>同面积同厚度，方形改长条：</a:t>
+            </a:r>
+            <a:r>
+              <a:rPr sz="1050" b="0" i="0">
+                <a:solidFill>
+                  <a:srgbClr val="3A4A50"/>
+                </a:solidFill>
+                <a:latin typeface="Segoe UI"/>
+                <a:ea typeface="Microsoft YaHei"/>
+              </a:rPr>
+              <a:t>N</a:t>
             </a:r>
             <a:r>
               <a:rPr sz="756" b="0" i="0" baseline="-25000">
@@ -11465,7 +11829,17 @@
                 <a:latin typeface="Segoe UI"/>
                 <a:ea typeface="Microsoft YaHei"/>
               </a:rPr>
-              <a:t> 几乎不变，变的是面内 N</a:t>
+              <a:t> 几乎不变，变的是面内 </a:t>
+            </a:r>
+            <a:r>
+              <a:rPr sz="1050" b="0" i="0">
+                <a:solidFill>
+                  <a:srgbClr val="3A4A50"/>
+                </a:solidFill>
+                <a:latin typeface="Segoe UI"/>
+                <a:ea typeface="Microsoft YaHei"/>
+              </a:rPr>
+              <a:t>N</a:t>
             </a:r>
             <a:r>
               <a:rPr sz="756" b="0" i="0" baseline="-25000">
@@ -11485,7 +11859,17 @@
                 <a:latin typeface="Segoe UI"/>
                 <a:ea typeface="Microsoft YaHei"/>
               </a:rPr>
-              <a:t> 0.030→0.014、N</a:t>
+              <a:t> 0.030→0.014、</a:t>
+            </a:r>
+            <a:r>
+              <a:rPr sz="1050" b="0" i="0">
+                <a:solidFill>
+                  <a:srgbClr val="3A4A50"/>
+                </a:solidFill>
+                <a:latin typeface="Segoe UI"/>
+                <a:ea typeface="Microsoft YaHei"/>
+              </a:rPr>
+              <a:t>N</a:t>
             </a:r>
             <a:r>
               <a:rPr sz="756" b="0" i="0" baseline="-25000">
@@ -11537,7 +11921,6 @@
           <a:lstStyle/>
           <a:p>
             <a:pPr algn="ctr"/>
-            <a:endParaRPr/>
           </a:p>
         </p:txBody>
       </p:sp>
@@ -11558,7 +11941,7 @@
           <a:noFill/>
         </p:spPr>
         <p:txBody>
-          <a:bodyPr wrap="square" lIns="0" tIns="0" rIns="0" bIns="0" anchor="t">
+          <a:bodyPr wrap="square" lIns="0" rIns="0" tIns="0" bIns="0" anchor="t">
             <a:noAutofit/>
           </a:bodyPr>
           <a:lstStyle/>
@@ -11604,7 +11987,7 @@
           <a:noFill/>
         </p:spPr>
         <p:txBody>
-          <a:bodyPr wrap="square" lIns="0" tIns="0" rIns="0" bIns="0" anchor="t">
+          <a:bodyPr wrap="square" lIns="0" rIns="0" tIns="0" bIns="0" anchor="t">
             <a:noAutofit/>
           </a:bodyPr>
           <a:lstStyle/>
@@ -11628,7 +12011,17 @@
                 <a:latin typeface="Segoe UI"/>
                 <a:ea typeface="Microsoft YaHei"/>
               </a:rPr>
-              <a:t>厚度 4 → 20 nm：N</a:t>
+              <a:t>厚度 4 → 20 nm：</a:t>
+            </a:r>
+            <a:r>
+              <a:rPr sz="1050" b="0" i="0">
+                <a:solidFill>
+                  <a:srgbClr val="3A4A50"/>
+                </a:solidFill>
+                <a:latin typeface="Segoe UI"/>
+                <a:ea typeface="Microsoft YaHei"/>
+              </a:rPr>
+              <a:t>N</a:t>
             </a:r>
             <a:r>
               <a:rPr sz="756" b="0" i="0" baseline="-25000">
@@ -11648,7 +12041,17 @@
                 <a:latin typeface="Segoe UI"/>
                 <a:ea typeface="Microsoft YaHei"/>
               </a:rPr>
-              <a:t> 明显下降，厚度才是 N</a:t>
+              <a:t> 明显下降，厚度才是 </a:t>
+            </a:r>
+            <a:r>
+              <a:rPr sz="1050" b="0" i="0">
+                <a:solidFill>
+                  <a:srgbClr val="3A4A50"/>
+                </a:solidFill>
+                <a:latin typeface="Segoe UI"/>
+                <a:ea typeface="Microsoft YaHei"/>
+              </a:rPr>
+              <a:t>N</a:t>
             </a:r>
             <a:r>
               <a:rPr sz="756" b="0" i="0" baseline="-25000">
@@ -11700,7 +12103,6 @@
           <a:lstStyle/>
           <a:p>
             <a:pPr algn="ctr"/>
-            <a:endParaRPr/>
           </a:p>
         </p:txBody>
       </p:sp>
@@ -11721,7 +12123,7 @@
           <a:noFill/>
         </p:spPr>
         <p:txBody>
-          <a:bodyPr wrap="square" lIns="0" tIns="0" rIns="0" bIns="0" anchor="t">
+          <a:bodyPr wrap="square" lIns="0" rIns="0" tIns="0" bIns="0" anchor="t">
             <a:noAutofit/>
           </a:bodyPr>
           <a:lstStyle/>
@@ -11767,7 +12169,7 @@
           <a:noFill/>
         </p:spPr>
         <p:txBody>
-          <a:bodyPr wrap="square" lIns="0" tIns="0" rIns="0" bIns="0" anchor="t">
+          <a:bodyPr wrap="square" lIns="0" rIns="0" tIns="0" bIns="0" anchor="t">
             <a:noAutofit/>
           </a:bodyPr>
           <a:lstStyle/>
@@ -11791,7 +12193,17 @@
                 <a:latin typeface="Segoe UI"/>
                 <a:ea typeface="Microsoft YaHei"/>
               </a:rPr>
-              <a:t>中心点 N</a:t>
+              <a:t>中心点 </a:t>
+            </a:r>
+            <a:r>
+              <a:rPr sz="1050" b="0" i="0">
+                <a:solidFill>
+                  <a:srgbClr val="3A4A50"/>
+                </a:solidFill>
+                <a:latin typeface="Segoe UI"/>
+                <a:ea typeface="Microsoft YaHei"/>
+              </a:rPr>
+              <a:t>N</a:t>
             </a:r>
             <a:r>
               <a:rPr sz="756" b="0" i="0" baseline="-25000">
@@ -11811,7 +12223,17 @@
                 <a:latin typeface="Segoe UI"/>
                 <a:ea typeface="Microsoft YaHei"/>
               </a:rPr>
-              <a:t> 比体积平均高 4.37%；用无限薄膜 N</a:t>
+              <a:t> 比体积平均高 4.37%；用无限薄膜 </a:t>
+            </a:r>
+            <a:r>
+              <a:rPr sz="1050" b="0" i="0">
+                <a:solidFill>
+                  <a:srgbClr val="3A4A50"/>
+                </a:solidFill>
+                <a:latin typeface="Segoe UI"/>
+                <a:ea typeface="Microsoft YaHei"/>
+              </a:rPr>
+              <a:t>N</a:t>
             </a:r>
             <a:r>
               <a:rPr sz="756" b="0" i="0" baseline="-25000">
@@ -11853,7 +12275,7 @@
           <a:noFill/>
         </p:spPr>
         <p:txBody>
-          <a:bodyPr wrap="square" lIns="0" tIns="0" rIns="0" bIns="0" anchor="t">
+          <a:bodyPr wrap="square" lIns="0" rIns="0" tIns="0" bIns="0" anchor="t">
             <a:noAutofit/>
           </a:bodyPr>
           <a:lstStyle/>
@@ -11899,7 +12321,7 @@
           <a:noFill/>
         </p:spPr>
         <p:txBody>
-          <a:bodyPr wrap="square" lIns="0" tIns="0" rIns="0" bIns="0" anchor="t">
+          <a:bodyPr wrap="square" lIns="0" rIns="0" tIns="0" bIns="0" anchor="t">
             <a:noAutofit/>
           </a:bodyPr>
           <a:lstStyle/>
@@ -11937,7 +12359,7 @@
 </file>
 
 <file path=ppt/slides/slide7.xml><?xml version="1.0" encoding="utf-8"?>
-<p:sld xmlns:a="http://schemas.openxmlformats.org/drawingml/2006/main" xmlns:r="http://schemas.openxmlformats.org/officeDocument/2006/relationships" xmlns:p="http://schemas.openxmlformats.org/presentationml/2006/main">
+<p:sld xmlns:a="http://schemas.openxmlformats.org/drawingml/2006/main" xmlns:p="http://schemas.openxmlformats.org/presentationml/2006/main" xmlns:r="http://schemas.openxmlformats.org/officeDocument/2006/relationships">
   <p:cSld>
     <p:bg>
       <p:bgPr>
@@ -11953,14 +12375,7 @@
         <p:cNvGrpSpPr/>
         <p:nvPr/>
       </p:nvGrpSpPr>
-      <p:grpSpPr>
-        <a:xfrm>
-          <a:off x="0" y="0"/>
-          <a:ext cx="0" cy="0"/>
-          <a:chOff x="0" y="0"/>
-          <a:chExt cx="0" cy="0"/>
-        </a:xfrm>
-      </p:grpSpPr>
+      <p:grpSpPr/>
       <p:sp>
         <p:nvSpPr>
           <p:cNvPr id="2" name="TextBox 1"/>
@@ -11978,7 +12393,7 @@
           <a:noFill/>
         </p:spPr>
         <p:txBody>
-          <a:bodyPr wrap="square" lIns="0" tIns="0" rIns="0" bIns="0" anchor="t">
+          <a:bodyPr wrap="square" lIns="0" rIns="0" tIns="0" bIns="0" anchor="t">
             <a:noAutofit/>
           </a:bodyPr>
           <a:lstStyle/>
@@ -12044,7 +12459,7 @@
           <a:noFill/>
         </p:spPr>
         <p:txBody>
-          <a:bodyPr wrap="square" lIns="0" tIns="0" rIns="0" bIns="0" anchor="ctr">
+          <a:bodyPr wrap="square" lIns="0" rIns="0" tIns="0" bIns="0" anchor="ctr">
             <a:noAutofit/>
           </a:bodyPr>
           <a:lstStyle/>
@@ -12100,7 +12515,6 @@
           <a:lstStyle/>
           <a:p>
             <a:pPr algn="ctr"/>
-            <a:endParaRPr/>
           </a:p>
         </p:txBody>
       </p:sp>
@@ -12135,7 +12549,6 @@
           <a:lstStyle/>
           <a:p>
             <a:pPr algn="ctr"/>
-            <a:endParaRPr/>
           </a:p>
         </p:txBody>
       </p:sp>
@@ -12166,7 +12579,6 @@
           <a:lstStyle/>
           <a:p>
             <a:pPr algn="ctr"/>
-            <a:endParaRPr/>
           </a:p>
         </p:txBody>
       </p:sp>
@@ -12187,7 +12599,7 @@
           <a:noFill/>
         </p:spPr>
         <p:txBody>
-          <a:bodyPr wrap="square" lIns="0" tIns="0" rIns="0" bIns="0" anchor="t">
+          <a:bodyPr wrap="square" lIns="0" rIns="0" tIns="0" bIns="0" anchor="t">
             <a:noAutofit/>
           </a:bodyPr>
           <a:lstStyle/>
@@ -12233,7 +12645,7 @@
           <a:noFill/>
         </p:spPr>
         <p:txBody>
-          <a:bodyPr wrap="square" lIns="0" tIns="0" rIns="0" bIns="0" anchor="t">
+          <a:bodyPr wrap="square" lIns="0" rIns="0" tIns="0" bIns="0" anchor="t">
             <a:noAutofit/>
           </a:bodyPr>
           <a:lstStyle/>
@@ -12279,7 +12691,7 @@
           <a:noFill/>
         </p:spPr>
         <p:txBody>
-          <a:bodyPr wrap="square" lIns="0" tIns="0" rIns="0" bIns="0" anchor="t">
+          <a:bodyPr wrap="square" lIns="0" rIns="0" tIns="0" bIns="0" anchor="t">
             <a:noAutofit/>
           </a:bodyPr>
           <a:lstStyle/>
@@ -12303,7 +12715,17 @@
                 <a:latin typeface="Segoe UI"/>
                 <a:ea typeface="Microsoft YaHei"/>
               </a:rPr>
-              <a:t>对 OOMMF 基准：7.49×10</a:t>
+              <a:t>对 OOMMF 基准：</a:t>
+            </a:r>
+            <a:r>
+              <a:rPr sz="1150" b="0" i="0">
+                <a:solidFill>
+                  <a:srgbClr val="3A4A50"/>
+                </a:solidFill>
+                <a:latin typeface="Segoe UI"/>
+                <a:ea typeface="Microsoft YaHei"/>
+              </a:rPr>
+              <a:t>7.49×10</a:t>
             </a:r>
             <a:r>
               <a:rPr sz="827" b="0" i="0" baseline="30000">
@@ -12336,7 +12758,17 @@
                 <a:latin typeface="Segoe UI"/>
                 <a:ea typeface="Microsoft YaHei"/>
               </a:rPr>
-              <a:t>迹误差：4.02×10</a:t>
+              <a:t>迹误差：</a:t>
+            </a:r>
+            <a:r>
+              <a:rPr sz="1150" b="0" i="0">
+                <a:solidFill>
+                  <a:srgbClr val="3A4A50"/>
+                </a:solidFill>
+                <a:latin typeface="Segoe UI"/>
+                <a:ea typeface="Microsoft YaHei"/>
+              </a:rPr>
+              <a:t>4.02×10</a:t>
             </a:r>
             <a:r>
               <a:rPr sz="827" b="0" i="0" baseline="30000">
@@ -12369,7 +12801,17 @@
                 <a:latin typeface="Segoe UI"/>
                 <a:ea typeface="Microsoft YaHei"/>
               </a:rPr>
-              <a:t>独立积分交叉验证：1.84×10</a:t>
+              <a:t>独立积分交叉验证：</a:t>
+            </a:r>
+            <a:r>
+              <a:rPr sz="1150" b="0" i="0">
+                <a:solidFill>
+                  <a:srgbClr val="3A4A50"/>
+                </a:solidFill>
+                <a:latin typeface="Segoe UI"/>
+                <a:ea typeface="Microsoft YaHei"/>
+              </a:rPr>
+              <a:t>1.84×10</a:t>
             </a:r>
             <a:r>
               <a:rPr sz="827" b="0" i="0" baseline="30000">
@@ -12401,7 +12843,7 @@
           <a:noFill/>
         </p:spPr>
         <p:txBody>
-          <a:bodyPr wrap="square" lIns="0" tIns="0" rIns="0" bIns="0" anchor="t">
+          <a:bodyPr wrap="square" lIns="0" rIns="0" tIns="0" bIns="0" anchor="t">
             <a:noAutofit/>
           </a:bodyPr>
           <a:lstStyle/>
@@ -12461,7 +12903,6 @@
           <a:lstStyle/>
           <a:p>
             <a:pPr algn="ctr"/>
-            <a:endParaRPr/>
           </a:p>
         </p:txBody>
       </p:sp>
@@ -12492,7 +12933,6 @@
           <a:lstStyle/>
           <a:p>
             <a:pPr algn="ctr"/>
-            <a:endParaRPr/>
           </a:p>
         </p:txBody>
       </p:sp>
@@ -12513,7 +12953,7 @@
           <a:noFill/>
         </p:spPr>
         <p:txBody>
-          <a:bodyPr wrap="square" lIns="0" tIns="0" rIns="0" bIns="0" anchor="t">
+          <a:bodyPr wrap="square" lIns="0" rIns="0" tIns="0" bIns="0" anchor="t">
             <a:noAutofit/>
           </a:bodyPr>
           <a:lstStyle/>
@@ -12559,7 +12999,7 @@
           <a:noFill/>
         </p:spPr>
         <p:txBody>
-          <a:bodyPr wrap="square" lIns="0" tIns="0" rIns="0" bIns="0" anchor="t">
+          <a:bodyPr wrap="square" lIns="0" rIns="0" tIns="0" bIns="0" anchor="t">
             <a:noAutofit/>
           </a:bodyPr>
           <a:lstStyle/>
@@ -12605,7 +13045,7 @@
           <a:noFill/>
         </p:spPr>
         <p:txBody>
-          <a:bodyPr wrap="square" lIns="0" tIns="0" rIns="0" bIns="0" anchor="t">
+          <a:bodyPr wrap="square" lIns="0" rIns="0" tIns="0" bIns="0" anchor="t">
             <a:noAutofit/>
           </a:bodyPr>
           <a:lstStyle/>
@@ -12629,7 +13069,17 @@
                 <a:latin typeface="Segoe UI"/>
                 <a:ea typeface="Microsoft YaHei"/>
               </a:rPr>
-              <a:t>与解析解：2.76×10</a:t>
+              <a:t>与解析解：</a:t>
+            </a:r>
+            <a:r>
+              <a:rPr sz="1150" b="0" i="0">
+                <a:solidFill>
+                  <a:srgbClr val="3A4A50"/>
+                </a:solidFill>
+                <a:latin typeface="Segoe UI"/>
+                <a:ea typeface="Microsoft YaHei"/>
+              </a:rPr>
+              <a:t>2.76×10</a:t>
             </a:r>
             <a:r>
               <a:rPr sz="827" b="0" i="0" baseline="30000">
@@ -12662,7 +13112,17 @@
                 <a:latin typeface="Segoe UI"/>
                 <a:ea typeface="Microsoft YaHei"/>
               </a:rPr>
-              <a:t>模长误差：1.02×10</a:t>
+              <a:t>模长误差：</a:t>
+            </a:r>
+            <a:r>
+              <a:rPr sz="1150" b="0" i="0">
+                <a:solidFill>
+                  <a:srgbClr val="3A4A50"/>
+                </a:solidFill>
+                <a:latin typeface="Segoe UI"/>
+                <a:ea typeface="Microsoft YaHei"/>
+              </a:rPr>
+              <a:t>1.02×10</a:t>
             </a:r>
             <a:r>
               <a:rPr sz="827" b="0" i="0" baseline="30000">
@@ -12695,7 +13155,17 @@
                 <a:latin typeface="Segoe UI"/>
                 <a:ea typeface="Microsoft YaHei"/>
               </a:rPr>
-              <a:t>步长减半差：2.59×10</a:t>
+              <a:t>步长减半差：</a:t>
+            </a:r>
+            <a:r>
+              <a:rPr sz="1150" b="0" i="0">
+                <a:solidFill>
+                  <a:srgbClr val="3A4A50"/>
+                </a:solidFill>
+                <a:latin typeface="Segoe UI"/>
+                <a:ea typeface="Microsoft YaHei"/>
+              </a:rPr>
+              <a:t>2.59×10</a:t>
             </a:r>
             <a:r>
               <a:rPr sz="827" b="0" i="0" baseline="30000">
@@ -12727,7 +13197,7 @@
           <a:noFill/>
         </p:spPr>
         <p:txBody>
-          <a:bodyPr wrap="square" lIns="0" tIns="0" rIns="0" bIns="0" anchor="t">
+          <a:bodyPr wrap="square" lIns="0" rIns="0" tIns="0" bIns="0" anchor="t">
             <a:noAutofit/>
           </a:bodyPr>
           <a:lstStyle/>
@@ -12785,7 +13255,6 @@
           <a:lstStyle/>
           <a:p>
             <a:pPr algn="ctr"/>
-            <a:endParaRPr/>
           </a:p>
         </p:txBody>
       </p:sp>
@@ -12816,7 +13285,6 @@
           <a:lstStyle/>
           <a:p>
             <a:pPr algn="ctr"/>
-            <a:endParaRPr/>
           </a:p>
         </p:txBody>
       </p:sp>
@@ -12837,7 +13305,7 @@
           <a:noFill/>
         </p:spPr>
         <p:txBody>
-          <a:bodyPr wrap="square" lIns="0" tIns="0" rIns="0" bIns="0" anchor="t">
+          <a:bodyPr wrap="square" lIns="0" rIns="0" tIns="0" bIns="0" anchor="t">
             <a:noAutofit/>
           </a:bodyPr>
           <a:lstStyle/>
@@ -12883,7 +13351,7 @@
           <a:noFill/>
         </p:spPr>
         <p:txBody>
-          <a:bodyPr wrap="square" lIns="0" tIns="0" rIns="0" bIns="0" anchor="t">
+          <a:bodyPr wrap="square" lIns="0" rIns="0" tIns="0" bIns="0" anchor="t">
             <a:noAutofit/>
           </a:bodyPr>
           <a:lstStyle/>
@@ -12929,7 +13397,7 @@
           <a:noFill/>
         </p:spPr>
         <p:txBody>
-          <a:bodyPr wrap="square" lIns="0" tIns="0" rIns="0" bIns="0" anchor="t">
+          <a:bodyPr wrap="square" lIns="0" rIns="0" tIns="0" bIns="0" anchor="t">
             <a:noAutofit/>
           </a:bodyPr>
           <a:lstStyle/>
@@ -12946,54 +13414,24 @@
               </a:spcAft>
             </a:pPr>
             <a:r>
-              <a:rPr sz="1150" b="0" i="0" dirty="0" err="1">
+              <a:rPr sz="1150" b="0" i="0">
                 <a:solidFill>
                   <a:srgbClr val="3A4A50"/>
                 </a:solidFill>
                 <a:latin typeface="Segoe UI"/>
                 <a:ea typeface="Microsoft YaHei"/>
               </a:rPr>
-              <a:t>接口与语法已核对，但本机没有</a:t>
-            </a:r>
-            <a:r>
-              <a:rPr sz="1150" b="0" i="0" dirty="0">
-                <a:solidFill>
-                  <a:srgbClr val="3A4A50"/>
-                </a:solidFill>
-                <a:latin typeface="Segoe UI"/>
-                <a:ea typeface="Microsoft YaHei"/>
-              </a:rPr>
-              <a:t> </a:t>
-            </a:r>
-            <a:r>
-              <a:rPr sz="1150" b="0" i="0" dirty="0" err="1">
-                <a:solidFill>
-                  <a:srgbClr val="3A4A50"/>
-                </a:solidFill>
-                <a:latin typeface="Segoe UI"/>
-                <a:ea typeface="Microsoft YaHei"/>
-              </a:rPr>
-              <a:t>Fidimag，尚未运行：目前没有任何薄膜模拟结果，</a:t>
-            </a:r>
-            <a:r>
-              <a:rPr sz="1150" b="1" i="0" dirty="0" err="1">
+              <a:t>接口与语法已核对，但本机没有 Fidimag，尚未运行：目前没有任何薄膜模拟结果，</a:t>
+            </a:r>
+            <a:r>
+              <a:rPr sz="1150" b="1" i="0">
                 <a:solidFill>
                   <a:srgbClr val="B45309"/>
                 </a:solidFill>
                 <a:latin typeface="Segoe UI"/>
                 <a:ea typeface="Microsoft YaHei"/>
               </a:rPr>
-              <a:t>这一步的结论还不能写</a:t>
-            </a:r>
-            <a:r>
-              <a:rPr sz="1150" b="1" i="0" dirty="0">
-                <a:solidFill>
-                  <a:srgbClr val="B45309"/>
-                </a:solidFill>
-                <a:latin typeface="Segoe UI"/>
-                <a:ea typeface="Microsoft YaHei"/>
-              </a:rPr>
-              <a:t>。</a:t>
+              <a:t>这一步的结论还不能写。</a:t>
             </a:r>
           </a:p>
         </p:txBody>
@@ -13015,7 +13453,7 @@
           <a:noFill/>
         </p:spPr>
         <p:txBody>
-          <a:bodyPr wrap="square" lIns="0" tIns="0" rIns="0" bIns="0" anchor="t">
+          <a:bodyPr wrap="square" lIns="0" rIns="0" tIns="0" bIns="0" anchor="t">
             <a:noAutofit/>
           </a:bodyPr>
           <a:lstStyle/>
@@ -13046,6 +13484,52 @@
       </p:sp>
       <p:sp>
         <p:nvSpPr>
+          <p:cNvPr id="23" name="TextBox 22"/>
+          <p:cNvSpPr txBox="1"/>
+          <p:nvPr/>
+        </p:nvSpPr>
+        <p:spPr>
+          <a:xfrm>
+            <a:off x="640080" y="6419088"/>
+            <a:ext cx="8869680" cy="237744"/>
+          </a:xfrm>
+          <a:prstGeom prst="rect">
+            <a:avLst/>
+          </a:prstGeom>
+          <a:noFill/>
+        </p:spPr>
+        <p:txBody>
+          <a:bodyPr wrap="square" lIns="0" rIns="0" tIns="0" bIns="0" anchor="t">
+            <a:noAutofit/>
+          </a:bodyPr>
+          <a:lstStyle/>
+          <a:p>
+            <a:pPr algn="l">
+              <a:lnSpc>
+                <a:spcPct val="115000"/>
+              </a:lnSpc>
+              <a:spcBef>
+                <a:spcPts val="0"/>
+              </a:spcBef>
+              <a:spcAft>
+                <a:spcPts val="0"/>
+              </a:spcAft>
+            </a:pPr>
+            <a:r>
+              <a:rPr sz="850" b="0" i="0">
+                <a:solidFill>
+                  <a:srgbClr val="53676D"/>
+                </a:solidFill>
+                <a:latin typeface="Segoe UI"/>
+                <a:ea typeface="Microsoft YaHei"/>
+              </a:rPr>
+              <a:t>结果来自 rectangular_demag.py 与 macrospin_results/verification.json</a:t>
+            </a:r>
+          </a:p>
+        </p:txBody>
+      </p:sp>
+      <p:sp>
+        <p:nvSpPr>
           <p:cNvPr id="24" name="TextBox 23"/>
           <p:cNvSpPr txBox="1"/>
           <p:nvPr/>
@@ -13061,7 +13545,7 @@
           <a:noFill/>
         </p:spPr>
         <p:txBody>
-          <a:bodyPr wrap="square" lIns="0" tIns="0" rIns="0" bIns="0" anchor="t">
+          <a:bodyPr wrap="square" lIns="0" rIns="0" tIns="0" bIns="0" anchor="t">
             <a:noAutofit/>
           </a:bodyPr>
           <a:lstStyle/>
@@ -13099,7 +13583,7 @@
 </file>
 
 <file path=ppt/slides/slide8.xml><?xml version="1.0" encoding="utf-8"?>
-<p:sld xmlns:a="http://schemas.openxmlformats.org/drawingml/2006/main" xmlns:r="http://schemas.openxmlformats.org/officeDocument/2006/relationships" xmlns:p="http://schemas.openxmlformats.org/presentationml/2006/main">
+<p:sld xmlns:a="http://schemas.openxmlformats.org/drawingml/2006/main" xmlns:p="http://schemas.openxmlformats.org/presentationml/2006/main" xmlns:r="http://schemas.openxmlformats.org/officeDocument/2006/relationships">
   <p:cSld>
     <p:bg>
       <p:bgPr>
@@ -13115,14 +13599,7 @@
         <p:cNvGrpSpPr/>
         <p:nvPr/>
       </p:nvGrpSpPr>
-      <p:grpSpPr>
-        <a:xfrm>
-          <a:off x="0" y="0"/>
-          <a:ext cx="0" cy="0"/>
-          <a:chOff x="0" y="0"/>
-          <a:chExt cx="0" cy="0"/>
-        </a:xfrm>
-      </p:grpSpPr>
+      <p:grpSpPr/>
       <p:sp>
         <p:nvSpPr>
           <p:cNvPr id="2" name="TextBox 1"/>
@@ -13140,7 +13617,7 @@
           <a:noFill/>
         </p:spPr>
         <p:txBody>
-          <a:bodyPr wrap="square" lIns="0" tIns="0" rIns="0" bIns="0" anchor="t">
+          <a:bodyPr wrap="square" lIns="0" rIns="0" tIns="0" bIns="0" anchor="t">
             <a:noAutofit/>
           </a:bodyPr>
           <a:lstStyle/>
@@ -13206,7 +13683,7 @@
           <a:noFill/>
         </p:spPr>
         <p:txBody>
-          <a:bodyPr wrap="square" lIns="0" tIns="0" rIns="0" bIns="0" anchor="ctr">
+          <a:bodyPr wrap="square" lIns="0" rIns="0" tIns="0" bIns="0" anchor="ctr">
             <a:noAutofit/>
           </a:bodyPr>
           <a:lstStyle/>
@@ -13262,7 +13739,6 @@
           <a:lstStyle/>
           <a:p>
             <a:pPr algn="ctr"/>
-            <a:endParaRPr/>
           </a:p>
         </p:txBody>
       </p:sp>
@@ -13283,7 +13759,7 @@
           <a:noFill/>
         </p:spPr>
         <p:txBody>
-          <a:bodyPr wrap="square" lIns="0" tIns="0" rIns="0" bIns="0" anchor="t">
+          <a:bodyPr wrap="square" lIns="0" rIns="0" tIns="0" bIns="0" anchor="t">
             <a:noAutofit/>
           </a:bodyPr>
           <a:lstStyle/>
@@ -13329,7 +13805,7 @@
           <a:noFill/>
         </p:spPr>
         <p:txBody>
-          <a:bodyPr wrap="square" lIns="0" tIns="0" rIns="0" bIns="0" anchor="t">
+          <a:bodyPr wrap="square" lIns="0" rIns="0" tIns="0" bIns="0" anchor="t">
             <a:noAutofit/>
           </a:bodyPr>
           <a:lstStyle/>
@@ -13375,7 +13851,7 @@
           <a:noFill/>
         </p:spPr>
         <p:txBody>
-          <a:bodyPr wrap="square" lIns="0" tIns="0" rIns="0" bIns="0" anchor="t">
+          <a:bodyPr wrap="square" lIns="0" rIns="0" tIns="0" bIns="0" anchor="t">
             <a:noAutofit/>
           </a:bodyPr>
           <a:lstStyle/>
@@ -13421,7 +13897,7 @@
           <a:noFill/>
         </p:spPr>
         <p:txBody>
-          <a:bodyPr wrap="square" lIns="0" tIns="0" rIns="0" bIns="0" anchor="t">
+          <a:bodyPr wrap="square" lIns="0" rIns="0" tIns="0" bIns="0" anchor="t">
             <a:noAutofit/>
           </a:bodyPr>
           <a:lstStyle/>
@@ -13467,7 +13943,7 @@
           <a:noFill/>
         </p:spPr>
         <p:txBody>
-          <a:bodyPr wrap="square" lIns="0" tIns="0" rIns="0" bIns="0" anchor="t">
+          <a:bodyPr wrap="square" lIns="0" rIns="0" tIns="0" bIns="0" anchor="t">
             <a:noAutofit/>
           </a:bodyPr>
           <a:lstStyle/>
@@ -13513,7 +13989,7 @@
           <a:noFill/>
         </p:spPr>
         <p:txBody>
-          <a:bodyPr wrap="square" lIns="0" tIns="0" rIns="0" bIns="0" anchor="t">
+          <a:bodyPr wrap="square" lIns="0" rIns="0" tIns="0" bIns="0" anchor="t">
             <a:noAutofit/>
           </a:bodyPr>
           <a:lstStyle/>
@@ -13559,7 +14035,7 @@
           <a:noFill/>
         </p:spPr>
         <p:txBody>
-          <a:bodyPr wrap="square" lIns="0" tIns="0" rIns="0" bIns="0" anchor="t">
+          <a:bodyPr wrap="square" lIns="0" rIns="0" tIns="0" bIns="0" anchor="t">
             <a:noAutofit/>
           </a:bodyPr>
           <a:lstStyle/>
@@ -13605,7 +14081,7 @@
           <a:noFill/>
         </p:spPr>
         <p:txBody>
-          <a:bodyPr wrap="square" lIns="0" tIns="0" rIns="0" bIns="0" anchor="t">
+          <a:bodyPr wrap="square" lIns="0" rIns="0" tIns="0" bIns="0" anchor="t">
             <a:noAutofit/>
           </a:bodyPr>
           <a:lstStyle/>
@@ -13651,7 +14127,7 @@
           <a:noFill/>
         </p:spPr>
         <p:txBody>
-          <a:bodyPr wrap="square" lIns="0" tIns="0" rIns="0" bIns="0" anchor="t">
+          <a:bodyPr wrap="square" lIns="0" rIns="0" tIns="0" bIns="0" anchor="t">
             <a:noAutofit/>
           </a:bodyPr>
           <a:lstStyle/>
@@ -13717,7 +14193,7 @@
           <a:noFill/>
         </p:spPr>
         <p:txBody>
-          <a:bodyPr wrap="square" lIns="0" tIns="0" rIns="0" bIns="0" anchor="t">
+          <a:bodyPr wrap="square" lIns="0" rIns="0" tIns="0" bIns="0" anchor="t">
             <a:noAutofit/>
           </a:bodyPr>
           <a:lstStyle/>
@@ -13763,7 +14239,7 @@
           <a:noFill/>
         </p:spPr>
         <p:txBody>
-          <a:bodyPr wrap="square" lIns="0" tIns="0" rIns="0" bIns="0" anchor="t">
+          <a:bodyPr wrap="square" lIns="0" rIns="0" tIns="0" bIns="0" anchor="t">
             <a:noAutofit/>
           </a:bodyPr>
           <a:lstStyle/>
@@ -13809,7 +14285,7 @@
           <a:noFill/>
         </p:spPr>
         <p:txBody>
-          <a:bodyPr wrap="square" lIns="0" tIns="0" rIns="0" bIns="0" anchor="t">
+          <a:bodyPr wrap="square" lIns="0" rIns="0" tIns="0" bIns="0" anchor="t">
             <a:noAutofit/>
           </a:bodyPr>
           <a:lstStyle/>
@@ -13869,7 +14345,6 @@
           <a:lstStyle/>
           <a:p>
             <a:pPr algn="ctr"/>
-            <a:endParaRPr/>
           </a:p>
         </p:txBody>
       </p:sp>
@@ -13890,7 +14365,7 @@
           <a:noFill/>
         </p:spPr>
         <p:txBody>
-          <a:bodyPr wrap="square" lIns="0" tIns="0" rIns="0" bIns="0" anchor="t">
+          <a:bodyPr wrap="square" lIns="0" rIns="0" tIns="0" bIns="0" anchor="t">
             <a:noAutofit/>
           </a:bodyPr>
           <a:lstStyle/>
@@ -13936,7 +14411,7 @@
           <a:noFill/>
         </p:spPr>
         <p:txBody>
-          <a:bodyPr wrap="square" lIns="0" tIns="0" rIns="0" bIns="0" anchor="t">
+          <a:bodyPr wrap="square" lIns="0" rIns="0" tIns="0" bIns="0" anchor="t">
             <a:noAutofit/>
           </a:bodyPr>
           <a:lstStyle/>
@@ -14028,7 +14503,7 @@
           <a:noFill/>
         </p:spPr>
         <p:txBody>
-          <a:bodyPr wrap="square" lIns="0" tIns="0" rIns="0" bIns="0" anchor="t">
+          <a:bodyPr wrap="square" lIns="0" rIns="0" tIns="0" bIns="0" anchor="t">
             <a:noAutofit/>
           </a:bodyPr>
           <a:lstStyle/>
@@ -14096,7 +14571,6 @@
           <a:lstStyle/>
           <a:p>
             <a:pPr algn="ctr"/>
-            <a:endParaRPr/>
           </a:p>
         </p:txBody>
       </p:sp>
@@ -14117,7 +14591,7 @@
           <a:noFill/>
         </p:spPr>
         <p:txBody>
-          <a:bodyPr wrap="square" lIns="0" tIns="0" rIns="0" bIns="0" anchor="ctr">
+          <a:bodyPr wrap="square" lIns="0" rIns="0" tIns="0" bIns="0" anchor="ctr">
             <a:noAutofit/>
           </a:bodyPr>
           <a:lstStyle/>
@@ -14163,7 +14637,7 @@
           <a:noFill/>
         </p:spPr>
         <p:txBody>
-          <a:bodyPr wrap="square" lIns="0" tIns="0" rIns="0" bIns="0" anchor="t">
+          <a:bodyPr wrap="square" lIns="0" rIns="0" tIns="0" bIns="0" anchor="t">
             <a:noAutofit/>
           </a:bodyPr>
           <a:lstStyle/>
@@ -14521,7 +14995,7 @@
 </file>
 
 <file path=ppt/theme/theme2.xml><?xml version="1.0" encoding="utf-8"?>
-<a:theme xmlns:a="http://schemas.openxmlformats.org/drawingml/2006/main" name="Office 主题​​">
+<a:theme xmlns:a="http://schemas.openxmlformats.org/drawingml/2006/main" name="Office Theme">
   <a:themeElements>
     <a:clrScheme name="Office">
       <a:dk1>
@@ -14531,44 +15005,44 @@
         <a:sysClr val="window" lastClr="FFFFFF"/>
       </a:lt1>
       <a:dk2>
-        <a:srgbClr val="0E2841"/>
+        <a:srgbClr val="1F497D"/>
       </a:dk2>
       <a:lt2>
-        <a:srgbClr val="E8E8E8"/>
+        <a:srgbClr val="EEECE1"/>
       </a:lt2>
       <a:accent1>
-        <a:srgbClr val="156082"/>
+        <a:srgbClr val="4F81BD"/>
       </a:accent1>
       <a:accent2>
-        <a:srgbClr val="E97132"/>
+        <a:srgbClr val="C0504D"/>
       </a:accent2>
       <a:accent3>
-        <a:srgbClr val="196B24"/>
+        <a:srgbClr val="9BBB59"/>
       </a:accent3>
       <a:accent4>
-        <a:srgbClr val="0F9ED5"/>
+        <a:srgbClr val="8064A2"/>
       </a:accent4>
       <a:accent5>
-        <a:srgbClr val="A02B93"/>
+        <a:srgbClr val="4BACC6"/>
       </a:accent5>
       <a:accent6>
-        <a:srgbClr val="4EA72E"/>
+        <a:srgbClr val="F79646"/>
       </a:accent6>
       <a:hlink>
-        <a:srgbClr val="467886"/>
+        <a:srgbClr val="0000FF"/>
       </a:hlink>
       <a:folHlink>
-        <a:srgbClr val="96607D"/>
+        <a:srgbClr val="800080"/>
       </a:folHlink>
     </a:clrScheme>
     <a:fontScheme name="Office">
       <a:majorFont>
-        <a:latin typeface="等线 Light" panose="02110004020202020204"/>
+        <a:latin typeface="Calibri"/>
         <a:ea typeface=""/>
         <a:cs typeface=""/>
-        <a:font script="Jpan" typeface="游ゴシック Light"/>
+        <a:font script="Jpan" typeface="ＭＳ Ｐゴシック"/>
         <a:font script="Hang" typeface="맑은 고딕"/>
-        <a:font script="Hans" typeface="等线 Light"/>
+        <a:font script="Hans" typeface="宋体"/>
         <a:font script="Hant" typeface="新細明體"/>
         <a:font script="Arab" typeface="Times New Roman"/>
         <a:font script="Hebr" typeface="Times New Roman"/>
@@ -14596,31 +15070,14 @@
         <a:font script="Viet" typeface="Times New Roman"/>
         <a:font script="Uigh" typeface="Microsoft Uighur"/>
         <a:font script="Geor" typeface="Sylfaen"/>
-        <a:font script="Armn" typeface="Arial"/>
-        <a:font script="Bugi" typeface="Leelawadee UI"/>
-        <a:font script="Bopo" typeface="Microsoft JhengHei"/>
-        <a:font script="Java" typeface="Javanese Text"/>
-        <a:font script="Lisu" typeface="Segoe UI"/>
-        <a:font script="Mymr" typeface="Myanmar Text"/>
-        <a:font script="Nkoo" typeface="Ebrima"/>
-        <a:font script="Olck" typeface="Nirmala UI"/>
-        <a:font script="Osma" typeface="Ebrima"/>
-        <a:font script="Phag" typeface="Phagspa"/>
-        <a:font script="Syrn" typeface="Estrangelo Edessa"/>
-        <a:font script="Syrj" typeface="Estrangelo Edessa"/>
-        <a:font script="Syre" typeface="Estrangelo Edessa"/>
-        <a:font script="Sora" typeface="Nirmala UI"/>
-        <a:font script="Tale" typeface="Microsoft Tai Le"/>
-        <a:font script="Talu" typeface="Microsoft New Tai Lue"/>
-        <a:font script="Tfng" typeface="Ebrima"/>
       </a:majorFont>
       <a:minorFont>
-        <a:latin typeface="等线" panose="02110004020202020204"/>
+        <a:latin typeface="Calibri"/>
         <a:ea typeface=""/>
         <a:cs typeface=""/>
-        <a:font script="Jpan" typeface="游ゴシック"/>
+        <a:font script="Jpan" typeface="ＭＳ Ｐゴシック"/>
         <a:font script="Hang" typeface="맑은 고딕"/>
-        <a:font script="Hans" typeface="等线"/>
+        <a:font script="Hans" typeface="宋体"/>
         <a:font script="Hant" typeface="新細明體"/>
         <a:font script="Arab" typeface="Arial"/>
         <a:font script="Hebr" typeface="Arial"/>
@@ -14648,23 +15105,6 @@
         <a:font script="Viet" typeface="Arial"/>
         <a:font script="Uigh" typeface="Microsoft Uighur"/>
         <a:font script="Geor" typeface="Sylfaen"/>
-        <a:font script="Armn" typeface="Arial"/>
-        <a:font script="Bugi" typeface="Leelawadee UI"/>
-        <a:font script="Bopo" typeface="Microsoft JhengHei"/>
-        <a:font script="Java" typeface="Javanese Text"/>
-        <a:font script="Lisu" typeface="Segoe UI"/>
-        <a:font script="Mymr" typeface="Myanmar Text"/>
-        <a:font script="Nkoo" typeface="Ebrima"/>
-        <a:font script="Olck" typeface="Nirmala UI"/>
-        <a:font script="Osma" typeface="Ebrima"/>
-        <a:font script="Phag" typeface="Phagspa"/>
-        <a:font script="Syrn" typeface="Estrangelo Edessa"/>
-        <a:font script="Syrj" typeface="Estrangelo Edessa"/>
-        <a:font script="Syre" typeface="Estrangelo Edessa"/>
-        <a:font script="Sora" typeface="Nirmala UI"/>
-        <a:font script="Tale" typeface="Microsoft Tai Le"/>
-        <a:font script="Talu" typeface="Microsoft New Tai Lue"/>
-        <a:font script="Tfng" typeface="Ebrima"/>
       </a:minorFont>
     </a:fontScheme>
     <a:fmtScheme name="Office">
@@ -14676,136 +15116,180 @@
           <a:gsLst>
             <a:gs pos="0">
               <a:schemeClr val="phClr">
-                <a:lumMod val="110000"/>
-                <a:satMod val="105000"/>
-                <a:tint val="67000"/>
+                <a:tint val="50000"/>
+                <a:satMod val="300000"/>
               </a:schemeClr>
             </a:gs>
-            <a:gs pos="50000">
+            <a:gs pos="35000">
               <a:schemeClr val="phClr">
-                <a:lumMod val="105000"/>
-                <a:satMod val="103000"/>
-                <a:tint val="73000"/>
+                <a:tint val="37000"/>
+                <a:satMod val="300000"/>
               </a:schemeClr>
             </a:gs>
             <a:gs pos="100000">
               <a:schemeClr val="phClr">
-                <a:lumMod val="105000"/>
-                <a:satMod val="109000"/>
-                <a:tint val="81000"/>
+                <a:tint val="15000"/>
+                <a:satMod val="350000"/>
               </a:schemeClr>
             </a:gs>
           </a:gsLst>
-          <a:lin ang="5400000" scaled="0"/>
+          <a:lin ang="16200000" scaled="1"/>
         </a:gradFill>
         <a:gradFill rotWithShape="1">
           <a:gsLst>
             <a:gs pos="0">
               <a:schemeClr val="phClr">
-                <a:satMod val="103000"/>
-                <a:lumMod val="102000"/>
-                <a:tint val="94000"/>
-              </a:schemeClr>
-            </a:gs>
-            <a:gs pos="50000">
-              <a:schemeClr val="phClr">
-                <a:satMod val="110000"/>
-                <a:lumMod val="100000"/>
+                <a:tint val="100000"/>
                 <a:shade val="100000"/>
+                <a:satMod val="130000"/>
               </a:schemeClr>
             </a:gs>
             <a:gs pos="100000">
               <a:schemeClr val="phClr">
-                <a:lumMod val="99000"/>
-                <a:satMod val="120000"/>
-                <a:shade val="78000"/>
+                <a:tint val="50000"/>
+                <a:shade val="100000"/>
+                <a:satMod val="350000"/>
               </a:schemeClr>
             </a:gs>
           </a:gsLst>
-          <a:lin ang="5400000" scaled="0"/>
+          <a:lin ang="16200000" scaled="0"/>
         </a:gradFill>
       </a:fillStyleLst>
       <a:lnStyleLst>
-        <a:ln w="12700" cap="flat" cmpd="sng" algn="ctr">
+        <a:ln w="9525" cap="flat" cmpd="sng" algn="ctr">
           <a:solidFill>
-            <a:schemeClr val="phClr"/>
+            <a:schemeClr val="phClr">
+              <a:shade val="95000"/>
+              <a:satMod val="105000"/>
+            </a:schemeClr>
           </a:solidFill>
           <a:prstDash val="solid"/>
-          <a:miter lim="800000"/>
-        </a:ln>
-        <a:ln w="19050" cap="flat" cmpd="sng" algn="ctr">
-          <a:solidFill>
-            <a:schemeClr val="phClr"/>
-          </a:solidFill>
-          <a:prstDash val="solid"/>
-          <a:miter lim="800000"/>
         </a:ln>
         <a:ln w="25400" cap="flat" cmpd="sng" algn="ctr">
           <a:solidFill>
             <a:schemeClr val="phClr"/>
           </a:solidFill>
           <a:prstDash val="solid"/>
-          <a:miter lim="800000"/>
+        </a:ln>
+        <a:ln w="38100" cap="flat" cmpd="sng" algn="ctr">
+          <a:solidFill>
+            <a:schemeClr val="phClr"/>
+          </a:solidFill>
+          <a:prstDash val="solid"/>
         </a:ln>
       </a:lnStyleLst>
       <a:effectStyleLst>
         <a:effectStyle>
-          <a:effectLst/>
-        </a:effectStyle>
-        <a:effectStyle>
-          <a:effectLst/>
+          <a:effectLst>
+            <a:outerShdw blurRad="40000" dist="20000" dir="5400000" rotWithShape="0">
+              <a:srgbClr val="000000">
+                <a:alpha val="38000"/>
+              </a:srgbClr>
+            </a:outerShdw>
+          </a:effectLst>
         </a:effectStyle>
         <a:effectStyle>
           <a:effectLst>
-            <a:outerShdw blurRad="57150" dist="19050" dir="5400000" algn="ctr" rotWithShape="0">
+            <a:outerShdw blurRad="40000" dist="23000" dir="5400000" rotWithShape="0">
               <a:srgbClr val="000000">
-                <a:alpha val="63000"/>
+                <a:alpha val="35000"/>
               </a:srgbClr>
             </a:outerShdw>
           </a:effectLst>
+        </a:effectStyle>
+        <a:effectStyle>
+          <a:effectLst>
+            <a:outerShdw blurRad="40000" dist="23000" dir="5400000" rotWithShape="0">
+              <a:srgbClr val="000000">
+                <a:alpha val="35000"/>
+              </a:srgbClr>
+            </a:outerShdw>
+          </a:effectLst>
+          <a:scene3d>
+            <a:camera prst="orthographicFront">
+              <a:rot lat="0" lon="0" rev="0"/>
+            </a:camera>
+            <a:lightRig rig="threePt" dir="t">
+              <a:rot lat="0" lon="0" rev="1200000"/>
+            </a:lightRig>
+          </a:scene3d>
+          <a:sp3d>
+            <a:bevelT w="63500" h="25400"/>
+          </a:sp3d>
         </a:effectStyle>
       </a:effectStyleLst>
       <a:bgFillStyleLst>
         <a:solidFill>
           <a:schemeClr val="phClr"/>
         </a:solidFill>
-        <a:solidFill>
-          <a:schemeClr val="phClr">
-            <a:tint val="95000"/>
-            <a:satMod val="170000"/>
-          </a:schemeClr>
-        </a:solidFill>
         <a:gradFill rotWithShape="1">
           <a:gsLst>
             <a:gs pos="0">
               <a:schemeClr val="phClr">
-                <a:tint val="93000"/>
-                <a:satMod val="150000"/>
-                <a:shade val="98000"/>
-                <a:lumMod val="102000"/>
+                <a:tint val="40000"/>
+                <a:satMod val="350000"/>
               </a:schemeClr>
             </a:gs>
-            <a:gs pos="50000">
+            <a:gs pos="40000">
               <a:schemeClr val="phClr">
-                <a:tint val="98000"/>
-                <a:satMod val="130000"/>
-                <a:shade val="90000"/>
-                <a:lumMod val="103000"/>
+                <a:tint val="45000"/>
+                <a:shade val="99000"/>
+                <a:satMod val="350000"/>
               </a:schemeClr>
             </a:gs>
             <a:gs pos="100000">
               <a:schemeClr val="phClr">
-                <a:shade val="63000"/>
-                <a:satMod val="120000"/>
+                <a:shade val="20000"/>
+                <a:satMod val="255000"/>
               </a:schemeClr>
             </a:gs>
           </a:gsLst>
-          <a:lin ang="5400000" scaled="0"/>
+          <a:path path="circle">
+            <a:fillToRect l="50000" t="-80000" r="50000" b="180000"/>
+          </a:path>
+        </a:gradFill>
+        <a:gradFill rotWithShape="1">
+          <a:gsLst>
+            <a:gs pos="0">
+              <a:schemeClr val="phClr">
+                <a:tint val="80000"/>
+                <a:satMod val="300000"/>
+              </a:schemeClr>
+            </a:gs>
+            <a:gs pos="100000">
+              <a:schemeClr val="phClr">
+                <a:shade val="30000"/>
+                <a:satMod val="200000"/>
+              </a:schemeClr>
+            </a:gs>
+          </a:gsLst>
+          <a:path path="circle">
+            <a:fillToRect l="50000" t="50000" r="50000" b="50000"/>
+          </a:path>
         </a:gradFill>
       </a:bgFillStyleLst>
     </a:fmtScheme>
   </a:themeElements>
   <a:objectDefaults>
+    <a:spDef>
+      <a:spPr/>
+      <a:bodyPr/>
+      <a:lstStyle/>
+      <a:style>
+        <a:lnRef idx="1">
+          <a:schemeClr val="accent1"/>
+        </a:lnRef>
+        <a:fillRef idx="3">
+          <a:schemeClr val="accent1"/>
+        </a:fillRef>
+        <a:effectRef idx="2">
+          <a:schemeClr val="accent1"/>
+        </a:effectRef>
+        <a:fontRef idx="minor">
+          <a:schemeClr val="lt1"/>
+        </a:fontRef>
+      </a:style>
+    </a:spDef>
     <a:lnDef>
       <a:spPr/>
       <a:bodyPr/>
@@ -14827,10 +15311,5 @@
     </a:lnDef>
   </a:objectDefaults>
   <a:extraClrSchemeLst/>
-  <a:extLst>
-    <a:ext uri="{05A4C25C-085E-4340-85A3-A5531E510DB2}">
-      <thm15:themeFamily xmlns:thm15="http://schemas.microsoft.com/office/thememl/2012/main" name="Office Theme" id="{2E142A2C-CD16-42D6-873A-C26D2A0506FA}" vid="{1BDDFF52-6CD6-40A5-AB3C-68EB2F1E4D0A}"/>
-    </a:ext>
-  </a:extLst>
 </a:theme>
 </file>
--- a/汇报PPT/1.pptx
+++ b/汇报PPT/1.pptx
@@ -4,20 +4,17 @@
   <p:sldMasterIdLst>
     <p:sldMasterId id="2147483648" r:id="rId1"/>
   </p:sldMasterIdLst>
-  <p:notesMasterIdLst>
-    <p:notesMasterId r:id="rId10"/>
-  </p:notesMasterIdLst>
   <p:sldIdLst>
-    <p:sldId id="256" r:id="rId2"/>
-    <p:sldId id="257" r:id="rId3"/>
-    <p:sldId id="258" r:id="rId4"/>
-    <p:sldId id="259" r:id="rId5"/>
-    <p:sldId id="260" r:id="rId6"/>
-    <p:sldId id="261" r:id="rId7"/>
-    <p:sldId id="262" r:id="rId8"/>
-    <p:sldId id="263" r:id="rId9"/>
+    <p:sldId id="256" r:id="rId7"/>
+    <p:sldId id="257" r:id="rId9"/>
+    <p:sldId id="258" r:id="rId10"/>
+    <p:sldId id="259" r:id="rId11"/>
+    <p:sldId id="260" r:id="rId12"/>
+    <p:sldId id="261" r:id="rId13"/>
+    <p:sldId id="262" r:id="rId14"/>
+    <p:sldId id="263" r:id="rId15"/>
   </p:sldIdLst>
-  <p:sldSz cx="12192000" cy="6858000"/>
+  <p:sldSz cx="12191695" cy="6858000" type="screen4x3"/>
   <p:notesSz cx="6858000" cy="9144000"/>
   <p:defaultTextStyle>
     <a:defPPr>
@@ -114,27 +111,11 @@
       </a:defRPr>
     </a:lvl9pPr>
   </p:defaultTextStyle>
-  <p:extLst>
-    <p:ext uri="{EFAFB233-063F-42B5-8137-9DF3F51BA10A}">
-      <p15:sldGuideLst xmlns:p15="http://schemas.microsoft.com/office/powerpoint/2012/main">
-        <p15:guide id="1" orient="horz" pos="2160">
-          <p15:clr>
-            <a:srgbClr val="A4A3A4"/>
-          </p15:clr>
-        </p15:guide>
-        <p15:guide id="2" pos="2880">
-          <p15:clr>
-            <a:srgbClr val="A4A3A4"/>
-          </p15:clr>
-        </p15:guide>
-      </p15:sldGuideLst>
-    </p:ext>
-  </p:extLst>
 </p:presentation>
 </file>
 
 <file path=ppt/notesMasters/notesMaster1.xml><?xml version="1.0" encoding="utf-8"?>
-<p:notesMaster xmlns:a="http://schemas.openxmlformats.org/drawingml/2006/main" xmlns:r="http://schemas.openxmlformats.org/officeDocument/2006/relationships" xmlns:p="http://schemas.openxmlformats.org/presentationml/2006/main">
+<p:notesMaster xmlns:a="http://schemas.openxmlformats.org/drawingml/2006/main" xmlns:p="http://schemas.openxmlformats.org/presentationml/2006/main" xmlns:r="http://schemas.openxmlformats.org/officeDocument/2006/relationships">
   <p:cSld>
     <p:bg>
       <p:bgRef idx="1001">
@@ -155,16 +136,241 @@
           <a:chExt cx="0" cy="0"/>
         </a:xfrm>
       </p:grpSpPr>
+      <p:sp>
+        <p:nvSpPr>
+          <p:cNvPr id="2" name="Header Placeholder 1"/>
+          <p:cNvSpPr>
+            <a:spLocks noGrp="1"/>
+          </p:cNvSpPr>
+          <p:nvPr>
+            <p:ph type="hdr" sz="quarter"/>
+          </p:nvPr>
+        </p:nvSpPr>
+        <p:spPr>
+          <a:xfrm>
+            <a:off x="0" y="0"/>
+            <a:ext cx="2971800" cy="457200"/>
+          </a:xfrm>
+          <a:prstGeom prst="rect">
+            <a:avLst/>
+          </a:prstGeom>
+        </p:spPr>
+        <p:txBody>
+          <a:bodyPr vert="horz" lIns="91440" tIns="45720" rIns="91440" bIns="45720" rtlCol="0"/>
+          <a:lstStyle>
+            <a:lvl1pPr algn="l">
+              <a:defRPr sz="1200"/>
+            </a:lvl1pPr>
+          </a:lstStyle>
+          <a:p>
+            <a:endParaRPr lang="en-US"/>
+          </a:p>
+        </p:txBody>
+      </p:sp>
+      <p:sp>
+        <p:nvSpPr>
+          <p:cNvPr id="3" name="Date Placeholder 2"/>
+          <p:cNvSpPr>
+            <a:spLocks noGrp="1"/>
+          </p:cNvSpPr>
+          <p:nvPr>
+            <p:ph type="dt" idx="1"/>
+          </p:nvPr>
+        </p:nvSpPr>
+        <p:spPr>
+          <a:xfrm>
+            <a:off x="3884613" y="0"/>
+            <a:ext cx="2971800" cy="457200"/>
+          </a:xfrm>
+          <a:prstGeom prst="rect">
+            <a:avLst/>
+          </a:prstGeom>
+        </p:spPr>
+        <p:txBody>
+          <a:bodyPr vert="horz" lIns="91440" tIns="45720" rIns="91440" bIns="45720" rtlCol="0"/>
+          <a:lstStyle>
+            <a:lvl1pPr algn="r">
+              <a:defRPr sz="1200"/>
+            </a:lvl1pPr>
+          </a:lstStyle>
+          <a:p>
+            <a:fld id="{0F89C1C7-3DCD-1040-A9CF-14679D8B5DDD}" type="datetimeFigureOut">
+              <a:rPr lang="en-US" smtClean="0"/>
+              <a:t>10/17/16</a:t>
+            </a:fld>
+            <a:endParaRPr lang="en-US"/>
+          </a:p>
+        </p:txBody>
+      </p:sp>
+      <p:sp>
+        <p:nvSpPr>
+          <p:cNvPr id="4" name="Slide Image Placeholder 3"/>
+          <p:cNvSpPr>
+            <a:spLocks noGrp="1" noRot="1" noChangeAspect="1"/>
+          </p:cNvSpPr>
+          <p:nvPr>
+            <p:ph type="sldImg" idx="2"/>
+          </p:nvPr>
+        </p:nvSpPr>
+        <p:spPr>
+          <a:xfrm>
+            <a:off x="1143000" y="685800"/>
+            <a:ext cx="4572000" cy="3429000"/>
+          </a:xfrm>
+          <a:prstGeom prst="rect">
+            <a:avLst/>
+          </a:prstGeom>
+          <a:noFill/>
+          <a:ln w="12700">
+            <a:solidFill>
+              <a:prstClr val="black"/>
+            </a:solidFill>
+          </a:ln>
+        </p:spPr>
+        <p:txBody>
+          <a:bodyPr vert="horz" lIns="91440" tIns="45720" rIns="91440" bIns="45720" rtlCol="0" anchor="ctr"/>
+          <a:lstStyle/>
+          <a:p>
+            <a:endParaRPr lang="en-US"/>
+          </a:p>
+        </p:txBody>
+      </p:sp>
+      <p:sp>
+        <p:nvSpPr>
+          <p:cNvPr id="5" name="Notes Placeholder 4"/>
+          <p:cNvSpPr>
+            <a:spLocks noGrp="1"/>
+          </p:cNvSpPr>
+          <p:nvPr>
+            <p:ph type="body" sz="quarter" idx="3"/>
+          </p:nvPr>
+        </p:nvSpPr>
+        <p:spPr>
+          <a:xfrm>
+            <a:off x="685800" y="4343400"/>
+            <a:ext cx="5486400" cy="4114800"/>
+          </a:xfrm>
+          <a:prstGeom prst="rect">
+            <a:avLst/>
+          </a:prstGeom>
+        </p:spPr>
+        <p:txBody>
+          <a:bodyPr vert="horz" lIns="91440" tIns="45720" rIns="91440" bIns="45720" rtlCol="0"/>
+          <a:lstStyle/>
+          <a:p>
+            <a:pPr lvl="0"/>
+            <a:r>
+              <a:rPr lang="en-US" smtClean="0"/>
+              <a:t>Click to edit Master text styles</a:t>
+            </a:r>
+          </a:p>
+          <a:p>
+            <a:pPr lvl="1"/>
+            <a:r>
+              <a:rPr lang="en-US" smtClean="0"/>
+              <a:t>Second level</a:t>
+            </a:r>
+          </a:p>
+          <a:p>
+            <a:pPr lvl="2"/>
+            <a:r>
+              <a:rPr lang="en-US" smtClean="0"/>
+              <a:t>Third level</a:t>
+            </a:r>
+          </a:p>
+          <a:p>
+            <a:pPr lvl="3"/>
+            <a:r>
+              <a:rPr lang="en-US" smtClean="0"/>
+              <a:t>Fourth level</a:t>
+            </a:r>
+          </a:p>
+          <a:p>
+            <a:pPr lvl="4"/>
+            <a:r>
+              <a:rPr lang="en-US" smtClean="0"/>
+              <a:t>Fifth level</a:t>
+            </a:r>
+            <a:endParaRPr lang="en-US"/>
+          </a:p>
+        </p:txBody>
+      </p:sp>
+      <p:sp>
+        <p:nvSpPr>
+          <p:cNvPr id="6" name="Footer Placeholder 5"/>
+          <p:cNvSpPr>
+            <a:spLocks noGrp="1"/>
+          </p:cNvSpPr>
+          <p:nvPr>
+            <p:ph type="ftr" sz="quarter" idx="4"/>
+          </p:nvPr>
+        </p:nvSpPr>
+        <p:spPr>
+          <a:xfrm>
+            <a:off x="0" y="8685213"/>
+            <a:ext cx="2971800" cy="457200"/>
+          </a:xfrm>
+          <a:prstGeom prst="rect">
+            <a:avLst/>
+          </a:prstGeom>
+        </p:spPr>
+        <p:txBody>
+          <a:bodyPr vert="horz" lIns="91440" tIns="45720" rIns="91440" bIns="45720" rtlCol="0" anchor="b"/>
+          <a:lstStyle>
+            <a:lvl1pPr algn="l">
+              <a:defRPr sz="1200"/>
+            </a:lvl1pPr>
+          </a:lstStyle>
+          <a:p>
+            <a:endParaRPr lang="en-US"/>
+          </a:p>
+        </p:txBody>
+      </p:sp>
+      <p:sp>
+        <p:nvSpPr>
+          <p:cNvPr id="7" name="Slide Number Placeholder 6"/>
+          <p:cNvSpPr>
+            <a:spLocks noGrp="1"/>
+          </p:cNvSpPr>
+          <p:nvPr>
+            <p:ph type="sldNum" sz="quarter" idx="5"/>
+          </p:nvPr>
+        </p:nvSpPr>
+        <p:spPr>
+          <a:xfrm>
+            <a:off x="3884613" y="8685213"/>
+            <a:ext cx="2971800" cy="457200"/>
+          </a:xfrm>
+          <a:prstGeom prst="rect">
+            <a:avLst/>
+          </a:prstGeom>
+        </p:spPr>
+        <p:txBody>
+          <a:bodyPr vert="horz" lIns="91440" tIns="45720" rIns="91440" bIns="45720" rtlCol="0" anchor="b"/>
+          <a:lstStyle>
+            <a:lvl1pPr algn="r">
+              <a:defRPr sz="1200"/>
+            </a:lvl1pPr>
+          </a:lstStyle>
+          <a:p>
+            <a:fld id="{BB5E49A5-4136-284D-997B-48E1D791AD67}" type="slidenum">
+              <a:rPr lang="en-US" smtClean="0"/>
+              <a:t>‹#›</a:t>
+            </a:fld>
+            <a:endParaRPr lang="en-US"/>
+          </a:p>
+        </p:txBody>
+      </p:sp>
     </p:spTree>
     <p:extLst>
       <p:ext uri="{BB962C8B-B14F-4D97-AF65-F5344CB8AC3E}">
-        <p14:creationId xmlns:p14="http://schemas.microsoft.com/office/powerpoint/2010/main" val="843602089"/>
+        <p14:creationId xmlns:p14="http://schemas.microsoft.com/office/powerpoint/2010/main" val="2623252185"/>
       </p:ext>
     </p:extLst>
   </p:cSld>
   <p:clrMap bg1="lt1" tx1="dk1" bg2="lt2" tx2="dk2" accent1="accent1" accent2="accent2" accent3="accent3" accent4="accent4" accent5="accent5" accent6="accent6" hlink="hlink" folHlink="folHlink"/>
   <p:notesStyle>
-    <a:lvl1pPr marL="0" algn="l" defTabSz="914400" rtl="0" eaLnBrk="1" latinLnBrk="0" hangingPunct="1">
+    <a:lvl1pPr marL="0" algn="l" defTabSz="457200" rtl="0" eaLnBrk="1" latinLnBrk="0" hangingPunct="1">
       <a:defRPr sz="1200" kern="1200">
         <a:solidFill>
           <a:schemeClr val="tx1"/>
@@ -174,7 +380,7 @@
         <a:cs typeface="+mn-cs"/>
       </a:defRPr>
     </a:lvl1pPr>
-    <a:lvl2pPr marL="457200" algn="l" defTabSz="914400" rtl="0" eaLnBrk="1" latinLnBrk="0" hangingPunct="1">
+    <a:lvl2pPr marL="457200" algn="l" defTabSz="457200" rtl="0" eaLnBrk="1" latinLnBrk="0" hangingPunct="1">
       <a:defRPr sz="1200" kern="1200">
         <a:solidFill>
           <a:schemeClr val="tx1"/>
@@ -184,7 +390,7 @@
         <a:cs typeface="+mn-cs"/>
       </a:defRPr>
     </a:lvl2pPr>
-    <a:lvl3pPr marL="914400" algn="l" defTabSz="914400" rtl="0" eaLnBrk="1" latinLnBrk="0" hangingPunct="1">
+    <a:lvl3pPr marL="914400" algn="l" defTabSz="457200" rtl="0" eaLnBrk="1" latinLnBrk="0" hangingPunct="1">
       <a:defRPr sz="1200" kern="1200">
         <a:solidFill>
           <a:schemeClr val="tx1"/>
@@ -194,7 +400,7 @@
         <a:cs typeface="+mn-cs"/>
       </a:defRPr>
     </a:lvl3pPr>
-    <a:lvl4pPr marL="1371600" algn="l" defTabSz="914400" rtl="0" eaLnBrk="1" latinLnBrk="0" hangingPunct="1">
+    <a:lvl4pPr marL="1371600" algn="l" defTabSz="457200" rtl="0" eaLnBrk="1" latinLnBrk="0" hangingPunct="1">
       <a:defRPr sz="1200" kern="1200">
         <a:solidFill>
           <a:schemeClr val="tx1"/>
@@ -204,7 +410,7 @@
         <a:cs typeface="+mn-cs"/>
       </a:defRPr>
     </a:lvl4pPr>
-    <a:lvl5pPr marL="1828800" algn="l" defTabSz="914400" rtl="0" eaLnBrk="1" latinLnBrk="0" hangingPunct="1">
+    <a:lvl5pPr marL="1828800" algn="l" defTabSz="457200" rtl="0" eaLnBrk="1" latinLnBrk="0" hangingPunct="1">
       <a:defRPr sz="1200" kern="1200">
         <a:solidFill>
           <a:schemeClr val="tx1"/>
@@ -214,7 +420,7 @@
         <a:cs typeface="+mn-cs"/>
       </a:defRPr>
     </a:lvl5pPr>
-    <a:lvl6pPr marL="2286000" algn="l" defTabSz="914400" rtl="0" eaLnBrk="1" latinLnBrk="0" hangingPunct="1">
+    <a:lvl6pPr marL="2286000" algn="l" defTabSz="457200" rtl="0" eaLnBrk="1" latinLnBrk="0" hangingPunct="1">
       <a:defRPr sz="1200" kern="1200">
         <a:solidFill>
           <a:schemeClr val="tx1"/>
@@ -224,7 +430,7 @@
         <a:cs typeface="+mn-cs"/>
       </a:defRPr>
     </a:lvl6pPr>
-    <a:lvl7pPr marL="2743200" algn="l" defTabSz="914400" rtl="0" eaLnBrk="1" latinLnBrk="0" hangingPunct="1">
+    <a:lvl7pPr marL="2743200" algn="l" defTabSz="457200" rtl="0" eaLnBrk="1" latinLnBrk="0" hangingPunct="1">
       <a:defRPr sz="1200" kern="1200">
         <a:solidFill>
           <a:schemeClr val="tx1"/>
@@ -234,7 +440,7 @@
         <a:cs typeface="+mn-cs"/>
       </a:defRPr>
     </a:lvl7pPr>
-    <a:lvl8pPr marL="3200400" algn="l" defTabSz="914400" rtl="0" eaLnBrk="1" latinLnBrk="0" hangingPunct="1">
+    <a:lvl8pPr marL="3200400" algn="l" defTabSz="457200" rtl="0" eaLnBrk="1" latinLnBrk="0" hangingPunct="1">
       <a:defRPr sz="1200" kern="1200">
         <a:solidFill>
           <a:schemeClr val="tx1"/>
@@ -244,7 +450,7 @@
         <a:cs typeface="+mn-cs"/>
       </a:defRPr>
     </a:lvl8pPr>
-    <a:lvl9pPr marL="3657600" algn="l" defTabSz="914400" rtl="0" eaLnBrk="1" latinLnBrk="0" hangingPunct="1">
+    <a:lvl9pPr marL="3657600" algn="l" defTabSz="457200" rtl="0" eaLnBrk="1" latinLnBrk="0" hangingPunct="1">
       <a:defRPr sz="1200" kern="1200">
         <a:solidFill>
           <a:schemeClr val="tx1"/>
@@ -259,7 +465,7 @@
 </file>
 
 <file path=ppt/notesSlides/notesSlide1.xml><?xml version="1.0" encoding="utf-8"?>
-<p:notes xmlns:a="http://schemas.openxmlformats.org/drawingml/2006/main" xmlns:r="http://schemas.openxmlformats.org/officeDocument/2006/relationships" xmlns:p="http://schemas.openxmlformats.org/presentationml/2006/main">
+<p:notes xmlns:a="http://schemas.openxmlformats.org/drawingml/2006/main" xmlns:p="http://schemas.openxmlformats.org/presentationml/2006/main" xmlns:r="http://schemas.openxmlformats.org/officeDocument/2006/relationships">
   <p:cSld>
     <p:spTree>
       <p:nvGrpSpPr>
@@ -279,7 +485,7 @@
         <p:nvSpPr>
           <p:cNvPr id="2" name="Slide Image Placeholder 1"/>
           <p:cNvSpPr>
-            <a:spLocks noGrp="1" noRot="1" noChangeAspect="1"/>
+            <a:spLocks noGrp="1"/>
           </p:cNvSpPr>
           <p:nvPr>
             <p:ph type="sldImg" idx="2"/>
@@ -294,7 +500,7 @@
             <a:spLocks noGrp="1"/>
           </p:cNvSpPr>
           <p:nvPr>
-            <p:ph type="body" sz="quarter" idx="3"/>
+            <p:ph type="body" idx="3" sz="quarter"/>
           </p:nvPr>
         </p:nvSpPr>
         <p:spPr/>
@@ -315,7 +521,7 @@
             <a:spLocks noGrp="1"/>
           </p:cNvSpPr>
           <p:nvPr>
-            <p:ph type="sldNum" sz="quarter" idx="5"/>
+            <p:ph type="sldNum" idx="5" sz="quarter"/>
           </p:nvPr>
         </p:nvSpPr>
         <p:spPr/>
@@ -329,7 +535,7 @@
 </file>
 
 <file path=ppt/notesSlides/notesSlide2.xml><?xml version="1.0" encoding="utf-8"?>
-<p:notes xmlns:a="http://schemas.openxmlformats.org/drawingml/2006/main" xmlns:r="http://schemas.openxmlformats.org/officeDocument/2006/relationships" xmlns:p="http://schemas.openxmlformats.org/presentationml/2006/main">
+<p:notes xmlns:a="http://schemas.openxmlformats.org/drawingml/2006/main" xmlns:p="http://schemas.openxmlformats.org/presentationml/2006/main" xmlns:r="http://schemas.openxmlformats.org/officeDocument/2006/relationships">
   <p:cSld>
     <p:spTree>
       <p:nvGrpSpPr>
@@ -349,7 +555,7 @@
         <p:nvSpPr>
           <p:cNvPr id="2" name="Slide Image Placeholder 1"/>
           <p:cNvSpPr>
-            <a:spLocks noGrp="1" noRot="1" noChangeAspect="1"/>
+            <a:spLocks noGrp="1"/>
           </p:cNvSpPr>
           <p:nvPr>
             <p:ph type="sldImg" idx="2"/>
@@ -364,7 +570,7 @@
             <a:spLocks noGrp="1"/>
           </p:cNvSpPr>
           <p:nvPr>
-            <p:ph type="body" sz="quarter" idx="3"/>
+            <p:ph type="body" idx="3" sz="quarter"/>
           </p:nvPr>
         </p:nvSpPr>
         <p:spPr/>
@@ -385,7 +591,7 @@
             <a:spLocks noGrp="1"/>
           </p:cNvSpPr>
           <p:nvPr>
-            <p:ph type="sldNum" sz="quarter" idx="5"/>
+            <p:ph type="sldNum" idx="5" sz="quarter"/>
           </p:nvPr>
         </p:nvSpPr>
         <p:spPr/>
@@ -399,7 +605,7 @@
 </file>
 
 <file path=ppt/notesSlides/notesSlide3.xml><?xml version="1.0" encoding="utf-8"?>
-<p:notes xmlns:a="http://schemas.openxmlformats.org/drawingml/2006/main" xmlns:r="http://schemas.openxmlformats.org/officeDocument/2006/relationships" xmlns:p="http://schemas.openxmlformats.org/presentationml/2006/main">
+<p:notes xmlns:a="http://schemas.openxmlformats.org/drawingml/2006/main" xmlns:p="http://schemas.openxmlformats.org/presentationml/2006/main" xmlns:r="http://schemas.openxmlformats.org/officeDocument/2006/relationships">
   <p:cSld>
     <p:spTree>
       <p:nvGrpSpPr>
@@ -419,7 +625,7 @@
         <p:nvSpPr>
           <p:cNvPr id="2" name="Slide Image Placeholder 1"/>
           <p:cNvSpPr>
-            <a:spLocks noGrp="1" noRot="1" noChangeAspect="1"/>
+            <a:spLocks noGrp="1"/>
           </p:cNvSpPr>
           <p:nvPr>
             <p:ph type="sldImg" idx="2"/>
@@ -434,7 +640,7 @@
             <a:spLocks noGrp="1"/>
           </p:cNvSpPr>
           <p:nvPr>
-            <p:ph type="body" sz="quarter" idx="3"/>
+            <p:ph type="body" idx="3" sz="quarter"/>
           </p:nvPr>
         </p:nvSpPr>
         <p:spPr/>
@@ -455,7 +661,7 @@
             <a:spLocks noGrp="1"/>
           </p:cNvSpPr>
           <p:nvPr>
-            <p:ph type="sldNum" sz="quarter" idx="5"/>
+            <p:ph type="sldNum" idx="5" sz="quarter"/>
           </p:nvPr>
         </p:nvSpPr>
         <p:spPr/>
@@ -469,7 +675,7 @@
 </file>
 
 <file path=ppt/notesSlides/notesSlide4.xml><?xml version="1.0" encoding="utf-8"?>
-<p:notes xmlns:a="http://schemas.openxmlformats.org/drawingml/2006/main" xmlns:r="http://schemas.openxmlformats.org/officeDocument/2006/relationships" xmlns:p="http://schemas.openxmlformats.org/presentationml/2006/main">
+<p:notes xmlns:a="http://schemas.openxmlformats.org/drawingml/2006/main" xmlns:p="http://schemas.openxmlformats.org/presentationml/2006/main" xmlns:r="http://schemas.openxmlformats.org/officeDocument/2006/relationships">
   <p:cSld>
     <p:spTree>
       <p:nvGrpSpPr>
@@ -489,7 +695,7 @@
         <p:nvSpPr>
           <p:cNvPr id="2" name="Slide Image Placeholder 1"/>
           <p:cNvSpPr>
-            <a:spLocks noGrp="1" noRot="1" noChangeAspect="1"/>
+            <a:spLocks noGrp="1"/>
           </p:cNvSpPr>
           <p:nvPr>
             <p:ph type="sldImg" idx="2"/>
@@ -504,7 +710,7 @@
             <a:spLocks noGrp="1"/>
           </p:cNvSpPr>
           <p:nvPr>
-            <p:ph type="body" sz="quarter" idx="3"/>
+            <p:ph type="body" idx="3" sz="quarter"/>
           </p:nvPr>
         </p:nvSpPr>
         <p:spPr/>
@@ -525,7 +731,7 @@
             <a:spLocks noGrp="1"/>
           </p:cNvSpPr>
           <p:nvPr>
-            <p:ph type="sldNum" sz="quarter" idx="5"/>
+            <p:ph type="sldNum" idx="5" sz="quarter"/>
           </p:nvPr>
         </p:nvSpPr>
         <p:spPr/>
@@ -539,7 +745,7 @@
 </file>
 
 <file path=ppt/notesSlides/notesSlide5.xml><?xml version="1.0" encoding="utf-8"?>
-<p:notes xmlns:a="http://schemas.openxmlformats.org/drawingml/2006/main" xmlns:r="http://schemas.openxmlformats.org/officeDocument/2006/relationships" xmlns:p="http://schemas.openxmlformats.org/presentationml/2006/main">
+<p:notes xmlns:a="http://schemas.openxmlformats.org/drawingml/2006/main" xmlns:p="http://schemas.openxmlformats.org/presentationml/2006/main" xmlns:r="http://schemas.openxmlformats.org/officeDocument/2006/relationships">
   <p:cSld>
     <p:spTree>
       <p:nvGrpSpPr>
@@ -559,7 +765,7 @@
         <p:nvSpPr>
           <p:cNvPr id="2" name="Slide Image Placeholder 1"/>
           <p:cNvSpPr>
-            <a:spLocks noGrp="1" noRot="1" noChangeAspect="1"/>
+            <a:spLocks noGrp="1"/>
           </p:cNvSpPr>
           <p:nvPr>
             <p:ph type="sldImg" idx="2"/>
@@ -574,7 +780,7 @@
             <a:spLocks noGrp="1"/>
           </p:cNvSpPr>
           <p:nvPr>
-            <p:ph type="body" sz="quarter" idx="3"/>
+            <p:ph type="body" idx="3" sz="quarter"/>
           </p:nvPr>
         </p:nvSpPr>
         <p:spPr/>
@@ -595,7 +801,7 @@
             <a:spLocks noGrp="1"/>
           </p:cNvSpPr>
           <p:nvPr>
-            <p:ph type="sldNum" sz="quarter" idx="5"/>
+            <p:ph type="sldNum" idx="5" sz="quarter"/>
           </p:nvPr>
         </p:nvSpPr>
         <p:spPr/>
@@ -609,7 +815,7 @@
 </file>
 
 <file path=ppt/notesSlides/notesSlide6.xml><?xml version="1.0" encoding="utf-8"?>
-<p:notes xmlns:a="http://schemas.openxmlformats.org/drawingml/2006/main" xmlns:r="http://schemas.openxmlformats.org/officeDocument/2006/relationships" xmlns:p="http://schemas.openxmlformats.org/presentationml/2006/main">
+<p:notes xmlns:a="http://schemas.openxmlformats.org/drawingml/2006/main" xmlns:p="http://schemas.openxmlformats.org/presentationml/2006/main" xmlns:r="http://schemas.openxmlformats.org/officeDocument/2006/relationships">
   <p:cSld>
     <p:spTree>
       <p:nvGrpSpPr>
@@ -629,7 +835,7 @@
         <p:nvSpPr>
           <p:cNvPr id="2" name="Slide Image Placeholder 1"/>
           <p:cNvSpPr>
-            <a:spLocks noGrp="1" noRot="1" noChangeAspect="1"/>
+            <a:spLocks noGrp="1"/>
           </p:cNvSpPr>
           <p:nvPr>
             <p:ph type="sldImg" idx="2"/>
@@ -644,7 +850,7 @@
             <a:spLocks noGrp="1"/>
           </p:cNvSpPr>
           <p:nvPr>
-            <p:ph type="body" sz="quarter" idx="3"/>
+            <p:ph type="body" idx="3" sz="quarter"/>
           </p:nvPr>
         </p:nvSpPr>
         <p:spPr/>
@@ -665,7 +871,7 @@
             <a:spLocks noGrp="1"/>
           </p:cNvSpPr>
           <p:nvPr>
-            <p:ph type="sldNum" sz="quarter" idx="5"/>
+            <p:ph type="sldNum" idx="5" sz="quarter"/>
           </p:nvPr>
         </p:nvSpPr>
         <p:spPr/>
@@ -679,7 +885,7 @@
 </file>
 
 <file path=ppt/notesSlides/notesSlide7.xml><?xml version="1.0" encoding="utf-8"?>
-<p:notes xmlns:a="http://schemas.openxmlformats.org/drawingml/2006/main" xmlns:r="http://schemas.openxmlformats.org/officeDocument/2006/relationships" xmlns:p="http://schemas.openxmlformats.org/presentationml/2006/main">
+<p:notes xmlns:a="http://schemas.openxmlformats.org/drawingml/2006/main" xmlns:p="http://schemas.openxmlformats.org/presentationml/2006/main" xmlns:r="http://schemas.openxmlformats.org/officeDocument/2006/relationships">
   <p:cSld>
     <p:spTree>
       <p:nvGrpSpPr>
@@ -699,7 +905,7 @@
         <p:nvSpPr>
           <p:cNvPr id="2" name="Slide Image Placeholder 1"/>
           <p:cNvSpPr>
-            <a:spLocks noGrp="1" noRot="1" noChangeAspect="1"/>
+            <a:spLocks noGrp="1"/>
           </p:cNvSpPr>
           <p:nvPr>
             <p:ph type="sldImg" idx="2"/>
@@ -714,7 +920,7 @@
             <a:spLocks noGrp="1"/>
           </p:cNvSpPr>
           <p:nvPr>
-            <p:ph type="body" sz="quarter" idx="3"/>
+            <p:ph type="body" idx="3" sz="quarter"/>
           </p:nvPr>
         </p:nvSpPr>
         <p:spPr/>
@@ -735,7 +941,7 @@
             <a:spLocks noGrp="1"/>
           </p:cNvSpPr>
           <p:nvPr>
-            <p:ph type="sldNum" sz="quarter" idx="5"/>
+            <p:ph type="sldNum" idx="5" sz="quarter"/>
           </p:nvPr>
         </p:nvSpPr>
         <p:spPr/>
@@ -749,7 +955,7 @@
 </file>
 
 <file path=ppt/notesSlides/notesSlide8.xml><?xml version="1.0" encoding="utf-8"?>
-<p:notes xmlns:a="http://schemas.openxmlformats.org/drawingml/2006/main" xmlns:r="http://schemas.openxmlformats.org/officeDocument/2006/relationships" xmlns:p="http://schemas.openxmlformats.org/presentationml/2006/main">
+<p:notes xmlns:a="http://schemas.openxmlformats.org/drawingml/2006/main" xmlns:p="http://schemas.openxmlformats.org/presentationml/2006/main" xmlns:r="http://schemas.openxmlformats.org/officeDocument/2006/relationships">
   <p:cSld>
     <p:spTree>
       <p:nvGrpSpPr>
@@ -769,7 +975,7 @@
         <p:nvSpPr>
           <p:cNvPr id="2" name="Slide Image Placeholder 1"/>
           <p:cNvSpPr>
-            <a:spLocks noGrp="1" noRot="1" noChangeAspect="1"/>
+            <a:spLocks noGrp="1"/>
           </p:cNvSpPr>
           <p:nvPr>
             <p:ph type="sldImg" idx="2"/>
@@ -784,7 +990,7 @@
             <a:spLocks noGrp="1"/>
           </p:cNvSpPr>
           <p:nvPr>
-            <p:ph type="body" sz="quarter" idx="3"/>
+            <p:ph type="body" idx="3" sz="quarter"/>
           </p:nvPr>
         </p:nvSpPr>
         <p:spPr/>
@@ -793,7 +999,7 @@
           <a:lstStyle/>
           <a:p>
             <a:r>
-              <a:t>下一步四件事：定软件、锁参数、做静态校验，再跑三形状、磁畴、磁滞和收敛。最需要老师定的是软件路线：这台机器有 RTX 5060，但新显卡和旧版 MuMax3 可能不兼容，也可能走 OOMMF 或 WSL 加 Fidimag。谢谢。</a:t>
+              <a:t>下一步四件事：定软件、锁参数、做静态校验，再跑三形状、磁畴、磁滞和收敛。软件路线还没定：这台机器有 RTX 5060，但新显卡和旧版 MuMax3 可能不兼容，也可能走 OOMMF 或 WSL 加 Fidimag。谢谢。</a:t>
             </a:r>
           </a:p>
         </p:txBody>
@@ -805,7 +1011,7 @@
             <a:spLocks noGrp="1"/>
           </p:cNvSpPr>
           <p:nvPr>
-            <p:ph type="sldNum" sz="quarter" idx="5"/>
+            <p:ph type="sldNum" idx="5" sz="quarter"/>
           </p:nvPr>
         </p:nvSpPr>
         <p:spPr/>
@@ -856,9 +1062,10 @@
           <a:lstStyle/>
           <a:p>
             <a:r>
-              <a:rPr lang="en-US"/>
+              <a:rPr lang="en-US" smtClean="0"/>
               <a:t>Click to edit Master title style</a:t>
             </a:r>
+            <a:endParaRPr lang="en-US"/>
           </a:p>
         </p:txBody>
       </p:sp>
@@ -974,9 +1181,10 @@
           </a:lstStyle>
           <a:p>
             <a:r>
-              <a:rPr lang="en-US"/>
+              <a:rPr lang="en-US" smtClean="0"/>
               <a:t>Click to edit Master subtitle style</a:t>
             </a:r>
+            <a:endParaRPr lang="en-US"/>
           </a:p>
         </p:txBody>
       </p:sp>
@@ -997,7 +1205,7 @@
           <a:p>
             <a:fld id="{5BCAD085-E8A6-8845-BD4E-CB4CCA059FC4}" type="datetimeFigureOut">
               <a:rPr lang="en-US" smtClean="0"/>
-              <a:t>10/25/2026</a:t>
+              <a:t>1/27/13</a:t>
             </a:fld>
             <a:endParaRPr lang="en-US"/>
           </a:p>
@@ -1091,9 +1299,10 @@
           <a:lstStyle/>
           <a:p>
             <a:r>
-              <a:rPr lang="en-US"/>
+              <a:rPr lang="en-US" smtClean="0"/>
               <a:t>Click to edit Master title style</a:t>
             </a:r>
+            <a:endParaRPr lang="en-US"/>
           </a:p>
         </p:txBody>
       </p:sp>
@@ -1114,37 +1323,38 @@
           <a:p>
             <a:pPr lvl="0"/>
             <a:r>
-              <a:rPr lang="en-US"/>
+              <a:rPr lang="en-US" smtClean="0"/>
               <a:t>Click to edit Master text styles</a:t>
             </a:r>
           </a:p>
           <a:p>
             <a:pPr lvl="1"/>
             <a:r>
-              <a:rPr lang="en-US"/>
+              <a:rPr lang="en-US" smtClean="0"/>
               <a:t>Second level</a:t>
             </a:r>
           </a:p>
           <a:p>
             <a:pPr lvl="2"/>
             <a:r>
-              <a:rPr lang="en-US"/>
+              <a:rPr lang="en-US" smtClean="0"/>
               <a:t>Third level</a:t>
             </a:r>
           </a:p>
           <a:p>
             <a:pPr lvl="3"/>
             <a:r>
-              <a:rPr lang="en-US"/>
+              <a:rPr lang="en-US" smtClean="0"/>
               <a:t>Fourth level</a:t>
             </a:r>
           </a:p>
           <a:p>
             <a:pPr lvl="4"/>
             <a:r>
-              <a:rPr lang="en-US"/>
+              <a:rPr lang="en-US" smtClean="0"/>
               <a:t>Fifth level</a:t>
             </a:r>
+            <a:endParaRPr lang="en-US"/>
           </a:p>
         </p:txBody>
       </p:sp>
@@ -1165,7 +1375,7 @@
           <a:p>
             <a:fld id="{5BCAD085-E8A6-8845-BD4E-CB4CCA059FC4}" type="datetimeFigureOut">
               <a:rPr lang="en-US" smtClean="0"/>
-              <a:t>10/25/2026</a:t>
+              <a:t>1/27/13</a:t>
             </a:fld>
             <a:endParaRPr lang="en-US"/>
           </a:p>
@@ -1264,9 +1474,10 @@
           <a:lstStyle/>
           <a:p>
             <a:r>
-              <a:rPr lang="en-US"/>
+              <a:rPr lang="en-US" smtClean="0"/>
               <a:t>Click to edit Master title style</a:t>
             </a:r>
+            <a:endParaRPr lang="en-US"/>
           </a:p>
         </p:txBody>
       </p:sp>
@@ -1292,37 +1503,38 @@
           <a:p>
             <a:pPr lvl="0"/>
             <a:r>
-              <a:rPr lang="en-US"/>
+              <a:rPr lang="en-US" smtClean="0"/>
               <a:t>Click to edit Master text styles</a:t>
             </a:r>
           </a:p>
           <a:p>
             <a:pPr lvl="1"/>
             <a:r>
-              <a:rPr lang="en-US"/>
+              <a:rPr lang="en-US" smtClean="0"/>
               <a:t>Second level</a:t>
             </a:r>
           </a:p>
           <a:p>
             <a:pPr lvl="2"/>
             <a:r>
-              <a:rPr lang="en-US"/>
+              <a:rPr lang="en-US" smtClean="0"/>
               <a:t>Third level</a:t>
             </a:r>
           </a:p>
           <a:p>
             <a:pPr lvl="3"/>
             <a:r>
-              <a:rPr lang="en-US"/>
+              <a:rPr lang="en-US" smtClean="0"/>
               <a:t>Fourth level</a:t>
             </a:r>
           </a:p>
           <a:p>
             <a:pPr lvl="4"/>
             <a:r>
-              <a:rPr lang="en-US"/>
+              <a:rPr lang="en-US" smtClean="0"/>
               <a:t>Fifth level</a:t>
             </a:r>
+            <a:endParaRPr lang="en-US"/>
           </a:p>
         </p:txBody>
       </p:sp>
@@ -1343,7 +1555,7 @@
           <a:p>
             <a:fld id="{5BCAD085-E8A6-8845-BD4E-CB4CCA059FC4}" type="datetimeFigureOut">
               <a:rPr lang="en-US" smtClean="0"/>
-              <a:t>10/25/2026</a:t>
+              <a:t>1/27/13</a:t>
             </a:fld>
             <a:endParaRPr lang="en-US"/>
           </a:p>
@@ -1437,9 +1649,10 @@
           <a:lstStyle/>
           <a:p>
             <a:r>
-              <a:rPr lang="en-US"/>
+              <a:rPr lang="en-US" smtClean="0"/>
               <a:t>Click to edit Master title style</a:t>
             </a:r>
+            <a:endParaRPr lang="en-US"/>
           </a:p>
         </p:txBody>
       </p:sp>
@@ -1460,37 +1673,38 @@
           <a:p>
             <a:pPr lvl="0"/>
             <a:r>
-              <a:rPr lang="en-US"/>
+              <a:rPr lang="en-US" smtClean="0"/>
               <a:t>Click to edit Master text styles</a:t>
             </a:r>
           </a:p>
           <a:p>
             <a:pPr lvl="1"/>
             <a:r>
-              <a:rPr lang="en-US"/>
+              <a:rPr lang="en-US" smtClean="0"/>
               <a:t>Second level</a:t>
             </a:r>
           </a:p>
           <a:p>
             <a:pPr lvl="2"/>
             <a:r>
-              <a:rPr lang="en-US"/>
+              <a:rPr lang="en-US" smtClean="0"/>
               <a:t>Third level</a:t>
             </a:r>
           </a:p>
           <a:p>
             <a:pPr lvl="3"/>
             <a:r>
-              <a:rPr lang="en-US"/>
+              <a:rPr lang="en-US" smtClean="0"/>
               <a:t>Fourth level</a:t>
             </a:r>
           </a:p>
           <a:p>
             <a:pPr lvl="4"/>
             <a:r>
-              <a:rPr lang="en-US"/>
+              <a:rPr lang="en-US" smtClean="0"/>
               <a:t>Fifth level</a:t>
             </a:r>
+            <a:endParaRPr lang="en-US"/>
           </a:p>
         </p:txBody>
       </p:sp>
@@ -1511,7 +1725,7 @@
           <a:p>
             <a:fld id="{5BCAD085-E8A6-8845-BD4E-CB4CCA059FC4}" type="datetimeFigureOut">
               <a:rPr lang="en-US" smtClean="0"/>
-              <a:t>10/25/2026</a:t>
+              <a:t>1/27/13</a:t>
             </a:fld>
             <a:endParaRPr lang="en-US"/>
           </a:p>
@@ -1614,9 +1828,10 @@
           </a:lstStyle>
           <a:p>
             <a:r>
-              <a:rPr lang="en-US"/>
+              <a:rPr lang="en-US" smtClean="0"/>
               <a:t>Click to edit Master title style</a:t>
             </a:r>
+            <a:endParaRPr lang="en-US"/>
           </a:p>
         </p:txBody>
       </p:sp>
@@ -1733,7 +1948,7 @@
           <a:p>
             <a:pPr lvl="0"/>
             <a:r>
-              <a:rPr lang="en-US"/>
+              <a:rPr lang="en-US" smtClean="0"/>
               <a:t>Click to edit Master text styles</a:t>
             </a:r>
           </a:p>
@@ -1756,7 +1971,7 @@
           <a:p>
             <a:fld id="{5BCAD085-E8A6-8845-BD4E-CB4CCA059FC4}" type="datetimeFigureOut">
               <a:rPr lang="en-US" smtClean="0"/>
-              <a:t>10/25/2026</a:t>
+              <a:t>1/27/13</a:t>
             </a:fld>
             <a:endParaRPr lang="en-US"/>
           </a:p>
@@ -1850,9 +2065,10 @@
           <a:lstStyle/>
           <a:p>
             <a:r>
-              <a:rPr lang="en-US"/>
+              <a:rPr lang="en-US" smtClean="0"/>
               <a:t>Click to edit Master title style</a:t>
             </a:r>
+            <a:endParaRPr lang="en-US"/>
           </a:p>
         </p:txBody>
       </p:sp>
@@ -1906,37 +2122,38 @@
           <a:p>
             <a:pPr lvl="0"/>
             <a:r>
-              <a:rPr lang="en-US"/>
+              <a:rPr lang="en-US" smtClean="0"/>
               <a:t>Click to edit Master text styles</a:t>
             </a:r>
           </a:p>
           <a:p>
             <a:pPr lvl="1"/>
             <a:r>
-              <a:rPr lang="en-US"/>
+              <a:rPr lang="en-US" smtClean="0"/>
               <a:t>Second level</a:t>
             </a:r>
           </a:p>
           <a:p>
             <a:pPr lvl="2"/>
             <a:r>
-              <a:rPr lang="en-US"/>
+              <a:rPr lang="en-US" smtClean="0"/>
               <a:t>Third level</a:t>
             </a:r>
           </a:p>
           <a:p>
             <a:pPr lvl="3"/>
             <a:r>
-              <a:rPr lang="en-US"/>
+              <a:rPr lang="en-US" smtClean="0"/>
               <a:t>Fourth level</a:t>
             </a:r>
           </a:p>
           <a:p>
             <a:pPr lvl="4"/>
             <a:r>
-              <a:rPr lang="en-US"/>
+              <a:rPr lang="en-US" smtClean="0"/>
               <a:t>Fifth level</a:t>
             </a:r>
+            <a:endParaRPr lang="en-US"/>
           </a:p>
         </p:txBody>
       </p:sp>
@@ -1990,37 +2207,38 @@
           <a:p>
             <a:pPr lvl="0"/>
             <a:r>
-              <a:rPr lang="en-US"/>
+              <a:rPr lang="en-US" smtClean="0"/>
               <a:t>Click to edit Master text styles</a:t>
             </a:r>
           </a:p>
           <a:p>
             <a:pPr lvl="1"/>
             <a:r>
-              <a:rPr lang="en-US"/>
+              <a:rPr lang="en-US" smtClean="0"/>
               <a:t>Second level</a:t>
             </a:r>
           </a:p>
           <a:p>
             <a:pPr lvl="2"/>
             <a:r>
-              <a:rPr lang="en-US"/>
+              <a:rPr lang="en-US" smtClean="0"/>
               <a:t>Third level</a:t>
             </a:r>
           </a:p>
           <a:p>
             <a:pPr lvl="3"/>
             <a:r>
-              <a:rPr lang="en-US"/>
+              <a:rPr lang="en-US" smtClean="0"/>
               <a:t>Fourth level</a:t>
             </a:r>
           </a:p>
           <a:p>
             <a:pPr lvl="4"/>
             <a:r>
-              <a:rPr lang="en-US"/>
+              <a:rPr lang="en-US" smtClean="0"/>
               <a:t>Fifth level</a:t>
             </a:r>
+            <a:endParaRPr lang="en-US"/>
           </a:p>
         </p:txBody>
       </p:sp>
@@ -2041,7 +2259,7 @@
           <a:p>
             <a:fld id="{5BCAD085-E8A6-8845-BD4E-CB4CCA059FC4}" type="datetimeFigureOut">
               <a:rPr lang="en-US" smtClean="0"/>
-              <a:t>10/25/2026</a:t>
+              <a:t>1/27/13</a:t>
             </a:fld>
             <a:endParaRPr lang="en-US"/>
           </a:p>
@@ -2139,9 +2357,10 @@
           </a:lstStyle>
           <a:p>
             <a:r>
-              <a:rPr lang="en-US"/>
+              <a:rPr lang="en-US" smtClean="0"/>
               <a:t>Click to edit Master title style</a:t>
             </a:r>
+            <a:endParaRPr lang="en-US"/>
           </a:p>
         </p:txBody>
       </p:sp>
@@ -2204,7 +2423,7 @@
           <a:p>
             <a:pPr lvl="0"/>
             <a:r>
-              <a:rPr lang="en-US"/>
+              <a:rPr lang="en-US" smtClean="0"/>
               <a:t>Click to edit Master text styles</a:t>
             </a:r>
           </a:p>
@@ -2260,37 +2479,38 @@
           <a:p>
             <a:pPr lvl="0"/>
             <a:r>
-              <a:rPr lang="en-US"/>
+              <a:rPr lang="en-US" smtClean="0"/>
               <a:t>Click to edit Master text styles</a:t>
             </a:r>
           </a:p>
           <a:p>
             <a:pPr lvl="1"/>
             <a:r>
-              <a:rPr lang="en-US"/>
+              <a:rPr lang="en-US" smtClean="0"/>
               <a:t>Second level</a:t>
             </a:r>
           </a:p>
           <a:p>
             <a:pPr lvl="2"/>
             <a:r>
-              <a:rPr lang="en-US"/>
+              <a:rPr lang="en-US" smtClean="0"/>
               <a:t>Third level</a:t>
             </a:r>
           </a:p>
           <a:p>
             <a:pPr lvl="3"/>
             <a:r>
-              <a:rPr lang="en-US"/>
+              <a:rPr lang="en-US" smtClean="0"/>
               <a:t>Fourth level</a:t>
             </a:r>
           </a:p>
           <a:p>
             <a:pPr lvl="4"/>
             <a:r>
-              <a:rPr lang="en-US"/>
+              <a:rPr lang="en-US" smtClean="0"/>
               <a:t>Fifth level</a:t>
             </a:r>
+            <a:endParaRPr lang="en-US"/>
           </a:p>
         </p:txBody>
       </p:sp>
@@ -2353,7 +2573,7 @@
           <a:p>
             <a:pPr lvl="0"/>
             <a:r>
-              <a:rPr lang="en-US"/>
+              <a:rPr lang="en-US" smtClean="0"/>
               <a:t>Click to edit Master text styles</a:t>
             </a:r>
           </a:p>
@@ -2409,37 +2629,38 @@
           <a:p>
             <a:pPr lvl="0"/>
             <a:r>
-              <a:rPr lang="en-US"/>
+              <a:rPr lang="en-US" smtClean="0"/>
               <a:t>Click to edit Master text styles</a:t>
             </a:r>
           </a:p>
           <a:p>
             <a:pPr lvl="1"/>
             <a:r>
-              <a:rPr lang="en-US"/>
+              <a:rPr lang="en-US" smtClean="0"/>
               <a:t>Second level</a:t>
             </a:r>
           </a:p>
           <a:p>
             <a:pPr lvl="2"/>
             <a:r>
-              <a:rPr lang="en-US"/>
+              <a:rPr lang="en-US" smtClean="0"/>
               <a:t>Third level</a:t>
             </a:r>
           </a:p>
           <a:p>
             <a:pPr lvl="3"/>
             <a:r>
-              <a:rPr lang="en-US"/>
+              <a:rPr lang="en-US" smtClean="0"/>
               <a:t>Fourth level</a:t>
             </a:r>
           </a:p>
           <a:p>
             <a:pPr lvl="4"/>
             <a:r>
-              <a:rPr lang="en-US"/>
+              <a:rPr lang="en-US" smtClean="0"/>
               <a:t>Fifth level</a:t>
             </a:r>
+            <a:endParaRPr lang="en-US"/>
           </a:p>
         </p:txBody>
       </p:sp>
@@ -2460,7 +2681,7 @@
           <a:p>
             <a:fld id="{5BCAD085-E8A6-8845-BD4E-CB4CCA059FC4}" type="datetimeFigureOut">
               <a:rPr lang="en-US" smtClean="0"/>
-              <a:t>10/25/2026</a:t>
+              <a:t>1/27/13</a:t>
             </a:fld>
             <a:endParaRPr lang="en-US"/>
           </a:p>
@@ -2554,9 +2775,10 @@
           <a:lstStyle/>
           <a:p>
             <a:r>
-              <a:rPr lang="en-US"/>
+              <a:rPr lang="en-US" smtClean="0"/>
               <a:t>Click to edit Master title style</a:t>
             </a:r>
+            <a:endParaRPr lang="en-US"/>
           </a:p>
         </p:txBody>
       </p:sp>
@@ -2577,7 +2799,7 @@
           <a:p>
             <a:fld id="{5BCAD085-E8A6-8845-BD4E-CB4CCA059FC4}" type="datetimeFigureOut">
               <a:rPr lang="en-US" smtClean="0"/>
-              <a:t>10/25/2026</a:t>
+              <a:t>1/27/13</a:t>
             </a:fld>
             <a:endParaRPr lang="en-US"/>
           </a:p>
@@ -2672,7 +2894,7 @@
           <a:p>
             <a:fld id="{5BCAD085-E8A6-8845-BD4E-CB4CCA059FC4}" type="datetimeFigureOut">
               <a:rPr lang="en-US" smtClean="0"/>
-              <a:t>10/25/2026</a:t>
+              <a:t>1/27/13</a:t>
             </a:fld>
             <a:endParaRPr lang="en-US"/>
           </a:p>
@@ -2775,9 +2997,10 @@
           </a:lstStyle>
           <a:p>
             <a:r>
-              <a:rPr lang="en-US"/>
+              <a:rPr lang="en-US" smtClean="0"/>
               <a:t>Click to edit Master title style</a:t>
             </a:r>
+            <a:endParaRPr lang="en-US"/>
           </a:p>
         </p:txBody>
       </p:sp>
@@ -2831,37 +3054,38 @@
           <a:p>
             <a:pPr lvl="0"/>
             <a:r>
-              <a:rPr lang="en-US"/>
+              <a:rPr lang="en-US" smtClean="0"/>
               <a:t>Click to edit Master text styles</a:t>
             </a:r>
           </a:p>
           <a:p>
             <a:pPr lvl="1"/>
             <a:r>
-              <a:rPr lang="en-US"/>
+              <a:rPr lang="en-US" smtClean="0"/>
               <a:t>Second level</a:t>
             </a:r>
           </a:p>
           <a:p>
             <a:pPr lvl="2"/>
             <a:r>
-              <a:rPr lang="en-US"/>
+              <a:rPr lang="en-US" smtClean="0"/>
               <a:t>Third level</a:t>
             </a:r>
           </a:p>
           <a:p>
             <a:pPr lvl="3"/>
             <a:r>
-              <a:rPr lang="en-US"/>
+              <a:rPr lang="en-US" smtClean="0"/>
               <a:t>Fourth level</a:t>
             </a:r>
           </a:p>
           <a:p>
             <a:pPr lvl="4"/>
             <a:r>
-              <a:rPr lang="en-US"/>
+              <a:rPr lang="en-US" smtClean="0"/>
               <a:t>Fifth level</a:t>
             </a:r>
+            <a:endParaRPr lang="en-US"/>
           </a:p>
         </p:txBody>
       </p:sp>
@@ -2924,7 +3148,7 @@
           <a:p>
             <a:pPr lvl="0"/>
             <a:r>
-              <a:rPr lang="en-US"/>
+              <a:rPr lang="en-US" smtClean="0"/>
               <a:t>Click to edit Master text styles</a:t>
             </a:r>
           </a:p>
@@ -2947,7 +3171,7 @@
           <a:p>
             <a:fld id="{5BCAD085-E8A6-8845-BD4E-CB4CCA059FC4}" type="datetimeFigureOut">
               <a:rPr lang="en-US" smtClean="0"/>
-              <a:t>10/25/2026</a:t>
+              <a:t>1/27/13</a:t>
             </a:fld>
             <a:endParaRPr lang="en-US"/>
           </a:p>
@@ -3050,9 +3274,10 @@
           </a:lstStyle>
           <a:p>
             <a:r>
-              <a:rPr lang="en-US"/>
+              <a:rPr lang="en-US" smtClean="0"/>
               <a:t>Click to edit Master title style</a:t>
             </a:r>
+            <a:endParaRPr lang="en-US"/>
           </a:p>
         </p:txBody>
       </p:sp>
@@ -3176,7 +3401,7 @@
           <a:p>
             <a:pPr lvl="0"/>
             <a:r>
-              <a:rPr lang="en-US"/>
+              <a:rPr lang="en-US" smtClean="0"/>
               <a:t>Click to edit Master text styles</a:t>
             </a:r>
           </a:p>
@@ -3199,7 +3424,7 @@
           <a:p>
             <a:fld id="{5BCAD085-E8A6-8845-BD4E-CB4CCA059FC4}" type="datetimeFigureOut">
               <a:rPr lang="en-US" smtClean="0"/>
-              <a:t>10/25/2026</a:t>
+              <a:t>1/27/13</a:t>
             </a:fld>
             <a:endParaRPr lang="en-US"/>
           </a:p>
@@ -3308,9 +3533,10 @@
           <a:lstStyle/>
           <a:p>
             <a:r>
-              <a:rPr lang="en-US"/>
+              <a:rPr lang="en-US" smtClean="0"/>
               <a:t>Click to edit Master title style</a:t>
             </a:r>
+            <a:endParaRPr lang="en-US"/>
           </a:p>
         </p:txBody>
       </p:sp>
@@ -3341,37 +3567,38 @@
           <a:p>
             <a:pPr lvl="0"/>
             <a:r>
-              <a:rPr lang="en-US"/>
+              <a:rPr lang="en-US" smtClean="0"/>
               <a:t>Click to edit Master text styles</a:t>
             </a:r>
           </a:p>
           <a:p>
             <a:pPr lvl="1"/>
             <a:r>
-              <a:rPr lang="en-US"/>
+              <a:rPr lang="en-US" smtClean="0"/>
               <a:t>Second level</a:t>
             </a:r>
           </a:p>
           <a:p>
             <a:pPr lvl="2"/>
             <a:r>
-              <a:rPr lang="en-US"/>
+              <a:rPr lang="en-US" smtClean="0"/>
               <a:t>Third level</a:t>
             </a:r>
           </a:p>
           <a:p>
             <a:pPr lvl="3"/>
             <a:r>
-              <a:rPr lang="en-US"/>
+              <a:rPr lang="en-US" smtClean="0"/>
               <a:t>Fourth level</a:t>
             </a:r>
           </a:p>
           <a:p>
             <a:pPr lvl="4"/>
             <a:r>
-              <a:rPr lang="en-US"/>
+              <a:rPr lang="en-US" smtClean="0"/>
               <a:t>Fifth level</a:t>
             </a:r>
+            <a:endParaRPr lang="en-US"/>
           </a:p>
         </p:txBody>
       </p:sp>
@@ -3410,7 +3637,7 @@
           <a:p>
             <a:fld id="{5BCAD085-E8A6-8845-BD4E-CB4CCA059FC4}" type="datetimeFigureOut">
               <a:rPr lang="en-US" smtClean="0"/>
-              <a:t>10/25/2026</a:t>
+              <a:t>1/27/13</a:t>
             </a:fld>
             <a:endParaRPr lang="en-US"/>
           </a:p>
@@ -3769,7 +3996,7 @@
 </file>
 
 <file path=ppt/slides/slide1.xml><?xml version="1.0" encoding="utf-8"?>
-<p:sld xmlns:a="http://schemas.openxmlformats.org/drawingml/2006/main" xmlns:r="http://schemas.openxmlformats.org/officeDocument/2006/relationships" xmlns:p="http://schemas.openxmlformats.org/presentationml/2006/main">
+<p:sld xmlns:a="http://schemas.openxmlformats.org/drawingml/2006/main" xmlns:p="http://schemas.openxmlformats.org/presentationml/2006/main" xmlns:r="http://schemas.openxmlformats.org/officeDocument/2006/relationships">
   <p:cSld>
     <p:bg>
       <p:bgPr>
@@ -3785,14 +4012,7 @@
         <p:cNvGrpSpPr/>
         <p:nvPr/>
       </p:nvGrpSpPr>
-      <p:grpSpPr>
-        <a:xfrm>
-          <a:off x="0" y="0"/>
-          <a:ext cx="0" cy="0"/>
-          <a:chOff x="0" y="0"/>
-          <a:chExt cx="0" cy="0"/>
-        </a:xfrm>
-      </p:grpSpPr>
+      <p:grpSpPr/>
       <p:sp>
         <p:nvSpPr>
           <p:cNvPr id="2" name="Rectangle 1"/>
@@ -3820,7 +4040,6 @@
           <a:lstStyle/>
           <a:p>
             <a:pPr algn="ctr"/>
-            <a:endParaRPr/>
           </a:p>
         </p:txBody>
       </p:sp>
@@ -3841,7 +4060,7 @@
           <a:noFill/>
         </p:spPr>
         <p:txBody>
-          <a:bodyPr wrap="square" lIns="0" tIns="0" rIns="0" bIns="0" anchor="t">
+          <a:bodyPr wrap="square" lIns="0" rIns="0" tIns="0" bIns="0" anchor="t">
             <a:noAutofit/>
           </a:bodyPr>
           <a:lstStyle/>
@@ -3887,7 +4106,7 @@
           <a:noFill/>
         </p:spPr>
         <p:txBody>
-          <a:bodyPr wrap="square" lIns="0" tIns="0" rIns="0" bIns="0" anchor="t">
+          <a:bodyPr wrap="square" lIns="0" rIns="0" tIns="0" bIns="0" anchor="t">
             <a:noAutofit/>
           </a:bodyPr>
           <a:lstStyle/>
@@ -3956,7 +4175,7 @@
           <a:noFill/>
         </p:spPr>
         <p:txBody>
-          <a:bodyPr wrap="square" lIns="0" tIns="0" rIns="0" bIns="0" anchor="t">
+          <a:bodyPr wrap="square" lIns="0" rIns="0" tIns="0" bIns="0" anchor="t">
             <a:noAutofit/>
           </a:bodyPr>
           <a:lstStyle/>
@@ -3973,7 +4192,7 @@
               </a:spcAft>
             </a:pPr>
             <a:r>
-              <a:rPr sz="1800" b="0" i="0" dirty="0" err="1">
+              <a:rPr sz="1800" b="0" i="0">
                 <a:solidFill>
                   <a:srgbClr val="3A4A50"/>
                 </a:solidFill>
@@ -3982,13 +4201,6 @@
               </a:rPr>
               <a:t>理论学习完成情况与下一步计划</a:t>
             </a:r>
-            <a:endParaRPr sz="1800" b="0" i="0" dirty="0">
-              <a:solidFill>
-                <a:srgbClr val="3A4A50"/>
-              </a:solidFill>
-              <a:latin typeface="Segoe UI"/>
-              <a:ea typeface="Microsoft YaHei"/>
-            </a:endParaRPr>
           </a:p>
         </p:txBody>
       </p:sp>
@@ -4009,7 +4221,7 @@
           <a:noFill/>
         </p:spPr>
         <p:txBody>
-          <a:bodyPr wrap="square" lIns="0" tIns="0" rIns="0" bIns="0" anchor="t">
+          <a:bodyPr wrap="square" lIns="0" rIns="0" tIns="0" bIns="0" anchor="t">
             <a:noAutofit/>
           </a:bodyPr>
           <a:lstStyle/>
@@ -4067,7 +4279,6 @@
           <a:lstStyle/>
           <a:p>
             <a:pPr algn="ctr"/>
-            <a:endParaRPr/>
           </a:p>
         </p:txBody>
       </p:sp>
@@ -4098,7 +4309,6 @@
           <a:lstStyle/>
           <a:p>
             <a:pPr algn="ctr"/>
-            <a:endParaRPr/>
           </a:p>
         </p:txBody>
       </p:sp>
@@ -4129,7 +4339,6 @@
           <a:lstStyle/>
           <a:p>
             <a:pPr algn="ctr"/>
-            <a:endParaRPr/>
           </a:p>
         </p:txBody>
       </p:sp>
@@ -4150,7 +4359,7 @@
           <a:noFill/>
         </p:spPr>
         <p:txBody>
-          <a:bodyPr wrap="square" lIns="0" tIns="0" rIns="0" bIns="0" anchor="t">
+          <a:bodyPr wrap="square" lIns="0" rIns="0" tIns="0" bIns="0" anchor="t">
             <a:noAutofit/>
           </a:bodyPr>
           <a:lstStyle/>
@@ -4206,7 +4415,6 @@
           <a:lstStyle/>
           <a:p>
             <a:pPr algn="ctr"/>
-            <a:endParaRPr/>
           </a:p>
         </p:txBody>
       </p:sp>
@@ -4227,7 +4435,7 @@
           <a:noFill/>
         </p:spPr>
         <p:txBody>
-          <a:bodyPr wrap="square" lIns="0" tIns="0" rIns="0" bIns="0" anchor="t">
+          <a:bodyPr wrap="square" lIns="0" rIns="0" tIns="0" bIns="0" anchor="t">
             <a:noAutofit/>
           </a:bodyPr>
           <a:lstStyle/>
@@ -4283,7 +4491,7 @@
           <a:noFill/>
         </p:spPr>
         <p:txBody>
-          <a:bodyPr wrap="square" lIns="0" tIns="0" rIns="0" bIns="0" anchor="t">
+          <a:bodyPr wrap="square" lIns="0" rIns="0" tIns="0" bIns="0" anchor="t">
             <a:noAutofit/>
           </a:bodyPr>
           <a:lstStyle/>
@@ -4343,7 +4551,6 @@
           <a:lstStyle/>
           <a:p>
             <a:pPr algn="ctr"/>
-            <a:endParaRPr/>
           </a:p>
         </p:txBody>
       </p:sp>
@@ -4364,7 +4571,7 @@
           <a:noFill/>
         </p:spPr>
         <p:txBody>
-          <a:bodyPr wrap="square" lIns="0" tIns="0" rIns="0" bIns="0" anchor="ctr">
+          <a:bodyPr wrap="square" lIns="0" rIns="0" tIns="0" bIns="0" anchor="ctr">
             <a:noAutofit/>
           </a:bodyPr>
           <a:lstStyle/>
@@ -4398,7 +4605,17 @@
                 <a:latin typeface="Segoe UI"/>
                 <a:ea typeface="Microsoft YaHei"/>
               </a:rPr>
-              <a:t>    份专题资料</a:t>
+              <a:t>    </a:t>
+            </a:r>
+            <a:r>
+              <a:rPr sz="1200" b="0" i="0">
+                <a:solidFill>
+                  <a:srgbClr val="3A4A50"/>
+                </a:solidFill>
+                <a:latin typeface="Segoe UI"/>
+                <a:ea typeface="Microsoft YaHei"/>
+              </a:rPr>
+              <a:t>份专题资料</a:t>
             </a:r>
           </a:p>
         </p:txBody>
@@ -4434,7 +4651,6 @@
           <a:lstStyle/>
           <a:p>
             <a:pPr algn="ctr"/>
-            <a:endParaRPr/>
           </a:p>
         </p:txBody>
       </p:sp>
@@ -4455,7 +4671,7 @@
           <a:noFill/>
         </p:spPr>
         <p:txBody>
-          <a:bodyPr wrap="square" lIns="0" tIns="0" rIns="0" bIns="0" anchor="ctr">
+          <a:bodyPr wrap="square" lIns="0" rIns="0" tIns="0" bIns="0" anchor="ctr">
             <a:noAutofit/>
           </a:bodyPr>
           <a:lstStyle/>
@@ -4489,7 +4705,17 @@
                 <a:latin typeface="Segoe UI"/>
                 <a:ea typeface="Microsoft YaHei"/>
               </a:rPr>
-              <a:t>    项数值校验通过</a:t>
+              <a:t>    </a:t>
+            </a:r>
+            <a:r>
+              <a:rPr sz="1200" b="0" i="0">
+                <a:solidFill>
+                  <a:srgbClr val="3A4A50"/>
+                </a:solidFill>
+                <a:latin typeface="Segoe UI"/>
+                <a:ea typeface="Microsoft YaHei"/>
+              </a:rPr>
+              <a:t>项数值校验通过</a:t>
             </a:r>
           </a:p>
         </p:txBody>
@@ -4525,7 +4751,6 @@
           <a:lstStyle/>
           <a:p>
             <a:pPr algn="ctr"/>
-            <a:endParaRPr/>
           </a:p>
         </p:txBody>
       </p:sp>
@@ -4546,7 +4771,7 @@
           <a:noFill/>
         </p:spPr>
         <p:txBody>
-          <a:bodyPr wrap="square" lIns="0" tIns="0" rIns="0" bIns="0" anchor="ctr">
+          <a:bodyPr wrap="square" lIns="0" rIns="0" tIns="0" bIns="0" anchor="ctr">
             <a:noAutofit/>
           </a:bodyPr>
           <a:lstStyle/>
@@ -4580,7 +4805,17 @@
                 <a:latin typeface="Segoe UI"/>
                 <a:ea typeface="Microsoft YaHei"/>
               </a:rPr>
-              <a:t>    种几何退磁因子已算</a:t>
+              <a:t>    </a:t>
+            </a:r>
+            <a:r>
+              <a:rPr sz="1200" b="0" i="0">
+                <a:solidFill>
+                  <a:srgbClr val="3A4A50"/>
+                </a:solidFill>
+                <a:latin typeface="Segoe UI"/>
+                <a:ea typeface="Microsoft YaHei"/>
+              </a:rPr>
+              <a:t>种几何退磁因子已算</a:t>
             </a:r>
           </a:p>
         </p:txBody>
@@ -4602,7 +4837,7 @@
           <a:noFill/>
         </p:spPr>
         <p:txBody>
-          <a:bodyPr wrap="square" lIns="0" tIns="0" rIns="0" bIns="0" anchor="t">
+          <a:bodyPr wrap="square" lIns="0" rIns="0" tIns="0" bIns="0" anchor="t">
             <a:noAutofit/>
           </a:bodyPr>
           <a:lstStyle/>
@@ -4627,45 +4862,6 @@
                 <a:ea typeface="Microsoft YaHei"/>
               </a:rPr>
               <a:t>1 / 8</a:t>
-            </a:r>
-          </a:p>
-        </p:txBody>
-      </p:sp>
-      <p:sp>
-        <p:nvSpPr>
-          <p:cNvPr id="21" name="文本框 20">
-            <a:extLst>
-              <a:ext uri="{FF2B5EF4-FFF2-40B4-BE49-F238E27FC236}">
-                <a16:creationId xmlns:a16="http://schemas.microsoft.com/office/drawing/2014/main" id="{E3BFD788-036C-66FA-C8BA-6072D3FBA456}"/>
-              </a:ext>
-            </a:extLst>
-          </p:cNvPr>
-          <p:cNvSpPr txBox="1"/>
-          <p:nvPr/>
-        </p:nvSpPr>
-        <p:spPr>
-          <a:xfrm>
-            <a:off x="777240" y="4352544"/>
-            <a:ext cx="3745665" cy="384048"/>
-          </a:xfrm>
-          <a:prstGeom prst="rect">
-            <a:avLst/>
-          </a:prstGeom>
-          <a:noFill/>
-        </p:spPr>
-        <p:txBody>
-          <a:bodyPr wrap="square" rtlCol="0">
-            <a:spAutoFit/>
-          </a:bodyPr>
-          <a:lstStyle/>
-          <a:p>
-            <a:r>
-              <a:rPr lang="zh-CN" altLang="en-US" dirty="0">
-                <a:latin typeface="Segoe UI" panose="020B0502040204020203" pitchFamily="34" charset="0"/>
-                <a:ea typeface="华文行楷" panose="02010800040101010101" pitchFamily="2" charset="-122"/>
-                <a:cs typeface="Segoe UI" panose="020B0502040204020203" pitchFamily="34" charset="0"/>
-              </a:rPr>
-              <a:t>孙煜凡  韦中天</a:t>
             </a:r>
           </a:p>
         </p:txBody>
@@ -4679,7 +4875,7 @@
 </file>
 
 <file path=ppt/slides/slide2.xml><?xml version="1.0" encoding="utf-8"?>
-<p:sld xmlns:a="http://schemas.openxmlformats.org/drawingml/2006/main" xmlns:r="http://schemas.openxmlformats.org/officeDocument/2006/relationships" xmlns:p="http://schemas.openxmlformats.org/presentationml/2006/main">
+<p:sld xmlns:a="http://schemas.openxmlformats.org/drawingml/2006/main" xmlns:p="http://schemas.openxmlformats.org/presentationml/2006/main" xmlns:r="http://schemas.openxmlformats.org/officeDocument/2006/relationships">
   <p:cSld>
     <p:bg>
       <p:bgPr>
@@ -4695,14 +4891,7 @@
         <p:cNvGrpSpPr/>
         <p:nvPr/>
       </p:nvGrpSpPr>
-      <p:grpSpPr>
-        <a:xfrm>
-          <a:off x="0" y="0"/>
-          <a:ext cx="0" cy="0"/>
-          <a:chOff x="0" y="0"/>
-          <a:chExt cx="0" cy="0"/>
-        </a:xfrm>
-      </p:grpSpPr>
+      <p:grpSpPr/>
       <p:sp>
         <p:nvSpPr>
           <p:cNvPr id="2" name="TextBox 1"/>
@@ -4720,7 +4909,7 @@
           <a:noFill/>
         </p:spPr>
         <p:txBody>
-          <a:bodyPr wrap="square" lIns="0" tIns="0" rIns="0" bIns="0" anchor="t">
+          <a:bodyPr wrap="square" lIns="0" rIns="0" tIns="0" bIns="0" anchor="t">
             <a:noAutofit/>
           </a:bodyPr>
           <a:lstStyle/>
@@ -4786,7 +4975,7 @@
           <a:noFill/>
         </p:spPr>
         <p:txBody>
-          <a:bodyPr wrap="square" lIns="0" tIns="0" rIns="0" bIns="0" anchor="ctr">
+          <a:bodyPr wrap="square" lIns="0" rIns="0" tIns="0" bIns="0" anchor="ctr">
             <a:noAutofit/>
           </a:bodyPr>
           <a:lstStyle/>
@@ -4842,7 +5031,6 @@
           <a:lstStyle/>
           <a:p>
             <a:pPr algn="ctr"/>
-            <a:endParaRPr/>
           </a:p>
         </p:txBody>
       </p:sp>
@@ -4877,7 +5065,6 @@
           <a:lstStyle/>
           <a:p>
             <a:pPr algn="ctr"/>
-            <a:endParaRPr/>
           </a:p>
         </p:txBody>
       </p:sp>
@@ -4898,7 +5085,7 @@
           <a:noFill/>
         </p:spPr>
         <p:txBody>
-          <a:bodyPr wrap="square" lIns="0" tIns="0" rIns="0" bIns="0" anchor="t">
+          <a:bodyPr wrap="square" lIns="0" rIns="0" tIns="0" bIns="0" anchor="t">
             <a:noAutofit/>
           </a:bodyPr>
           <a:lstStyle/>
@@ -4944,7 +5131,7 @@
           <a:noFill/>
         </p:spPr>
         <p:txBody>
-          <a:bodyPr wrap="square" lIns="0" tIns="0" rIns="0" bIns="0" anchor="t">
+          <a:bodyPr wrap="square" lIns="0" rIns="0" tIns="0" bIns="0" anchor="t">
             <a:noAutofit/>
           </a:bodyPr>
           <a:lstStyle/>
@@ -4990,7 +5177,7 @@
           <a:noFill/>
         </p:spPr>
         <p:txBody>
-          <a:bodyPr wrap="square" lIns="0" tIns="0" rIns="0" bIns="0" anchor="t">
+          <a:bodyPr wrap="square" lIns="0" rIns="0" tIns="0" bIns="0" anchor="t">
             <a:noAutofit/>
           </a:bodyPr>
           <a:lstStyle/>
@@ -5046,7 +5233,6 @@
           <a:lstStyle/>
           <a:p>
             <a:pPr algn="ctr"/>
-            <a:endParaRPr/>
           </a:p>
         </p:txBody>
       </p:sp>
@@ -5081,7 +5267,6 @@
           <a:lstStyle/>
           <a:p>
             <a:pPr algn="ctr"/>
-            <a:endParaRPr/>
           </a:p>
         </p:txBody>
       </p:sp>
@@ -5102,7 +5287,7 @@
           <a:noFill/>
         </p:spPr>
         <p:txBody>
-          <a:bodyPr wrap="square" lIns="0" tIns="0" rIns="0" bIns="0" anchor="t">
+          <a:bodyPr wrap="square" lIns="0" rIns="0" tIns="0" bIns="0" anchor="t">
             <a:noAutofit/>
           </a:bodyPr>
           <a:lstStyle/>
@@ -5148,7 +5333,7 @@
           <a:noFill/>
         </p:spPr>
         <p:txBody>
-          <a:bodyPr wrap="square" lIns="0" tIns="0" rIns="0" bIns="0" anchor="t">
+          <a:bodyPr wrap="square" lIns="0" rIns="0" tIns="0" bIns="0" anchor="t">
             <a:noAutofit/>
           </a:bodyPr>
           <a:lstStyle/>
@@ -5194,7 +5379,7 @@
           <a:noFill/>
         </p:spPr>
         <p:txBody>
-          <a:bodyPr wrap="square" lIns="0" tIns="0" rIns="0" bIns="0" anchor="t">
+          <a:bodyPr wrap="square" lIns="0" rIns="0" tIns="0" bIns="0" anchor="t">
             <a:noAutofit/>
           </a:bodyPr>
           <a:lstStyle/>
@@ -5290,7 +5475,6 @@
           <a:lstStyle/>
           <a:p>
             <a:pPr algn="ctr"/>
-            <a:endParaRPr/>
           </a:p>
         </p:txBody>
       </p:sp>
@@ -5325,7 +5509,6 @@
           <a:lstStyle/>
           <a:p>
             <a:pPr algn="ctr"/>
-            <a:endParaRPr/>
           </a:p>
         </p:txBody>
       </p:sp>
@@ -5346,7 +5529,7 @@
           <a:noFill/>
         </p:spPr>
         <p:txBody>
-          <a:bodyPr wrap="square" lIns="0" tIns="0" rIns="0" bIns="0" anchor="t">
+          <a:bodyPr wrap="square" lIns="0" rIns="0" tIns="0" bIns="0" anchor="t">
             <a:noAutofit/>
           </a:bodyPr>
           <a:lstStyle/>
@@ -5392,7 +5575,7 @@
           <a:noFill/>
         </p:spPr>
         <p:txBody>
-          <a:bodyPr wrap="square" lIns="0" tIns="0" rIns="0" bIns="0" anchor="t">
+          <a:bodyPr wrap="square" lIns="0" rIns="0" tIns="0" bIns="0" anchor="t">
             <a:noAutofit/>
           </a:bodyPr>
           <a:lstStyle/>
@@ -5438,7 +5621,7 @@
           <a:noFill/>
         </p:spPr>
         <p:txBody>
-          <a:bodyPr wrap="square" lIns="0" tIns="0" rIns="0" bIns="0" anchor="t">
+          <a:bodyPr wrap="square" lIns="0" rIns="0" tIns="0" bIns="0" anchor="t">
             <a:noAutofit/>
           </a:bodyPr>
           <a:lstStyle/>
@@ -5494,7 +5677,6 @@
           <a:lstStyle/>
           <a:p>
             <a:pPr algn="ctr"/>
-            <a:endParaRPr/>
           </a:p>
         </p:txBody>
       </p:sp>
@@ -5529,7 +5711,6 @@
           <a:lstStyle/>
           <a:p>
             <a:pPr algn="ctr"/>
-            <a:endParaRPr/>
           </a:p>
         </p:txBody>
       </p:sp>
@@ -5550,7 +5731,7 @@
           <a:noFill/>
         </p:spPr>
         <p:txBody>
-          <a:bodyPr wrap="square" lIns="0" tIns="0" rIns="0" bIns="0" anchor="t">
+          <a:bodyPr wrap="square" lIns="0" rIns="0" tIns="0" bIns="0" anchor="t">
             <a:noAutofit/>
           </a:bodyPr>
           <a:lstStyle/>
@@ -5596,7 +5777,7 @@
           <a:noFill/>
         </p:spPr>
         <p:txBody>
-          <a:bodyPr wrap="square" lIns="0" tIns="0" rIns="0" bIns="0" anchor="t">
+          <a:bodyPr wrap="square" lIns="0" rIns="0" tIns="0" bIns="0" anchor="t">
             <a:noAutofit/>
           </a:bodyPr>
           <a:lstStyle/>
@@ -5642,7 +5823,7 @@
           <a:noFill/>
         </p:spPr>
         <p:txBody>
-          <a:bodyPr wrap="square" lIns="0" tIns="0" rIns="0" bIns="0" anchor="t">
+          <a:bodyPr wrap="square" lIns="0" rIns="0" tIns="0" bIns="0" anchor="t">
             <a:noAutofit/>
           </a:bodyPr>
           <a:lstStyle/>
@@ -5703,7 +5884,6 @@
           <a:lstStyle/>
           <a:p>
             <a:pPr algn="ctr"/>
-            <a:endParaRPr/>
           </a:p>
         </p:txBody>
       </p:sp>
@@ -5724,7 +5904,7 @@
           <a:noFill/>
         </p:spPr>
         <p:txBody>
-          <a:bodyPr wrap="square" lIns="0" tIns="0" rIns="0" bIns="0" anchor="t">
+          <a:bodyPr wrap="square" lIns="0" rIns="0" tIns="0" bIns="0" anchor="t">
             <a:noAutofit/>
           </a:bodyPr>
           <a:lstStyle/>
@@ -5770,7 +5950,7 @@
           <a:noFill/>
         </p:spPr>
         <p:txBody>
-          <a:bodyPr wrap="square" lIns="0" tIns="0" rIns="0" bIns="0" anchor="t">
+          <a:bodyPr wrap="square" lIns="0" rIns="0" tIns="0" bIns="0" anchor="t">
             <a:noAutofit/>
           </a:bodyPr>
           <a:lstStyle/>
@@ -5816,7 +5996,7 @@
           <a:noFill/>
         </p:spPr>
         <p:txBody>
-          <a:bodyPr wrap="square" lIns="0" tIns="0" rIns="0" bIns="0" anchor="t">
+          <a:bodyPr wrap="square" lIns="0" rIns="0" tIns="0" bIns="0" anchor="t">
             <a:noAutofit/>
           </a:bodyPr>
           <a:lstStyle/>
@@ -5876,7 +6056,6 @@
           <a:lstStyle/>
           <a:p>
             <a:pPr algn="ctr"/>
-            <a:endParaRPr/>
           </a:p>
         </p:txBody>
       </p:sp>
@@ -5907,7 +6086,6 @@
           <a:lstStyle/>
           <a:p>
             <a:pPr algn="ctr"/>
-            <a:endParaRPr/>
           </a:p>
         </p:txBody>
       </p:sp>
@@ -5928,7 +6106,7 @@
           <a:noFill/>
         </p:spPr>
         <p:txBody>
-          <a:bodyPr wrap="square" lIns="0" tIns="0" rIns="0" bIns="0" anchor="t">
+          <a:bodyPr wrap="square" lIns="0" rIns="0" tIns="0" bIns="0" anchor="t">
             <a:noAutofit/>
           </a:bodyPr>
           <a:lstStyle/>
@@ -5974,7 +6152,7 @@
           <a:noFill/>
         </p:spPr>
         <p:txBody>
-          <a:bodyPr wrap="square" lIns="0" tIns="0" rIns="0" bIns="0" anchor="t">
+          <a:bodyPr wrap="square" lIns="0" rIns="0" tIns="0" bIns="0" anchor="t">
             <a:noAutofit/>
           </a:bodyPr>
           <a:lstStyle/>
@@ -6028,6 +6206,52 @@
       </p:sp>
       <p:sp>
         <p:nvSpPr>
+          <p:cNvPr id="32" name="TextBox 31"/>
+          <p:cNvSpPr txBox="1"/>
+          <p:nvPr/>
+        </p:nvSpPr>
+        <p:spPr>
+          <a:xfrm>
+            <a:off x="640080" y="6419088"/>
+            <a:ext cx="8869680" cy="237744"/>
+          </a:xfrm>
+          <a:prstGeom prst="rect">
+            <a:avLst/>
+          </a:prstGeom>
+          <a:noFill/>
+        </p:spPr>
+        <p:txBody>
+          <a:bodyPr wrap="square" lIns="0" rIns="0" tIns="0" bIns="0" anchor="t">
+            <a:noAutofit/>
+          </a:bodyPr>
+          <a:lstStyle/>
+          <a:p>
+            <a:pPr algn="l">
+              <a:lnSpc>
+                <a:spcPct val="115000"/>
+              </a:lnSpc>
+              <a:spcBef>
+                <a:spcPts val="0"/>
+              </a:spcBef>
+              <a:spcAft>
+                <a:spcPts val="0"/>
+              </a:spcAft>
+            </a:pPr>
+            <a:r>
+              <a:rPr sz="850" b="0" i="0">
+                <a:solidFill>
+                  <a:srgbClr val="53676D"/>
+                </a:solidFill>
+                <a:latin typeface="Segoe UI"/>
+                <a:ea typeface="Microsoft YaHei"/>
+              </a:rPr>
+              <a:t>研究范围见 README.md 与 4-QAH基本概念与面外磁化学习指南.md</a:t>
+            </a:r>
+          </a:p>
+        </p:txBody>
+      </p:sp>
+      <p:sp>
+        <p:nvSpPr>
           <p:cNvPr id="33" name="TextBox 32"/>
           <p:cNvSpPr txBox="1"/>
           <p:nvPr/>
@@ -6043,7 +6267,7 @@
           <a:noFill/>
         </p:spPr>
         <p:txBody>
-          <a:bodyPr wrap="square" lIns="0" tIns="0" rIns="0" bIns="0" anchor="t">
+          <a:bodyPr wrap="square" lIns="0" rIns="0" tIns="0" bIns="0" anchor="t">
             <a:noAutofit/>
           </a:bodyPr>
           <a:lstStyle/>
@@ -6081,7 +6305,7 @@
 </file>
 
 <file path=ppt/slides/slide3.xml><?xml version="1.0" encoding="utf-8"?>
-<p:sld xmlns:a="http://schemas.openxmlformats.org/drawingml/2006/main" xmlns:r="http://schemas.openxmlformats.org/officeDocument/2006/relationships" xmlns:p="http://schemas.openxmlformats.org/presentationml/2006/main">
+<p:sld xmlns:a="http://schemas.openxmlformats.org/drawingml/2006/main" xmlns:p="http://schemas.openxmlformats.org/presentationml/2006/main" xmlns:r="http://schemas.openxmlformats.org/officeDocument/2006/relationships">
   <p:cSld>
     <p:bg>
       <p:bgPr>
@@ -6097,14 +6321,7 @@
         <p:cNvGrpSpPr/>
         <p:nvPr/>
       </p:nvGrpSpPr>
-      <p:grpSpPr>
-        <a:xfrm>
-          <a:off x="0" y="0"/>
-          <a:ext cx="0" cy="0"/>
-          <a:chOff x="0" y="0"/>
-          <a:chExt cx="0" cy="0"/>
-        </a:xfrm>
-      </p:grpSpPr>
+      <p:grpSpPr/>
       <p:sp>
         <p:nvSpPr>
           <p:cNvPr id="2" name="TextBox 1"/>
@@ -6122,7 +6339,7 @@
           <a:noFill/>
         </p:spPr>
         <p:txBody>
-          <a:bodyPr wrap="square" lIns="0" tIns="0" rIns="0" bIns="0" anchor="t">
+          <a:bodyPr wrap="square" lIns="0" rIns="0" tIns="0" bIns="0" anchor="t">
             <a:noAutofit/>
           </a:bodyPr>
           <a:lstStyle/>
@@ -6188,7 +6405,7 @@
           <a:noFill/>
         </p:spPr>
         <p:txBody>
-          <a:bodyPr wrap="square" lIns="0" tIns="0" rIns="0" bIns="0" anchor="ctr">
+          <a:bodyPr wrap="square" lIns="0" rIns="0" tIns="0" bIns="0" anchor="ctr">
             <a:noAutofit/>
           </a:bodyPr>
           <a:lstStyle/>
@@ -6244,7 +6461,6 @@
           <a:lstStyle/>
           <a:p>
             <a:pPr algn="ctr"/>
-            <a:endParaRPr/>
           </a:p>
         </p:txBody>
       </p:sp>
@@ -6277,7 +6493,6 @@
           <a:lstStyle/>
           <a:p>
             <a:pPr algn="ctr"/>
-            <a:endParaRPr/>
           </a:p>
         </p:txBody>
       </p:sp>
@@ -6298,7 +6513,7 @@
           <a:noFill/>
         </p:spPr>
         <p:txBody>
-          <a:bodyPr wrap="square" lIns="0" tIns="0" rIns="0" bIns="0" anchor="t">
+          <a:bodyPr wrap="square" lIns="0" rIns="0" tIns="0" bIns="0" anchor="t">
             <a:noAutofit/>
           </a:bodyPr>
           <a:lstStyle/>
@@ -6344,7 +6559,7 @@
           <a:noFill/>
         </p:spPr>
         <p:txBody>
-          <a:bodyPr wrap="square" lIns="0" tIns="0" rIns="0" bIns="0" anchor="t">
+          <a:bodyPr wrap="square" lIns="0" rIns="0" tIns="0" bIns="0" anchor="t">
             <a:noAutofit/>
           </a:bodyPr>
           <a:lstStyle/>
@@ -6404,7 +6619,6 @@
           <a:lstStyle/>
           <a:p>
             <a:pPr algn="ctr"/>
-            <a:endParaRPr/>
           </a:p>
         </p:txBody>
       </p:sp>
@@ -6425,7 +6639,7 @@
           <a:noFill/>
         </p:spPr>
         <p:txBody>
-          <a:bodyPr wrap="square" lIns="0" tIns="0" rIns="0" bIns="0" anchor="t">
+          <a:bodyPr wrap="square" lIns="0" rIns="0" tIns="0" bIns="0" anchor="t">
             <a:noAutofit/>
           </a:bodyPr>
           <a:lstStyle/>
@@ -6471,7 +6685,7 @@
           <a:noFill/>
         </p:spPr>
         <p:txBody>
-          <a:bodyPr wrap="square" lIns="0" tIns="0" rIns="0" bIns="0" anchor="t">
+          <a:bodyPr wrap="square" lIns="0" rIns="0" tIns="0" bIns="0" anchor="t">
             <a:noAutofit/>
           </a:bodyPr>
           <a:lstStyle/>
@@ -6531,7 +6745,6 @@
           <a:lstStyle/>
           <a:p>
             <a:pPr algn="ctr"/>
-            <a:endParaRPr/>
           </a:p>
         </p:txBody>
       </p:sp>
@@ -6552,7 +6765,7 @@
           <a:noFill/>
         </p:spPr>
         <p:txBody>
-          <a:bodyPr wrap="square" lIns="0" tIns="0" rIns="0" bIns="0" anchor="t">
+          <a:bodyPr wrap="square" lIns="0" rIns="0" tIns="0" bIns="0" anchor="t">
             <a:noAutofit/>
           </a:bodyPr>
           <a:lstStyle/>
@@ -6598,7 +6811,7 @@
           <a:noFill/>
         </p:spPr>
         <p:txBody>
-          <a:bodyPr wrap="square" lIns="0" tIns="0" rIns="0" bIns="0" anchor="t">
+          <a:bodyPr wrap="square" lIns="0" rIns="0" tIns="0" bIns="0" anchor="t">
             <a:noAutofit/>
           </a:bodyPr>
           <a:lstStyle/>
@@ -6658,7 +6871,6 @@
           <a:lstStyle/>
           <a:p>
             <a:pPr algn="ctr"/>
-            <a:endParaRPr/>
           </a:p>
         </p:txBody>
       </p:sp>
@@ -6679,7 +6891,7 @@
           <a:noFill/>
         </p:spPr>
         <p:txBody>
-          <a:bodyPr wrap="square" lIns="0" tIns="0" rIns="0" bIns="0" anchor="t">
+          <a:bodyPr wrap="square" lIns="0" rIns="0" tIns="0" bIns="0" anchor="t">
             <a:noAutofit/>
           </a:bodyPr>
           <a:lstStyle/>
@@ -6725,7 +6937,7 @@
           <a:noFill/>
         </p:spPr>
         <p:txBody>
-          <a:bodyPr wrap="square" lIns="0" tIns="0" rIns="0" bIns="0" anchor="t">
+          <a:bodyPr wrap="square" lIns="0" rIns="0" tIns="0" bIns="0" anchor="t">
             <a:noAutofit/>
           </a:bodyPr>
           <a:lstStyle/>
@@ -6785,7 +6997,6 @@
           <a:lstStyle/>
           <a:p>
             <a:pPr algn="ctr"/>
-            <a:endParaRPr/>
           </a:p>
         </p:txBody>
       </p:sp>
@@ -6806,7 +7017,7 @@
           <a:noFill/>
         </p:spPr>
         <p:txBody>
-          <a:bodyPr wrap="square" lIns="0" tIns="0" rIns="0" bIns="0" anchor="t">
+          <a:bodyPr wrap="square" lIns="0" rIns="0" tIns="0" bIns="0" anchor="t">
             <a:noAutofit/>
           </a:bodyPr>
           <a:lstStyle/>
@@ -6852,7 +7063,7 @@
           <a:noFill/>
         </p:spPr>
         <p:txBody>
-          <a:bodyPr wrap="square" lIns="0" tIns="0" rIns="0" bIns="0" anchor="t">
+          <a:bodyPr wrap="square" lIns="0" rIns="0" tIns="0" bIns="0" anchor="t">
             <a:noAutofit/>
           </a:bodyPr>
           <a:lstStyle/>
@@ -6912,7 +7123,6 @@
           <a:lstStyle/>
           <a:p>
             <a:pPr algn="ctr"/>
-            <a:endParaRPr/>
           </a:p>
         </p:txBody>
       </p:sp>
@@ -6943,7 +7153,6 @@
           <a:lstStyle/>
           <a:p>
             <a:pPr algn="ctr"/>
-            <a:endParaRPr/>
           </a:p>
         </p:txBody>
       </p:sp>
@@ -6964,7 +7173,7 @@
           <a:noFill/>
         </p:spPr>
         <p:txBody>
-          <a:bodyPr wrap="square" lIns="0" tIns="0" rIns="0" bIns="0" anchor="t">
+          <a:bodyPr wrap="square" lIns="0" rIns="0" tIns="0" bIns="0" anchor="t">
             <a:noAutofit/>
           </a:bodyPr>
           <a:lstStyle/>
@@ -7010,7 +7219,7 @@
           <a:noFill/>
         </p:spPr>
         <p:txBody>
-          <a:bodyPr wrap="square" lIns="0" tIns="0" rIns="0" bIns="0" anchor="t">
+          <a:bodyPr wrap="square" lIns="0" rIns="0" tIns="0" bIns="0" anchor="t">
             <a:noAutofit/>
           </a:bodyPr>
           <a:lstStyle/>
@@ -7084,6 +7293,52 @@
       </p:sp>
       <p:sp>
         <p:nvSpPr>
+          <p:cNvPr id="24" name="TextBox 23"/>
+          <p:cNvSpPr txBox="1"/>
+          <p:nvPr/>
+        </p:nvSpPr>
+        <p:spPr>
+          <a:xfrm>
+            <a:off x="640080" y="6419088"/>
+            <a:ext cx="8869680" cy="237744"/>
+          </a:xfrm>
+          <a:prstGeom prst="rect">
+            <a:avLst/>
+          </a:prstGeom>
+          <a:noFill/>
+        </p:spPr>
+        <p:txBody>
+          <a:bodyPr wrap="square" lIns="0" rIns="0" tIns="0" bIns="0" anchor="t">
+            <a:noAutofit/>
+          </a:bodyPr>
+          <a:lstStyle/>
+          <a:p>
+            <a:pPr algn="l">
+              <a:lnSpc>
+                <a:spcPct val="115000"/>
+              </a:lnSpc>
+              <a:spcBef>
+                <a:spcPts val="0"/>
+              </a:spcBef>
+              <a:spcAft>
+                <a:spcPts val="0"/>
+              </a:spcAft>
+            </a:pPr>
+            <a:r>
+              <a:rPr sz="850" b="0" i="0">
+                <a:solidFill>
+                  <a:srgbClr val="53676D"/>
+                </a:solidFill>
+                <a:latin typeface="Segoe UI"/>
+                <a:ea typeface="Microsoft YaHei"/>
+              </a:rPr>
+              <a:t>阶段划分见 README.md 第 8 节；求解器与 GPU 检查于 2026-10-25</a:t>
+            </a:r>
+          </a:p>
+        </p:txBody>
+      </p:sp>
+      <p:sp>
+        <p:nvSpPr>
           <p:cNvPr id="25" name="TextBox 24"/>
           <p:cNvSpPr txBox="1"/>
           <p:nvPr/>
@@ -7099,7 +7354,7 @@
           <a:noFill/>
         </p:spPr>
         <p:txBody>
-          <a:bodyPr wrap="square" lIns="0" tIns="0" rIns="0" bIns="0" anchor="t">
+          <a:bodyPr wrap="square" lIns="0" rIns="0" tIns="0" bIns="0" anchor="t">
             <a:noAutofit/>
           </a:bodyPr>
           <a:lstStyle/>
@@ -7137,7 +7392,7 @@
 </file>
 
 <file path=ppt/slides/slide4.xml><?xml version="1.0" encoding="utf-8"?>
-<p:sld xmlns:a="http://schemas.openxmlformats.org/drawingml/2006/main" xmlns:r="http://schemas.openxmlformats.org/officeDocument/2006/relationships" xmlns:p="http://schemas.openxmlformats.org/presentationml/2006/main">
+<p:sld xmlns:a="http://schemas.openxmlformats.org/drawingml/2006/main" xmlns:p="http://schemas.openxmlformats.org/presentationml/2006/main" xmlns:r="http://schemas.openxmlformats.org/officeDocument/2006/relationships">
   <p:cSld>
     <p:bg>
       <p:bgPr>
@@ -7153,14 +7408,7 @@
         <p:cNvGrpSpPr/>
         <p:nvPr/>
       </p:nvGrpSpPr>
-      <p:grpSpPr>
-        <a:xfrm>
-          <a:off x="0" y="0"/>
-          <a:ext cx="0" cy="0"/>
-          <a:chOff x="0" y="0"/>
-          <a:chExt cx="0" cy="0"/>
-        </a:xfrm>
-      </p:grpSpPr>
+      <p:grpSpPr/>
       <p:sp>
         <p:nvSpPr>
           <p:cNvPr id="2" name="TextBox 1"/>
@@ -7178,7 +7426,7 @@
           <a:noFill/>
         </p:spPr>
         <p:txBody>
-          <a:bodyPr wrap="square" lIns="0" tIns="0" rIns="0" bIns="0" anchor="t">
+          <a:bodyPr wrap="square" lIns="0" rIns="0" tIns="0" bIns="0" anchor="t">
             <a:noAutofit/>
           </a:bodyPr>
           <a:lstStyle/>
@@ -7244,7 +7492,7 @@
           <a:noFill/>
         </p:spPr>
         <p:txBody>
-          <a:bodyPr wrap="square" lIns="0" tIns="0" rIns="0" bIns="0" anchor="ctr">
+          <a:bodyPr wrap="square" lIns="0" rIns="0" tIns="0" bIns="0" anchor="ctr">
             <a:noAutofit/>
           </a:bodyPr>
           <a:lstStyle/>
@@ -7300,7 +7548,6 @@
           <a:lstStyle/>
           <a:p>
             <a:pPr algn="ctr"/>
-            <a:endParaRPr/>
           </a:p>
         </p:txBody>
       </p:sp>
@@ -7335,7 +7582,6 @@
           <a:lstStyle/>
           <a:p>
             <a:pPr algn="ctr"/>
-            <a:endParaRPr/>
           </a:p>
         </p:txBody>
       </p:sp>
@@ -7356,7 +7602,7 @@
           <a:noFill/>
         </p:spPr>
         <p:txBody>
-          <a:bodyPr wrap="square" lIns="0" tIns="0" rIns="0" bIns="0" anchor="t">
+          <a:bodyPr wrap="square" lIns="0" rIns="0" tIns="0" bIns="0" anchor="t">
             <a:noAutofit/>
           </a:bodyPr>
           <a:lstStyle/>
@@ -7402,7 +7648,7 @@
           <a:noFill/>
         </p:spPr>
         <p:txBody>
-          <a:bodyPr wrap="square" lIns="0" tIns="0" rIns="0" bIns="0" anchor="t">
+          <a:bodyPr wrap="square" lIns="0" rIns="0" tIns="0" bIns="0" anchor="t">
             <a:noAutofit/>
           </a:bodyPr>
           <a:lstStyle/>
@@ -7448,7 +7694,7 @@
           <a:noFill/>
         </p:spPr>
         <p:txBody>
-          <a:bodyPr wrap="square" lIns="0" tIns="0" rIns="0" bIns="0" anchor="t">
+          <a:bodyPr wrap="square" lIns="0" rIns="0" tIns="0" bIns="0" anchor="t">
             <a:noAutofit/>
           </a:bodyPr>
           <a:lstStyle/>
@@ -7494,7 +7740,7 @@
           <a:noFill/>
         </p:spPr>
         <p:txBody>
-          <a:bodyPr wrap="square" lIns="0" tIns="0" rIns="0" bIns="0" anchor="t">
+          <a:bodyPr wrap="square" lIns="0" rIns="0" tIns="0" bIns="0" anchor="t">
             <a:noAutofit/>
           </a:bodyPr>
           <a:lstStyle/>
@@ -7564,7 +7810,6 @@
           <a:lstStyle/>
           <a:p>
             <a:pPr algn="ctr"/>
-            <a:endParaRPr/>
           </a:p>
         </p:txBody>
       </p:sp>
@@ -7585,7 +7830,7 @@
           <a:noFill/>
         </p:spPr>
         <p:txBody>
-          <a:bodyPr wrap="square" lIns="0" tIns="0" rIns="0" bIns="0" anchor="t">
+          <a:bodyPr wrap="square" lIns="0" rIns="0" tIns="0" bIns="0" anchor="t">
             <a:noAutofit/>
           </a:bodyPr>
           <a:lstStyle/>
@@ -7631,7 +7876,7 @@
           <a:noFill/>
         </p:spPr>
         <p:txBody>
-          <a:bodyPr wrap="square" lIns="0" tIns="0" rIns="0" bIns="0" anchor="t">
+          <a:bodyPr wrap="square" lIns="0" rIns="0" tIns="0" bIns="0" anchor="t">
             <a:noAutofit/>
           </a:bodyPr>
           <a:lstStyle/>
@@ -7677,7 +7922,7 @@
           <a:noFill/>
         </p:spPr>
         <p:txBody>
-          <a:bodyPr wrap="square" lIns="0" tIns="0" rIns="0" bIns="0" anchor="t">
+          <a:bodyPr wrap="square" lIns="0" rIns="0" tIns="0" bIns="0" anchor="t">
             <a:noAutofit/>
           </a:bodyPr>
           <a:lstStyle/>
@@ -7723,7 +7968,7 @@
           <a:noFill/>
         </p:spPr>
         <p:txBody>
-          <a:bodyPr wrap="square" lIns="0" tIns="0" rIns="0" bIns="0" anchor="t">
+          <a:bodyPr wrap="square" lIns="0" rIns="0" tIns="0" bIns="0" anchor="t">
             <a:noAutofit/>
           </a:bodyPr>
           <a:lstStyle/>
@@ -7793,7 +8038,6 @@
           <a:lstStyle/>
           <a:p>
             <a:pPr algn="ctr"/>
-            <a:endParaRPr/>
           </a:p>
         </p:txBody>
       </p:sp>
@@ -7814,7 +8058,7 @@
           <a:noFill/>
         </p:spPr>
         <p:txBody>
-          <a:bodyPr wrap="square" lIns="0" tIns="0" rIns="0" bIns="0" anchor="t">
+          <a:bodyPr wrap="square" lIns="0" rIns="0" tIns="0" bIns="0" anchor="t">
             <a:noAutofit/>
           </a:bodyPr>
           <a:lstStyle/>
@@ -7860,7 +8104,7 @@
           <a:noFill/>
         </p:spPr>
         <p:txBody>
-          <a:bodyPr wrap="square" lIns="0" tIns="0" rIns="0" bIns="0" anchor="t">
+          <a:bodyPr wrap="square" lIns="0" rIns="0" tIns="0" bIns="0" anchor="t">
             <a:noAutofit/>
           </a:bodyPr>
           <a:lstStyle/>
@@ -7906,7 +8150,7 @@
           <a:noFill/>
         </p:spPr>
         <p:txBody>
-          <a:bodyPr wrap="square" lIns="0" tIns="0" rIns="0" bIns="0" anchor="t">
+          <a:bodyPr wrap="square" lIns="0" rIns="0" tIns="0" bIns="0" anchor="t">
             <a:noAutofit/>
           </a:bodyPr>
           <a:lstStyle/>
@@ -7952,7 +8196,7 @@
           <a:noFill/>
         </p:spPr>
         <p:txBody>
-          <a:bodyPr wrap="square" lIns="0" tIns="0" rIns="0" bIns="0" anchor="t">
+          <a:bodyPr wrap="square" lIns="0" rIns="0" tIns="0" bIns="0" anchor="t">
             <a:noAutofit/>
           </a:bodyPr>
           <a:lstStyle/>
@@ -8022,7 +8266,6 @@
           <a:lstStyle/>
           <a:p>
             <a:pPr algn="ctr"/>
-            <a:endParaRPr/>
           </a:p>
         </p:txBody>
       </p:sp>
@@ -8043,7 +8286,7 @@
           <a:noFill/>
         </p:spPr>
         <p:txBody>
-          <a:bodyPr wrap="square" lIns="0" tIns="0" rIns="0" bIns="0" anchor="t">
+          <a:bodyPr wrap="square" lIns="0" rIns="0" tIns="0" bIns="0" anchor="t">
             <a:noAutofit/>
           </a:bodyPr>
           <a:lstStyle/>
@@ -8089,7 +8332,7 @@
           <a:noFill/>
         </p:spPr>
         <p:txBody>
-          <a:bodyPr wrap="square" lIns="0" tIns="0" rIns="0" bIns="0" anchor="t">
+          <a:bodyPr wrap="square" lIns="0" rIns="0" tIns="0" bIns="0" anchor="t">
             <a:noAutofit/>
           </a:bodyPr>
           <a:lstStyle/>
@@ -8135,7 +8378,7 @@
           <a:noFill/>
         </p:spPr>
         <p:txBody>
-          <a:bodyPr wrap="square" lIns="0" tIns="0" rIns="0" bIns="0" anchor="t">
+          <a:bodyPr wrap="square" lIns="0" rIns="0" tIns="0" bIns="0" anchor="t">
             <a:noAutofit/>
           </a:bodyPr>
           <a:lstStyle/>
@@ -8181,7 +8424,7 @@
           <a:noFill/>
         </p:spPr>
         <p:txBody>
-          <a:bodyPr wrap="square" lIns="0" tIns="0" rIns="0" bIns="0" anchor="t">
+          <a:bodyPr wrap="square" lIns="0" rIns="0" tIns="0" bIns="0" anchor="t">
             <a:noAutofit/>
           </a:bodyPr>
           <a:lstStyle/>
@@ -8251,7 +8494,6 @@
           <a:lstStyle/>
           <a:p>
             <a:pPr algn="ctr"/>
-            <a:endParaRPr/>
           </a:p>
         </p:txBody>
       </p:sp>
@@ -8272,7 +8514,7 @@
           <a:noFill/>
         </p:spPr>
         <p:txBody>
-          <a:bodyPr wrap="square" lIns="0" tIns="0" rIns="0" bIns="0" anchor="t">
+          <a:bodyPr wrap="square" lIns="0" rIns="0" tIns="0" bIns="0" anchor="t">
             <a:noAutofit/>
           </a:bodyPr>
           <a:lstStyle/>
@@ -8318,7 +8560,7 @@
           <a:noFill/>
         </p:spPr>
         <p:txBody>
-          <a:bodyPr wrap="square" lIns="0" tIns="0" rIns="0" bIns="0" anchor="t">
+          <a:bodyPr wrap="square" lIns="0" rIns="0" tIns="0" bIns="0" anchor="t">
             <a:noAutofit/>
           </a:bodyPr>
           <a:lstStyle/>
@@ -8364,7 +8606,7 @@
           <a:noFill/>
         </p:spPr>
         <p:txBody>
-          <a:bodyPr wrap="square" lIns="0" tIns="0" rIns="0" bIns="0" anchor="t">
+          <a:bodyPr wrap="square" lIns="0" rIns="0" tIns="0" bIns="0" anchor="t">
             <a:noAutofit/>
           </a:bodyPr>
           <a:lstStyle/>
@@ -8410,7 +8652,7 @@
           <a:noFill/>
         </p:spPr>
         <p:txBody>
-          <a:bodyPr wrap="square" lIns="0" tIns="0" rIns="0" bIns="0" anchor="t">
+          <a:bodyPr wrap="square" lIns="0" rIns="0" tIns="0" bIns="0" anchor="t">
             <a:noAutofit/>
           </a:bodyPr>
           <a:lstStyle/>
@@ -8478,7 +8720,6 @@
           <a:lstStyle/>
           <a:p>
             <a:pPr algn="ctr"/>
-            <a:endParaRPr/>
           </a:p>
         </p:txBody>
       </p:sp>
@@ -8499,7 +8740,7 @@
           <a:noFill/>
         </p:spPr>
         <p:txBody>
-          <a:bodyPr wrap="square" lIns="0" tIns="0" rIns="0" bIns="0" anchor="t">
+          <a:bodyPr wrap="square" lIns="0" rIns="0" tIns="0" bIns="0" anchor="t">
             <a:noAutofit/>
           </a:bodyPr>
           <a:lstStyle/>
@@ -8545,7 +8786,7 @@
           <a:noFill/>
         </p:spPr>
         <p:txBody>
-          <a:bodyPr wrap="square" lIns="0" tIns="0" rIns="0" bIns="0" anchor="t">
+          <a:bodyPr wrap="square" lIns="0" rIns="0" tIns="0" bIns="0" anchor="t">
             <a:noAutofit/>
           </a:bodyPr>
           <a:lstStyle/>
@@ -8591,7 +8832,7 @@
           <a:noFill/>
         </p:spPr>
         <p:txBody>
-          <a:bodyPr wrap="square" lIns="0" tIns="0" rIns="0" bIns="0" anchor="t">
+          <a:bodyPr wrap="square" lIns="0" rIns="0" tIns="0" bIns="0" anchor="t">
             <a:noAutofit/>
           </a:bodyPr>
           <a:lstStyle/>
@@ -8637,7 +8878,7 @@
           <a:noFill/>
         </p:spPr>
         <p:txBody>
-          <a:bodyPr wrap="square" lIns="0" tIns="0" rIns="0" bIns="0" anchor="t">
+          <a:bodyPr wrap="square" lIns="0" rIns="0" tIns="0" bIns="0" anchor="t">
             <a:noAutofit/>
           </a:bodyPr>
           <a:lstStyle/>
@@ -8661,7 +8902,63 @@
                 <a:latin typeface="Segoe UI"/>
                 <a:ea typeface="Microsoft YaHei"/>
               </a:rPr>
-              <a:t>→ 三格式可读、来源可查</a:t>
+              <a:t>→ </a:t>
+            </a:r>
+            <a:r>
+              <a:rPr sz="900" b="0" i="0">
+                <a:solidFill>
+                  <a:srgbClr val="136C69"/>
+                </a:solidFill>
+                <a:latin typeface="Segoe UI"/>
+                <a:ea typeface="Microsoft YaHei"/>
+              </a:rPr>
+              <a:t>三格式可读、来源可查</a:t>
+            </a:r>
+          </a:p>
+        </p:txBody>
+      </p:sp>
+      <p:sp>
+        <p:nvSpPr>
+          <p:cNvPr id="35" name="TextBox 34"/>
+          <p:cNvSpPr txBox="1"/>
+          <p:nvPr/>
+        </p:nvSpPr>
+        <p:spPr>
+          <a:xfrm>
+            <a:off x="640080" y="6419088"/>
+            <a:ext cx="8869680" cy="237744"/>
+          </a:xfrm>
+          <a:prstGeom prst="rect">
+            <a:avLst/>
+          </a:prstGeom>
+          <a:noFill/>
+        </p:spPr>
+        <p:txBody>
+          <a:bodyPr wrap="square" lIns="0" rIns="0" tIns="0" bIns="0" anchor="t">
+            <a:noAutofit/>
+          </a:bodyPr>
+          <a:lstStyle/>
+          <a:p>
+            <a:pPr algn="l">
+              <a:lnSpc>
+                <a:spcPct val="115000"/>
+              </a:lnSpc>
+              <a:spcBef>
+                <a:spcPts val="0"/>
+              </a:spcBef>
+              <a:spcAft>
+                <a:spcPts val="0"/>
+              </a:spcAft>
+            </a:pPr>
+            <a:r>
+              <a:rPr sz="850" b="0" i="0">
+                <a:solidFill>
+                  <a:srgbClr val="53676D"/>
+                </a:solidFill>
+                <a:latin typeface="Segoe UI"/>
+                <a:ea typeface="Microsoft YaHei"/>
+              </a:rPr>
+              <a:t>详细内容见 理论学习资料/ 下五份专题文档</a:t>
             </a:r>
           </a:p>
         </p:txBody>
@@ -8683,7 +8980,7 @@
           <a:noFill/>
         </p:spPr>
         <p:txBody>
-          <a:bodyPr wrap="square" lIns="0" tIns="0" rIns="0" bIns="0" anchor="t">
+          <a:bodyPr wrap="square" lIns="0" rIns="0" tIns="0" bIns="0" anchor="t">
             <a:noAutofit/>
           </a:bodyPr>
           <a:lstStyle/>
@@ -8721,7 +9018,7 @@
 </file>
 
 <file path=ppt/slides/slide5.xml><?xml version="1.0" encoding="utf-8"?>
-<p:sld xmlns:a="http://schemas.openxmlformats.org/drawingml/2006/main" xmlns:r="http://schemas.openxmlformats.org/officeDocument/2006/relationships" xmlns:p="http://schemas.openxmlformats.org/presentationml/2006/main">
+<p:sld xmlns:a="http://schemas.openxmlformats.org/drawingml/2006/main" xmlns:p="http://schemas.openxmlformats.org/presentationml/2006/main" xmlns:r="http://schemas.openxmlformats.org/officeDocument/2006/relationships">
   <p:cSld>
     <p:bg>
       <p:bgPr>
@@ -8737,14 +9034,7 @@
         <p:cNvGrpSpPr/>
         <p:nvPr/>
       </p:nvGrpSpPr>
-      <p:grpSpPr>
-        <a:xfrm>
-          <a:off x="0" y="0"/>
-          <a:ext cx="0" cy="0"/>
-          <a:chOff x="0" y="0"/>
-          <a:chExt cx="0" cy="0"/>
-        </a:xfrm>
-      </p:grpSpPr>
+      <p:grpSpPr/>
       <p:sp>
         <p:nvSpPr>
           <p:cNvPr id="2" name="TextBox 1"/>
@@ -8762,7 +9052,7 @@
           <a:noFill/>
         </p:spPr>
         <p:txBody>
-          <a:bodyPr wrap="square" lIns="0" tIns="0" rIns="0" bIns="0" anchor="t">
+          <a:bodyPr wrap="square" lIns="0" rIns="0" tIns="0" bIns="0" anchor="t">
             <a:noAutofit/>
           </a:bodyPr>
           <a:lstStyle/>
@@ -8828,7 +9118,7 @@
           <a:noFill/>
         </p:spPr>
         <p:txBody>
-          <a:bodyPr wrap="square" lIns="0" tIns="0" rIns="0" bIns="0" anchor="ctr">
+          <a:bodyPr wrap="square" lIns="0" rIns="0" tIns="0" bIns="0" anchor="ctr">
             <a:noAutofit/>
           </a:bodyPr>
           <a:lstStyle/>
@@ -8852,7 +9142,17 @@
                 <a:latin typeface="Segoe UI"/>
                 <a:ea typeface="Microsoft YaHei"/>
               </a:rPr>
-              <a:t>面外是否有利，看 K</a:t>
+              <a:t>面外是否有利，看 </a:t>
+            </a:r>
+            <a:r>
+              <a:rPr sz="2800" b="1" i="0">
+                <a:solidFill>
+                  <a:srgbClr val="172E36"/>
+                </a:solidFill>
+                <a:latin typeface="Segoe UI"/>
+                <a:ea typeface="Microsoft YaHei"/>
+              </a:rPr>
+              <a:t>K</a:t>
             </a:r>
             <a:r>
               <a:rPr sz="2016" b="1" i="0" baseline="-25000">
@@ -8904,7 +9204,6 @@
           <a:lstStyle/>
           <a:p>
             <a:pPr algn="ctr"/>
-            <a:endParaRPr/>
           </a:p>
         </p:txBody>
       </p:sp>
@@ -8935,7 +9234,6 @@
           <a:lstStyle/>
           <a:p>
             <a:pPr algn="ctr"/>
-            <a:endParaRPr/>
           </a:p>
         </p:txBody>
       </p:sp>
@@ -8956,7 +9254,7 @@
           <a:noFill/>
         </p:spPr>
         <p:txBody>
-          <a:bodyPr wrap="square" lIns="0" tIns="0" rIns="0" bIns="0" anchor="t">
+          <a:bodyPr wrap="square" lIns="0" rIns="0" tIns="0" bIns="0" anchor="t">
             <a:noAutofit/>
           </a:bodyPr>
           <a:lstStyle/>
@@ -9002,7 +9300,7 @@
           <a:noFill/>
         </p:spPr>
         <p:txBody>
-          <a:bodyPr wrap="square" lIns="0" tIns="0" rIns="0" bIns="0" anchor="t">
+          <a:bodyPr wrap="square" lIns="0" rIns="0" tIns="0" bIns="0" anchor="t">
             <a:noAutofit/>
           </a:bodyPr>
           <a:lstStyle/>
@@ -9058,7 +9356,6 @@
           <a:lstStyle/>
           <a:p>
             <a:pPr algn="ctr"/>
-            <a:endParaRPr/>
           </a:p>
         </p:txBody>
       </p:sp>
@@ -9079,7 +9376,7 @@
           <a:noFill/>
         </p:spPr>
         <p:txBody>
-          <a:bodyPr wrap="square" lIns="0" tIns="0" rIns="0" bIns="0" anchor="t">
+          <a:bodyPr wrap="square" lIns="0" rIns="0" tIns="0" bIns="0" anchor="t">
             <a:noAutofit/>
           </a:bodyPr>
           <a:lstStyle/>
@@ -9125,7 +9422,7 @@
           <a:noFill/>
         </p:spPr>
         <p:txBody>
-          <a:bodyPr wrap="square" lIns="0" tIns="0" rIns="0" bIns="0" anchor="t">
+          <a:bodyPr wrap="square" lIns="0" rIns="0" tIns="0" bIns="0" anchor="t">
             <a:noAutofit/>
           </a:bodyPr>
           <a:lstStyle/>
@@ -9201,7 +9498,6 @@
           <a:lstStyle/>
           <a:p>
             <a:pPr algn="ctr"/>
-            <a:endParaRPr/>
           </a:p>
         </p:txBody>
       </p:sp>
@@ -9222,7 +9518,7 @@
           <a:noFill/>
         </p:spPr>
         <p:txBody>
-          <a:bodyPr wrap="square" lIns="0" tIns="0" rIns="0" bIns="0" anchor="t">
+          <a:bodyPr wrap="square" lIns="0" rIns="0" tIns="0" bIns="0" anchor="t">
             <a:noAutofit/>
           </a:bodyPr>
           <a:lstStyle/>
@@ -9268,7 +9564,7 @@
           <a:noFill/>
         </p:spPr>
         <p:txBody>
-          <a:bodyPr wrap="square" lIns="0" tIns="0" rIns="0" bIns="0" anchor="t">
+          <a:bodyPr wrap="square" lIns="0" rIns="0" tIns="0" bIns="0" anchor="t">
             <a:noAutofit/>
           </a:bodyPr>
           <a:lstStyle/>
@@ -9324,7 +9620,6 @@
           <a:lstStyle/>
           <a:p>
             <a:pPr algn="ctr"/>
-            <a:endParaRPr/>
           </a:p>
         </p:txBody>
       </p:sp>
@@ -9345,7 +9640,7 @@
           <a:noFill/>
         </p:spPr>
         <p:txBody>
-          <a:bodyPr wrap="square" lIns="0" tIns="0" rIns="0" bIns="0" anchor="t">
+          <a:bodyPr wrap="square" lIns="0" rIns="0" tIns="0" bIns="0" anchor="t">
             <a:noAutofit/>
           </a:bodyPr>
           <a:lstStyle/>
@@ -9391,7 +9686,7 @@
           <a:noFill/>
         </p:spPr>
         <p:txBody>
-          <a:bodyPr wrap="square" lIns="0" tIns="0" rIns="0" bIns="0" anchor="t">
+          <a:bodyPr wrap="square" lIns="0" rIns="0" tIns="0" bIns="0" anchor="t">
             <a:noAutofit/>
           </a:bodyPr>
           <a:lstStyle/>
@@ -9449,7 +9744,6 @@
           <a:lstStyle/>
           <a:p>
             <a:pPr algn="ctr"/>
-            <a:endParaRPr/>
           </a:p>
         </p:txBody>
       </p:sp>
@@ -9470,7 +9764,7 @@
           <a:noFill/>
         </p:spPr>
         <p:txBody>
-          <a:bodyPr wrap="square" lIns="0" tIns="0" rIns="0" bIns="0" anchor="t">
+          <a:bodyPr wrap="square" lIns="0" rIns="0" tIns="0" bIns="0" anchor="t">
             <a:noAutofit/>
           </a:bodyPr>
           <a:lstStyle/>
@@ -9516,7 +9810,7 @@
           <a:noFill/>
         </p:spPr>
         <p:txBody>
-          <a:bodyPr wrap="square" lIns="0" tIns="0" rIns="0" bIns="0" anchor="ctr">
+          <a:bodyPr wrap="square" lIns="0" rIns="0" tIns="0" bIns="0" anchor="ctr">
             <a:noAutofit/>
           </a:bodyPr>
           <a:lstStyle/>
@@ -9696,7 +9990,6 @@
           <a:lstStyle/>
           <a:p>
             <a:pPr algn="ctr"/>
-            <a:endParaRPr/>
           </a:p>
         </p:txBody>
       </p:sp>
@@ -9717,7 +10010,7 @@
           <a:noFill/>
         </p:spPr>
         <p:txBody>
-          <a:bodyPr wrap="square" lIns="0" tIns="0" rIns="0" bIns="0" anchor="t">
+          <a:bodyPr wrap="square" lIns="0" rIns="0" tIns="0" bIns="0" anchor="t">
             <a:noAutofit/>
           </a:bodyPr>
           <a:lstStyle/>
@@ -9763,7 +10056,7 @@
           <a:noFill/>
         </p:spPr>
         <p:txBody>
-          <a:bodyPr wrap="square" lIns="0" tIns="0" rIns="0" bIns="0" anchor="t">
+          <a:bodyPr wrap="square" lIns="0" rIns="0" tIns="0" bIns="0" anchor="t">
             <a:noAutofit/>
           </a:bodyPr>
           <a:lstStyle/>
@@ -9930,7 +10223,17 @@
                 <a:latin typeface="Segoe UI"/>
                 <a:ea typeface="Microsoft YaHei"/>
               </a:rPr>
-              <a:t>²/2 = 5.65×10</a:t>
+              <a:t>²/2 = </a:t>
+            </a:r>
+            <a:r>
+              <a:rPr sz="1150" b="0" i="0">
+                <a:solidFill>
+                  <a:srgbClr val="3A4A50"/>
+                </a:solidFill>
+                <a:latin typeface="Segoe UI"/>
+                <a:ea typeface="Microsoft YaHei"/>
+              </a:rPr>
+              <a:t>5.65×10</a:t>
             </a:r>
             <a:r>
               <a:rPr sz="827" b="0" i="0" baseline="30000">
@@ -9990,7 +10293,17 @@
                 <a:latin typeface="Segoe UI"/>
                 <a:ea typeface="Microsoft YaHei"/>
               </a:rPr>
-              <a:t> = 0.911</a:t>
+              <a:t> = </a:t>
+            </a:r>
+            <a:r>
+              <a:rPr sz="1150" b="0" i="0">
+                <a:solidFill>
+                  <a:srgbClr val="3A4A50"/>
+                </a:solidFill>
+                <a:latin typeface="Segoe UI"/>
+                <a:ea typeface="Microsoft YaHei"/>
+              </a:rPr>
+              <a:t>0.911</a:t>
             </a:r>
           </a:p>
           <a:p>
@@ -10013,7 +10326,17 @@
                 <a:latin typeface="Segoe UI"/>
                 <a:ea typeface="Microsoft YaHei"/>
               </a:rPr>
-              <a:t>阈值 5.15×10</a:t>
+              <a:t>阈值 </a:t>
+            </a:r>
+            <a:r>
+              <a:rPr sz="1150" b="0" i="0">
+                <a:solidFill>
+                  <a:srgbClr val="3A4A50"/>
+                </a:solidFill>
+                <a:latin typeface="Segoe UI"/>
+                <a:ea typeface="Microsoft YaHei"/>
+              </a:rPr>
+              <a:t>5.15×10</a:t>
             </a:r>
             <a:r>
               <a:rPr sz="827" b="0" i="0" baseline="30000">
@@ -10073,7 +10396,17 @@
                 <a:latin typeface="Segoe UI"/>
                 <a:ea typeface="Microsoft YaHei"/>
               </a:rPr>
-              <a:t> = 2.85×10</a:t>
+              <a:t> = </a:t>
+            </a:r>
+            <a:r>
+              <a:rPr sz="1150" b="0" i="0">
+                <a:solidFill>
+                  <a:srgbClr val="3A4A50"/>
+                </a:solidFill>
+                <a:latin typeface="Segoe UI"/>
+                <a:ea typeface="Microsoft YaHei"/>
+              </a:rPr>
+              <a:t>2.85×10</a:t>
             </a:r>
             <a:r>
               <a:rPr sz="827" b="0" i="0" baseline="30000">
@@ -10136,7 +10469,27 @@
                 <a:latin typeface="Segoe UI"/>
                 <a:ea typeface="Microsoft YaHei"/>
               </a:rPr>
-              <a:t> = 9.4 nm  ⇒ 网格 2 nm 起步，再以 1 nm 复算</a:t>
+              <a:t> = </a:t>
+            </a:r>
+            <a:r>
+              <a:rPr sz="1150" b="0" i="0">
+                <a:solidFill>
+                  <a:srgbClr val="3A4A50"/>
+                </a:solidFill>
+                <a:latin typeface="Segoe UI"/>
+                <a:ea typeface="Microsoft YaHei"/>
+              </a:rPr>
+              <a:t>9.4</a:t>
+            </a:r>
+            <a:r>
+              <a:rPr sz="1150" b="0" i="0">
+                <a:solidFill>
+                  <a:srgbClr val="3A4A50"/>
+                </a:solidFill>
+                <a:latin typeface="Segoe UI"/>
+                <a:ea typeface="Microsoft YaHei"/>
+              </a:rPr>
+              <a:t> nm  ⇒ 网格 2 nm 起步，再以 1 nm 复算</a:t>
             </a:r>
           </a:p>
         </p:txBody>
@@ -10158,7 +10511,7 @@
           <a:noFill/>
         </p:spPr>
         <p:txBody>
-          <a:bodyPr wrap="square" lIns="0" tIns="0" rIns="0" bIns="0" anchor="t">
+          <a:bodyPr wrap="square" lIns="0" rIns="0" tIns="0" bIns="0" anchor="t">
             <a:noAutofit/>
           </a:bodyPr>
           <a:lstStyle/>
@@ -10269,6 +10622,52 @@
       </p:sp>
       <p:sp>
         <p:nvSpPr>
+          <p:cNvPr id="24" name="TextBox 23"/>
+          <p:cNvSpPr txBox="1"/>
+          <p:nvPr/>
+        </p:nvSpPr>
+        <p:spPr>
+          <a:xfrm>
+            <a:off x="640080" y="6419088"/>
+            <a:ext cx="8869680" cy="237744"/>
+          </a:xfrm>
+          <a:prstGeom prst="rect">
+            <a:avLst/>
+          </a:prstGeom>
+          <a:noFill/>
+        </p:spPr>
+        <p:txBody>
+          <a:bodyPr wrap="square" lIns="0" rIns="0" tIns="0" bIns="0" anchor="t">
+            <a:noAutofit/>
+          </a:bodyPr>
+          <a:lstStyle/>
+          <a:p>
+            <a:pPr algn="l">
+              <a:lnSpc>
+                <a:spcPct val="115000"/>
+              </a:lnSpc>
+              <a:spcBef>
+                <a:spcPts val="0"/>
+              </a:spcBef>
+              <a:spcAft>
+                <a:spcPts val="0"/>
+              </a:spcAft>
+            </a:pPr>
+            <a:r>
+              <a:rPr sz="850" b="0" i="0">
+                <a:solidFill>
+                  <a:srgbClr val="53676D"/>
+                </a:solidFill>
+                <a:latin typeface="Segoe UI"/>
+                <a:ea typeface="Microsoft YaHei"/>
+              </a:rPr>
+              <a:t>推导见 2-微磁学四种能量竞争_学习笔记.md §8；参数见 3-Fidimag…md §7</a:t>
+            </a:r>
+          </a:p>
+        </p:txBody>
+      </p:sp>
+      <p:sp>
+        <p:nvSpPr>
           <p:cNvPr id="25" name="TextBox 24"/>
           <p:cNvSpPr txBox="1"/>
           <p:nvPr/>
@@ -10284,7 +10683,7 @@
           <a:noFill/>
         </p:spPr>
         <p:txBody>
-          <a:bodyPr wrap="square" lIns="0" tIns="0" rIns="0" bIns="0" anchor="t">
+          <a:bodyPr wrap="square" lIns="0" rIns="0" tIns="0" bIns="0" anchor="t">
             <a:noAutofit/>
           </a:bodyPr>
           <a:lstStyle/>
@@ -10322,7 +10721,7 @@
 </file>
 
 <file path=ppt/slides/slide6.xml><?xml version="1.0" encoding="utf-8"?>
-<p:sld xmlns:a="http://schemas.openxmlformats.org/drawingml/2006/main" xmlns:r="http://schemas.openxmlformats.org/officeDocument/2006/relationships" xmlns:p="http://schemas.openxmlformats.org/presentationml/2006/main">
+<p:sld xmlns:a="http://schemas.openxmlformats.org/drawingml/2006/main" xmlns:p="http://schemas.openxmlformats.org/presentationml/2006/main" xmlns:r="http://schemas.openxmlformats.org/officeDocument/2006/relationships">
   <p:cSld>
     <p:bg>
       <p:bgPr>
@@ -10338,14 +10737,7 @@
         <p:cNvGrpSpPr/>
         <p:nvPr/>
       </p:nvGrpSpPr>
-      <p:grpSpPr>
-        <a:xfrm>
-          <a:off x="0" y="0"/>
-          <a:ext cx="0" cy="0"/>
-          <a:chOff x="0" y="0"/>
-          <a:chExt cx="0" cy="0"/>
-        </a:xfrm>
-      </p:grpSpPr>
+      <p:grpSpPr/>
       <p:sp>
         <p:nvSpPr>
           <p:cNvPr id="2" name="TextBox 1"/>
@@ -10363,7 +10755,7 @@
           <a:noFill/>
         </p:spPr>
         <p:txBody>
-          <a:bodyPr wrap="square" lIns="0" tIns="0" rIns="0" bIns="0" anchor="t">
+          <a:bodyPr wrap="square" lIns="0" rIns="0" tIns="0" bIns="0" anchor="t">
             <a:noAutofit/>
           </a:bodyPr>
           <a:lstStyle/>
@@ -10429,7 +10821,7 @@
           <a:noFill/>
         </p:spPr>
         <p:txBody>
-          <a:bodyPr wrap="square" lIns="0" tIns="0" rIns="0" bIns="0" anchor="ctr">
+          <a:bodyPr wrap="square" lIns="0" rIns="0" tIns="0" bIns="0" anchor="ctr">
             <a:noAutofit/>
           </a:bodyPr>
           <a:lstStyle/>
@@ -10453,7 +10845,17 @@
                 <a:latin typeface="Segoe UI"/>
                 <a:ea typeface="Microsoft YaHei"/>
               </a:rPr>
-              <a:t>平面形状改的是面内各向异性，厚度才主导 N</a:t>
+              <a:t>平面形状改的是面内各向异性，厚度才主导 </a:t>
+            </a:r>
+            <a:r>
+              <a:rPr sz="2800" b="1" i="0">
+                <a:solidFill>
+                  <a:srgbClr val="172E36"/>
+                </a:solidFill>
+                <a:latin typeface="Segoe UI"/>
+                <a:ea typeface="Microsoft YaHei"/>
+              </a:rPr>
+              <a:t>N</a:t>
             </a:r>
             <a:r>
               <a:rPr sz="2016" b="1" i="0" baseline="-25000">
@@ -10495,7 +10897,6 @@
           <a:lstStyle/>
           <a:p>
             <a:pPr algn="ctr"/>
-            <a:endParaRPr/>
           </a:p>
         </p:txBody>
       </p:sp>
@@ -10516,39 +10917,15 @@
             <a:tbl>
               <a:tblPr firstRow="1" bandRow="1"/>
               <a:tblGrid>
-                <a:gridCol w="2194560">
-                  <a:extLst>
-                    <a:ext uri="{9D8B030D-6E8A-4147-A177-3AD203B41FA5}">
-                      <a16:colId xmlns:a16="http://schemas.microsoft.com/office/drawing/2014/main" val="20000"/>
-                    </a:ext>
-                  </a:extLst>
-                </a:gridCol>
-                <a:gridCol w="1371600">
-                  <a:extLst>
-                    <a:ext uri="{9D8B030D-6E8A-4147-A177-3AD203B41FA5}">
-                      <a16:colId xmlns:a16="http://schemas.microsoft.com/office/drawing/2014/main" val="20001"/>
-                    </a:ext>
-                  </a:extLst>
-                </a:gridCol>
-                <a:gridCol w="1371600">
-                  <a:extLst>
-                    <a:ext uri="{9D8B030D-6E8A-4147-A177-3AD203B41FA5}">
-                      <a16:colId xmlns:a16="http://schemas.microsoft.com/office/drawing/2014/main" val="20002"/>
-                    </a:ext>
-                  </a:extLst>
-                </a:gridCol>
-                <a:gridCol w="1371600">
-                  <a:extLst>
-                    <a:ext uri="{9D8B030D-6E8A-4147-A177-3AD203B41FA5}">
-                      <a16:colId xmlns:a16="http://schemas.microsoft.com/office/drawing/2014/main" val="20003"/>
-                    </a:ext>
-                  </a:extLst>
-                </a:gridCol>
+                <a:gridCol w="2194560"/>
+                <a:gridCol w="1371600"/>
+                <a:gridCol w="1371600"/>
+                <a:gridCol w="1371600"/>
               </a:tblGrid>
               <a:tr h="411480">
                 <a:tc>
                   <a:txBody>
-                    <a:bodyPr/>
+                    <a:bodyPr wrap="none"/>
                     <a:lstStyle/>
                     <a:p>
                       <a:pPr algn="l"/>
@@ -10572,7 +10949,7 @@
                 </a:tc>
                 <a:tc>
                   <a:txBody>
-                    <a:bodyPr/>
+                    <a:bodyPr wrap="none"/>
                     <a:lstStyle/>
                     <a:p>
                       <a:pPr algn="ctr"/>
@@ -10606,7 +10983,7 @@
                 </a:tc>
                 <a:tc>
                   <a:txBody>
-                    <a:bodyPr/>
+                    <a:bodyPr wrap="none"/>
                     <a:lstStyle/>
                     <a:p>
                       <a:pPr algn="ctr"/>
@@ -10640,7 +11017,7 @@
                 </a:tc>
                 <a:tc>
                   <a:txBody>
-                    <a:bodyPr/>
+                    <a:bodyPr wrap="none"/>
                     <a:lstStyle/>
                     <a:p>
                       <a:pPr algn="ctr"/>
@@ -10672,16 +11049,11 @@
                     </a:solidFill>
                   </a:tcPr>
                 </a:tc>
-                <a:extLst>
-                  <a:ext uri="{0D108BD9-81ED-4DB2-BD59-A6C34878D82A}">
-                    <a16:rowId xmlns:a16="http://schemas.microsoft.com/office/drawing/2014/main" val="10000"/>
-                  </a:ext>
-                </a:extLst>
               </a:tr>
               <a:tr h="411480">
                 <a:tc>
                   <a:txBody>
-                    <a:bodyPr/>
+                    <a:bodyPr wrap="none"/>
                     <a:lstStyle/>
                     <a:p>
                       <a:pPr algn="l"/>
@@ -10705,7 +11077,7 @@
                 </a:tc>
                 <a:tc>
                   <a:txBody>
-                    <a:bodyPr/>
+                    <a:bodyPr wrap="none"/>
                     <a:lstStyle/>
                     <a:p>
                       <a:pPr algn="ctr"/>
@@ -10729,7 +11101,7 @@
                 </a:tc>
                 <a:tc>
                   <a:txBody>
-                    <a:bodyPr/>
+                    <a:bodyPr wrap="none"/>
                     <a:lstStyle/>
                     <a:p>
                       <a:pPr algn="ctr"/>
@@ -10753,7 +11125,7 @@
                 </a:tc>
                 <a:tc>
                   <a:txBody>
-                    <a:bodyPr/>
+                    <a:bodyPr wrap="none"/>
                     <a:lstStyle/>
                     <a:p>
                       <a:pPr algn="ctr"/>
@@ -10775,16 +11147,11 @@
                     </a:solidFill>
                   </a:tcPr>
                 </a:tc>
-                <a:extLst>
-                  <a:ext uri="{0D108BD9-81ED-4DB2-BD59-A6C34878D82A}">
-                    <a16:rowId xmlns:a16="http://schemas.microsoft.com/office/drawing/2014/main" val="10001"/>
-                  </a:ext>
-                </a:extLst>
               </a:tr>
               <a:tr h="411480">
                 <a:tc>
                   <a:txBody>
-                    <a:bodyPr/>
+                    <a:bodyPr wrap="none"/>
                     <a:lstStyle/>
                     <a:p>
                       <a:pPr algn="l"/>
@@ -10808,7 +11175,7 @@
                 </a:tc>
                 <a:tc>
                   <a:txBody>
-                    <a:bodyPr/>
+                    <a:bodyPr wrap="none"/>
                     <a:lstStyle/>
                     <a:p>
                       <a:pPr algn="ctr"/>
@@ -10832,7 +11199,7 @@
                 </a:tc>
                 <a:tc>
                   <a:txBody>
-                    <a:bodyPr/>
+                    <a:bodyPr wrap="none"/>
                     <a:lstStyle/>
                     <a:p>
                       <a:pPr algn="ctr"/>
@@ -10856,7 +11223,7 @@
                 </a:tc>
                 <a:tc>
                   <a:txBody>
-                    <a:bodyPr/>
+                    <a:bodyPr wrap="none"/>
                     <a:lstStyle/>
                     <a:p>
                       <a:pPr algn="ctr"/>
@@ -10878,16 +11245,11 @@
                     </a:solidFill>
                   </a:tcPr>
                 </a:tc>
-                <a:extLst>
-                  <a:ext uri="{0D108BD9-81ED-4DB2-BD59-A6C34878D82A}">
-                    <a16:rowId xmlns:a16="http://schemas.microsoft.com/office/drawing/2014/main" val="10002"/>
-                  </a:ext>
-                </a:extLst>
               </a:tr>
               <a:tr h="411480">
                 <a:tc>
                   <a:txBody>
-                    <a:bodyPr/>
+                    <a:bodyPr wrap="none"/>
                     <a:lstStyle/>
                     <a:p>
                       <a:pPr algn="l"/>
@@ -10911,7 +11273,7 @@
                 </a:tc>
                 <a:tc>
                   <a:txBody>
-                    <a:bodyPr/>
+                    <a:bodyPr wrap="none"/>
                     <a:lstStyle/>
                     <a:p>
                       <a:pPr algn="ctr"/>
@@ -10935,7 +11297,7 @@
                 </a:tc>
                 <a:tc>
                   <a:txBody>
-                    <a:bodyPr/>
+                    <a:bodyPr wrap="none"/>
                     <a:lstStyle/>
                     <a:p>
                       <a:pPr algn="ctr"/>
@@ -10959,7 +11321,7 @@
                 </a:tc>
                 <a:tc>
                   <a:txBody>
-                    <a:bodyPr/>
+                    <a:bodyPr wrap="none"/>
                     <a:lstStyle/>
                     <a:p>
                       <a:pPr algn="ctr"/>
@@ -10981,11 +11343,6 @@
                     </a:solidFill>
                   </a:tcPr>
                 </a:tc>
-                <a:extLst>
-                  <a:ext uri="{0D108BD9-81ED-4DB2-BD59-A6C34878D82A}">
-                    <a16:rowId xmlns:a16="http://schemas.microsoft.com/office/drawing/2014/main" val="10003"/>
-                  </a:ext>
-                </a:extLst>
               </a:tr>
             </a:tbl>
           </a:graphicData>
@@ -11008,7 +11365,7 @@
           <a:noFill/>
         </p:spPr>
         <p:txBody>
-          <a:bodyPr wrap="square" lIns="0" tIns="0" rIns="0" bIns="0" anchor="t">
+          <a:bodyPr wrap="square" lIns="0" rIns="0" tIns="0" bIns="0" anchor="t">
             <a:noAutofit/>
           </a:bodyPr>
           <a:lstStyle/>
@@ -11064,7 +11421,6 @@
           <a:lstStyle/>
           <a:p>
             <a:pPr algn="ctr"/>
-            <a:endParaRPr/>
           </a:p>
         </p:txBody>
       </p:sp>
@@ -11095,7 +11451,6 @@
           <a:lstStyle/>
           <a:p>
             <a:pPr algn="ctr"/>
-            <a:endParaRPr/>
           </a:p>
         </p:txBody>
       </p:sp>
@@ -11126,7 +11481,6 @@
           <a:lstStyle/>
           <a:p>
             <a:pPr algn="ctr"/>
-            <a:endParaRPr/>
           </a:p>
         </p:txBody>
       </p:sp>
@@ -11147,7 +11501,7 @@
           <a:noFill/>
         </p:spPr>
         <p:txBody>
-          <a:bodyPr wrap="square" lIns="0" tIns="0" rIns="0" bIns="0" anchor="ctr">
+          <a:bodyPr wrap="square" lIns="0" rIns="0" tIns="0" bIns="0" anchor="ctr">
             <a:noAutofit/>
           </a:bodyPr>
           <a:lstStyle/>
@@ -11213,7 +11567,7 @@
           <a:noFill/>
         </p:spPr>
         <p:txBody>
-          <a:bodyPr wrap="square" lIns="0" tIns="0" rIns="0" bIns="0" anchor="t">
+          <a:bodyPr wrap="square" lIns="0" rIns="0" tIns="0" bIns="0" anchor="t">
             <a:noAutofit/>
           </a:bodyPr>
           <a:lstStyle/>
@@ -11299,7 +11653,7 @@
           <a:noFill/>
         </p:spPr>
         <p:txBody>
-          <a:bodyPr wrap="square" lIns="0" tIns="0" rIns="0" bIns="0" anchor="t">
+          <a:bodyPr wrap="square" lIns="0" rIns="0" tIns="0" bIns="0" anchor="t">
             <a:noAutofit/>
           </a:bodyPr>
           <a:lstStyle/>
@@ -11375,7 +11729,7 @@
           <a:noFill/>
         </p:spPr>
         <p:txBody>
-          <a:bodyPr wrap="square" lIns="0" tIns="0" rIns="0" bIns="0" anchor="t">
+          <a:bodyPr wrap="square" lIns="0" rIns="0" tIns="0" bIns="0" anchor="t">
             <a:noAutofit/>
           </a:bodyPr>
           <a:lstStyle/>
@@ -11421,7 +11775,7 @@
           <a:noFill/>
         </p:spPr>
         <p:txBody>
-          <a:bodyPr wrap="square" lIns="0" tIns="0" rIns="0" bIns="0" anchor="t">
+          <a:bodyPr wrap="square" lIns="0" rIns="0" tIns="0" bIns="0" anchor="t">
             <a:noAutofit/>
           </a:bodyPr>
           <a:lstStyle/>
@@ -11445,7 +11799,17 @@
                 <a:latin typeface="Segoe UI"/>
                 <a:ea typeface="Microsoft YaHei"/>
               </a:rPr>
-              <a:t>同面积同厚度，方形改长条：N</a:t>
+              <a:t>同面积同厚度，方形改长条：</a:t>
+            </a:r>
+            <a:r>
+              <a:rPr sz="1050" b="0" i="0">
+                <a:solidFill>
+                  <a:srgbClr val="3A4A50"/>
+                </a:solidFill>
+                <a:latin typeface="Segoe UI"/>
+                <a:ea typeface="Microsoft YaHei"/>
+              </a:rPr>
+              <a:t>N</a:t>
             </a:r>
             <a:r>
               <a:rPr sz="756" b="0" i="0" baseline="-25000">
@@ -11465,7 +11829,17 @@
                 <a:latin typeface="Segoe UI"/>
                 <a:ea typeface="Microsoft YaHei"/>
               </a:rPr>
-              <a:t> 几乎不变，变的是面内 N</a:t>
+              <a:t> 几乎不变，变的是面内 </a:t>
+            </a:r>
+            <a:r>
+              <a:rPr sz="1050" b="0" i="0">
+                <a:solidFill>
+                  <a:srgbClr val="3A4A50"/>
+                </a:solidFill>
+                <a:latin typeface="Segoe UI"/>
+                <a:ea typeface="Microsoft YaHei"/>
+              </a:rPr>
+              <a:t>N</a:t>
             </a:r>
             <a:r>
               <a:rPr sz="756" b="0" i="0" baseline="-25000">
@@ -11485,7 +11859,17 @@
                 <a:latin typeface="Segoe UI"/>
                 <a:ea typeface="Microsoft YaHei"/>
               </a:rPr>
-              <a:t> 0.030→0.014、N</a:t>
+              <a:t> 0.030→0.014、</a:t>
+            </a:r>
+            <a:r>
+              <a:rPr sz="1050" b="0" i="0">
+                <a:solidFill>
+                  <a:srgbClr val="3A4A50"/>
+                </a:solidFill>
+                <a:latin typeface="Segoe UI"/>
+                <a:ea typeface="Microsoft YaHei"/>
+              </a:rPr>
+              <a:t>N</a:t>
             </a:r>
             <a:r>
               <a:rPr sz="756" b="0" i="0" baseline="-25000">
@@ -11537,7 +11921,6 @@
           <a:lstStyle/>
           <a:p>
             <a:pPr algn="ctr"/>
-            <a:endParaRPr/>
           </a:p>
         </p:txBody>
       </p:sp>
@@ -11558,7 +11941,7 @@
           <a:noFill/>
         </p:spPr>
         <p:txBody>
-          <a:bodyPr wrap="square" lIns="0" tIns="0" rIns="0" bIns="0" anchor="t">
+          <a:bodyPr wrap="square" lIns="0" rIns="0" tIns="0" bIns="0" anchor="t">
             <a:noAutofit/>
           </a:bodyPr>
           <a:lstStyle/>
@@ -11604,7 +11987,7 @@
           <a:noFill/>
         </p:spPr>
         <p:txBody>
-          <a:bodyPr wrap="square" lIns="0" tIns="0" rIns="0" bIns="0" anchor="t">
+          <a:bodyPr wrap="square" lIns="0" rIns="0" tIns="0" bIns="0" anchor="t">
             <a:noAutofit/>
           </a:bodyPr>
           <a:lstStyle/>
@@ -11628,7 +12011,17 @@
                 <a:latin typeface="Segoe UI"/>
                 <a:ea typeface="Microsoft YaHei"/>
               </a:rPr>
-              <a:t>厚度 4 → 20 nm：N</a:t>
+              <a:t>厚度 4 → 20 nm：</a:t>
+            </a:r>
+            <a:r>
+              <a:rPr sz="1050" b="0" i="0">
+                <a:solidFill>
+                  <a:srgbClr val="3A4A50"/>
+                </a:solidFill>
+                <a:latin typeface="Segoe UI"/>
+                <a:ea typeface="Microsoft YaHei"/>
+              </a:rPr>
+              <a:t>N</a:t>
             </a:r>
             <a:r>
               <a:rPr sz="756" b="0" i="0" baseline="-25000">
@@ -11648,7 +12041,17 @@
                 <a:latin typeface="Segoe UI"/>
                 <a:ea typeface="Microsoft YaHei"/>
               </a:rPr>
-              <a:t> 明显下降，厚度才是 N</a:t>
+              <a:t> 明显下降，厚度才是 </a:t>
+            </a:r>
+            <a:r>
+              <a:rPr sz="1050" b="0" i="0">
+                <a:solidFill>
+                  <a:srgbClr val="3A4A50"/>
+                </a:solidFill>
+                <a:latin typeface="Segoe UI"/>
+                <a:ea typeface="Microsoft YaHei"/>
+              </a:rPr>
+              <a:t>N</a:t>
             </a:r>
             <a:r>
               <a:rPr sz="756" b="0" i="0" baseline="-25000">
@@ -11700,7 +12103,6 @@
           <a:lstStyle/>
           <a:p>
             <a:pPr algn="ctr"/>
-            <a:endParaRPr/>
           </a:p>
         </p:txBody>
       </p:sp>
@@ -11721,7 +12123,7 @@
           <a:noFill/>
         </p:spPr>
         <p:txBody>
-          <a:bodyPr wrap="square" lIns="0" tIns="0" rIns="0" bIns="0" anchor="t">
+          <a:bodyPr wrap="square" lIns="0" rIns="0" tIns="0" bIns="0" anchor="t">
             <a:noAutofit/>
           </a:bodyPr>
           <a:lstStyle/>
@@ -11767,7 +12169,7 @@
           <a:noFill/>
         </p:spPr>
         <p:txBody>
-          <a:bodyPr wrap="square" lIns="0" tIns="0" rIns="0" bIns="0" anchor="t">
+          <a:bodyPr wrap="square" lIns="0" rIns="0" tIns="0" bIns="0" anchor="t">
             <a:noAutofit/>
           </a:bodyPr>
           <a:lstStyle/>
@@ -11791,7 +12193,17 @@
                 <a:latin typeface="Segoe UI"/>
                 <a:ea typeface="Microsoft YaHei"/>
               </a:rPr>
-              <a:t>中心点 N</a:t>
+              <a:t>中心点 </a:t>
+            </a:r>
+            <a:r>
+              <a:rPr sz="1050" b="0" i="0">
+                <a:solidFill>
+                  <a:srgbClr val="3A4A50"/>
+                </a:solidFill>
+                <a:latin typeface="Segoe UI"/>
+                <a:ea typeface="Microsoft YaHei"/>
+              </a:rPr>
+              <a:t>N</a:t>
             </a:r>
             <a:r>
               <a:rPr sz="756" b="0" i="0" baseline="-25000">
@@ -11811,7 +12223,17 @@
                 <a:latin typeface="Segoe UI"/>
                 <a:ea typeface="Microsoft YaHei"/>
               </a:rPr>
-              <a:t> 比体积平均高 4.37%；用无限薄膜 N</a:t>
+              <a:t> 比体积平均高 4.37%；用无限薄膜 </a:t>
+            </a:r>
+            <a:r>
+              <a:rPr sz="1050" b="0" i="0">
+                <a:solidFill>
+                  <a:srgbClr val="3A4A50"/>
+                </a:solidFill>
+                <a:latin typeface="Segoe UI"/>
+                <a:ea typeface="Microsoft YaHei"/>
+              </a:rPr>
+              <a:t>N</a:t>
             </a:r>
             <a:r>
               <a:rPr sz="756" b="0" i="0" baseline="-25000">
@@ -11853,7 +12275,7 @@
           <a:noFill/>
         </p:spPr>
         <p:txBody>
-          <a:bodyPr wrap="square" lIns="0" tIns="0" rIns="0" bIns="0" anchor="t">
+          <a:bodyPr wrap="square" lIns="0" rIns="0" tIns="0" bIns="0" anchor="t">
             <a:noAutofit/>
           </a:bodyPr>
           <a:lstStyle/>
@@ -11899,7 +12321,7 @@
           <a:noFill/>
         </p:spPr>
         <p:txBody>
-          <a:bodyPr wrap="square" lIns="0" tIns="0" rIns="0" bIns="0" anchor="t">
+          <a:bodyPr wrap="square" lIns="0" rIns="0" tIns="0" bIns="0" anchor="t">
             <a:noAutofit/>
           </a:bodyPr>
           <a:lstStyle/>
@@ -11937,7 +12359,7 @@
 </file>
 
 <file path=ppt/slides/slide7.xml><?xml version="1.0" encoding="utf-8"?>
-<p:sld xmlns:a="http://schemas.openxmlformats.org/drawingml/2006/main" xmlns:r="http://schemas.openxmlformats.org/officeDocument/2006/relationships" xmlns:p="http://schemas.openxmlformats.org/presentationml/2006/main">
+<p:sld xmlns:a="http://schemas.openxmlformats.org/drawingml/2006/main" xmlns:p="http://schemas.openxmlformats.org/presentationml/2006/main" xmlns:r="http://schemas.openxmlformats.org/officeDocument/2006/relationships">
   <p:cSld>
     <p:bg>
       <p:bgPr>
@@ -11953,14 +12375,7 @@
         <p:cNvGrpSpPr/>
         <p:nvPr/>
       </p:nvGrpSpPr>
-      <p:grpSpPr>
-        <a:xfrm>
-          <a:off x="0" y="0"/>
-          <a:ext cx="0" cy="0"/>
-          <a:chOff x="0" y="0"/>
-          <a:chExt cx="0" cy="0"/>
-        </a:xfrm>
-      </p:grpSpPr>
+      <p:grpSpPr/>
       <p:sp>
         <p:nvSpPr>
           <p:cNvPr id="2" name="TextBox 1"/>
@@ -11978,7 +12393,7 @@
           <a:noFill/>
         </p:spPr>
         <p:txBody>
-          <a:bodyPr wrap="square" lIns="0" tIns="0" rIns="0" bIns="0" anchor="t">
+          <a:bodyPr wrap="square" lIns="0" rIns="0" tIns="0" bIns="0" anchor="t">
             <a:noAutofit/>
           </a:bodyPr>
           <a:lstStyle/>
@@ -12044,7 +12459,7 @@
           <a:noFill/>
         </p:spPr>
         <p:txBody>
-          <a:bodyPr wrap="square" lIns="0" tIns="0" rIns="0" bIns="0" anchor="ctr">
+          <a:bodyPr wrap="square" lIns="0" rIns="0" tIns="0" bIns="0" anchor="ctr">
             <a:noAutofit/>
           </a:bodyPr>
           <a:lstStyle/>
@@ -12100,7 +12515,6 @@
           <a:lstStyle/>
           <a:p>
             <a:pPr algn="ctr"/>
-            <a:endParaRPr/>
           </a:p>
         </p:txBody>
       </p:sp>
@@ -12135,7 +12549,6 @@
           <a:lstStyle/>
           <a:p>
             <a:pPr algn="ctr"/>
-            <a:endParaRPr/>
           </a:p>
         </p:txBody>
       </p:sp>
@@ -12166,7 +12579,6 @@
           <a:lstStyle/>
           <a:p>
             <a:pPr algn="ctr"/>
-            <a:endParaRPr/>
           </a:p>
         </p:txBody>
       </p:sp>
@@ -12187,7 +12599,7 @@
           <a:noFill/>
         </p:spPr>
         <p:txBody>
-          <a:bodyPr wrap="square" lIns="0" tIns="0" rIns="0" bIns="0" anchor="t">
+          <a:bodyPr wrap="square" lIns="0" rIns="0" tIns="0" bIns="0" anchor="t">
             <a:noAutofit/>
           </a:bodyPr>
           <a:lstStyle/>
@@ -12233,7 +12645,7 @@
           <a:noFill/>
         </p:spPr>
         <p:txBody>
-          <a:bodyPr wrap="square" lIns="0" tIns="0" rIns="0" bIns="0" anchor="t">
+          <a:bodyPr wrap="square" lIns="0" rIns="0" tIns="0" bIns="0" anchor="t">
             <a:noAutofit/>
           </a:bodyPr>
           <a:lstStyle/>
@@ -12279,7 +12691,7 @@
           <a:noFill/>
         </p:spPr>
         <p:txBody>
-          <a:bodyPr wrap="square" lIns="0" tIns="0" rIns="0" bIns="0" anchor="t">
+          <a:bodyPr wrap="square" lIns="0" rIns="0" tIns="0" bIns="0" anchor="t">
             <a:noAutofit/>
           </a:bodyPr>
           <a:lstStyle/>
@@ -12303,7 +12715,17 @@
                 <a:latin typeface="Segoe UI"/>
                 <a:ea typeface="Microsoft YaHei"/>
               </a:rPr>
-              <a:t>对 OOMMF 基准：7.49×10</a:t>
+              <a:t>对 OOMMF 基准：</a:t>
+            </a:r>
+            <a:r>
+              <a:rPr sz="1150" b="0" i="0">
+                <a:solidFill>
+                  <a:srgbClr val="3A4A50"/>
+                </a:solidFill>
+                <a:latin typeface="Segoe UI"/>
+                <a:ea typeface="Microsoft YaHei"/>
+              </a:rPr>
+              <a:t>7.49×10</a:t>
             </a:r>
             <a:r>
               <a:rPr sz="827" b="0" i="0" baseline="30000">
@@ -12336,7 +12758,17 @@
                 <a:latin typeface="Segoe UI"/>
                 <a:ea typeface="Microsoft YaHei"/>
               </a:rPr>
-              <a:t>迹误差：4.02×10</a:t>
+              <a:t>迹误差：</a:t>
+            </a:r>
+            <a:r>
+              <a:rPr sz="1150" b="0" i="0">
+                <a:solidFill>
+                  <a:srgbClr val="3A4A50"/>
+                </a:solidFill>
+                <a:latin typeface="Segoe UI"/>
+                <a:ea typeface="Microsoft YaHei"/>
+              </a:rPr>
+              <a:t>4.02×10</a:t>
             </a:r>
             <a:r>
               <a:rPr sz="827" b="0" i="0" baseline="30000">
@@ -12369,7 +12801,17 @@
                 <a:latin typeface="Segoe UI"/>
                 <a:ea typeface="Microsoft YaHei"/>
               </a:rPr>
-              <a:t>独立积分交叉验证：1.84×10</a:t>
+              <a:t>独立积分交叉验证：</a:t>
+            </a:r>
+            <a:r>
+              <a:rPr sz="1150" b="0" i="0">
+                <a:solidFill>
+                  <a:srgbClr val="3A4A50"/>
+                </a:solidFill>
+                <a:latin typeface="Segoe UI"/>
+                <a:ea typeface="Microsoft YaHei"/>
+              </a:rPr>
+              <a:t>1.84×10</a:t>
             </a:r>
             <a:r>
               <a:rPr sz="827" b="0" i="0" baseline="30000">
@@ -12401,7 +12843,7 @@
           <a:noFill/>
         </p:spPr>
         <p:txBody>
-          <a:bodyPr wrap="square" lIns="0" tIns="0" rIns="0" bIns="0" anchor="t">
+          <a:bodyPr wrap="square" lIns="0" rIns="0" tIns="0" bIns="0" anchor="t">
             <a:noAutofit/>
           </a:bodyPr>
           <a:lstStyle/>
@@ -12461,7 +12903,6 @@
           <a:lstStyle/>
           <a:p>
             <a:pPr algn="ctr"/>
-            <a:endParaRPr/>
           </a:p>
         </p:txBody>
       </p:sp>
@@ -12492,7 +12933,6 @@
           <a:lstStyle/>
           <a:p>
             <a:pPr algn="ctr"/>
-            <a:endParaRPr/>
           </a:p>
         </p:txBody>
       </p:sp>
@@ -12513,7 +12953,7 @@
           <a:noFill/>
         </p:spPr>
         <p:txBody>
-          <a:bodyPr wrap="square" lIns="0" tIns="0" rIns="0" bIns="0" anchor="t">
+          <a:bodyPr wrap="square" lIns="0" rIns="0" tIns="0" bIns="0" anchor="t">
             <a:noAutofit/>
           </a:bodyPr>
           <a:lstStyle/>
@@ -12559,7 +12999,7 @@
           <a:noFill/>
         </p:spPr>
         <p:txBody>
-          <a:bodyPr wrap="square" lIns="0" tIns="0" rIns="0" bIns="0" anchor="t">
+          <a:bodyPr wrap="square" lIns="0" rIns="0" tIns="0" bIns="0" anchor="t">
             <a:noAutofit/>
           </a:bodyPr>
           <a:lstStyle/>
@@ -12605,7 +13045,7 @@
           <a:noFill/>
         </p:spPr>
         <p:txBody>
-          <a:bodyPr wrap="square" lIns="0" tIns="0" rIns="0" bIns="0" anchor="t">
+          <a:bodyPr wrap="square" lIns="0" rIns="0" tIns="0" bIns="0" anchor="t">
             <a:noAutofit/>
           </a:bodyPr>
           <a:lstStyle/>
@@ -12629,7 +13069,17 @@
                 <a:latin typeface="Segoe UI"/>
                 <a:ea typeface="Microsoft YaHei"/>
               </a:rPr>
-              <a:t>与解析解：2.76×10</a:t>
+              <a:t>与解析解：</a:t>
+            </a:r>
+            <a:r>
+              <a:rPr sz="1150" b="0" i="0">
+                <a:solidFill>
+                  <a:srgbClr val="3A4A50"/>
+                </a:solidFill>
+                <a:latin typeface="Segoe UI"/>
+                <a:ea typeface="Microsoft YaHei"/>
+              </a:rPr>
+              <a:t>2.76×10</a:t>
             </a:r>
             <a:r>
               <a:rPr sz="827" b="0" i="0" baseline="30000">
@@ -12662,7 +13112,17 @@
                 <a:latin typeface="Segoe UI"/>
                 <a:ea typeface="Microsoft YaHei"/>
               </a:rPr>
-              <a:t>模长误差：1.02×10</a:t>
+              <a:t>模长误差：</a:t>
+            </a:r>
+            <a:r>
+              <a:rPr sz="1150" b="0" i="0">
+                <a:solidFill>
+                  <a:srgbClr val="3A4A50"/>
+                </a:solidFill>
+                <a:latin typeface="Segoe UI"/>
+                <a:ea typeface="Microsoft YaHei"/>
+              </a:rPr>
+              <a:t>1.02×10</a:t>
             </a:r>
             <a:r>
               <a:rPr sz="827" b="0" i="0" baseline="30000">
@@ -12695,7 +13155,17 @@
                 <a:latin typeface="Segoe UI"/>
                 <a:ea typeface="Microsoft YaHei"/>
               </a:rPr>
-              <a:t>步长减半差：2.59×10</a:t>
+              <a:t>步长减半差：</a:t>
+            </a:r>
+            <a:r>
+              <a:rPr sz="1150" b="0" i="0">
+                <a:solidFill>
+                  <a:srgbClr val="3A4A50"/>
+                </a:solidFill>
+                <a:latin typeface="Segoe UI"/>
+                <a:ea typeface="Microsoft YaHei"/>
+              </a:rPr>
+              <a:t>2.59×10</a:t>
             </a:r>
             <a:r>
               <a:rPr sz="827" b="0" i="0" baseline="30000">
@@ -12727,7 +13197,7 @@
           <a:noFill/>
         </p:spPr>
         <p:txBody>
-          <a:bodyPr wrap="square" lIns="0" tIns="0" rIns="0" bIns="0" anchor="t">
+          <a:bodyPr wrap="square" lIns="0" rIns="0" tIns="0" bIns="0" anchor="t">
             <a:noAutofit/>
           </a:bodyPr>
           <a:lstStyle/>
@@ -12785,7 +13255,6 @@
           <a:lstStyle/>
           <a:p>
             <a:pPr algn="ctr"/>
-            <a:endParaRPr/>
           </a:p>
         </p:txBody>
       </p:sp>
@@ -12816,7 +13285,6 @@
           <a:lstStyle/>
           <a:p>
             <a:pPr algn="ctr"/>
-            <a:endParaRPr/>
           </a:p>
         </p:txBody>
       </p:sp>
@@ -12837,7 +13305,7 @@
           <a:noFill/>
         </p:spPr>
         <p:txBody>
-          <a:bodyPr wrap="square" lIns="0" tIns="0" rIns="0" bIns="0" anchor="t">
+          <a:bodyPr wrap="square" lIns="0" rIns="0" tIns="0" bIns="0" anchor="t">
             <a:noAutofit/>
           </a:bodyPr>
           <a:lstStyle/>
@@ -12883,7 +13351,7 @@
           <a:noFill/>
         </p:spPr>
         <p:txBody>
-          <a:bodyPr wrap="square" lIns="0" tIns="0" rIns="0" bIns="0" anchor="t">
+          <a:bodyPr wrap="square" lIns="0" rIns="0" tIns="0" bIns="0" anchor="t">
             <a:noAutofit/>
           </a:bodyPr>
           <a:lstStyle/>
@@ -12929,7 +13397,7 @@
           <a:noFill/>
         </p:spPr>
         <p:txBody>
-          <a:bodyPr wrap="square" lIns="0" tIns="0" rIns="0" bIns="0" anchor="t">
+          <a:bodyPr wrap="square" lIns="0" rIns="0" tIns="0" bIns="0" anchor="t">
             <a:noAutofit/>
           </a:bodyPr>
           <a:lstStyle/>
@@ -12946,54 +13414,24 @@
               </a:spcAft>
             </a:pPr>
             <a:r>
-              <a:rPr sz="1150" b="0" i="0" dirty="0" err="1">
+              <a:rPr sz="1150" b="0" i="0">
                 <a:solidFill>
                   <a:srgbClr val="3A4A50"/>
                 </a:solidFill>
                 <a:latin typeface="Segoe UI"/>
                 <a:ea typeface="Microsoft YaHei"/>
               </a:rPr>
-              <a:t>接口与语法已核对，但本机没有</a:t>
-            </a:r>
-            <a:r>
-              <a:rPr sz="1150" b="0" i="0" dirty="0">
-                <a:solidFill>
-                  <a:srgbClr val="3A4A50"/>
-                </a:solidFill>
-                <a:latin typeface="Segoe UI"/>
-                <a:ea typeface="Microsoft YaHei"/>
-              </a:rPr>
-              <a:t> </a:t>
-            </a:r>
-            <a:r>
-              <a:rPr sz="1150" b="0" i="0" dirty="0" err="1">
-                <a:solidFill>
-                  <a:srgbClr val="3A4A50"/>
-                </a:solidFill>
-                <a:latin typeface="Segoe UI"/>
-                <a:ea typeface="Microsoft YaHei"/>
-              </a:rPr>
-              <a:t>Fidimag，尚未运行：目前没有任何薄膜模拟结果，</a:t>
-            </a:r>
-            <a:r>
-              <a:rPr sz="1150" b="1" i="0" dirty="0" err="1">
+              <a:t>接口与语法已核对，但本机没有 Fidimag，尚未运行：目前没有任何薄膜模拟结果，</a:t>
+            </a:r>
+            <a:r>
+              <a:rPr sz="1150" b="1" i="0">
                 <a:solidFill>
                   <a:srgbClr val="B45309"/>
                 </a:solidFill>
                 <a:latin typeface="Segoe UI"/>
                 <a:ea typeface="Microsoft YaHei"/>
               </a:rPr>
-              <a:t>这一步的结论还不能写</a:t>
-            </a:r>
-            <a:r>
-              <a:rPr sz="1150" b="1" i="0" dirty="0">
-                <a:solidFill>
-                  <a:srgbClr val="B45309"/>
-                </a:solidFill>
-                <a:latin typeface="Segoe UI"/>
-                <a:ea typeface="Microsoft YaHei"/>
-              </a:rPr>
-              <a:t>。</a:t>
+              <a:t>这一步的结论还不能写。</a:t>
             </a:r>
           </a:p>
         </p:txBody>
@@ -13015,7 +13453,7 @@
           <a:noFill/>
         </p:spPr>
         <p:txBody>
-          <a:bodyPr wrap="square" lIns="0" tIns="0" rIns="0" bIns="0" anchor="t">
+          <a:bodyPr wrap="square" lIns="0" rIns="0" tIns="0" bIns="0" anchor="t">
             <a:noAutofit/>
           </a:bodyPr>
           <a:lstStyle/>
@@ -13046,6 +13484,52 @@
       </p:sp>
       <p:sp>
         <p:nvSpPr>
+          <p:cNvPr id="23" name="TextBox 22"/>
+          <p:cNvSpPr txBox="1"/>
+          <p:nvPr/>
+        </p:nvSpPr>
+        <p:spPr>
+          <a:xfrm>
+            <a:off x="640080" y="6419088"/>
+            <a:ext cx="8869680" cy="237744"/>
+          </a:xfrm>
+          <a:prstGeom prst="rect">
+            <a:avLst/>
+          </a:prstGeom>
+          <a:noFill/>
+        </p:spPr>
+        <p:txBody>
+          <a:bodyPr wrap="square" lIns="0" rIns="0" tIns="0" bIns="0" anchor="t">
+            <a:noAutofit/>
+          </a:bodyPr>
+          <a:lstStyle/>
+          <a:p>
+            <a:pPr algn="l">
+              <a:lnSpc>
+                <a:spcPct val="115000"/>
+              </a:lnSpc>
+              <a:spcBef>
+                <a:spcPts val="0"/>
+              </a:spcBef>
+              <a:spcAft>
+                <a:spcPts val="0"/>
+              </a:spcAft>
+            </a:pPr>
+            <a:r>
+              <a:rPr sz="850" b="0" i="0">
+                <a:solidFill>
+                  <a:srgbClr val="53676D"/>
+                </a:solidFill>
+                <a:latin typeface="Segoe UI"/>
+                <a:ea typeface="Microsoft YaHei"/>
+              </a:rPr>
+              <a:t>结果来自 rectangular_demag.py 与 macrospin_results/verification.json</a:t>
+            </a:r>
+          </a:p>
+        </p:txBody>
+      </p:sp>
+      <p:sp>
+        <p:nvSpPr>
           <p:cNvPr id="24" name="TextBox 23"/>
           <p:cNvSpPr txBox="1"/>
           <p:nvPr/>
@@ -13061,7 +13545,7 @@
           <a:noFill/>
         </p:spPr>
         <p:txBody>
-          <a:bodyPr wrap="square" lIns="0" tIns="0" rIns="0" bIns="0" anchor="t">
+          <a:bodyPr wrap="square" lIns="0" rIns="0" tIns="0" bIns="0" anchor="t">
             <a:noAutofit/>
           </a:bodyPr>
           <a:lstStyle/>
@@ -13099,7 +13583,7 @@
 </file>
 
 <file path=ppt/slides/slide8.xml><?xml version="1.0" encoding="utf-8"?>
-<p:sld xmlns:a="http://schemas.openxmlformats.org/drawingml/2006/main" xmlns:r="http://schemas.openxmlformats.org/officeDocument/2006/relationships" xmlns:p="http://schemas.openxmlformats.org/presentationml/2006/main">
+<p:sld xmlns:a="http://schemas.openxmlformats.org/drawingml/2006/main" xmlns:p="http://schemas.openxmlformats.org/presentationml/2006/main" xmlns:r="http://schemas.openxmlformats.org/officeDocument/2006/relationships">
   <p:cSld>
     <p:bg>
       <p:bgPr>
@@ -13115,14 +13599,7 @@
         <p:cNvGrpSpPr/>
         <p:nvPr/>
       </p:nvGrpSpPr>
-      <p:grpSpPr>
-        <a:xfrm>
-          <a:off x="0" y="0"/>
-          <a:ext cx="0" cy="0"/>
-          <a:chOff x="0" y="0"/>
-          <a:chExt cx="0" cy="0"/>
-        </a:xfrm>
-      </p:grpSpPr>
+      <p:grpSpPr/>
       <p:sp>
         <p:nvSpPr>
           <p:cNvPr id="2" name="TextBox 1"/>
@@ -13140,7 +13617,7 @@
           <a:noFill/>
         </p:spPr>
         <p:txBody>
-          <a:bodyPr wrap="square" lIns="0" tIns="0" rIns="0" bIns="0" anchor="t">
+          <a:bodyPr wrap="square" lIns="0" rIns="0" tIns="0" bIns="0" anchor="t">
             <a:noAutofit/>
           </a:bodyPr>
           <a:lstStyle/>
@@ -13206,7 +13683,7 @@
           <a:noFill/>
         </p:spPr>
         <p:txBody>
-          <a:bodyPr wrap="square" lIns="0" tIns="0" rIns="0" bIns="0" anchor="ctr">
+          <a:bodyPr wrap="square" lIns="0" rIns="0" tIns="0" bIns="0" anchor="ctr">
             <a:noAutofit/>
           </a:bodyPr>
           <a:lstStyle/>
@@ -13262,7 +13739,6 @@
           <a:lstStyle/>
           <a:p>
             <a:pPr algn="ctr"/>
-            <a:endParaRPr/>
           </a:p>
         </p:txBody>
       </p:sp>
@@ -13283,7 +13759,7 @@
           <a:noFill/>
         </p:spPr>
         <p:txBody>
-          <a:bodyPr wrap="square" lIns="0" tIns="0" rIns="0" bIns="0" anchor="t">
+          <a:bodyPr wrap="square" lIns="0" rIns="0" tIns="0" bIns="0" anchor="t">
             <a:noAutofit/>
           </a:bodyPr>
           <a:lstStyle/>
@@ -13320,8 +13796,8 @@
         </p:nvSpPr>
         <p:spPr>
           <a:xfrm>
-            <a:off x="1261872" y="1828800"/>
-            <a:ext cx="5760720" cy="329184"/>
+            <a:off x="1280160" y="1828800"/>
+            <a:ext cx="10271455" cy="329184"/>
           </a:xfrm>
           <a:prstGeom prst="rect">
             <a:avLst/>
@@ -13329,7 +13805,7 @@
           <a:noFill/>
         </p:spPr>
         <p:txBody>
-          <a:bodyPr wrap="square" lIns="0" tIns="0" rIns="0" bIns="0" anchor="t">
+          <a:bodyPr wrap="square" lIns="0" rIns="0" tIns="0" bIns="0" anchor="t">
             <a:noAutofit/>
           </a:bodyPr>
           <a:lstStyle/>
@@ -13366,8 +13842,8 @@
         </p:nvSpPr>
         <p:spPr>
           <a:xfrm>
-            <a:off x="1261872" y="2176272"/>
-            <a:ext cx="5760720" cy="457200"/>
+            <a:off x="1280160" y="2176272"/>
+            <a:ext cx="10271455" cy="457200"/>
           </a:xfrm>
           <a:prstGeom prst="rect">
             <a:avLst/>
@@ -13375,7 +13851,7 @@
           <a:noFill/>
         </p:spPr>
         <p:txBody>
-          <a:bodyPr wrap="square" lIns="0" tIns="0" rIns="0" bIns="0" anchor="t">
+          <a:bodyPr wrap="square" lIns="0" rIns="0" tIns="0" bIns="0" anchor="t">
             <a:noAutofit/>
           </a:bodyPr>
           <a:lstStyle/>
@@ -13399,20 +13875,50 @@
                 <a:latin typeface="Segoe UI"/>
                 <a:ea typeface="Microsoft YaHei"/>
               </a:rPr>
-              <a:t>OOMMF / WSL+Fidimag / MuMax3，先验证 GPU 与 CUDA 兼容性</a:t>
-            </a:r>
-          </a:p>
-        </p:txBody>
-      </p:sp>
-      <p:sp>
-        <p:nvSpPr>
-          <p:cNvPr id="8" name="TextBox 7"/>
+              <a:t>OOMMF / WSL+Fidimag / MuMax3：先验证 GPU 与 CUDA 兼容性；本机 RTX 5060 可能不兼容旧版。</a:t>
+            </a:r>
+          </a:p>
+        </p:txBody>
+      </p:sp>
+      <p:sp>
+        <p:nvSpPr>
+          <p:cNvPr id="8" name="Rectangle 7"/>
+          <p:cNvSpPr/>
+          <p:nvPr/>
+        </p:nvSpPr>
+        <p:spPr>
+          <a:xfrm>
+            <a:off x="640080" y="2743200"/>
+            <a:ext cx="10911535" cy="8229"/>
+          </a:xfrm>
+          <a:prstGeom prst="rect">
+            <a:avLst/>
+          </a:prstGeom>
+          <a:solidFill>
+            <a:srgbClr val="DCE6E3"/>
+          </a:solidFill>
+          <a:ln>
+            <a:noFill/>
+          </a:ln>
+          <a:effectLst/>
+        </p:spPr>
+        <p:txBody>
+          <a:bodyPr rtlCol="0" anchor="ctr"/>
+          <a:lstStyle/>
+          <a:p>
+            <a:pPr algn="ctr"/>
+          </a:p>
+        </p:txBody>
+      </p:sp>
+      <p:sp>
+        <p:nvSpPr>
+          <p:cNvPr id="9" name="TextBox 8"/>
           <p:cNvSpPr txBox="1"/>
           <p:nvPr/>
         </p:nvSpPr>
         <p:spPr>
           <a:xfrm>
-            <a:off x="640080" y="2834640"/>
+            <a:off x="640080" y="2852928"/>
             <a:ext cx="566928" cy="384048"/>
           </a:xfrm>
           <a:prstGeom prst="rect">
@@ -13421,7 +13927,7 @@
           <a:noFill/>
         </p:spPr>
         <p:txBody>
-          <a:bodyPr wrap="square" lIns="0" tIns="0" rIns="0" bIns="0" anchor="t">
+          <a:bodyPr wrap="square" lIns="0" rIns="0" tIns="0" bIns="0" anchor="t">
             <a:noAutofit/>
           </a:bodyPr>
           <a:lstStyle/>
@@ -13452,14 +13958,14 @@
       </p:sp>
       <p:sp>
         <p:nvSpPr>
-          <p:cNvPr id="9" name="TextBox 8"/>
+          <p:cNvPr id="10" name="TextBox 9"/>
           <p:cNvSpPr txBox="1"/>
           <p:nvPr/>
         </p:nvSpPr>
         <p:spPr>
           <a:xfrm>
-            <a:off x="1261872" y="2816352"/>
-            <a:ext cx="5760720" cy="329184"/>
+            <a:off x="1280160" y="2834640"/>
+            <a:ext cx="10271455" cy="329184"/>
           </a:xfrm>
           <a:prstGeom prst="rect">
             <a:avLst/>
@@ -13467,7 +13973,7 @@
           <a:noFill/>
         </p:spPr>
         <p:txBody>
-          <a:bodyPr wrap="square" lIns="0" tIns="0" rIns="0" bIns="0" anchor="t">
+          <a:bodyPr wrap="square" lIns="0" rIns="0" tIns="0" bIns="0" anchor="t">
             <a:noAutofit/>
           </a:bodyPr>
           <a:lstStyle/>
@@ -13498,14 +14004,14 @@
       </p:sp>
       <p:sp>
         <p:nvSpPr>
-          <p:cNvPr id="10" name="TextBox 9"/>
+          <p:cNvPr id="11" name="TextBox 10"/>
           <p:cNvSpPr txBox="1"/>
           <p:nvPr/>
         </p:nvSpPr>
         <p:spPr>
           <a:xfrm>
-            <a:off x="1261872" y="3163824"/>
-            <a:ext cx="5760720" cy="457200"/>
+            <a:off x="1280160" y="3182112"/>
+            <a:ext cx="10271455" cy="457200"/>
           </a:xfrm>
           <a:prstGeom prst="rect">
             <a:avLst/>
@@ -13513,7 +14019,7 @@
           <a:noFill/>
         </p:spPr>
         <p:txBody>
-          <a:bodyPr wrap="square" lIns="0" tIns="0" rIns="0" bIns="0" anchor="t">
+          <a:bodyPr wrap="square" lIns="0" rIns="0" tIns="0" bIns="0" anchor="t">
             <a:noAutofit/>
           </a:bodyPr>
           <a:lstStyle/>
@@ -13544,13 +14050,43 @@
       </p:sp>
       <p:sp>
         <p:nvSpPr>
-          <p:cNvPr id="11" name="TextBox 10"/>
+          <p:cNvPr id="12" name="Rectangle 11"/>
+          <p:cNvSpPr/>
+          <p:nvPr/>
+        </p:nvSpPr>
+        <p:spPr>
+          <a:xfrm>
+            <a:off x="640080" y="3749039"/>
+            <a:ext cx="10911535" cy="8229"/>
+          </a:xfrm>
+          <a:prstGeom prst="rect">
+            <a:avLst/>
+          </a:prstGeom>
+          <a:solidFill>
+            <a:srgbClr val="DCE6E3"/>
+          </a:solidFill>
+          <a:ln>
+            <a:noFill/>
+          </a:ln>
+          <a:effectLst/>
+        </p:spPr>
+        <p:txBody>
+          <a:bodyPr rtlCol="0" anchor="ctr"/>
+          <a:lstStyle/>
+          <a:p>
+            <a:pPr algn="ctr"/>
+          </a:p>
+        </p:txBody>
+      </p:sp>
+      <p:sp>
+        <p:nvSpPr>
+          <p:cNvPr id="13" name="TextBox 12"/>
           <p:cNvSpPr txBox="1"/>
           <p:nvPr/>
         </p:nvSpPr>
         <p:spPr>
           <a:xfrm>
-            <a:off x="640080" y="3822191"/>
+            <a:off x="640080" y="3858768"/>
             <a:ext cx="566928" cy="384048"/>
           </a:xfrm>
           <a:prstGeom prst="rect">
@@ -13559,7 +14095,7 @@
           <a:noFill/>
         </p:spPr>
         <p:txBody>
-          <a:bodyPr wrap="square" lIns="0" tIns="0" rIns="0" bIns="0" anchor="t">
+          <a:bodyPr wrap="square" lIns="0" rIns="0" tIns="0" bIns="0" anchor="t">
             <a:noAutofit/>
           </a:bodyPr>
           <a:lstStyle/>
@@ -13590,14 +14126,14 @@
       </p:sp>
       <p:sp>
         <p:nvSpPr>
-          <p:cNvPr id="12" name="TextBox 11"/>
+          <p:cNvPr id="14" name="TextBox 13"/>
           <p:cNvSpPr txBox="1"/>
           <p:nvPr/>
         </p:nvSpPr>
         <p:spPr>
           <a:xfrm>
-            <a:off x="1261872" y="3803904"/>
-            <a:ext cx="5760720" cy="329184"/>
+            <a:off x="1280160" y="3840480"/>
+            <a:ext cx="10271455" cy="329184"/>
           </a:xfrm>
           <a:prstGeom prst="rect">
             <a:avLst/>
@@ -13605,7 +14141,7 @@
           <a:noFill/>
         </p:spPr>
         <p:txBody>
-          <a:bodyPr wrap="square" lIns="0" tIns="0" rIns="0" bIns="0" anchor="t">
+          <a:bodyPr wrap="square" lIns="0" rIns="0" tIns="0" bIns="0" anchor="t">
             <a:noAutofit/>
           </a:bodyPr>
           <a:lstStyle/>
@@ -13636,14 +14172,14 @@
       </p:sp>
       <p:sp>
         <p:nvSpPr>
-          <p:cNvPr id="13" name="TextBox 12"/>
+          <p:cNvPr id="15" name="TextBox 14"/>
           <p:cNvSpPr txBox="1"/>
           <p:nvPr/>
         </p:nvSpPr>
         <p:spPr>
           <a:xfrm>
-            <a:off x="1261872" y="4151376"/>
-            <a:ext cx="5760720" cy="457200"/>
+            <a:off x="1280160" y="4187952"/>
+            <a:ext cx="10271455" cy="457200"/>
           </a:xfrm>
           <a:prstGeom prst="rect">
             <a:avLst/>
@@ -13651,7 +14187,7 @@
           <a:noFill/>
         </p:spPr>
         <p:txBody>
-          <a:bodyPr wrap="square" lIns="0" tIns="0" rIns="0" bIns="0" anchor="t">
+          <a:bodyPr wrap="square" lIns="0" rIns="0" tIns="0" bIns="0" anchor="t">
             <a:noAutofit/>
           </a:bodyPr>
           <a:lstStyle/>
@@ -13702,13 +14238,43 @@
       </p:sp>
       <p:sp>
         <p:nvSpPr>
-          <p:cNvPr id="14" name="TextBox 13"/>
+          <p:cNvPr id="16" name="Rectangle 15"/>
+          <p:cNvSpPr/>
+          <p:nvPr/>
+        </p:nvSpPr>
+        <p:spPr>
+          <a:xfrm>
+            <a:off x="640080" y="4754880"/>
+            <a:ext cx="10911535" cy="8229"/>
+          </a:xfrm>
+          <a:prstGeom prst="rect">
+            <a:avLst/>
+          </a:prstGeom>
+          <a:solidFill>
+            <a:srgbClr val="DCE6E3"/>
+          </a:solidFill>
+          <a:ln>
+            <a:noFill/>
+          </a:ln>
+          <a:effectLst/>
+        </p:spPr>
+        <p:txBody>
+          <a:bodyPr rtlCol="0" anchor="ctr"/>
+          <a:lstStyle/>
+          <a:p>
+            <a:pPr algn="ctr"/>
+          </a:p>
+        </p:txBody>
+      </p:sp>
+      <p:sp>
+        <p:nvSpPr>
+          <p:cNvPr id="17" name="TextBox 16"/>
           <p:cNvSpPr txBox="1"/>
           <p:nvPr/>
         </p:nvSpPr>
         <p:spPr>
           <a:xfrm>
-            <a:off x="640080" y="4809744"/>
+            <a:off x="640080" y="4864608"/>
             <a:ext cx="566928" cy="384048"/>
           </a:xfrm>
           <a:prstGeom prst="rect">
@@ -13717,7 +14283,7 @@
           <a:noFill/>
         </p:spPr>
         <p:txBody>
-          <a:bodyPr wrap="square" lIns="0" tIns="0" rIns="0" bIns="0" anchor="t">
+          <a:bodyPr wrap="square" lIns="0" rIns="0" tIns="0" bIns="0" anchor="t">
             <a:noAutofit/>
           </a:bodyPr>
           <a:lstStyle/>
@@ -13748,14 +14314,14 @@
       </p:sp>
       <p:sp>
         <p:nvSpPr>
-          <p:cNvPr id="15" name="TextBox 14"/>
+          <p:cNvPr id="18" name="TextBox 17"/>
           <p:cNvSpPr txBox="1"/>
           <p:nvPr/>
         </p:nvSpPr>
         <p:spPr>
           <a:xfrm>
-            <a:off x="1261872" y="4791456"/>
-            <a:ext cx="5760720" cy="329184"/>
+            <a:off x="1280160" y="4846320"/>
+            <a:ext cx="10271455" cy="329184"/>
           </a:xfrm>
           <a:prstGeom prst="rect">
             <a:avLst/>
@@ -13763,7 +14329,7 @@
           <a:noFill/>
         </p:spPr>
         <p:txBody>
-          <a:bodyPr wrap="square" lIns="0" tIns="0" rIns="0" bIns="0" anchor="t">
+          <a:bodyPr wrap="square" lIns="0" rIns="0" tIns="0" bIns="0" anchor="t">
             <a:noAutofit/>
           </a:bodyPr>
           <a:lstStyle/>
@@ -13794,14 +14360,14 @@
       </p:sp>
       <p:sp>
         <p:nvSpPr>
-          <p:cNvPr id="16" name="TextBox 15"/>
+          <p:cNvPr id="19" name="TextBox 18"/>
           <p:cNvSpPr txBox="1"/>
           <p:nvPr/>
         </p:nvSpPr>
         <p:spPr>
           <a:xfrm>
-            <a:off x="1261872" y="5138928"/>
-            <a:ext cx="5760720" cy="457200"/>
+            <a:off x="1280160" y="5193792"/>
+            <a:ext cx="10271455" cy="457200"/>
           </a:xfrm>
           <a:prstGeom prst="rect">
             <a:avLst/>
@@ -13809,7 +14375,7 @@
           <a:noFill/>
         </p:spPr>
         <p:txBody>
-          <a:bodyPr wrap="square" lIns="0" tIns="0" rIns="0" bIns="0" anchor="t">
+          <a:bodyPr wrap="square" lIns="0" rIns="0" tIns="0" bIns="0" anchor="t">
             <a:noAutofit/>
           </a:bodyPr>
           <a:lstStyle/>
@@ -13840,236 +14406,7 @@
       </p:sp>
       <p:sp>
         <p:nvSpPr>
-          <p:cNvPr id="17" name="Rounded Rectangle 16"/>
-          <p:cNvSpPr/>
-          <p:nvPr/>
-        </p:nvSpPr>
-        <p:spPr>
-          <a:xfrm>
-            <a:off x="7315200" y="1847088"/>
-            <a:ext cx="4233672" cy="2011680"/>
-          </a:xfrm>
-          <a:prstGeom prst="roundRect">
-            <a:avLst>
-              <a:gd name="adj" fmla="val 6000"/>
-            </a:avLst>
-          </a:prstGeom>
-          <a:solidFill>
-            <a:srgbClr val="FFFFFF"/>
-          </a:solidFill>
-          <a:ln w="15875">
-            <a:solidFill>
-              <a:srgbClr val="B45309"/>
-            </a:solidFill>
-          </a:ln>
-          <a:effectLst/>
-        </p:spPr>
-        <p:txBody>
-          <a:bodyPr rtlCol="0" anchor="ctr"/>
-          <a:lstStyle/>
-          <a:p>
-            <a:pPr algn="ctr"/>
-            <a:endParaRPr/>
-          </a:p>
-        </p:txBody>
-      </p:sp>
-      <p:sp>
-        <p:nvSpPr>
-          <p:cNvPr id="18" name="TextBox 17"/>
-          <p:cNvSpPr txBox="1"/>
-          <p:nvPr/>
-        </p:nvSpPr>
-        <p:spPr>
-          <a:xfrm>
-            <a:off x="7534656" y="1975104"/>
-            <a:ext cx="3840480" cy="256032"/>
-          </a:xfrm>
-          <a:prstGeom prst="rect">
-            <a:avLst/>
-          </a:prstGeom>
-          <a:noFill/>
-        </p:spPr>
-        <p:txBody>
-          <a:bodyPr wrap="square" lIns="0" tIns="0" rIns="0" bIns="0" anchor="t">
-            <a:noAutofit/>
-          </a:bodyPr>
-          <a:lstStyle/>
-          <a:p>
-            <a:pPr algn="l">
-              <a:lnSpc>
-                <a:spcPct val="115000"/>
-              </a:lnSpc>
-              <a:spcBef>
-                <a:spcPts val="0"/>
-              </a:spcBef>
-              <a:spcAft>
-                <a:spcPts val="0"/>
-              </a:spcAft>
-            </a:pPr>
-            <a:r>
-              <a:rPr sz="1050" b="1" i="0" spc="150">
-                <a:solidFill>
-                  <a:srgbClr val="B45309"/>
-                </a:solidFill>
-                <a:latin typeface="Segoe UI"/>
-                <a:ea typeface="Microsoft YaHei"/>
-              </a:rPr>
-              <a:t>需要你确认</a:t>
-            </a:r>
-          </a:p>
-        </p:txBody>
-      </p:sp>
-      <p:sp>
-        <p:nvSpPr>
-          <p:cNvPr id="19" name="TextBox 18"/>
-          <p:cNvSpPr txBox="1"/>
-          <p:nvPr/>
-        </p:nvSpPr>
-        <p:spPr>
-          <a:xfrm>
-            <a:off x="7534656" y="2286000"/>
-            <a:ext cx="3840480" cy="1417320"/>
-          </a:xfrm>
-          <a:prstGeom prst="rect">
-            <a:avLst/>
-          </a:prstGeom>
-          <a:noFill/>
-        </p:spPr>
-        <p:txBody>
-          <a:bodyPr wrap="square" lIns="0" tIns="0" rIns="0" bIns="0" anchor="t">
-            <a:noAutofit/>
-          </a:bodyPr>
-          <a:lstStyle/>
-          <a:p>
-            <a:pPr algn="l">
-              <a:lnSpc>
-                <a:spcPct val="160000"/>
-              </a:lnSpc>
-              <a:spcBef>
-                <a:spcPts val="0"/>
-              </a:spcBef>
-              <a:spcAft>
-                <a:spcPts val="0"/>
-              </a:spcAft>
-            </a:pPr>
-            <a:r>
-              <a:rPr sz="1200" b="0" i="0">
-                <a:solidFill>
-                  <a:srgbClr val="3A4A50"/>
-                </a:solidFill>
-                <a:latin typeface="Segoe UI"/>
-                <a:ea typeface="Microsoft YaHei"/>
-              </a:rPr>
-              <a:t>· 软件路线走哪一条</a:t>
-            </a:r>
-          </a:p>
-          <a:p>
-            <a:pPr algn="l">
-              <a:lnSpc>
-                <a:spcPct val="160000"/>
-              </a:lnSpc>
-              <a:spcBef>
-                <a:spcPts val="0"/>
-              </a:spcBef>
-              <a:spcAft>
-                <a:spcPts val="0"/>
-              </a:spcAft>
-            </a:pPr>
-            <a:r>
-              <a:rPr sz="1200" b="0" i="0">
-                <a:solidFill>
-                  <a:srgbClr val="3A4A50"/>
-                </a:solidFill>
-                <a:latin typeface="Segoe UI"/>
-                <a:ea typeface="Microsoft YaHei"/>
-              </a:rPr>
-              <a:t>· 可用机时 / 机器</a:t>
-            </a:r>
-          </a:p>
-          <a:p>
-            <a:pPr algn="l">
-              <a:lnSpc>
-                <a:spcPct val="160000"/>
-              </a:lnSpc>
-              <a:spcBef>
-                <a:spcPts val="0"/>
-              </a:spcBef>
-              <a:spcAft>
-                <a:spcPts val="0"/>
-              </a:spcAft>
-            </a:pPr>
-            <a:r>
-              <a:rPr sz="1200" b="0" i="0">
-                <a:solidFill>
-                  <a:srgbClr val="3A4A50"/>
-                </a:solidFill>
-                <a:latin typeface="Segoe UI"/>
-                <a:ea typeface="Microsoft YaHei"/>
-              </a:rPr>
-              <a:t>· 是否沿用教学参数</a:t>
-            </a:r>
-          </a:p>
-        </p:txBody>
-      </p:sp>
-      <p:sp>
-        <p:nvSpPr>
-          <p:cNvPr id="20" name="TextBox 19"/>
-          <p:cNvSpPr txBox="1"/>
-          <p:nvPr/>
-        </p:nvSpPr>
-        <p:spPr>
-          <a:xfrm>
-            <a:off x="7315200" y="4069080"/>
-            <a:ext cx="4233672" cy="1051560"/>
-          </a:xfrm>
-          <a:prstGeom prst="rect">
-            <a:avLst/>
-          </a:prstGeom>
-          <a:noFill/>
-        </p:spPr>
-        <p:txBody>
-          <a:bodyPr wrap="square" lIns="0" tIns="0" rIns="0" bIns="0" anchor="t">
-            <a:noAutofit/>
-          </a:bodyPr>
-          <a:lstStyle/>
-          <a:p>
-            <a:pPr algn="l">
-              <a:lnSpc>
-                <a:spcPct val="130000"/>
-              </a:lnSpc>
-              <a:spcBef>
-                <a:spcPts val="0"/>
-              </a:spcBef>
-              <a:spcAft>
-                <a:spcPts val="0"/>
-              </a:spcAft>
-            </a:pPr>
-            <a:r>
-              <a:rPr sz="1050" b="1" i="0">
-                <a:solidFill>
-                  <a:srgbClr val="B45309"/>
-                </a:solidFill>
-                <a:latin typeface="Segoe UI"/>
-                <a:ea typeface="Microsoft YaHei"/>
-              </a:rPr>
-              <a:t>风险：</a:t>
-            </a:r>
-            <a:r>
-              <a:rPr sz="1050" b="0" i="0">
-                <a:solidFill>
-                  <a:srgbClr val="3A4A50"/>
-                </a:solidFill>
-                <a:latin typeface="Segoe UI"/>
-                <a:ea typeface="Microsoft YaHei"/>
-              </a:rPr>
-              <a:t>本机 RTX 5060（Blackwell, sm_120）与旧版 MuMax3/CUDA 可能不兼容。</a:t>
-            </a:r>
-          </a:p>
-        </p:txBody>
-      </p:sp>
-      <p:sp>
-        <p:nvSpPr>
-          <p:cNvPr id="21" name="Rounded Rectangle 20"/>
+          <p:cNvPr id="20" name="Rounded Rectangle 19"/>
           <p:cNvSpPr/>
           <p:nvPr/>
         </p:nvSpPr>
@@ -14096,13 +14433,12 @@
           <a:lstStyle/>
           <a:p>
             <a:pPr algn="ctr"/>
-            <a:endParaRPr/>
-          </a:p>
-        </p:txBody>
-      </p:sp>
-      <p:sp>
-        <p:nvSpPr>
-          <p:cNvPr id="22" name="TextBox 21"/>
+          </a:p>
+        </p:txBody>
+      </p:sp>
+      <p:sp>
+        <p:nvSpPr>
+          <p:cNvPr id="21" name="TextBox 20"/>
           <p:cNvSpPr txBox="1"/>
           <p:nvPr/>
         </p:nvSpPr>
@@ -14117,7 +14453,7 @@
           <a:noFill/>
         </p:spPr>
         <p:txBody>
-          <a:bodyPr wrap="square" lIns="0" tIns="0" rIns="0" bIns="0" anchor="ctr">
+          <a:bodyPr wrap="square" lIns="0" rIns="0" tIns="0" bIns="0" anchor="ctr">
             <a:noAutofit/>
           </a:bodyPr>
           <a:lstStyle/>
@@ -14148,7 +14484,7 @@
       </p:sp>
       <p:sp>
         <p:nvSpPr>
-          <p:cNvPr id="23" name="TextBox 22"/>
+          <p:cNvPr id="22" name="TextBox 21"/>
           <p:cNvSpPr txBox="1"/>
           <p:nvPr/>
         </p:nvSpPr>
@@ -14163,7 +14499,7 @@
           <a:noFill/>
         </p:spPr>
         <p:txBody>
-          <a:bodyPr wrap="square" lIns="0" tIns="0" rIns="0" bIns="0" anchor="t">
+          <a:bodyPr wrap="square" lIns="0" rIns="0" tIns="0" bIns="0" anchor="t">
             <a:noAutofit/>
           </a:bodyPr>
           <a:lstStyle/>
@@ -14521,7 +14857,7 @@
 </file>
 
 <file path=ppt/theme/theme2.xml><?xml version="1.0" encoding="utf-8"?>
-<a:theme xmlns:a="http://schemas.openxmlformats.org/drawingml/2006/main" name="Office 主题​​">
+<a:theme xmlns:a="http://schemas.openxmlformats.org/drawingml/2006/main" name="Office Theme">
   <a:themeElements>
     <a:clrScheme name="Office">
       <a:dk1>
@@ -14531,44 +14867,44 @@
         <a:sysClr val="window" lastClr="FFFFFF"/>
       </a:lt1>
       <a:dk2>
-        <a:srgbClr val="0E2841"/>
+        <a:srgbClr val="1F497D"/>
       </a:dk2>
       <a:lt2>
-        <a:srgbClr val="E8E8E8"/>
+        <a:srgbClr val="EEECE1"/>
       </a:lt2>
       <a:accent1>
-        <a:srgbClr val="156082"/>
+        <a:srgbClr val="4F81BD"/>
       </a:accent1>
       <a:accent2>
-        <a:srgbClr val="E97132"/>
+        <a:srgbClr val="C0504D"/>
       </a:accent2>
       <a:accent3>
-        <a:srgbClr val="196B24"/>
+        <a:srgbClr val="9BBB59"/>
       </a:accent3>
       <a:accent4>
-        <a:srgbClr val="0F9ED5"/>
+        <a:srgbClr val="8064A2"/>
       </a:accent4>
       <a:accent5>
-        <a:srgbClr val="A02B93"/>
+        <a:srgbClr val="4BACC6"/>
       </a:accent5>
       <a:accent6>
-        <a:srgbClr val="4EA72E"/>
+        <a:srgbClr val="F79646"/>
       </a:accent6>
       <a:hlink>
-        <a:srgbClr val="467886"/>
+        <a:srgbClr val="0000FF"/>
       </a:hlink>
       <a:folHlink>
-        <a:srgbClr val="96607D"/>
+        <a:srgbClr val="800080"/>
       </a:folHlink>
     </a:clrScheme>
     <a:fontScheme name="Office">
       <a:majorFont>
-        <a:latin typeface="等线 Light" panose="02110004020202020204"/>
+        <a:latin typeface="Calibri"/>
         <a:ea typeface=""/>
         <a:cs typeface=""/>
-        <a:font script="Jpan" typeface="游ゴシック Light"/>
+        <a:font script="Jpan" typeface="ＭＳ Ｐゴシック"/>
         <a:font script="Hang" typeface="맑은 고딕"/>
-        <a:font script="Hans" typeface="等线 Light"/>
+        <a:font script="Hans" typeface="宋体"/>
         <a:font script="Hant" typeface="新細明體"/>
         <a:font script="Arab" typeface="Times New Roman"/>
         <a:font script="Hebr" typeface="Times New Roman"/>
@@ -14596,31 +14932,14 @@
         <a:font script="Viet" typeface="Times New Roman"/>
         <a:font script="Uigh" typeface="Microsoft Uighur"/>
         <a:font script="Geor" typeface="Sylfaen"/>
-        <a:font script="Armn" typeface="Arial"/>
-        <a:font script="Bugi" typeface="Leelawadee UI"/>
-        <a:font script="Bopo" typeface="Microsoft JhengHei"/>
-        <a:font script="Java" typeface="Javanese Text"/>
-        <a:font script="Lisu" typeface="Segoe UI"/>
-        <a:font script="Mymr" typeface="Myanmar Text"/>
-        <a:font script="Nkoo" typeface="Ebrima"/>
-        <a:font script="Olck" typeface="Nirmala UI"/>
-        <a:font script="Osma" typeface="Ebrima"/>
-        <a:font script="Phag" typeface="Phagspa"/>
-        <a:font script="Syrn" typeface="Estrangelo Edessa"/>
-        <a:font script="Syrj" typeface="Estrangelo Edessa"/>
-        <a:font script="Syre" typeface="Estrangelo Edessa"/>
-        <a:font script="Sora" typeface="Nirmala UI"/>
-        <a:font script="Tale" typeface="Microsoft Tai Le"/>
-        <a:font script="Talu" typeface="Microsoft New Tai Lue"/>
-        <a:font script="Tfng" typeface="Ebrima"/>
       </a:majorFont>
       <a:minorFont>
-        <a:latin typeface="等线" panose="02110004020202020204"/>
+        <a:latin typeface="Calibri"/>
         <a:ea typeface=""/>
         <a:cs typeface=""/>
-        <a:font script="Jpan" typeface="游ゴシック"/>
+        <a:font script="Jpan" typeface="ＭＳ Ｐゴシック"/>
         <a:font script="Hang" typeface="맑은 고딕"/>
-        <a:font script="Hans" typeface="等线"/>
+        <a:font script="Hans" typeface="宋体"/>
         <a:font script="Hant" typeface="新細明體"/>
         <a:font script="Arab" typeface="Arial"/>
         <a:font script="Hebr" typeface="Arial"/>
@@ -14648,23 +14967,6 @@
         <a:font script="Viet" typeface="Arial"/>
         <a:font script="Uigh" typeface="Microsoft Uighur"/>
         <a:font script="Geor" typeface="Sylfaen"/>
-        <a:font script="Armn" typeface="Arial"/>
-        <a:font script="Bugi" typeface="Leelawadee UI"/>
-        <a:font script="Bopo" typeface="Microsoft JhengHei"/>
-        <a:font script="Java" typeface="Javanese Text"/>
-        <a:font script="Lisu" typeface="Segoe UI"/>
-        <a:font script="Mymr" typeface="Myanmar Text"/>
-        <a:font script="Nkoo" typeface="Ebrima"/>
-        <a:font script="Olck" typeface="Nirmala UI"/>
-        <a:font script="Osma" typeface="Ebrima"/>
-        <a:font script="Phag" typeface="Phagspa"/>
-        <a:font script="Syrn" typeface="Estrangelo Edessa"/>
-        <a:font script="Syrj" typeface="Estrangelo Edessa"/>
-        <a:font script="Syre" typeface="Estrangelo Edessa"/>
-        <a:font script="Sora" typeface="Nirmala UI"/>
-        <a:font script="Tale" typeface="Microsoft Tai Le"/>
-        <a:font script="Talu" typeface="Microsoft New Tai Lue"/>
-        <a:font script="Tfng" typeface="Ebrima"/>
       </a:minorFont>
     </a:fontScheme>
     <a:fmtScheme name="Office">
@@ -14676,136 +14978,180 @@
           <a:gsLst>
             <a:gs pos="0">
               <a:schemeClr val="phClr">
-                <a:lumMod val="110000"/>
-                <a:satMod val="105000"/>
-                <a:tint val="67000"/>
+                <a:tint val="50000"/>
+                <a:satMod val="300000"/>
               </a:schemeClr>
             </a:gs>
-            <a:gs pos="50000">
+            <a:gs pos="35000">
               <a:schemeClr val="phClr">
-                <a:lumMod val="105000"/>
-                <a:satMod val="103000"/>
-                <a:tint val="73000"/>
+                <a:tint val="37000"/>
+                <a:satMod val="300000"/>
               </a:schemeClr>
             </a:gs>
             <a:gs pos="100000">
               <a:schemeClr val="phClr">
-                <a:lumMod val="105000"/>
-                <a:satMod val="109000"/>
-                <a:tint val="81000"/>
+                <a:tint val="15000"/>
+                <a:satMod val="350000"/>
               </a:schemeClr>
             </a:gs>
           </a:gsLst>
-          <a:lin ang="5400000" scaled="0"/>
+          <a:lin ang="16200000" scaled="1"/>
         </a:gradFill>
         <a:gradFill rotWithShape="1">
           <a:gsLst>
             <a:gs pos="0">
               <a:schemeClr val="phClr">
-                <a:satMod val="103000"/>
-                <a:lumMod val="102000"/>
-                <a:tint val="94000"/>
-              </a:schemeClr>
-            </a:gs>
-            <a:gs pos="50000">
-              <a:schemeClr val="phClr">
-                <a:satMod val="110000"/>
-                <a:lumMod val="100000"/>
+                <a:tint val="100000"/>
                 <a:shade val="100000"/>
+                <a:satMod val="130000"/>
               </a:schemeClr>
             </a:gs>
             <a:gs pos="100000">
               <a:schemeClr val="phClr">
-                <a:lumMod val="99000"/>
-                <a:satMod val="120000"/>
-                <a:shade val="78000"/>
+                <a:tint val="50000"/>
+                <a:shade val="100000"/>
+                <a:satMod val="350000"/>
               </a:schemeClr>
             </a:gs>
           </a:gsLst>
-          <a:lin ang="5400000" scaled="0"/>
+          <a:lin ang="16200000" scaled="0"/>
         </a:gradFill>
       </a:fillStyleLst>
       <a:lnStyleLst>
-        <a:ln w="12700" cap="flat" cmpd="sng" algn="ctr">
+        <a:ln w="9525" cap="flat" cmpd="sng" algn="ctr">
           <a:solidFill>
-            <a:schemeClr val="phClr"/>
+            <a:schemeClr val="phClr">
+              <a:shade val="95000"/>
+              <a:satMod val="105000"/>
+            </a:schemeClr>
           </a:solidFill>
           <a:prstDash val="solid"/>
-          <a:miter lim="800000"/>
-        </a:ln>
-        <a:ln w="19050" cap="flat" cmpd="sng" algn="ctr">
-          <a:solidFill>
-            <a:schemeClr val="phClr"/>
-          </a:solidFill>
-          <a:prstDash val="solid"/>
-          <a:miter lim="800000"/>
         </a:ln>
         <a:ln w="25400" cap="flat" cmpd="sng" algn="ctr">
           <a:solidFill>
             <a:schemeClr val="phClr"/>
           </a:solidFill>
           <a:prstDash val="solid"/>
-          <a:miter lim="800000"/>
+        </a:ln>
+        <a:ln w="38100" cap="flat" cmpd="sng" algn="ctr">
+          <a:solidFill>
+            <a:schemeClr val="phClr"/>
+          </a:solidFill>
+          <a:prstDash val="solid"/>
         </a:ln>
       </a:lnStyleLst>
       <a:effectStyleLst>
         <a:effectStyle>
-          <a:effectLst/>
-        </a:effectStyle>
-        <a:effectStyle>
-          <a:effectLst/>
+          <a:effectLst>
+            <a:outerShdw blurRad="40000" dist="20000" dir="5400000" rotWithShape="0">
+              <a:srgbClr val="000000">
+                <a:alpha val="38000"/>
+              </a:srgbClr>
+            </a:outerShdw>
+          </a:effectLst>
         </a:effectStyle>
         <a:effectStyle>
           <a:effectLst>
-            <a:outerShdw blurRad="57150" dist="19050" dir="5400000" algn="ctr" rotWithShape="0">
+            <a:outerShdw blurRad="40000" dist="23000" dir="5400000" rotWithShape="0">
               <a:srgbClr val="000000">
-                <a:alpha val="63000"/>
+                <a:alpha val="35000"/>
               </a:srgbClr>
             </a:outerShdw>
           </a:effectLst>
+        </a:effectStyle>
+        <a:effectStyle>
+          <a:effectLst>
+            <a:outerShdw blurRad="40000" dist="23000" dir="5400000" rotWithShape="0">
+              <a:srgbClr val="000000">
+                <a:alpha val="35000"/>
+              </a:srgbClr>
+            </a:outerShdw>
+          </a:effectLst>
+          <a:scene3d>
+            <a:camera prst="orthographicFront">
+              <a:rot lat="0" lon="0" rev="0"/>
+            </a:camera>
+            <a:lightRig rig="threePt" dir="t">
+              <a:rot lat="0" lon="0" rev="1200000"/>
+            </a:lightRig>
+          </a:scene3d>
+          <a:sp3d>
+            <a:bevelT w="63500" h="25400"/>
+          </a:sp3d>
         </a:effectStyle>
       </a:effectStyleLst>
       <a:bgFillStyleLst>
         <a:solidFill>
           <a:schemeClr val="phClr"/>
         </a:solidFill>
-        <a:solidFill>
-          <a:schemeClr val="phClr">
-            <a:tint val="95000"/>
-            <a:satMod val="170000"/>
-          </a:schemeClr>
-        </a:solidFill>
         <a:gradFill rotWithShape="1">
           <a:gsLst>
             <a:gs pos="0">
               <a:schemeClr val="phClr">
-                <a:tint val="93000"/>
-                <a:satMod val="150000"/>
-                <a:shade val="98000"/>
-                <a:lumMod val="102000"/>
+                <a:tint val="40000"/>
+                <a:satMod val="350000"/>
               </a:schemeClr>
             </a:gs>
-            <a:gs pos="50000">
+            <a:gs pos="40000">
               <a:schemeClr val="phClr">
-                <a:tint val="98000"/>
-                <a:satMod val="130000"/>
-                <a:shade val="90000"/>
-                <a:lumMod val="103000"/>
+                <a:tint val="45000"/>
+                <a:shade val="99000"/>
+                <a:satMod val="350000"/>
               </a:schemeClr>
             </a:gs>
             <a:gs pos="100000">
               <a:schemeClr val="phClr">
-                <a:shade val="63000"/>
-                <a:satMod val="120000"/>
+                <a:shade val="20000"/>
+                <a:satMod val="255000"/>
               </a:schemeClr>
             </a:gs>
           </a:gsLst>
-          <a:lin ang="5400000" scaled="0"/>
+          <a:path path="circle">
+            <a:fillToRect l="50000" t="-80000" r="50000" b="180000"/>
+          </a:path>
+        </a:gradFill>
+        <a:gradFill rotWithShape="1">
+          <a:gsLst>
+            <a:gs pos="0">
+              <a:schemeClr val="phClr">
+                <a:tint val="80000"/>
+                <a:satMod val="300000"/>
+              </a:schemeClr>
+            </a:gs>
+            <a:gs pos="100000">
+              <a:schemeClr val="phClr">
+                <a:shade val="30000"/>
+                <a:satMod val="200000"/>
+              </a:schemeClr>
+            </a:gs>
+          </a:gsLst>
+          <a:path path="circle">
+            <a:fillToRect l="50000" t="50000" r="50000" b="50000"/>
+          </a:path>
         </a:gradFill>
       </a:bgFillStyleLst>
     </a:fmtScheme>
   </a:themeElements>
   <a:objectDefaults>
+    <a:spDef>
+      <a:spPr/>
+      <a:bodyPr/>
+      <a:lstStyle/>
+      <a:style>
+        <a:lnRef idx="1">
+          <a:schemeClr val="accent1"/>
+        </a:lnRef>
+        <a:fillRef idx="3">
+          <a:schemeClr val="accent1"/>
+        </a:fillRef>
+        <a:effectRef idx="2">
+          <a:schemeClr val="accent1"/>
+        </a:effectRef>
+        <a:fontRef idx="minor">
+          <a:schemeClr val="lt1"/>
+        </a:fontRef>
+      </a:style>
+    </a:spDef>
     <a:lnDef>
       <a:spPr/>
       <a:bodyPr/>
@@ -14827,10 +15173,5 @@
     </a:lnDef>
   </a:objectDefaults>
   <a:extraClrSchemeLst/>
-  <a:extLst>
-    <a:ext uri="{05A4C25C-085E-4340-85A3-A5531E510DB2}">
-      <thm15:themeFamily xmlns:thm15="http://schemas.microsoft.com/office/thememl/2012/main" name="Office Theme" id="{2E142A2C-CD16-42D6-873A-C26D2A0506FA}" vid="{1BDDFF52-6CD6-40A5-AB3C-68EB2F1E4D0A}"/>
-    </a:ext>
-  </a:extLst>
 </a:theme>
 </file>
--- a/汇报PPT/1.pptx
+++ b/汇报PPT/1.pptx
@@ -4022,7 +4022,7 @@
         <p:spPr>
           <a:xfrm>
             <a:off x="640080" y="1170432"/>
-            <a:ext cx="50292" cy="3063240"/>
+            <a:ext cx="50292" cy="3310128"/>
           </a:xfrm>
           <a:prstGeom prst="rect">
             <a:avLst/>
@@ -4212,8 +4212,8 @@
         </p:nvSpPr>
         <p:spPr>
           <a:xfrm>
-            <a:off x="868680" y="4005072"/>
-            <a:ext cx="6766560" cy="292608"/>
+            <a:off x="868680" y="3931920"/>
+            <a:ext cx="6766560" cy="310896"/>
           </a:xfrm>
           <a:prstGeom prst="rect">
             <a:avLst/>
@@ -4238,7 +4238,53 @@
               </a:spcAft>
             </a:pPr>
             <a:r>
-              <a:rPr sz="1200" b="0" i="0">
+              <a:rPr sz="1450" b="1" i="0">
+                <a:solidFill>
+                  <a:srgbClr val="172E36"/>
+                </a:solidFill>
+                <a:latin typeface="Segoe UI"/>
+                <a:ea typeface="Microsoft YaHei"/>
+              </a:rPr>
+              <a:t>孙煜凡　韦中天</a:t>
+            </a:r>
+          </a:p>
+        </p:txBody>
+      </p:sp>
+      <p:sp>
+        <p:nvSpPr>
+          <p:cNvPr id="7" name="TextBox 6"/>
+          <p:cNvSpPr txBox="1"/>
+          <p:nvPr/>
+        </p:nvSpPr>
+        <p:spPr>
+          <a:xfrm>
+            <a:off x="868680" y="4279392"/>
+            <a:ext cx="6766560" cy="256032"/>
+          </a:xfrm>
+          <a:prstGeom prst="rect">
+            <a:avLst/>
+          </a:prstGeom>
+          <a:noFill/>
+        </p:spPr>
+        <p:txBody>
+          <a:bodyPr wrap="square" lIns="0" rIns="0" tIns="0" bIns="0" anchor="t">
+            <a:noAutofit/>
+          </a:bodyPr>
+          <a:lstStyle/>
+          <a:p>
+            <a:pPr algn="l">
+              <a:lnSpc>
+                <a:spcPct val="115000"/>
+              </a:lnSpc>
+              <a:spcBef>
+                <a:spcPts val="0"/>
+              </a:spcBef>
+              <a:spcAft>
+                <a:spcPts val="0"/>
+              </a:spcAft>
+            </a:pPr>
+            <a:r>
+              <a:rPr sz="1100" b="0" i="0">
                 <a:solidFill>
                   <a:srgbClr val="53676D"/>
                 </a:solidFill>
@@ -4252,7 +4298,7 @@
       </p:sp>
       <p:sp>
         <p:nvSpPr>
-          <p:cNvPr id="7" name="Rounded Rectangle 6"/>
+          <p:cNvPr id="8" name="Rounded Rectangle 7"/>
           <p:cNvSpPr/>
           <p:nvPr/>
         </p:nvSpPr>
@@ -4284,7 +4330,7 @@
       </p:sp>
       <p:sp>
         <p:nvSpPr>
-          <p:cNvPr id="8" name="Rectangle 7"/>
+          <p:cNvPr id="9" name="Rectangle 8"/>
           <p:cNvSpPr/>
           <p:nvPr/>
         </p:nvSpPr>
@@ -4314,7 +4360,7 @@
       </p:sp>
       <p:sp>
         <p:nvSpPr>
-          <p:cNvPr id="9" name="Up Arrow 8"/>
+          <p:cNvPr id="10" name="Up Arrow 9"/>
           <p:cNvSpPr/>
           <p:nvPr/>
         </p:nvSpPr>
@@ -4344,7 +4390,7 @@
       </p:sp>
       <p:sp>
         <p:nvSpPr>
-          <p:cNvPr id="10" name="TextBox 9"/>
+          <p:cNvPr id="11" name="TextBox 10"/>
           <p:cNvSpPr txBox="1"/>
           <p:nvPr/>
         </p:nvSpPr>
@@ -4390,7 +4436,7 @@
       </p:sp>
       <p:sp>
         <p:nvSpPr>
-          <p:cNvPr id="11" name="Down Arrow 10"/>
+          <p:cNvPr id="12" name="Down Arrow 11"/>
           <p:cNvSpPr/>
           <p:nvPr/>
         </p:nvSpPr>
@@ -4420,7 +4466,7 @@
       </p:sp>
       <p:sp>
         <p:nvSpPr>
-          <p:cNvPr id="12" name="TextBox 11"/>
+          <p:cNvPr id="13" name="TextBox 12"/>
           <p:cNvSpPr txBox="1"/>
           <p:nvPr/>
         </p:nvSpPr>
@@ -4476,7 +4522,7 @@
       </p:sp>
       <p:sp>
         <p:nvSpPr>
-          <p:cNvPr id="13" name="TextBox 12"/>
+          <p:cNvPr id="14" name="TextBox 13"/>
           <p:cNvSpPr txBox="1"/>
           <p:nvPr/>
         </p:nvSpPr>
@@ -4522,7 +4568,7 @@
       </p:sp>
       <p:sp>
         <p:nvSpPr>
-          <p:cNvPr id="14" name="Rounded Rectangle 13"/>
+          <p:cNvPr id="15" name="Rounded Rectangle 14"/>
           <p:cNvSpPr/>
           <p:nvPr/>
         </p:nvSpPr>
@@ -4556,7 +4602,7 @@
       </p:sp>
       <p:sp>
         <p:nvSpPr>
-          <p:cNvPr id="15" name="TextBox 14"/>
+          <p:cNvPr id="16" name="TextBox 15"/>
           <p:cNvSpPr txBox="1"/>
           <p:nvPr/>
         </p:nvSpPr>
@@ -4622,7 +4668,7 @@
       </p:sp>
       <p:sp>
         <p:nvSpPr>
-          <p:cNvPr id="16" name="Rounded Rectangle 15"/>
+          <p:cNvPr id="17" name="Rounded Rectangle 16"/>
           <p:cNvSpPr/>
           <p:nvPr/>
         </p:nvSpPr>
@@ -4656,7 +4702,7 @@
       </p:sp>
       <p:sp>
         <p:nvSpPr>
-          <p:cNvPr id="17" name="TextBox 16"/>
+          <p:cNvPr id="18" name="TextBox 17"/>
           <p:cNvSpPr txBox="1"/>
           <p:nvPr/>
         </p:nvSpPr>
@@ -4722,7 +4768,7 @@
       </p:sp>
       <p:sp>
         <p:nvSpPr>
-          <p:cNvPr id="18" name="Rounded Rectangle 17"/>
+          <p:cNvPr id="19" name="Rounded Rectangle 18"/>
           <p:cNvSpPr/>
           <p:nvPr/>
         </p:nvSpPr>
@@ -4756,7 +4802,7 @@
       </p:sp>
       <p:sp>
         <p:nvSpPr>
-          <p:cNvPr id="19" name="TextBox 18"/>
+          <p:cNvPr id="20" name="TextBox 19"/>
           <p:cNvSpPr txBox="1"/>
           <p:nvPr/>
         </p:nvSpPr>
@@ -4822,7 +4868,7 @@
       </p:sp>
       <p:sp>
         <p:nvSpPr>
-          <p:cNvPr id="20" name="TextBox 19"/>
+          <p:cNvPr id="21" name="TextBox 20"/>
           <p:cNvSpPr txBox="1"/>
           <p:nvPr/>
         </p:nvSpPr>

--- a/汇报PPT/1.pptx
+++ b/汇报PPT/1.pptx
@@ -4,17 +4,20 @@
   <p:sldMasterIdLst>
     <p:sldMasterId id="2147483648" r:id="rId1"/>
   </p:sldMasterIdLst>
+  <p:notesMasterIdLst>
+    <p:notesMasterId r:id="rId10"/>
+  </p:notesMasterIdLst>
   <p:sldIdLst>
-    <p:sldId id="256" r:id="rId7"/>
-    <p:sldId id="257" r:id="rId9"/>
-    <p:sldId id="258" r:id="rId10"/>
-    <p:sldId id="259" r:id="rId11"/>
-    <p:sldId id="260" r:id="rId12"/>
-    <p:sldId id="261" r:id="rId13"/>
-    <p:sldId id="262" r:id="rId14"/>
-    <p:sldId id="263" r:id="rId15"/>
+    <p:sldId id="256" r:id="rId2"/>
+    <p:sldId id="257" r:id="rId3"/>
+    <p:sldId id="258" r:id="rId4"/>
+    <p:sldId id="259" r:id="rId5"/>
+    <p:sldId id="260" r:id="rId6"/>
+    <p:sldId id="261" r:id="rId7"/>
+    <p:sldId id="262" r:id="rId8"/>
+    <p:sldId id="263" r:id="rId9"/>
   </p:sldIdLst>
-  <p:sldSz cx="12191695" cy="6858000" type="screen4x3"/>
+  <p:sldSz cx="12192000" cy="6858000"/>
   <p:notesSz cx="6858000" cy="9144000"/>
   <p:defaultTextStyle>
     <a:defPPr>
@@ -111,11 +114,27 @@
       </a:defRPr>
     </a:lvl9pPr>
   </p:defaultTextStyle>
+  <p:extLst>
+    <p:ext uri="{EFAFB233-063F-42B5-8137-9DF3F51BA10A}">
+      <p15:sldGuideLst xmlns:p15="http://schemas.microsoft.com/office/powerpoint/2012/main">
+        <p15:guide id="1" orient="horz" pos="2160">
+          <p15:clr>
+            <a:srgbClr val="A4A3A4"/>
+          </p15:clr>
+        </p15:guide>
+        <p15:guide id="2" pos="2880">
+          <p15:clr>
+            <a:srgbClr val="A4A3A4"/>
+          </p15:clr>
+        </p15:guide>
+      </p15:sldGuideLst>
+    </p:ext>
+  </p:extLst>
 </p:presentation>
 </file>
 
 <file path=ppt/notesMasters/notesMaster1.xml><?xml version="1.0" encoding="utf-8"?>
-<p:notesMaster xmlns:a="http://schemas.openxmlformats.org/drawingml/2006/main" xmlns:p="http://schemas.openxmlformats.org/presentationml/2006/main" xmlns:r="http://schemas.openxmlformats.org/officeDocument/2006/relationships">
+<p:notesMaster xmlns:a="http://schemas.openxmlformats.org/drawingml/2006/main" xmlns:r="http://schemas.openxmlformats.org/officeDocument/2006/relationships" xmlns:p="http://schemas.openxmlformats.org/presentationml/2006/main">
   <p:cSld>
     <p:bg>
       <p:bgRef idx="1001">
@@ -136,241 +155,16 @@
           <a:chExt cx="0" cy="0"/>
         </a:xfrm>
       </p:grpSpPr>
-      <p:sp>
-        <p:nvSpPr>
-          <p:cNvPr id="2" name="Header Placeholder 1"/>
-          <p:cNvSpPr>
-            <a:spLocks noGrp="1"/>
-          </p:cNvSpPr>
-          <p:nvPr>
-            <p:ph type="hdr" sz="quarter"/>
-          </p:nvPr>
-        </p:nvSpPr>
-        <p:spPr>
-          <a:xfrm>
-            <a:off x="0" y="0"/>
-            <a:ext cx="2971800" cy="457200"/>
-          </a:xfrm>
-          <a:prstGeom prst="rect">
-            <a:avLst/>
-          </a:prstGeom>
-        </p:spPr>
-        <p:txBody>
-          <a:bodyPr vert="horz" lIns="91440" tIns="45720" rIns="91440" bIns="45720" rtlCol="0"/>
-          <a:lstStyle>
-            <a:lvl1pPr algn="l">
-              <a:defRPr sz="1200"/>
-            </a:lvl1pPr>
-          </a:lstStyle>
-          <a:p>
-            <a:endParaRPr lang="en-US"/>
-          </a:p>
-        </p:txBody>
-      </p:sp>
-      <p:sp>
-        <p:nvSpPr>
-          <p:cNvPr id="3" name="Date Placeholder 2"/>
-          <p:cNvSpPr>
-            <a:spLocks noGrp="1"/>
-          </p:cNvSpPr>
-          <p:nvPr>
-            <p:ph type="dt" idx="1"/>
-          </p:nvPr>
-        </p:nvSpPr>
-        <p:spPr>
-          <a:xfrm>
-            <a:off x="3884613" y="0"/>
-            <a:ext cx="2971800" cy="457200"/>
-          </a:xfrm>
-          <a:prstGeom prst="rect">
-            <a:avLst/>
-          </a:prstGeom>
-        </p:spPr>
-        <p:txBody>
-          <a:bodyPr vert="horz" lIns="91440" tIns="45720" rIns="91440" bIns="45720" rtlCol="0"/>
-          <a:lstStyle>
-            <a:lvl1pPr algn="r">
-              <a:defRPr sz="1200"/>
-            </a:lvl1pPr>
-          </a:lstStyle>
-          <a:p>
-            <a:fld id="{0F89C1C7-3DCD-1040-A9CF-14679D8B5DDD}" type="datetimeFigureOut">
-              <a:rPr lang="en-US" smtClean="0"/>
-              <a:t>10/17/16</a:t>
-            </a:fld>
-            <a:endParaRPr lang="en-US"/>
-          </a:p>
-        </p:txBody>
-      </p:sp>
-      <p:sp>
-        <p:nvSpPr>
-          <p:cNvPr id="4" name="Slide Image Placeholder 3"/>
-          <p:cNvSpPr>
-            <a:spLocks noGrp="1" noRot="1" noChangeAspect="1"/>
-          </p:cNvSpPr>
-          <p:nvPr>
-            <p:ph type="sldImg" idx="2"/>
-          </p:nvPr>
-        </p:nvSpPr>
-        <p:spPr>
-          <a:xfrm>
-            <a:off x="1143000" y="685800"/>
-            <a:ext cx="4572000" cy="3429000"/>
-          </a:xfrm>
-          <a:prstGeom prst="rect">
-            <a:avLst/>
-          </a:prstGeom>
-          <a:noFill/>
-          <a:ln w="12700">
-            <a:solidFill>
-              <a:prstClr val="black"/>
-            </a:solidFill>
-          </a:ln>
-        </p:spPr>
-        <p:txBody>
-          <a:bodyPr vert="horz" lIns="91440" tIns="45720" rIns="91440" bIns="45720" rtlCol="0" anchor="ctr"/>
-          <a:lstStyle/>
-          <a:p>
-            <a:endParaRPr lang="en-US"/>
-          </a:p>
-        </p:txBody>
-      </p:sp>
-      <p:sp>
-        <p:nvSpPr>
-          <p:cNvPr id="5" name="Notes Placeholder 4"/>
-          <p:cNvSpPr>
-            <a:spLocks noGrp="1"/>
-          </p:cNvSpPr>
-          <p:nvPr>
-            <p:ph type="body" sz="quarter" idx="3"/>
-          </p:nvPr>
-        </p:nvSpPr>
-        <p:spPr>
-          <a:xfrm>
-            <a:off x="685800" y="4343400"/>
-            <a:ext cx="5486400" cy="4114800"/>
-          </a:xfrm>
-          <a:prstGeom prst="rect">
-            <a:avLst/>
-          </a:prstGeom>
-        </p:spPr>
-        <p:txBody>
-          <a:bodyPr vert="horz" lIns="91440" tIns="45720" rIns="91440" bIns="45720" rtlCol="0"/>
-          <a:lstStyle/>
-          <a:p>
-            <a:pPr lvl="0"/>
-            <a:r>
-              <a:rPr lang="en-US" smtClean="0"/>
-              <a:t>Click to edit Master text styles</a:t>
-            </a:r>
-          </a:p>
-          <a:p>
-            <a:pPr lvl="1"/>
-            <a:r>
-              <a:rPr lang="en-US" smtClean="0"/>
-              <a:t>Second level</a:t>
-            </a:r>
-          </a:p>
-          <a:p>
-            <a:pPr lvl="2"/>
-            <a:r>
-              <a:rPr lang="en-US" smtClean="0"/>
-              <a:t>Third level</a:t>
-            </a:r>
-          </a:p>
-          <a:p>
-            <a:pPr lvl="3"/>
-            <a:r>
-              <a:rPr lang="en-US" smtClean="0"/>
-              <a:t>Fourth level</a:t>
-            </a:r>
-          </a:p>
-          <a:p>
-            <a:pPr lvl="4"/>
-            <a:r>
-              <a:rPr lang="en-US" smtClean="0"/>
-              <a:t>Fifth level</a:t>
-            </a:r>
-            <a:endParaRPr lang="en-US"/>
-          </a:p>
-        </p:txBody>
-      </p:sp>
-      <p:sp>
-        <p:nvSpPr>
-          <p:cNvPr id="6" name="Footer Placeholder 5"/>
-          <p:cNvSpPr>
-            <a:spLocks noGrp="1"/>
-          </p:cNvSpPr>
-          <p:nvPr>
-            <p:ph type="ftr" sz="quarter" idx="4"/>
-          </p:nvPr>
-        </p:nvSpPr>
-        <p:spPr>
-          <a:xfrm>
-            <a:off x="0" y="8685213"/>
-            <a:ext cx="2971800" cy="457200"/>
-          </a:xfrm>
-          <a:prstGeom prst="rect">
-            <a:avLst/>
-          </a:prstGeom>
-        </p:spPr>
-        <p:txBody>
-          <a:bodyPr vert="horz" lIns="91440" tIns="45720" rIns="91440" bIns="45720" rtlCol="0" anchor="b"/>
-          <a:lstStyle>
-            <a:lvl1pPr algn="l">
-              <a:defRPr sz="1200"/>
-            </a:lvl1pPr>
-          </a:lstStyle>
-          <a:p>
-            <a:endParaRPr lang="en-US"/>
-          </a:p>
-        </p:txBody>
-      </p:sp>
-      <p:sp>
-        <p:nvSpPr>
-          <p:cNvPr id="7" name="Slide Number Placeholder 6"/>
-          <p:cNvSpPr>
-            <a:spLocks noGrp="1"/>
-          </p:cNvSpPr>
-          <p:nvPr>
-            <p:ph type="sldNum" sz="quarter" idx="5"/>
-          </p:nvPr>
-        </p:nvSpPr>
-        <p:spPr>
-          <a:xfrm>
-            <a:off x="3884613" y="8685213"/>
-            <a:ext cx="2971800" cy="457200"/>
-          </a:xfrm>
-          <a:prstGeom prst="rect">
-            <a:avLst/>
-          </a:prstGeom>
-        </p:spPr>
-        <p:txBody>
-          <a:bodyPr vert="horz" lIns="91440" tIns="45720" rIns="91440" bIns="45720" rtlCol="0" anchor="b"/>
-          <a:lstStyle>
-            <a:lvl1pPr algn="r">
-              <a:defRPr sz="1200"/>
-            </a:lvl1pPr>
-          </a:lstStyle>
-          <a:p>
-            <a:fld id="{BB5E49A5-4136-284D-997B-48E1D791AD67}" type="slidenum">
-              <a:rPr lang="en-US" smtClean="0"/>
-              <a:t>‹#›</a:t>
-            </a:fld>
-            <a:endParaRPr lang="en-US"/>
-          </a:p>
-        </p:txBody>
-      </p:sp>
     </p:spTree>
     <p:extLst>
       <p:ext uri="{BB962C8B-B14F-4D97-AF65-F5344CB8AC3E}">
-        <p14:creationId xmlns:p14="http://schemas.microsoft.com/office/powerpoint/2010/main" val="2623252185"/>
+        <p14:creationId xmlns:p14="http://schemas.microsoft.com/office/powerpoint/2010/main" val="497571689"/>
       </p:ext>
     </p:extLst>
   </p:cSld>
   <p:clrMap bg1="lt1" tx1="dk1" bg2="lt2" tx2="dk2" accent1="accent1" accent2="accent2" accent3="accent3" accent4="accent4" accent5="accent5" accent6="accent6" hlink="hlink" folHlink="folHlink"/>
   <p:notesStyle>
-    <a:lvl1pPr marL="0" algn="l" defTabSz="457200" rtl="0" eaLnBrk="1" latinLnBrk="0" hangingPunct="1">
+    <a:lvl1pPr marL="0" algn="l" defTabSz="914400" rtl="0" eaLnBrk="1" latinLnBrk="0" hangingPunct="1">
       <a:defRPr sz="1200" kern="1200">
         <a:solidFill>
           <a:schemeClr val="tx1"/>
@@ -380,7 +174,7 @@
         <a:cs typeface="+mn-cs"/>
       </a:defRPr>
     </a:lvl1pPr>
-    <a:lvl2pPr marL="457200" algn="l" defTabSz="457200" rtl="0" eaLnBrk="1" latinLnBrk="0" hangingPunct="1">
+    <a:lvl2pPr marL="457200" algn="l" defTabSz="914400" rtl="0" eaLnBrk="1" latinLnBrk="0" hangingPunct="1">
       <a:defRPr sz="1200" kern="1200">
         <a:solidFill>
           <a:schemeClr val="tx1"/>
@@ -390,7 +184,7 @@
         <a:cs typeface="+mn-cs"/>
       </a:defRPr>
     </a:lvl2pPr>
-    <a:lvl3pPr marL="914400" algn="l" defTabSz="457200" rtl="0" eaLnBrk="1" latinLnBrk="0" hangingPunct="1">
+    <a:lvl3pPr marL="914400" algn="l" defTabSz="914400" rtl="0" eaLnBrk="1" latinLnBrk="0" hangingPunct="1">
       <a:defRPr sz="1200" kern="1200">
         <a:solidFill>
           <a:schemeClr val="tx1"/>
@@ -400,7 +194,7 @@
         <a:cs typeface="+mn-cs"/>
       </a:defRPr>
     </a:lvl3pPr>
-    <a:lvl4pPr marL="1371600" algn="l" defTabSz="457200" rtl="0" eaLnBrk="1" latinLnBrk="0" hangingPunct="1">
+    <a:lvl4pPr marL="1371600" algn="l" defTabSz="914400" rtl="0" eaLnBrk="1" latinLnBrk="0" hangingPunct="1">
       <a:defRPr sz="1200" kern="1200">
         <a:solidFill>
           <a:schemeClr val="tx1"/>
@@ -410,7 +204,7 @@
         <a:cs typeface="+mn-cs"/>
       </a:defRPr>
     </a:lvl4pPr>
-    <a:lvl5pPr marL="1828800" algn="l" defTabSz="457200" rtl="0" eaLnBrk="1" latinLnBrk="0" hangingPunct="1">
+    <a:lvl5pPr marL="1828800" algn="l" defTabSz="914400" rtl="0" eaLnBrk="1" latinLnBrk="0" hangingPunct="1">
       <a:defRPr sz="1200" kern="1200">
         <a:solidFill>
           <a:schemeClr val="tx1"/>
@@ -420,7 +214,7 @@
         <a:cs typeface="+mn-cs"/>
       </a:defRPr>
     </a:lvl5pPr>
-    <a:lvl6pPr marL="2286000" algn="l" defTabSz="457200" rtl="0" eaLnBrk="1" latinLnBrk="0" hangingPunct="1">
+    <a:lvl6pPr marL="2286000" algn="l" defTabSz="914400" rtl="0" eaLnBrk="1" latinLnBrk="0" hangingPunct="1">
       <a:defRPr sz="1200" kern="1200">
         <a:solidFill>
           <a:schemeClr val="tx1"/>
@@ -430,7 +224,7 @@
         <a:cs typeface="+mn-cs"/>
       </a:defRPr>
     </a:lvl6pPr>
-    <a:lvl7pPr marL="2743200" algn="l" defTabSz="457200" rtl="0" eaLnBrk="1" latinLnBrk="0" hangingPunct="1">
+    <a:lvl7pPr marL="2743200" algn="l" defTabSz="914400" rtl="0" eaLnBrk="1" latinLnBrk="0" hangingPunct="1">
       <a:defRPr sz="1200" kern="1200">
         <a:solidFill>
           <a:schemeClr val="tx1"/>
@@ -440,7 +234,7 @@
         <a:cs typeface="+mn-cs"/>
       </a:defRPr>
     </a:lvl7pPr>
-    <a:lvl8pPr marL="3200400" algn="l" defTabSz="457200" rtl="0" eaLnBrk="1" latinLnBrk="0" hangingPunct="1">
+    <a:lvl8pPr marL="3200400" algn="l" defTabSz="914400" rtl="0" eaLnBrk="1" latinLnBrk="0" hangingPunct="1">
       <a:defRPr sz="1200" kern="1200">
         <a:solidFill>
           <a:schemeClr val="tx1"/>
@@ -450,7 +244,7 @@
         <a:cs typeface="+mn-cs"/>
       </a:defRPr>
     </a:lvl8pPr>
-    <a:lvl9pPr marL="3657600" algn="l" defTabSz="457200" rtl="0" eaLnBrk="1" latinLnBrk="0" hangingPunct="1">
+    <a:lvl9pPr marL="3657600" algn="l" defTabSz="914400" rtl="0" eaLnBrk="1" latinLnBrk="0" hangingPunct="1">
       <a:defRPr sz="1200" kern="1200">
         <a:solidFill>
           <a:schemeClr val="tx1"/>
@@ -465,7 +259,7 @@
 </file>
 
 <file path=ppt/notesSlides/notesSlide1.xml><?xml version="1.0" encoding="utf-8"?>
-<p:notes xmlns:a="http://schemas.openxmlformats.org/drawingml/2006/main" xmlns:p="http://schemas.openxmlformats.org/presentationml/2006/main" xmlns:r="http://schemas.openxmlformats.org/officeDocument/2006/relationships">
+<p:notes xmlns:a="http://schemas.openxmlformats.org/drawingml/2006/main" xmlns:r="http://schemas.openxmlformats.org/officeDocument/2006/relationships" xmlns:p="http://schemas.openxmlformats.org/presentationml/2006/main">
   <p:cSld>
     <p:spTree>
       <p:nvGrpSpPr>
@@ -485,7 +279,7 @@
         <p:nvSpPr>
           <p:cNvPr id="2" name="Slide Image Placeholder 1"/>
           <p:cNvSpPr>
-            <a:spLocks noGrp="1"/>
+            <a:spLocks noGrp="1" noRot="1" noChangeAspect="1"/>
           </p:cNvSpPr>
           <p:nvPr>
             <p:ph type="sldImg" idx="2"/>
@@ -500,7 +294,7 @@
             <a:spLocks noGrp="1"/>
           </p:cNvSpPr>
           <p:nvPr>
-            <p:ph type="body" idx="3" sz="quarter"/>
+            <p:ph type="body" sz="quarter" idx="3"/>
           </p:nvPr>
         </p:nvSpPr>
         <p:spPr/>
@@ -509,7 +303,7 @@
           <a:lstStyle/>
           <a:p>
             <a:r>
-              <a:t>各位老师好。我汇报这个电磁学课程项目的进展。题目是《基于微磁学模拟探讨量子反常霍尔效应的退磁场效应》。目前理论学习已经完成，模拟即将启动，今天主要讲已经做完的准备和下一步安排。</a:t>
+              <a:t>各位老师好。我们汇报这个电磁学课程项目的进展。题目是《基于微磁学模拟探讨量子反常霍尔效应的退磁场效应》。目前理论学习已经完成，模拟即将启动，今天主要讲已经做完的准备和下一步安排。</a:t>
             </a:r>
           </a:p>
         </p:txBody>
@@ -521,7 +315,7 @@
             <a:spLocks noGrp="1"/>
           </p:cNvSpPr>
           <p:nvPr>
-            <p:ph type="sldNum" idx="5" sz="quarter"/>
+            <p:ph type="sldNum" sz="quarter" idx="5"/>
           </p:nvPr>
         </p:nvSpPr>
         <p:spPr/>
@@ -535,7 +329,7 @@
 </file>
 
 <file path=ppt/notesSlides/notesSlide2.xml><?xml version="1.0" encoding="utf-8"?>
-<p:notes xmlns:a="http://schemas.openxmlformats.org/drawingml/2006/main" xmlns:p="http://schemas.openxmlformats.org/presentationml/2006/main" xmlns:r="http://schemas.openxmlformats.org/officeDocument/2006/relationships">
+<p:notes xmlns:a="http://schemas.openxmlformats.org/drawingml/2006/main" xmlns:r="http://schemas.openxmlformats.org/officeDocument/2006/relationships" xmlns:p="http://schemas.openxmlformats.org/presentationml/2006/main">
   <p:cSld>
     <p:spTree>
       <p:nvGrpSpPr>
@@ -555,7 +349,7 @@
         <p:nvSpPr>
           <p:cNvPr id="2" name="Slide Image Placeholder 1"/>
           <p:cNvSpPr>
-            <a:spLocks noGrp="1"/>
+            <a:spLocks noGrp="1" noRot="1" noChangeAspect="1"/>
           </p:cNvSpPr>
           <p:nvPr>
             <p:ph type="sldImg" idx="2"/>
@@ -570,7 +364,7 @@
             <a:spLocks noGrp="1"/>
           </p:cNvSpPr>
           <p:nvPr>
-            <p:ph type="body" idx="3" sz="quarter"/>
+            <p:ph type="body" sz="quarter" idx="3"/>
           </p:nvPr>
         </p:nvSpPr>
         <p:spPr/>
@@ -591,7 +385,7 @@
             <a:spLocks noGrp="1"/>
           </p:cNvSpPr>
           <p:nvPr>
-            <p:ph type="sldNum" idx="5" sz="quarter"/>
+            <p:ph type="sldNum" sz="quarter" idx="5"/>
           </p:nvPr>
         </p:nvSpPr>
         <p:spPr/>
@@ -605,7 +399,7 @@
 </file>
 
 <file path=ppt/notesSlides/notesSlide3.xml><?xml version="1.0" encoding="utf-8"?>
-<p:notes xmlns:a="http://schemas.openxmlformats.org/drawingml/2006/main" xmlns:p="http://schemas.openxmlformats.org/presentationml/2006/main" xmlns:r="http://schemas.openxmlformats.org/officeDocument/2006/relationships">
+<p:notes xmlns:a="http://schemas.openxmlformats.org/drawingml/2006/main" xmlns:r="http://schemas.openxmlformats.org/officeDocument/2006/relationships" xmlns:p="http://schemas.openxmlformats.org/presentationml/2006/main">
   <p:cSld>
     <p:spTree>
       <p:nvGrpSpPr>
@@ -625,7 +419,7 @@
         <p:nvSpPr>
           <p:cNvPr id="2" name="Slide Image Placeholder 1"/>
           <p:cNvSpPr>
-            <a:spLocks noGrp="1"/>
+            <a:spLocks noGrp="1" noRot="1" noChangeAspect="1"/>
           </p:cNvSpPr>
           <p:nvPr>
             <p:ph type="sldImg" idx="2"/>
@@ -640,7 +434,7 @@
             <a:spLocks noGrp="1"/>
           </p:cNvSpPr>
           <p:nvPr>
-            <p:ph type="body" idx="3" sz="quarter"/>
+            <p:ph type="body" sz="quarter" idx="3"/>
           </p:nvPr>
         </p:nvSpPr>
         <p:spPr/>
@@ -661,7 +455,7 @@
             <a:spLocks noGrp="1"/>
           </p:cNvSpPr>
           <p:nvPr>
-            <p:ph type="sldNum" idx="5" sz="quarter"/>
+            <p:ph type="sldNum" sz="quarter" idx="5"/>
           </p:nvPr>
         </p:nvSpPr>
         <p:spPr/>
@@ -675,7 +469,7 @@
 </file>
 
 <file path=ppt/notesSlides/notesSlide4.xml><?xml version="1.0" encoding="utf-8"?>
-<p:notes xmlns:a="http://schemas.openxmlformats.org/drawingml/2006/main" xmlns:p="http://schemas.openxmlformats.org/presentationml/2006/main" xmlns:r="http://schemas.openxmlformats.org/officeDocument/2006/relationships">
+<p:notes xmlns:a="http://schemas.openxmlformats.org/drawingml/2006/main" xmlns:r="http://schemas.openxmlformats.org/officeDocument/2006/relationships" xmlns:p="http://schemas.openxmlformats.org/presentationml/2006/main">
   <p:cSld>
     <p:spTree>
       <p:nvGrpSpPr>
@@ -695,7 +489,7 @@
         <p:nvSpPr>
           <p:cNvPr id="2" name="Slide Image Placeholder 1"/>
           <p:cNvSpPr>
-            <a:spLocks noGrp="1"/>
+            <a:spLocks noGrp="1" noRot="1" noChangeAspect="1"/>
           </p:cNvSpPr>
           <p:nvPr>
             <p:ph type="sldImg" idx="2"/>
@@ -710,7 +504,7 @@
             <a:spLocks noGrp="1"/>
           </p:cNvSpPr>
           <p:nvPr>
-            <p:ph type="body" idx="3" sz="quarter"/>
+            <p:ph type="body" sz="quarter" idx="3"/>
           </p:nvPr>
         </p:nvSpPr>
         <p:spPr/>
@@ -731,7 +525,7 @@
             <a:spLocks noGrp="1"/>
           </p:cNvSpPr>
           <p:nvPr>
-            <p:ph type="sldNum" idx="5" sz="quarter"/>
+            <p:ph type="sldNum" sz="quarter" idx="5"/>
           </p:nvPr>
         </p:nvSpPr>
         <p:spPr/>
@@ -745,7 +539,7 @@
 </file>
 
 <file path=ppt/notesSlides/notesSlide5.xml><?xml version="1.0" encoding="utf-8"?>
-<p:notes xmlns:a="http://schemas.openxmlformats.org/drawingml/2006/main" xmlns:p="http://schemas.openxmlformats.org/presentationml/2006/main" xmlns:r="http://schemas.openxmlformats.org/officeDocument/2006/relationships">
+<p:notes xmlns:a="http://schemas.openxmlformats.org/drawingml/2006/main" xmlns:r="http://schemas.openxmlformats.org/officeDocument/2006/relationships" xmlns:p="http://schemas.openxmlformats.org/presentationml/2006/main">
   <p:cSld>
     <p:spTree>
       <p:nvGrpSpPr>
@@ -765,7 +559,7 @@
         <p:nvSpPr>
           <p:cNvPr id="2" name="Slide Image Placeholder 1"/>
           <p:cNvSpPr>
-            <a:spLocks noGrp="1"/>
+            <a:spLocks noGrp="1" noRot="1" noChangeAspect="1"/>
           </p:cNvSpPr>
           <p:nvPr>
             <p:ph type="sldImg" idx="2"/>
@@ -780,7 +574,7 @@
             <a:spLocks noGrp="1"/>
           </p:cNvSpPr>
           <p:nvPr>
-            <p:ph type="body" idx="3" sz="quarter"/>
+            <p:ph type="body" sz="quarter" idx="3"/>
           </p:nvPr>
         </p:nvSpPr>
         <p:spPr/>
@@ -801,7 +595,7 @@
             <a:spLocks noGrp="1"/>
           </p:cNvSpPr>
           <p:nvPr>
-            <p:ph type="sldNum" idx="5" sz="quarter"/>
+            <p:ph type="sldNum" sz="quarter" idx="5"/>
           </p:nvPr>
         </p:nvSpPr>
         <p:spPr/>
@@ -815,7 +609,7 @@
 </file>
 
 <file path=ppt/notesSlides/notesSlide6.xml><?xml version="1.0" encoding="utf-8"?>
-<p:notes xmlns:a="http://schemas.openxmlformats.org/drawingml/2006/main" xmlns:p="http://schemas.openxmlformats.org/presentationml/2006/main" xmlns:r="http://schemas.openxmlformats.org/officeDocument/2006/relationships">
+<p:notes xmlns:a="http://schemas.openxmlformats.org/drawingml/2006/main" xmlns:r="http://schemas.openxmlformats.org/officeDocument/2006/relationships" xmlns:p="http://schemas.openxmlformats.org/presentationml/2006/main">
   <p:cSld>
     <p:spTree>
       <p:nvGrpSpPr>
@@ -835,7 +629,7 @@
         <p:nvSpPr>
           <p:cNvPr id="2" name="Slide Image Placeholder 1"/>
           <p:cNvSpPr>
-            <a:spLocks noGrp="1"/>
+            <a:spLocks noGrp="1" noRot="1" noChangeAspect="1"/>
           </p:cNvSpPr>
           <p:nvPr>
             <p:ph type="sldImg" idx="2"/>
@@ -850,7 +644,7 @@
             <a:spLocks noGrp="1"/>
           </p:cNvSpPr>
           <p:nvPr>
-            <p:ph type="body" idx="3" sz="quarter"/>
+            <p:ph type="body" sz="quarter" idx="3"/>
           </p:nvPr>
         </p:nvSpPr>
         <p:spPr/>
@@ -871,7 +665,7 @@
             <a:spLocks noGrp="1"/>
           </p:cNvSpPr>
           <p:nvPr>
-            <p:ph type="sldNum" idx="5" sz="quarter"/>
+            <p:ph type="sldNum" sz="quarter" idx="5"/>
           </p:nvPr>
         </p:nvSpPr>
         <p:spPr/>
@@ -885,7 +679,7 @@
 </file>
 
 <file path=ppt/notesSlides/notesSlide7.xml><?xml version="1.0" encoding="utf-8"?>
-<p:notes xmlns:a="http://schemas.openxmlformats.org/drawingml/2006/main" xmlns:p="http://schemas.openxmlformats.org/presentationml/2006/main" xmlns:r="http://schemas.openxmlformats.org/officeDocument/2006/relationships">
+<p:notes xmlns:a="http://schemas.openxmlformats.org/drawingml/2006/main" xmlns:r="http://schemas.openxmlformats.org/officeDocument/2006/relationships" xmlns:p="http://schemas.openxmlformats.org/presentationml/2006/main">
   <p:cSld>
     <p:spTree>
       <p:nvGrpSpPr>
@@ -905,7 +699,7 @@
         <p:nvSpPr>
           <p:cNvPr id="2" name="Slide Image Placeholder 1"/>
           <p:cNvSpPr>
-            <a:spLocks noGrp="1"/>
+            <a:spLocks noGrp="1" noRot="1" noChangeAspect="1"/>
           </p:cNvSpPr>
           <p:nvPr>
             <p:ph type="sldImg" idx="2"/>
@@ -920,7 +714,7 @@
             <a:spLocks noGrp="1"/>
           </p:cNvSpPr>
           <p:nvPr>
-            <p:ph type="body" idx="3" sz="quarter"/>
+            <p:ph type="body" sz="quarter" idx="3"/>
           </p:nvPr>
         </p:nvSpPr>
         <p:spPr/>
@@ -941,7 +735,7 @@
             <a:spLocks noGrp="1"/>
           </p:cNvSpPr>
           <p:nvPr>
-            <p:ph type="sldNum" idx="5" sz="quarter"/>
+            <p:ph type="sldNum" sz="quarter" idx="5"/>
           </p:nvPr>
         </p:nvSpPr>
         <p:spPr/>
@@ -955,7 +749,7 @@
 </file>
 
 <file path=ppt/notesSlides/notesSlide8.xml><?xml version="1.0" encoding="utf-8"?>
-<p:notes xmlns:a="http://schemas.openxmlformats.org/drawingml/2006/main" xmlns:p="http://schemas.openxmlformats.org/presentationml/2006/main" xmlns:r="http://schemas.openxmlformats.org/officeDocument/2006/relationships">
+<p:notes xmlns:a="http://schemas.openxmlformats.org/drawingml/2006/main" xmlns:r="http://schemas.openxmlformats.org/officeDocument/2006/relationships" xmlns:p="http://schemas.openxmlformats.org/presentationml/2006/main">
   <p:cSld>
     <p:spTree>
       <p:nvGrpSpPr>
@@ -975,7 +769,7 @@
         <p:nvSpPr>
           <p:cNvPr id="2" name="Slide Image Placeholder 1"/>
           <p:cNvSpPr>
-            <a:spLocks noGrp="1"/>
+            <a:spLocks noGrp="1" noRot="1" noChangeAspect="1"/>
           </p:cNvSpPr>
           <p:nvPr>
             <p:ph type="sldImg" idx="2"/>
@@ -990,7 +784,7 @@
             <a:spLocks noGrp="1"/>
           </p:cNvSpPr>
           <p:nvPr>
-            <p:ph type="body" idx="3" sz="quarter"/>
+            <p:ph type="body" sz="quarter" idx="3"/>
           </p:nvPr>
         </p:nvSpPr>
         <p:spPr/>
@@ -1011,7 +805,7 @@
             <a:spLocks noGrp="1"/>
           </p:cNvSpPr>
           <p:nvPr>
-            <p:ph type="sldNum" idx="5" sz="quarter"/>
+            <p:ph type="sldNum" sz="quarter" idx="5"/>
           </p:nvPr>
         </p:nvSpPr>
         <p:spPr/>
@@ -1062,10 +856,9 @@
           <a:lstStyle/>
           <a:p>
             <a:r>
-              <a:rPr lang="en-US" smtClean="0"/>
+              <a:rPr lang="en-US"/>
               <a:t>Click to edit Master title style</a:t>
             </a:r>
-            <a:endParaRPr lang="en-US"/>
           </a:p>
         </p:txBody>
       </p:sp>
@@ -1181,10 +974,9 @@
           </a:lstStyle>
           <a:p>
             <a:r>
-              <a:rPr lang="en-US" smtClean="0"/>
+              <a:rPr lang="en-US"/>
               <a:t>Click to edit Master subtitle style</a:t>
             </a:r>
-            <a:endParaRPr lang="en-US"/>
           </a:p>
         </p:txBody>
       </p:sp>
@@ -1205,7 +997,7 @@
           <a:p>
             <a:fld id="{5BCAD085-E8A6-8845-BD4E-CB4CCA059FC4}" type="datetimeFigureOut">
               <a:rPr lang="en-US" smtClean="0"/>
-              <a:t>1/27/13</a:t>
+              <a:t>10/25/2026</a:t>
             </a:fld>
             <a:endParaRPr lang="en-US"/>
           </a:p>
@@ -1299,10 +1091,9 @@
           <a:lstStyle/>
           <a:p>
             <a:r>
-              <a:rPr lang="en-US" smtClean="0"/>
+              <a:rPr lang="en-US"/>
               <a:t>Click to edit Master title style</a:t>
             </a:r>
-            <a:endParaRPr lang="en-US"/>
           </a:p>
         </p:txBody>
       </p:sp>
@@ -1323,38 +1114,37 @@
           <a:p>
             <a:pPr lvl="0"/>
             <a:r>
-              <a:rPr lang="en-US" smtClean="0"/>
+              <a:rPr lang="en-US"/>
               <a:t>Click to edit Master text styles</a:t>
             </a:r>
           </a:p>
           <a:p>
             <a:pPr lvl="1"/>
             <a:r>
-              <a:rPr lang="en-US" smtClean="0"/>
+              <a:rPr lang="en-US"/>
               <a:t>Second level</a:t>
             </a:r>
           </a:p>
           <a:p>
             <a:pPr lvl="2"/>
             <a:r>
-              <a:rPr lang="en-US" smtClean="0"/>
+              <a:rPr lang="en-US"/>
               <a:t>Third level</a:t>
             </a:r>
           </a:p>
           <a:p>
             <a:pPr lvl="3"/>
             <a:r>
-              <a:rPr lang="en-US" smtClean="0"/>
+              <a:rPr lang="en-US"/>
               <a:t>Fourth level</a:t>
             </a:r>
           </a:p>
           <a:p>
             <a:pPr lvl="4"/>
             <a:r>
-              <a:rPr lang="en-US" smtClean="0"/>
+              <a:rPr lang="en-US"/>
               <a:t>Fifth level</a:t>
             </a:r>
-            <a:endParaRPr lang="en-US"/>
           </a:p>
         </p:txBody>
       </p:sp>
@@ -1375,7 +1165,7 @@
           <a:p>
             <a:fld id="{5BCAD085-E8A6-8845-BD4E-CB4CCA059FC4}" type="datetimeFigureOut">
               <a:rPr lang="en-US" smtClean="0"/>
-              <a:t>1/27/13</a:t>
+              <a:t>10/25/2026</a:t>
             </a:fld>
             <a:endParaRPr lang="en-US"/>
           </a:p>
@@ -1474,10 +1264,9 @@
           <a:lstStyle/>
           <a:p>
             <a:r>
-              <a:rPr lang="en-US" smtClean="0"/>
+              <a:rPr lang="en-US"/>
               <a:t>Click to edit Master title style</a:t>
             </a:r>
-            <a:endParaRPr lang="en-US"/>
           </a:p>
         </p:txBody>
       </p:sp>
@@ -1503,38 +1292,37 @@
           <a:p>
             <a:pPr lvl="0"/>
             <a:r>
-              <a:rPr lang="en-US" smtClean="0"/>
+              <a:rPr lang="en-US"/>
               <a:t>Click to edit Master text styles</a:t>
             </a:r>
           </a:p>
           <a:p>
             <a:pPr lvl="1"/>
             <a:r>
-              <a:rPr lang="en-US" smtClean="0"/>
+              <a:rPr lang="en-US"/>
               <a:t>Second level</a:t>
             </a:r>
           </a:p>
           <a:p>
             <a:pPr lvl="2"/>
             <a:r>
-              <a:rPr lang="en-US" smtClean="0"/>
+              <a:rPr lang="en-US"/>
               <a:t>Third level</a:t>
             </a:r>
           </a:p>
           <a:p>
             <a:pPr lvl="3"/>
             <a:r>
-              <a:rPr lang="en-US" smtClean="0"/>
+              <a:rPr lang="en-US"/>
               <a:t>Fourth level</a:t>
             </a:r>
           </a:p>
           <a:p>
             <a:pPr lvl="4"/>
             <a:r>
-              <a:rPr lang="en-US" smtClean="0"/>
+              <a:rPr lang="en-US"/>
               <a:t>Fifth level</a:t>
             </a:r>
-            <a:endParaRPr lang="en-US"/>
           </a:p>
         </p:txBody>
       </p:sp>
@@ -1555,7 +1343,7 @@
           <a:p>
             <a:fld id="{5BCAD085-E8A6-8845-BD4E-CB4CCA059FC4}" type="datetimeFigureOut">
               <a:rPr lang="en-US" smtClean="0"/>
-              <a:t>1/27/13</a:t>
+              <a:t>10/25/2026</a:t>
             </a:fld>
             <a:endParaRPr lang="en-US"/>
           </a:p>
@@ -1649,10 +1437,9 @@
           <a:lstStyle/>
           <a:p>
             <a:r>
-              <a:rPr lang="en-US" smtClean="0"/>
+              <a:rPr lang="en-US"/>
               <a:t>Click to edit Master title style</a:t>
             </a:r>
-            <a:endParaRPr lang="en-US"/>
           </a:p>
         </p:txBody>
       </p:sp>
@@ -1673,38 +1460,37 @@
           <a:p>
             <a:pPr lvl="0"/>
             <a:r>
-              <a:rPr lang="en-US" smtClean="0"/>
+              <a:rPr lang="en-US"/>
               <a:t>Click to edit Master text styles</a:t>
             </a:r>
           </a:p>
           <a:p>
             <a:pPr lvl="1"/>
             <a:r>
-              <a:rPr lang="en-US" smtClean="0"/>
+              <a:rPr lang="en-US"/>
               <a:t>Second level</a:t>
             </a:r>
           </a:p>
           <a:p>
             <a:pPr lvl="2"/>
             <a:r>
-              <a:rPr lang="en-US" smtClean="0"/>
+              <a:rPr lang="en-US"/>
               <a:t>Third level</a:t>
             </a:r>
           </a:p>
           <a:p>
             <a:pPr lvl="3"/>
             <a:r>
-              <a:rPr lang="en-US" smtClean="0"/>
+              <a:rPr lang="en-US"/>
               <a:t>Fourth level</a:t>
             </a:r>
           </a:p>
           <a:p>
             <a:pPr lvl="4"/>
             <a:r>
-              <a:rPr lang="en-US" smtClean="0"/>
+              <a:rPr lang="en-US"/>
               <a:t>Fifth level</a:t>
             </a:r>
-            <a:endParaRPr lang="en-US"/>
           </a:p>
         </p:txBody>
       </p:sp>
@@ -1725,7 +1511,7 @@
           <a:p>
             <a:fld id="{5BCAD085-E8A6-8845-BD4E-CB4CCA059FC4}" type="datetimeFigureOut">
               <a:rPr lang="en-US" smtClean="0"/>
-              <a:t>1/27/13</a:t>
+              <a:t>10/25/2026</a:t>
             </a:fld>
             <a:endParaRPr lang="en-US"/>
           </a:p>
@@ -1828,10 +1614,9 @@
           </a:lstStyle>
           <a:p>
             <a:r>
-              <a:rPr lang="en-US" smtClean="0"/>
+              <a:rPr lang="en-US"/>
               <a:t>Click to edit Master title style</a:t>
             </a:r>
-            <a:endParaRPr lang="en-US"/>
           </a:p>
         </p:txBody>
       </p:sp>
@@ -1948,7 +1733,7 @@
           <a:p>
             <a:pPr lvl="0"/>
             <a:r>
-              <a:rPr lang="en-US" smtClean="0"/>
+              <a:rPr lang="en-US"/>
               <a:t>Click to edit Master text styles</a:t>
             </a:r>
           </a:p>
@@ -1971,7 +1756,7 @@
           <a:p>
             <a:fld id="{5BCAD085-E8A6-8845-BD4E-CB4CCA059FC4}" type="datetimeFigureOut">
               <a:rPr lang="en-US" smtClean="0"/>
-              <a:t>1/27/13</a:t>
+              <a:t>10/25/2026</a:t>
             </a:fld>
             <a:endParaRPr lang="en-US"/>
           </a:p>
@@ -2065,10 +1850,9 @@
           <a:lstStyle/>
           <a:p>
             <a:r>
-              <a:rPr lang="en-US" smtClean="0"/>
+              <a:rPr lang="en-US"/>
               <a:t>Click to edit Master title style</a:t>
             </a:r>
-            <a:endParaRPr lang="en-US"/>
           </a:p>
         </p:txBody>
       </p:sp>
@@ -2122,38 +1906,37 @@
           <a:p>
             <a:pPr lvl="0"/>
             <a:r>
-              <a:rPr lang="en-US" smtClean="0"/>
+              <a:rPr lang="en-US"/>
               <a:t>Click to edit Master text styles</a:t>
             </a:r>
           </a:p>
           <a:p>
             <a:pPr lvl="1"/>
             <a:r>
-              <a:rPr lang="en-US" smtClean="0"/>
+              <a:rPr lang="en-US"/>
               <a:t>Second level</a:t>
             </a:r>
           </a:p>
           <a:p>
             <a:pPr lvl="2"/>
             <a:r>
-              <a:rPr lang="en-US" smtClean="0"/>
+              <a:rPr lang="en-US"/>
               <a:t>Third level</a:t>
             </a:r>
           </a:p>
           <a:p>
             <a:pPr lvl="3"/>
             <a:r>
-              <a:rPr lang="en-US" smtClean="0"/>
+              <a:rPr lang="en-US"/>
               <a:t>Fourth level</a:t>
             </a:r>
           </a:p>
           <a:p>
             <a:pPr lvl="4"/>
             <a:r>
-              <a:rPr lang="en-US" smtClean="0"/>
+              <a:rPr lang="en-US"/>
               <a:t>Fifth level</a:t>
             </a:r>
-            <a:endParaRPr lang="en-US"/>
           </a:p>
         </p:txBody>
       </p:sp>
@@ -2207,38 +1990,37 @@
           <a:p>
             <a:pPr lvl="0"/>
             <a:r>
-              <a:rPr lang="en-US" smtClean="0"/>
+              <a:rPr lang="en-US"/>
               <a:t>Click to edit Master text styles</a:t>
             </a:r>
           </a:p>
           <a:p>
             <a:pPr lvl="1"/>
             <a:r>
-              <a:rPr lang="en-US" smtClean="0"/>
+              <a:rPr lang="en-US"/>
               <a:t>Second level</a:t>
             </a:r>
           </a:p>
           <a:p>
             <a:pPr lvl="2"/>
             <a:r>
-              <a:rPr lang="en-US" smtClean="0"/>
+              <a:rPr lang="en-US"/>
               <a:t>Third level</a:t>
             </a:r>
           </a:p>
           <a:p>
             <a:pPr lvl="3"/>
             <a:r>
-              <a:rPr lang="en-US" smtClean="0"/>
+              <a:rPr lang="en-US"/>
               <a:t>Fourth level</a:t>
             </a:r>
           </a:p>
           <a:p>
             <a:pPr lvl="4"/>
             <a:r>
-              <a:rPr lang="en-US" smtClean="0"/>
+              <a:rPr lang="en-US"/>
               <a:t>Fifth level</a:t>
             </a:r>
-            <a:endParaRPr lang="en-US"/>
           </a:p>
         </p:txBody>
       </p:sp>
@@ -2259,7 +2041,7 @@
           <a:p>
             <a:fld id="{5BCAD085-E8A6-8845-BD4E-CB4CCA059FC4}" type="datetimeFigureOut">
               <a:rPr lang="en-US" smtClean="0"/>
-              <a:t>1/27/13</a:t>
+              <a:t>10/25/2026</a:t>
             </a:fld>
             <a:endParaRPr lang="en-US"/>
           </a:p>
@@ -2357,10 +2139,9 @@
           </a:lstStyle>
           <a:p>
             <a:r>
-              <a:rPr lang="en-US" smtClean="0"/>
+              <a:rPr lang="en-US"/>
               <a:t>Click to edit Master title style</a:t>
             </a:r>
-            <a:endParaRPr lang="en-US"/>
           </a:p>
         </p:txBody>
       </p:sp>
@@ -2423,7 +2204,7 @@
           <a:p>
             <a:pPr lvl="0"/>
             <a:r>
-              <a:rPr lang="en-US" smtClean="0"/>
+              <a:rPr lang="en-US"/>
               <a:t>Click to edit Master text styles</a:t>
             </a:r>
           </a:p>
@@ -2479,38 +2260,37 @@
           <a:p>
             <a:pPr lvl="0"/>
             <a:r>
-              <a:rPr lang="en-US" smtClean="0"/>
+              <a:rPr lang="en-US"/>
               <a:t>Click to edit Master text styles</a:t>
             </a:r>
           </a:p>
           <a:p>
             <a:pPr lvl="1"/>
             <a:r>
-              <a:rPr lang="en-US" smtClean="0"/>
+              <a:rPr lang="en-US"/>
               <a:t>Second level</a:t>
             </a:r>
           </a:p>
           <a:p>
             <a:pPr lvl="2"/>
             <a:r>
-              <a:rPr lang="en-US" smtClean="0"/>
+              <a:rPr lang="en-US"/>
               <a:t>Third level</a:t>
             </a:r>
           </a:p>
           <a:p>
             <a:pPr lvl="3"/>
             <a:r>
-              <a:rPr lang="en-US" smtClean="0"/>
+              <a:rPr lang="en-US"/>
               <a:t>Fourth level</a:t>
             </a:r>
           </a:p>
           <a:p>
             <a:pPr lvl="4"/>
             <a:r>
-              <a:rPr lang="en-US" smtClean="0"/>
+              <a:rPr lang="en-US"/>
               <a:t>Fifth level</a:t>
             </a:r>
-            <a:endParaRPr lang="en-US"/>
           </a:p>
         </p:txBody>
       </p:sp>
@@ -2573,7 +2353,7 @@
           <a:p>
             <a:pPr lvl="0"/>
             <a:r>
-              <a:rPr lang="en-US" smtClean="0"/>
+              <a:rPr lang="en-US"/>
               <a:t>Click to edit Master text styles</a:t>
             </a:r>
           </a:p>
@@ -2629,38 +2409,37 @@
           <a:p>
             <a:pPr lvl="0"/>
             <a:r>
-              <a:rPr lang="en-US" smtClean="0"/>
+              <a:rPr lang="en-US"/>
               <a:t>Click to edit Master text styles</a:t>
             </a:r>
           </a:p>
           <a:p>
             <a:pPr lvl="1"/>
             <a:r>
-              <a:rPr lang="en-US" smtClean="0"/>
+              <a:rPr lang="en-US"/>
               <a:t>Second level</a:t>
             </a:r>
           </a:p>
           <a:p>
             <a:pPr lvl="2"/>
             <a:r>
-              <a:rPr lang="en-US" smtClean="0"/>
+              <a:rPr lang="en-US"/>
               <a:t>Third level</a:t>
             </a:r>
           </a:p>
           <a:p>
             <a:pPr lvl="3"/>
             <a:r>
-              <a:rPr lang="en-US" smtClean="0"/>
+              <a:rPr lang="en-US"/>
               <a:t>Fourth level</a:t>
             </a:r>
           </a:p>
           <a:p>
             <a:pPr lvl="4"/>
             <a:r>
-              <a:rPr lang="en-US" smtClean="0"/>
+              <a:rPr lang="en-US"/>
               <a:t>Fifth level</a:t>
             </a:r>
-            <a:endParaRPr lang="en-US"/>
           </a:p>
         </p:txBody>
       </p:sp>
@@ -2681,7 +2460,7 @@
           <a:p>
             <a:fld id="{5BCAD085-E8A6-8845-BD4E-CB4CCA059FC4}" type="datetimeFigureOut">
               <a:rPr lang="en-US" smtClean="0"/>
-              <a:t>1/27/13</a:t>
+              <a:t>10/25/2026</a:t>
             </a:fld>
             <a:endParaRPr lang="en-US"/>
           </a:p>
@@ -2775,10 +2554,9 @@
           <a:lstStyle/>
           <a:p>
             <a:r>
-              <a:rPr lang="en-US" smtClean="0"/>
+              <a:rPr lang="en-US"/>
               <a:t>Click to edit Master title style</a:t>
             </a:r>
-            <a:endParaRPr lang="en-US"/>
           </a:p>
         </p:txBody>
       </p:sp>
@@ -2799,7 +2577,7 @@
           <a:p>
             <a:fld id="{5BCAD085-E8A6-8845-BD4E-CB4CCA059FC4}" type="datetimeFigureOut">
               <a:rPr lang="en-US" smtClean="0"/>
-              <a:t>1/27/13</a:t>
+              <a:t>10/25/2026</a:t>
             </a:fld>
             <a:endParaRPr lang="en-US"/>
           </a:p>
@@ -2894,7 +2672,7 @@
           <a:p>
             <a:fld id="{5BCAD085-E8A6-8845-BD4E-CB4CCA059FC4}" type="datetimeFigureOut">
               <a:rPr lang="en-US" smtClean="0"/>
-              <a:t>1/27/13</a:t>
+              <a:t>10/25/2026</a:t>
             </a:fld>
             <a:endParaRPr lang="en-US"/>
           </a:p>
@@ -2997,10 +2775,9 @@
           </a:lstStyle>
           <a:p>
             <a:r>
-              <a:rPr lang="en-US" smtClean="0"/>
+              <a:rPr lang="en-US"/>
               <a:t>Click to edit Master title style</a:t>
             </a:r>
-            <a:endParaRPr lang="en-US"/>
           </a:p>
         </p:txBody>
       </p:sp>
@@ -3054,38 +2831,37 @@
           <a:p>
             <a:pPr lvl="0"/>
             <a:r>
-              <a:rPr lang="en-US" smtClean="0"/>
+              <a:rPr lang="en-US"/>
               <a:t>Click to edit Master text styles</a:t>
             </a:r>
           </a:p>
           <a:p>
             <a:pPr lvl="1"/>
             <a:r>
-              <a:rPr lang="en-US" smtClean="0"/>
+              <a:rPr lang="en-US"/>
               <a:t>Second level</a:t>
             </a:r>
           </a:p>
           <a:p>
             <a:pPr lvl="2"/>
             <a:r>
-              <a:rPr lang="en-US" smtClean="0"/>
+              <a:rPr lang="en-US"/>
               <a:t>Third level</a:t>
             </a:r>
           </a:p>
           <a:p>
             <a:pPr lvl="3"/>
             <a:r>
-              <a:rPr lang="en-US" smtClean="0"/>
+              <a:rPr lang="en-US"/>
               <a:t>Fourth level</a:t>
             </a:r>
           </a:p>
           <a:p>
             <a:pPr lvl="4"/>
             <a:r>
-              <a:rPr lang="en-US" smtClean="0"/>
+              <a:rPr lang="en-US"/>
               <a:t>Fifth level</a:t>
             </a:r>
-            <a:endParaRPr lang="en-US"/>
           </a:p>
         </p:txBody>
       </p:sp>
@@ -3148,7 +2924,7 @@
           <a:p>
             <a:pPr lvl="0"/>
             <a:r>
-              <a:rPr lang="en-US" smtClean="0"/>
+              <a:rPr lang="en-US"/>
               <a:t>Click to edit Master text styles</a:t>
             </a:r>
           </a:p>
@@ -3171,7 +2947,7 @@
           <a:p>
             <a:fld id="{5BCAD085-E8A6-8845-BD4E-CB4CCA059FC4}" type="datetimeFigureOut">
               <a:rPr lang="en-US" smtClean="0"/>
-              <a:t>1/27/13</a:t>
+              <a:t>10/25/2026</a:t>
             </a:fld>
             <a:endParaRPr lang="en-US"/>
           </a:p>
@@ -3274,10 +3050,9 @@
           </a:lstStyle>
           <a:p>
             <a:r>
-              <a:rPr lang="en-US" smtClean="0"/>
+              <a:rPr lang="en-US"/>
               <a:t>Click to edit Master title style</a:t>
             </a:r>
-            <a:endParaRPr lang="en-US"/>
           </a:p>
         </p:txBody>
       </p:sp>
@@ -3401,7 +3176,7 @@
           <a:p>
             <a:pPr lvl="0"/>
             <a:r>
-              <a:rPr lang="en-US" smtClean="0"/>
+              <a:rPr lang="en-US"/>
               <a:t>Click to edit Master text styles</a:t>
             </a:r>
           </a:p>
@@ -3424,7 +3199,7 @@
           <a:p>
             <a:fld id="{5BCAD085-E8A6-8845-BD4E-CB4CCA059FC4}" type="datetimeFigureOut">
               <a:rPr lang="en-US" smtClean="0"/>
-              <a:t>1/27/13</a:t>
+              <a:t>10/25/2026</a:t>
             </a:fld>
             <a:endParaRPr lang="en-US"/>
           </a:p>
@@ -3533,10 +3308,9 @@
           <a:lstStyle/>
           <a:p>
             <a:r>
-              <a:rPr lang="en-US" smtClean="0"/>
+              <a:rPr lang="en-US"/>
               <a:t>Click to edit Master title style</a:t>
             </a:r>
-            <a:endParaRPr lang="en-US"/>
           </a:p>
         </p:txBody>
       </p:sp>
@@ -3567,38 +3341,37 @@
           <a:p>
             <a:pPr lvl="0"/>
             <a:r>
-              <a:rPr lang="en-US" smtClean="0"/>
+              <a:rPr lang="en-US"/>
               <a:t>Click to edit Master text styles</a:t>
             </a:r>
           </a:p>
           <a:p>
             <a:pPr lvl="1"/>
             <a:r>
-              <a:rPr lang="en-US" smtClean="0"/>
+              <a:rPr lang="en-US"/>
               <a:t>Second level</a:t>
             </a:r>
           </a:p>
           <a:p>
             <a:pPr lvl="2"/>
             <a:r>
-              <a:rPr lang="en-US" smtClean="0"/>
+              <a:rPr lang="en-US"/>
               <a:t>Third level</a:t>
             </a:r>
           </a:p>
           <a:p>
             <a:pPr lvl="3"/>
             <a:r>
-              <a:rPr lang="en-US" smtClean="0"/>
+              <a:rPr lang="en-US"/>
               <a:t>Fourth level</a:t>
             </a:r>
           </a:p>
           <a:p>
             <a:pPr lvl="4"/>
             <a:r>
-              <a:rPr lang="en-US" smtClean="0"/>
+              <a:rPr lang="en-US"/>
               <a:t>Fifth level</a:t>
             </a:r>
-            <a:endParaRPr lang="en-US"/>
           </a:p>
         </p:txBody>
       </p:sp>
@@ -3637,7 +3410,7 @@
           <a:p>
             <a:fld id="{5BCAD085-E8A6-8845-BD4E-CB4CCA059FC4}" type="datetimeFigureOut">
               <a:rPr lang="en-US" smtClean="0"/>
-              <a:t>1/27/13</a:t>
+              <a:t>10/25/2026</a:t>
             </a:fld>
             <a:endParaRPr lang="en-US"/>
           </a:p>
@@ -3996,7 +3769,7 @@
 </file>
 
 <file path=ppt/slides/slide1.xml><?xml version="1.0" encoding="utf-8"?>
-<p:sld xmlns:a="http://schemas.openxmlformats.org/drawingml/2006/main" xmlns:p="http://schemas.openxmlformats.org/presentationml/2006/main" xmlns:r="http://schemas.openxmlformats.org/officeDocument/2006/relationships">
+<p:sld xmlns:a="http://schemas.openxmlformats.org/drawingml/2006/main" xmlns:r="http://schemas.openxmlformats.org/officeDocument/2006/relationships" xmlns:p="http://schemas.openxmlformats.org/presentationml/2006/main">
   <p:cSld>
     <p:bg>
       <p:bgPr>
@@ -4012,7 +3785,14 @@
         <p:cNvGrpSpPr/>
         <p:nvPr/>
       </p:nvGrpSpPr>
-      <p:grpSpPr/>
+      <p:grpSpPr>
+        <a:xfrm>
+          <a:off x="0" y="0"/>
+          <a:ext cx="0" cy="0"/>
+          <a:chOff x="0" y="0"/>
+          <a:chExt cx="0" cy="0"/>
+        </a:xfrm>
+      </p:grpSpPr>
       <p:sp>
         <p:nvSpPr>
           <p:cNvPr id="2" name="Rectangle 1"/>
@@ -4022,7 +3802,7 @@
         <p:spPr>
           <a:xfrm>
             <a:off x="640080" y="1170432"/>
-            <a:ext cx="50292" cy="3310128"/>
+            <a:ext cx="50292" cy="3383280"/>
           </a:xfrm>
           <a:prstGeom prst="rect">
             <a:avLst/>
@@ -4040,6 +3820,7 @@
           <a:lstStyle/>
           <a:p>
             <a:pPr algn="ctr"/>
+            <a:endParaRPr/>
           </a:p>
         </p:txBody>
       </p:sp>
@@ -4060,7 +3841,7 @@
           <a:noFill/>
         </p:spPr>
         <p:txBody>
-          <a:bodyPr wrap="square" lIns="0" rIns="0" tIns="0" bIns="0" anchor="t">
+          <a:bodyPr wrap="square" lIns="0" tIns="0" rIns="0" bIns="0" anchor="t">
             <a:noAutofit/>
           </a:bodyPr>
           <a:lstStyle/>
@@ -4106,7 +3887,7 @@
           <a:noFill/>
         </p:spPr>
         <p:txBody>
-          <a:bodyPr wrap="square" lIns="0" rIns="0" tIns="0" bIns="0" anchor="t">
+          <a:bodyPr wrap="square" lIns="0" tIns="0" rIns="0" bIns="0" anchor="t">
             <a:noAutofit/>
           </a:bodyPr>
           <a:lstStyle/>
@@ -4175,7 +3956,7 @@
           <a:noFill/>
         </p:spPr>
         <p:txBody>
-          <a:bodyPr wrap="square" lIns="0" rIns="0" tIns="0" bIns="0" anchor="t">
+          <a:bodyPr wrap="square" lIns="0" tIns="0" rIns="0" bIns="0" anchor="t">
             <a:noAutofit/>
           </a:bodyPr>
           <a:lstStyle/>
@@ -4212,7 +3993,7 @@
         </p:nvSpPr>
         <p:spPr>
           <a:xfrm>
-            <a:off x="868680" y="3931920"/>
+            <a:off x="868680" y="4005072"/>
             <a:ext cx="6766560" cy="310896"/>
           </a:xfrm>
           <a:prstGeom prst="rect">
@@ -4221,7 +4002,7 @@
           <a:noFill/>
         </p:spPr>
         <p:txBody>
-          <a:bodyPr wrap="square" lIns="0" rIns="0" tIns="0" bIns="0" anchor="t">
+          <a:bodyPr wrap="square" lIns="0" tIns="0" rIns="0" bIns="0" anchor="t">
             <a:noAutofit/>
           </a:bodyPr>
           <a:lstStyle/>
@@ -4258,7 +4039,7 @@
         </p:nvSpPr>
         <p:spPr>
           <a:xfrm>
-            <a:off x="868680" y="4279392"/>
+            <a:off x="868680" y="4352544"/>
             <a:ext cx="6766560" cy="256032"/>
           </a:xfrm>
           <a:prstGeom prst="rect">
@@ -4267,7 +4048,7 @@
           <a:noFill/>
         </p:spPr>
         <p:txBody>
-          <a:bodyPr wrap="square" lIns="0" rIns="0" tIns="0" bIns="0" anchor="t">
+          <a:bodyPr wrap="square" lIns="0" tIns="0" rIns="0" bIns="0" anchor="t">
             <a:noAutofit/>
           </a:bodyPr>
           <a:lstStyle/>
@@ -4325,6 +4106,7 @@
           <a:lstStyle/>
           <a:p>
             <a:pPr algn="ctr"/>
+            <a:endParaRPr/>
           </a:p>
         </p:txBody>
       </p:sp>
@@ -4355,6 +4137,7 @@
           <a:lstStyle/>
           <a:p>
             <a:pPr algn="ctr"/>
+            <a:endParaRPr/>
           </a:p>
         </p:txBody>
       </p:sp>
@@ -4385,6 +4168,7 @@
           <a:lstStyle/>
           <a:p>
             <a:pPr algn="ctr"/>
+            <a:endParaRPr/>
           </a:p>
         </p:txBody>
       </p:sp>
@@ -4405,7 +4189,7 @@
           <a:noFill/>
         </p:spPr>
         <p:txBody>
-          <a:bodyPr wrap="square" lIns="0" rIns="0" tIns="0" bIns="0" anchor="t">
+          <a:bodyPr wrap="square" lIns="0" tIns="0" rIns="0" bIns="0" anchor="t">
             <a:noAutofit/>
           </a:bodyPr>
           <a:lstStyle/>
@@ -4461,6 +4245,7 @@
           <a:lstStyle/>
           <a:p>
             <a:pPr algn="ctr"/>
+            <a:endParaRPr/>
           </a:p>
         </p:txBody>
       </p:sp>
@@ -4481,7 +4266,7 @@
           <a:noFill/>
         </p:spPr>
         <p:txBody>
-          <a:bodyPr wrap="square" lIns="0" rIns="0" tIns="0" bIns="0" anchor="t">
+          <a:bodyPr wrap="square" lIns="0" tIns="0" rIns="0" bIns="0" anchor="t">
             <a:noAutofit/>
           </a:bodyPr>
           <a:lstStyle/>
@@ -4537,7 +4322,7 @@
           <a:noFill/>
         </p:spPr>
         <p:txBody>
-          <a:bodyPr wrap="square" lIns="0" rIns="0" tIns="0" bIns="0" anchor="t">
+          <a:bodyPr wrap="square" lIns="0" tIns="0" rIns="0" bIns="0" anchor="t">
             <a:noAutofit/>
           </a:bodyPr>
           <a:lstStyle/>
@@ -4597,6 +4382,7 @@
           <a:lstStyle/>
           <a:p>
             <a:pPr algn="ctr"/>
+            <a:endParaRPr/>
           </a:p>
         </p:txBody>
       </p:sp>
@@ -4617,7 +4403,7 @@
           <a:noFill/>
         </p:spPr>
         <p:txBody>
-          <a:bodyPr wrap="square" lIns="0" rIns="0" tIns="0" bIns="0" anchor="ctr">
+          <a:bodyPr wrap="square" lIns="0" tIns="0" rIns="0" bIns="0" anchor="ctr">
             <a:noAutofit/>
           </a:bodyPr>
           <a:lstStyle/>
@@ -4651,17 +4437,7 @@
                 <a:latin typeface="Segoe UI"/>
                 <a:ea typeface="Microsoft YaHei"/>
               </a:rPr>
-              <a:t>    </a:t>
-            </a:r>
-            <a:r>
-              <a:rPr sz="1200" b="0" i="0">
-                <a:solidFill>
-                  <a:srgbClr val="3A4A50"/>
-                </a:solidFill>
-                <a:latin typeface="Segoe UI"/>
-                <a:ea typeface="Microsoft YaHei"/>
-              </a:rPr>
-              <a:t>份专题资料</a:t>
+              <a:t>    份专题资料</a:t>
             </a:r>
           </a:p>
         </p:txBody>
@@ -4697,6 +4473,7 @@
           <a:lstStyle/>
           <a:p>
             <a:pPr algn="ctr"/>
+            <a:endParaRPr/>
           </a:p>
         </p:txBody>
       </p:sp>
@@ -4717,7 +4494,7 @@
           <a:noFill/>
         </p:spPr>
         <p:txBody>
-          <a:bodyPr wrap="square" lIns="0" rIns="0" tIns="0" bIns="0" anchor="ctr">
+          <a:bodyPr wrap="square" lIns="0" tIns="0" rIns="0" bIns="0" anchor="ctr">
             <a:noAutofit/>
           </a:bodyPr>
           <a:lstStyle/>
@@ -4751,17 +4528,7 @@
                 <a:latin typeface="Segoe UI"/>
                 <a:ea typeface="Microsoft YaHei"/>
               </a:rPr>
-              <a:t>    </a:t>
-            </a:r>
-            <a:r>
-              <a:rPr sz="1200" b="0" i="0">
-                <a:solidFill>
-                  <a:srgbClr val="3A4A50"/>
-                </a:solidFill>
-                <a:latin typeface="Segoe UI"/>
-                <a:ea typeface="Microsoft YaHei"/>
-              </a:rPr>
-              <a:t>项数值校验通过</a:t>
+              <a:t>    项数值校验通过</a:t>
             </a:r>
           </a:p>
         </p:txBody>
@@ -4797,6 +4564,7 @@
           <a:lstStyle/>
           <a:p>
             <a:pPr algn="ctr"/>
+            <a:endParaRPr/>
           </a:p>
         </p:txBody>
       </p:sp>
@@ -4817,7 +4585,7 @@
           <a:noFill/>
         </p:spPr>
         <p:txBody>
-          <a:bodyPr wrap="square" lIns="0" rIns="0" tIns="0" bIns="0" anchor="ctr">
+          <a:bodyPr wrap="square" lIns="0" tIns="0" rIns="0" bIns="0" anchor="ctr">
             <a:noAutofit/>
           </a:bodyPr>
           <a:lstStyle/>
@@ -4851,17 +4619,7 @@
                 <a:latin typeface="Segoe UI"/>
                 <a:ea typeface="Microsoft YaHei"/>
               </a:rPr>
-              <a:t>    </a:t>
-            </a:r>
-            <a:r>
-              <a:rPr sz="1200" b="0" i="0">
-                <a:solidFill>
-                  <a:srgbClr val="3A4A50"/>
-                </a:solidFill>
-                <a:latin typeface="Segoe UI"/>
-                <a:ea typeface="Microsoft YaHei"/>
-              </a:rPr>
-              <a:t>种几何退磁因子已算</a:t>
+              <a:t>    种几何退磁因子已算</a:t>
             </a:r>
           </a:p>
         </p:txBody>
@@ -4883,7 +4641,7 @@
           <a:noFill/>
         </p:spPr>
         <p:txBody>
-          <a:bodyPr wrap="square" lIns="0" rIns="0" tIns="0" bIns="0" anchor="t">
+          <a:bodyPr wrap="square" lIns="0" tIns="0" rIns="0" bIns="0" anchor="t">
             <a:noAutofit/>
           </a:bodyPr>
           <a:lstStyle/>
@@ -4921,7 +4679,7 @@
 </file>
 
 <file path=ppt/slides/slide2.xml><?xml version="1.0" encoding="utf-8"?>
-<p:sld xmlns:a="http://schemas.openxmlformats.org/drawingml/2006/main" xmlns:p="http://schemas.openxmlformats.org/presentationml/2006/main" xmlns:r="http://schemas.openxmlformats.org/officeDocument/2006/relationships">
+<p:sld xmlns:a="http://schemas.openxmlformats.org/drawingml/2006/main" xmlns:r="http://schemas.openxmlformats.org/officeDocument/2006/relationships" xmlns:p="http://schemas.openxmlformats.org/presentationml/2006/main">
   <p:cSld>
     <p:bg>
       <p:bgPr>
@@ -4937,7 +4695,14 @@
         <p:cNvGrpSpPr/>
         <p:nvPr/>
       </p:nvGrpSpPr>
-      <p:grpSpPr/>
+      <p:grpSpPr>
+        <a:xfrm>
+          <a:off x="0" y="0"/>
+          <a:ext cx="0" cy="0"/>
+          <a:chOff x="0" y="0"/>
+          <a:chExt cx="0" cy="0"/>
+        </a:xfrm>
+      </p:grpSpPr>
       <p:sp>
         <p:nvSpPr>
           <p:cNvPr id="2" name="TextBox 1"/>
@@ -4955,7 +4720,7 @@
           <a:noFill/>
         </p:spPr>
         <p:txBody>
-          <a:bodyPr wrap="square" lIns="0" rIns="0" tIns="0" bIns="0" anchor="t">
+          <a:bodyPr wrap="square" lIns="0" tIns="0" rIns="0" bIns="0" anchor="t">
             <a:noAutofit/>
           </a:bodyPr>
           <a:lstStyle/>
@@ -5021,7 +4786,7 @@
           <a:noFill/>
         </p:spPr>
         <p:txBody>
-          <a:bodyPr wrap="square" lIns="0" rIns="0" tIns="0" bIns="0" anchor="ctr">
+          <a:bodyPr wrap="square" lIns="0" tIns="0" rIns="0" bIns="0" anchor="ctr">
             <a:noAutofit/>
           </a:bodyPr>
           <a:lstStyle/>
@@ -5077,6 +4842,7 @@
           <a:lstStyle/>
           <a:p>
             <a:pPr algn="ctr"/>
+            <a:endParaRPr/>
           </a:p>
         </p:txBody>
       </p:sp>
@@ -5111,6 +4877,7 @@
           <a:lstStyle/>
           <a:p>
             <a:pPr algn="ctr"/>
+            <a:endParaRPr/>
           </a:p>
         </p:txBody>
       </p:sp>
@@ -5131,7 +4898,7 @@
           <a:noFill/>
         </p:spPr>
         <p:txBody>
-          <a:bodyPr wrap="square" lIns="0" rIns="0" tIns="0" bIns="0" anchor="t">
+          <a:bodyPr wrap="square" lIns="0" tIns="0" rIns="0" bIns="0" anchor="t">
             <a:noAutofit/>
           </a:bodyPr>
           <a:lstStyle/>
@@ -5177,7 +4944,7 @@
           <a:noFill/>
         </p:spPr>
         <p:txBody>
-          <a:bodyPr wrap="square" lIns="0" rIns="0" tIns="0" bIns="0" anchor="t">
+          <a:bodyPr wrap="square" lIns="0" tIns="0" rIns="0" bIns="0" anchor="t">
             <a:noAutofit/>
           </a:bodyPr>
           <a:lstStyle/>
@@ -5223,7 +4990,7 @@
           <a:noFill/>
         </p:spPr>
         <p:txBody>
-          <a:bodyPr wrap="square" lIns="0" rIns="0" tIns="0" bIns="0" anchor="t">
+          <a:bodyPr wrap="square" lIns="0" tIns="0" rIns="0" bIns="0" anchor="t">
             <a:noAutofit/>
           </a:bodyPr>
           <a:lstStyle/>
@@ -5279,6 +5046,7 @@
           <a:lstStyle/>
           <a:p>
             <a:pPr algn="ctr"/>
+            <a:endParaRPr/>
           </a:p>
         </p:txBody>
       </p:sp>
@@ -5313,6 +5081,7 @@
           <a:lstStyle/>
           <a:p>
             <a:pPr algn="ctr"/>
+            <a:endParaRPr/>
           </a:p>
         </p:txBody>
       </p:sp>
@@ -5333,7 +5102,7 @@
           <a:noFill/>
         </p:spPr>
         <p:txBody>
-          <a:bodyPr wrap="square" lIns="0" rIns="0" tIns="0" bIns="0" anchor="t">
+          <a:bodyPr wrap="square" lIns="0" tIns="0" rIns="0" bIns="0" anchor="t">
             <a:noAutofit/>
           </a:bodyPr>
           <a:lstStyle/>
@@ -5379,7 +5148,7 @@
           <a:noFill/>
         </p:spPr>
         <p:txBody>
-          <a:bodyPr wrap="square" lIns="0" rIns="0" tIns="0" bIns="0" anchor="t">
+          <a:bodyPr wrap="square" lIns="0" tIns="0" rIns="0" bIns="0" anchor="t">
             <a:noAutofit/>
           </a:bodyPr>
           <a:lstStyle/>
@@ -5425,7 +5194,7 @@
           <a:noFill/>
         </p:spPr>
         <p:txBody>
-          <a:bodyPr wrap="square" lIns="0" rIns="0" tIns="0" bIns="0" anchor="t">
+          <a:bodyPr wrap="square" lIns="0" tIns="0" rIns="0" bIns="0" anchor="t">
             <a:noAutofit/>
           </a:bodyPr>
           <a:lstStyle/>
@@ -5521,6 +5290,7 @@
           <a:lstStyle/>
           <a:p>
             <a:pPr algn="ctr"/>
+            <a:endParaRPr/>
           </a:p>
         </p:txBody>
       </p:sp>
@@ -5555,6 +5325,7 @@
           <a:lstStyle/>
           <a:p>
             <a:pPr algn="ctr"/>
+            <a:endParaRPr/>
           </a:p>
         </p:txBody>
       </p:sp>
@@ -5575,7 +5346,7 @@
           <a:noFill/>
         </p:spPr>
         <p:txBody>
-          <a:bodyPr wrap="square" lIns="0" rIns="0" tIns="0" bIns="0" anchor="t">
+          <a:bodyPr wrap="square" lIns="0" tIns="0" rIns="0" bIns="0" anchor="t">
             <a:noAutofit/>
           </a:bodyPr>
           <a:lstStyle/>
@@ -5621,7 +5392,7 @@
           <a:noFill/>
         </p:spPr>
         <p:txBody>
-          <a:bodyPr wrap="square" lIns="0" rIns="0" tIns="0" bIns="0" anchor="t">
+          <a:bodyPr wrap="square" lIns="0" tIns="0" rIns="0" bIns="0" anchor="t">
             <a:noAutofit/>
           </a:bodyPr>
           <a:lstStyle/>
@@ -5667,7 +5438,7 @@
           <a:noFill/>
         </p:spPr>
         <p:txBody>
-          <a:bodyPr wrap="square" lIns="0" rIns="0" tIns="0" bIns="0" anchor="t">
+          <a:bodyPr wrap="square" lIns="0" tIns="0" rIns="0" bIns="0" anchor="t">
             <a:noAutofit/>
           </a:bodyPr>
           <a:lstStyle/>
@@ -5723,6 +5494,7 @@
           <a:lstStyle/>
           <a:p>
             <a:pPr algn="ctr"/>
+            <a:endParaRPr/>
           </a:p>
         </p:txBody>
       </p:sp>
@@ -5757,6 +5529,7 @@
           <a:lstStyle/>
           <a:p>
             <a:pPr algn="ctr"/>
+            <a:endParaRPr/>
           </a:p>
         </p:txBody>
       </p:sp>
@@ -5777,7 +5550,7 @@
           <a:noFill/>
         </p:spPr>
         <p:txBody>
-          <a:bodyPr wrap="square" lIns="0" rIns="0" tIns="0" bIns="0" anchor="t">
+          <a:bodyPr wrap="square" lIns="0" tIns="0" rIns="0" bIns="0" anchor="t">
             <a:noAutofit/>
           </a:bodyPr>
           <a:lstStyle/>
@@ -5823,7 +5596,7 @@
           <a:noFill/>
         </p:spPr>
         <p:txBody>
-          <a:bodyPr wrap="square" lIns="0" rIns="0" tIns="0" bIns="0" anchor="t">
+          <a:bodyPr wrap="square" lIns="0" tIns="0" rIns="0" bIns="0" anchor="t">
             <a:noAutofit/>
           </a:bodyPr>
           <a:lstStyle/>
@@ -5869,7 +5642,7 @@
           <a:noFill/>
         </p:spPr>
         <p:txBody>
-          <a:bodyPr wrap="square" lIns="0" rIns="0" tIns="0" bIns="0" anchor="t">
+          <a:bodyPr wrap="square" lIns="0" tIns="0" rIns="0" bIns="0" anchor="t">
             <a:noAutofit/>
           </a:bodyPr>
           <a:lstStyle/>
@@ -5930,6 +5703,7 @@
           <a:lstStyle/>
           <a:p>
             <a:pPr algn="ctr"/>
+            <a:endParaRPr/>
           </a:p>
         </p:txBody>
       </p:sp>
@@ -5950,7 +5724,7 @@
           <a:noFill/>
         </p:spPr>
         <p:txBody>
-          <a:bodyPr wrap="square" lIns="0" rIns="0" tIns="0" bIns="0" anchor="t">
+          <a:bodyPr wrap="square" lIns="0" tIns="0" rIns="0" bIns="0" anchor="t">
             <a:noAutofit/>
           </a:bodyPr>
           <a:lstStyle/>
@@ -5996,7 +5770,7 @@
           <a:noFill/>
         </p:spPr>
         <p:txBody>
-          <a:bodyPr wrap="square" lIns="0" rIns="0" tIns="0" bIns="0" anchor="t">
+          <a:bodyPr wrap="square" lIns="0" tIns="0" rIns="0" bIns="0" anchor="t">
             <a:noAutofit/>
           </a:bodyPr>
           <a:lstStyle/>
@@ -6042,7 +5816,7 @@
           <a:noFill/>
         </p:spPr>
         <p:txBody>
-          <a:bodyPr wrap="square" lIns="0" rIns="0" tIns="0" bIns="0" anchor="t">
+          <a:bodyPr wrap="square" lIns="0" tIns="0" rIns="0" bIns="0" anchor="t">
             <a:noAutofit/>
           </a:bodyPr>
           <a:lstStyle/>
@@ -6102,6 +5876,7 @@
           <a:lstStyle/>
           <a:p>
             <a:pPr algn="ctr"/>
+            <a:endParaRPr/>
           </a:p>
         </p:txBody>
       </p:sp>
@@ -6132,6 +5907,7 @@
           <a:lstStyle/>
           <a:p>
             <a:pPr algn="ctr"/>
+            <a:endParaRPr/>
           </a:p>
         </p:txBody>
       </p:sp>
@@ -6152,7 +5928,7 @@
           <a:noFill/>
         </p:spPr>
         <p:txBody>
-          <a:bodyPr wrap="square" lIns="0" rIns="0" tIns="0" bIns="0" anchor="t">
+          <a:bodyPr wrap="square" lIns="0" tIns="0" rIns="0" bIns="0" anchor="t">
             <a:noAutofit/>
           </a:bodyPr>
           <a:lstStyle/>
@@ -6198,7 +5974,7 @@
           <a:noFill/>
         </p:spPr>
         <p:txBody>
-          <a:bodyPr wrap="square" lIns="0" rIns="0" tIns="0" bIns="0" anchor="t">
+          <a:bodyPr wrap="square" lIns="0" tIns="0" rIns="0" bIns="0" anchor="t">
             <a:noAutofit/>
           </a:bodyPr>
           <a:lstStyle/>
@@ -6252,52 +6028,6 @@
       </p:sp>
       <p:sp>
         <p:nvSpPr>
-          <p:cNvPr id="32" name="TextBox 31"/>
-          <p:cNvSpPr txBox="1"/>
-          <p:nvPr/>
-        </p:nvSpPr>
-        <p:spPr>
-          <a:xfrm>
-            <a:off x="640080" y="6419088"/>
-            <a:ext cx="8869680" cy="237744"/>
-          </a:xfrm>
-          <a:prstGeom prst="rect">
-            <a:avLst/>
-          </a:prstGeom>
-          <a:noFill/>
-        </p:spPr>
-        <p:txBody>
-          <a:bodyPr wrap="square" lIns="0" rIns="0" tIns="0" bIns="0" anchor="t">
-            <a:noAutofit/>
-          </a:bodyPr>
-          <a:lstStyle/>
-          <a:p>
-            <a:pPr algn="l">
-              <a:lnSpc>
-                <a:spcPct val="115000"/>
-              </a:lnSpc>
-              <a:spcBef>
-                <a:spcPts val="0"/>
-              </a:spcBef>
-              <a:spcAft>
-                <a:spcPts val="0"/>
-              </a:spcAft>
-            </a:pPr>
-            <a:r>
-              <a:rPr sz="850" b="0" i="0">
-                <a:solidFill>
-                  <a:srgbClr val="53676D"/>
-                </a:solidFill>
-                <a:latin typeface="Segoe UI"/>
-                <a:ea typeface="Microsoft YaHei"/>
-              </a:rPr>
-              <a:t>研究范围见 README.md 与 4-QAH基本概念与面外磁化学习指南.md</a:t>
-            </a:r>
-          </a:p>
-        </p:txBody>
-      </p:sp>
-      <p:sp>
-        <p:nvSpPr>
           <p:cNvPr id="33" name="TextBox 32"/>
           <p:cNvSpPr txBox="1"/>
           <p:nvPr/>
@@ -6313,7 +6043,7 @@
           <a:noFill/>
         </p:spPr>
         <p:txBody>
-          <a:bodyPr wrap="square" lIns="0" rIns="0" tIns="0" bIns="0" anchor="t">
+          <a:bodyPr wrap="square" lIns="0" tIns="0" rIns="0" bIns="0" anchor="t">
             <a:noAutofit/>
           </a:bodyPr>
           <a:lstStyle/>
@@ -6351,7 +6081,7 @@
 </file>
 
 <file path=ppt/slides/slide3.xml><?xml version="1.0" encoding="utf-8"?>
-<p:sld xmlns:a="http://schemas.openxmlformats.org/drawingml/2006/main" xmlns:p="http://schemas.openxmlformats.org/presentationml/2006/main" xmlns:r="http://schemas.openxmlformats.org/officeDocument/2006/relationships">
+<p:sld xmlns:a="http://schemas.openxmlformats.org/drawingml/2006/main" xmlns:r="http://schemas.openxmlformats.org/officeDocument/2006/relationships" xmlns:p="http://schemas.openxmlformats.org/presentationml/2006/main">
   <p:cSld>
     <p:bg>
       <p:bgPr>
@@ -6367,7 +6097,14 @@
         <p:cNvGrpSpPr/>
         <p:nvPr/>
       </p:nvGrpSpPr>
-      <p:grpSpPr/>
+      <p:grpSpPr>
+        <a:xfrm>
+          <a:off x="0" y="0"/>
+          <a:ext cx="0" cy="0"/>
+          <a:chOff x="0" y="0"/>
+          <a:chExt cx="0" cy="0"/>
+        </a:xfrm>
+      </p:grpSpPr>
       <p:sp>
         <p:nvSpPr>
           <p:cNvPr id="2" name="TextBox 1"/>
@@ -6385,7 +6122,7 @@
           <a:noFill/>
         </p:spPr>
         <p:txBody>
-          <a:bodyPr wrap="square" lIns="0" rIns="0" tIns="0" bIns="0" anchor="t">
+          <a:bodyPr wrap="square" lIns="0" tIns="0" rIns="0" bIns="0" anchor="t">
             <a:noAutofit/>
           </a:bodyPr>
           <a:lstStyle/>
@@ -6451,7 +6188,7 @@
           <a:noFill/>
         </p:spPr>
         <p:txBody>
-          <a:bodyPr wrap="square" lIns="0" rIns="0" tIns="0" bIns="0" anchor="ctr">
+          <a:bodyPr wrap="square" lIns="0" tIns="0" rIns="0" bIns="0" anchor="ctr">
             <a:noAutofit/>
           </a:bodyPr>
           <a:lstStyle/>
@@ -6507,6 +6244,7 @@
           <a:lstStyle/>
           <a:p>
             <a:pPr algn="ctr"/>
+            <a:endParaRPr/>
           </a:p>
         </p:txBody>
       </p:sp>
@@ -6539,6 +6277,7 @@
           <a:lstStyle/>
           <a:p>
             <a:pPr algn="ctr"/>
+            <a:endParaRPr/>
           </a:p>
         </p:txBody>
       </p:sp>
@@ -6559,7 +6298,7 @@
           <a:noFill/>
         </p:spPr>
         <p:txBody>
-          <a:bodyPr wrap="square" lIns="0" rIns="0" tIns="0" bIns="0" anchor="t">
+          <a:bodyPr wrap="square" lIns="0" tIns="0" rIns="0" bIns="0" anchor="t">
             <a:noAutofit/>
           </a:bodyPr>
           <a:lstStyle/>
@@ -6605,7 +6344,7 @@
           <a:noFill/>
         </p:spPr>
         <p:txBody>
-          <a:bodyPr wrap="square" lIns="0" rIns="0" tIns="0" bIns="0" anchor="t">
+          <a:bodyPr wrap="square" lIns="0" tIns="0" rIns="0" bIns="0" anchor="t">
             <a:noAutofit/>
           </a:bodyPr>
           <a:lstStyle/>
@@ -6665,6 +6404,7 @@
           <a:lstStyle/>
           <a:p>
             <a:pPr algn="ctr"/>
+            <a:endParaRPr/>
           </a:p>
         </p:txBody>
       </p:sp>
@@ -6685,7 +6425,7 @@
           <a:noFill/>
         </p:spPr>
         <p:txBody>
-          <a:bodyPr wrap="square" lIns="0" rIns="0" tIns="0" bIns="0" anchor="t">
+          <a:bodyPr wrap="square" lIns="0" tIns="0" rIns="0" bIns="0" anchor="t">
             <a:noAutofit/>
           </a:bodyPr>
           <a:lstStyle/>
@@ -6731,7 +6471,7 @@
           <a:noFill/>
         </p:spPr>
         <p:txBody>
-          <a:bodyPr wrap="square" lIns="0" rIns="0" tIns="0" bIns="0" anchor="t">
+          <a:bodyPr wrap="square" lIns="0" tIns="0" rIns="0" bIns="0" anchor="t">
             <a:noAutofit/>
           </a:bodyPr>
           <a:lstStyle/>
@@ -6791,6 +6531,7 @@
           <a:lstStyle/>
           <a:p>
             <a:pPr algn="ctr"/>
+            <a:endParaRPr/>
           </a:p>
         </p:txBody>
       </p:sp>
@@ -6811,7 +6552,7 @@
           <a:noFill/>
         </p:spPr>
         <p:txBody>
-          <a:bodyPr wrap="square" lIns="0" rIns="0" tIns="0" bIns="0" anchor="t">
+          <a:bodyPr wrap="square" lIns="0" tIns="0" rIns="0" bIns="0" anchor="t">
             <a:noAutofit/>
           </a:bodyPr>
           <a:lstStyle/>
@@ -6857,7 +6598,7 @@
           <a:noFill/>
         </p:spPr>
         <p:txBody>
-          <a:bodyPr wrap="square" lIns="0" rIns="0" tIns="0" bIns="0" anchor="t">
+          <a:bodyPr wrap="square" lIns="0" tIns="0" rIns="0" bIns="0" anchor="t">
             <a:noAutofit/>
           </a:bodyPr>
           <a:lstStyle/>
@@ -6917,6 +6658,7 @@
           <a:lstStyle/>
           <a:p>
             <a:pPr algn="ctr"/>
+            <a:endParaRPr/>
           </a:p>
         </p:txBody>
       </p:sp>
@@ -6937,7 +6679,7 @@
           <a:noFill/>
         </p:spPr>
         <p:txBody>
-          <a:bodyPr wrap="square" lIns="0" rIns="0" tIns="0" bIns="0" anchor="t">
+          <a:bodyPr wrap="square" lIns="0" tIns="0" rIns="0" bIns="0" anchor="t">
             <a:noAutofit/>
           </a:bodyPr>
           <a:lstStyle/>
@@ -6983,7 +6725,7 @@
           <a:noFill/>
         </p:spPr>
         <p:txBody>
-          <a:bodyPr wrap="square" lIns="0" rIns="0" tIns="0" bIns="0" anchor="t">
+          <a:bodyPr wrap="square" lIns="0" tIns="0" rIns="0" bIns="0" anchor="t">
             <a:noAutofit/>
           </a:bodyPr>
           <a:lstStyle/>
@@ -7043,6 +6785,7 @@
           <a:lstStyle/>
           <a:p>
             <a:pPr algn="ctr"/>
+            <a:endParaRPr/>
           </a:p>
         </p:txBody>
       </p:sp>
@@ -7063,7 +6806,7 @@
           <a:noFill/>
         </p:spPr>
         <p:txBody>
-          <a:bodyPr wrap="square" lIns="0" rIns="0" tIns="0" bIns="0" anchor="t">
+          <a:bodyPr wrap="square" lIns="0" tIns="0" rIns="0" bIns="0" anchor="t">
             <a:noAutofit/>
           </a:bodyPr>
           <a:lstStyle/>
@@ -7109,7 +6852,7 @@
           <a:noFill/>
         </p:spPr>
         <p:txBody>
-          <a:bodyPr wrap="square" lIns="0" rIns="0" tIns="0" bIns="0" anchor="t">
+          <a:bodyPr wrap="square" lIns="0" tIns="0" rIns="0" bIns="0" anchor="t">
             <a:noAutofit/>
           </a:bodyPr>
           <a:lstStyle/>
@@ -7169,6 +6912,7 @@
           <a:lstStyle/>
           <a:p>
             <a:pPr algn="ctr"/>
+            <a:endParaRPr/>
           </a:p>
         </p:txBody>
       </p:sp>
@@ -7199,6 +6943,7 @@
           <a:lstStyle/>
           <a:p>
             <a:pPr algn="ctr"/>
+            <a:endParaRPr/>
           </a:p>
         </p:txBody>
       </p:sp>
@@ -7219,7 +6964,7 @@
           <a:noFill/>
         </p:spPr>
         <p:txBody>
-          <a:bodyPr wrap="square" lIns="0" rIns="0" tIns="0" bIns="0" anchor="t">
+          <a:bodyPr wrap="square" lIns="0" tIns="0" rIns="0" bIns="0" anchor="t">
             <a:noAutofit/>
           </a:bodyPr>
           <a:lstStyle/>
@@ -7265,7 +7010,7 @@
           <a:noFill/>
         </p:spPr>
         <p:txBody>
-          <a:bodyPr wrap="square" lIns="0" rIns="0" tIns="0" bIns="0" anchor="t">
+          <a:bodyPr wrap="square" lIns="0" tIns="0" rIns="0" bIns="0" anchor="t">
             <a:noAutofit/>
           </a:bodyPr>
           <a:lstStyle/>
@@ -7339,52 +7084,6 @@
       </p:sp>
       <p:sp>
         <p:nvSpPr>
-          <p:cNvPr id="24" name="TextBox 23"/>
-          <p:cNvSpPr txBox="1"/>
-          <p:nvPr/>
-        </p:nvSpPr>
-        <p:spPr>
-          <a:xfrm>
-            <a:off x="640080" y="6419088"/>
-            <a:ext cx="8869680" cy="237744"/>
-          </a:xfrm>
-          <a:prstGeom prst="rect">
-            <a:avLst/>
-          </a:prstGeom>
-          <a:noFill/>
-        </p:spPr>
-        <p:txBody>
-          <a:bodyPr wrap="square" lIns="0" rIns="0" tIns="0" bIns="0" anchor="t">
-            <a:noAutofit/>
-          </a:bodyPr>
-          <a:lstStyle/>
-          <a:p>
-            <a:pPr algn="l">
-              <a:lnSpc>
-                <a:spcPct val="115000"/>
-              </a:lnSpc>
-              <a:spcBef>
-                <a:spcPts val="0"/>
-              </a:spcBef>
-              <a:spcAft>
-                <a:spcPts val="0"/>
-              </a:spcAft>
-            </a:pPr>
-            <a:r>
-              <a:rPr sz="850" b="0" i="0">
-                <a:solidFill>
-                  <a:srgbClr val="53676D"/>
-                </a:solidFill>
-                <a:latin typeface="Segoe UI"/>
-                <a:ea typeface="Microsoft YaHei"/>
-              </a:rPr>
-              <a:t>阶段划分见 README.md 第 8 节；求解器与 GPU 检查于 2026-10-25</a:t>
-            </a:r>
-          </a:p>
-        </p:txBody>
-      </p:sp>
-      <p:sp>
-        <p:nvSpPr>
           <p:cNvPr id="25" name="TextBox 24"/>
           <p:cNvSpPr txBox="1"/>
           <p:nvPr/>
@@ -7400,7 +7099,7 @@
           <a:noFill/>
         </p:spPr>
         <p:txBody>
-          <a:bodyPr wrap="square" lIns="0" rIns="0" tIns="0" bIns="0" anchor="t">
+          <a:bodyPr wrap="square" lIns="0" tIns="0" rIns="0" bIns="0" anchor="t">
             <a:noAutofit/>
           </a:bodyPr>
           <a:lstStyle/>
@@ -7438,7 +7137,7 @@
 </file>
 
 <file path=ppt/slides/slide4.xml><?xml version="1.0" encoding="utf-8"?>
-<p:sld xmlns:a="http://schemas.openxmlformats.org/drawingml/2006/main" xmlns:p="http://schemas.openxmlformats.org/presentationml/2006/main" xmlns:r="http://schemas.openxmlformats.org/officeDocument/2006/relationships">
+<p:sld xmlns:a="http://schemas.openxmlformats.org/drawingml/2006/main" xmlns:r="http://schemas.openxmlformats.org/officeDocument/2006/relationships" xmlns:p="http://schemas.openxmlformats.org/presentationml/2006/main">
   <p:cSld>
     <p:bg>
       <p:bgPr>
@@ -7454,7 +7153,14 @@
         <p:cNvGrpSpPr/>
         <p:nvPr/>
       </p:nvGrpSpPr>
-      <p:grpSpPr/>
+      <p:grpSpPr>
+        <a:xfrm>
+          <a:off x="0" y="0"/>
+          <a:ext cx="0" cy="0"/>
+          <a:chOff x="0" y="0"/>
+          <a:chExt cx="0" cy="0"/>
+        </a:xfrm>
+      </p:grpSpPr>
       <p:sp>
         <p:nvSpPr>
           <p:cNvPr id="2" name="TextBox 1"/>
@@ -7472,7 +7178,7 @@
           <a:noFill/>
         </p:spPr>
         <p:txBody>
-          <a:bodyPr wrap="square" lIns="0" rIns="0" tIns="0" bIns="0" anchor="t">
+          <a:bodyPr wrap="square" lIns="0" tIns="0" rIns="0" bIns="0" anchor="t">
             <a:noAutofit/>
           </a:bodyPr>
           <a:lstStyle/>
@@ -7538,7 +7244,7 @@
           <a:noFill/>
         </p:spPr>
         <p:txBody>
-          <a:bodyPr wrap="square" lIns="0" rIns="0" tIns="0" bIns="0" anchor="ctr">
+          <a:bodyPr wrap="square" lIns="0" tIns="0" rIns="0" bIns="0" anchor="ctr">
             <a:noAutofit/>
           </a:bodyPr>
           <a:lstStyle/>
@@ -7594,6 +7300,7 @@
           <a:lstStyle/>
           <a:p>
             <a:pPr algn="ctr"/>
+            <a:endParaRPr/>
           </a:p>
         </p:txBody>
       </p:sp>
@@ -7628,6 +7335,7 @@
           <a:lstStyle/>
           <a:p>
             <a:pPr algn="ctr"/>
+            <a:endParaRPr/>
           </a:p>
         </p:txBody>
       </p:sp>
@@ -7648,7 +7356,7 @@
           <a:noFill/>
         </p:spPr>
         <p:txBody>
-          <a:bodyPr wrap="square" lIns="0" rIns="0" tIns="0" bIns="0" anchor="t">
+          <a:bodyPr wrap="square" lIns="0" tIns="0" rIns="0" bIns="0" anchor="t">
             <a:noAutofit/>
           </a:bodyPr>
           <a:lstStyle/>
@@ -7694,7 +7402,7 @@
           <a:noFill/>
         </p:spPr>
         <p:txBody>
-          <a:bodyPr wrap="square" lIns="0" rIns="0" tIns="0" bIns="0" anchor="t">
+          <a:bodyPr wrap="square" lIns="0" tIns="0" rIns="0" bIns="0" anchor="t">
             <a:noAutofit/>
           </a:bodyPr>
           <a:lstStyle/>
@@ -7740,7 +7448,7 @@
           <a:noFill/>
         </p:spPr>
         <p:txBody>
-          <a:bodyPr wrap="square" lIns="0" rIns="0" tIns="0" bIns="0" anchor="t">
+          <a:bodyPr wrap="square" lIns="0" tIns="0" rIns="0" bIns="0" anchor="t">
             <a:noAutofit/>
           </a:bodyPr>
           <a:lstStyle/>
@@ -7786,7 +7494,7 @@
           <a:noFill/>
         </p:spPr>
         <p:txBody>
-          <a:bodyPr wrap="square" lIns="0" rIns="0" tIns="0" bIns="0" anchor="t">
+          <a:bodyPr wrap="square" lIns="0" tIns="0" rIns="0" bIns="0" anchor="t">
             <a:noAutofit/>
           </a:bodyPr>
           <a:lstStyle/>
@@ -7856,6 +7564,7 @@
           <a:lstStyle/>
           <a:p>
             <a:pPr algn="ctr"/>
+            <a:endParaRPr/>
           </a:p>
         </p:txBody>
       </p:sp>
@@ -7876,7 +7585,7 @@
           <a:noFill/>
         </p:spPr>
         <p:txBody>
-          <a:bodyPr wrap="square" lIns="0" rIns="0" tIns="0" bIns="0" anchor="t">
+          <a:bodyPr wrap="square" lIns="0" tIns="0" rIns="0" bIns="0" anchor="t">
             <a:noAutofit/>
           </a:bodyPr>
           <a:lstStyle/>
@@ -7922,7 +7631,7 @@
           <a:noFill/>
         </p:spPr>
         <p:txBody>
-          <a:bodyPr wrap="square" lIns="0" rIns="0" tIns="0" bIns="0" anchor="t">
+          <a:bodyPr wrap="square" lIns="0" tIns="0" rIns="0" bIns="0" anchor="t">
             <a:noAutofit/>
           </a:bodyPr>
           <a:lstStyle/>
@@ -7968,7 +7677,7 @@
           <a:noFill/>
         </p:spPr>
         <p:txBody>
-          <a:bodyPr wrap="square" lIns="0" rIns="0" tIns="0" bIns="0" anchor="t">
+          <a:bodyPr wrap="square" lIns="0" tIns="0" rIns="0" bIns="0" anchor="t">
             <a:noAutofit/>
           </a:bodyPr>
           <a:lstStyle/>
@@ -8014,7 +7723,7 @@
           <a:noFill/>
         </p:spPr>
         <p:txBody>
-          <a:bodyPr wrap="square" lIns="0" rIns="0" tIns="0" bIns="0" anchor="t">
+          <a:bodyPr wrap="square" lIns="0" tIns="0" rIns="0" bIns="0" anchor="t">
             <a:noAutofit/>
           </a:bodyPr>
           <a:lstStyle/>
@@ -8084,6 +7793,7 @@
           <a:lstStyle/>
           <a:p>
             <a:pPr algn="ctr"/>
+            <a:endParaRPr/>
           </a:p>
         </p:txBody>
       </p:sp>
@@ -8104,7 +7814,7 @@
           <a:noFill/>
         </p:spPr>
         <p:txBody>
-          <a:bodyPr wrap="square" lIns="0" rIns="0" tIns="0" bIns="0" anchor="t">
+          <a:bodyPr wrap="square" lIns="0" tIns="0" rIns="0" bIns="0" anchor="t">
             <a:noAutofit/>
           </a:bodyPr>
           <a:lstStyle/>
@@ -8150,7 +7860,7 @@
           <a:noFill/>
         </p:spPr>
         <p:txBody>
-          <a:bodyPr wrap="square" lIns="0" rIns="0" tIns="0" bIns="0" anchor="t">
+          <a:bodyPr wrap="square" lIns="0" tIns="0" rIns="0" bIns="0" anchor="t">
             <a:noAutofit/>
           </a:bodyPr>
           <a:lstStyle/>
@@ -8196,7 +7906,7 @@
           <a:noFill/>
         </p:spPr>
         <p:txBody>
-          <a:bodyPr wrap="square" lIns="0" rIns="0" tIns="0" bIns="0" anchor="t">
+          <a:bodyPr wrap="square" lIns="0" tIns="0" rIns="0" bIns="0" anchor="t">
             <a:noAutofit/>
           </a:bodyPr>
           <a:lstStyle/>
@@ -8242,7 +7952,7 @@
           <a:noFill/>
         </p:spPr>
         <p:txBody>
-          <a:bodyPr wrap="square" lIns="0" rIns="0" tIns="0" bIns="0" anchor="t">
+          <a:bodyPr wrap="square" lIns="0" tIns="0" rIns="0" bIns="0" anchor="t">
             <a:noAutofit/>
           </a:bodyPr>
           <a:lstStyle/>
@@ -8312,6 +8022,7 @@
           <a:lstStyle/>
           <a:p>
             <a:pPr algn="ctr"/>
+            <a:endParaRPr/>
           </a:p>
         </p:txBody>
       </p:sp>
@@ -8332,7 +8043,7 @@
           <a:noFill/>
         </p:spPr>
         <p:txBody>
-          <a:bodyPr wrap="square" lIns="0" rIns="0" tIns="0" bIns="0" anchor="t">
+          <a:bodyPr wrap="square" lIns="0" tIns="0" rIns="0" bIns="0" anchor="t">
             <a:noAutofit/>
           </a:bodyPr>
           <a:lstStyle/>
@@ -8378,7 +8089,7 @@
           <a:noFill/>
         </p:spPr>
         <p:txBody>
-          <a:bodyPr wrap="square" lIns="0" rIns="0" tIns="0" bIns="0" anchor="t">
+          <a:bodyPr wrap="square" lIns="0" tIns="0" rIns="0" bIns="0" anchor="t">
             <a:noAutofit/>
           </a:bodyPr>
           <a:lstStyle/>
@@ -8424,7 +8135,7 @@
           <a:noFill/>
         </p:spPr>
         <p:txBody>
-          <a:bodyPr wrap="square" lIns="0" rIns="0" tIns="0" bIns="0" anchor="t">
+          <a:bodyPr wrap="square" lIns="0" tIns="0" rIns="0" bIns="0" anchor="t">
             <a:noAutofit/>
           </a:bodyPr>
           <a:lstStyle/>
@@ -8470,7 +8181,7 @@
           <a:noFill/>
         </p:spPr>
         <p:txBody>
-          <a:bodyPr wrap="square" lIns="0" rIns="0" tIns="0" bIns="0" anchor="t">
+          <a:bodyPr wrap="square" lIns="0" tIns="0" rIns="0" bIns="0" anchor="t">
             <a:noAutofit/>
           </a:bodyPr>
           <a:lstStyle/>
@@ -8540,6 +8251,7 @@
           <a:lstStyle/>
           <a:p>
             <a:pPr algn="ctr"/>
+            <a:endParaRPr/>
           </a:p>
         </p:txBody>
       </p:sp>
@@ -8560,7 +8272,7 @@
           <a:noFill/>
         </p:spPr>
         <p:txBody>
-          <a:bodyPr wrap="square" lIns="0" rIns="0" tIns="0" bIns="0" anchor="t">
+          <a:bodyPr wrap="square" lIns="0" tIns="0" rIns="0" bIns="0" anchor="t">
             <a:noAutofit/>
           </a:bodyPr>
           <a:lstStyle/>
@@ -8606,7 +8318,7 @@
           <a:noFill/>
         </p:spPr>
         <p:txBody>
-          <a:bodyPr wrap="square" lIns="0" rIns="0" tIns="0" bIns="0" anchor="t">
+          <a:bodyPr wrap="square" lIns="0" tIns="0" rIns="0" bIns="0" anchor="t">
             <a:noAutofit/>
           </a:bodyPr>
           <a:lstStyle/>
@@ -8652,7 +8364,7 @@
           <a:noFill/>
         </p:spPr>
         <p:txBody>
-          <a:bodyPr wrap="square" lIns="0" rIns="0" tIns="0" bIns="0" anchor="t">
+          <a:bodyPr wrap="square" lIns="0" tIns="0" rIns="0" bIns="0" anchor="t">
             <a:noAutofit/>
           </a:bodyPr>
           <a:lstStyle/>
@@ -8698,7 +8410,7 @@
           <a:noFill/>
         </p:spPr>
         <p:txBody>
-          <a:bodyPr wrap="square" lIns="0" rIns="0" tIns="0" bIns="0" anchor="t">
+          <a:bodyPr wrap="square" lIns="0" tIns="0" rIns="0" bIns="0" anchor="t">
             <a:noAutofit/>
           </a:bodyPr>
           <a:lstStyle/>
@@ -8766,6 +8478,7 @@
           <a:lstStyle/>
           <a:p>
             <a:pPr algn="ctr"/>
+            <a:endParaRPr/>
           </a:p>
         </p:txBody>
       </p:sp>
@@ -8786,7 +8499,7 @@
           <a:noFill/>
         </p:spPr>
         <p:txBody>
-          <a:bodyPr wrap="square" lIns="0" rIns="0" tIns="0" bIns="0" anchor="t">
+          <a:bodyPr wrap="square" lIns="0" tIns="0" rIns="0" bIns="0" anchor="t">
             <a:noAutofit/>
           </a:bodyPr>
           <a:lstStyle/>
@@ -8832,7 +8545,7 @@
           <a:noFill/>
         </p:spPr>
         <p:txBody>
-          <a:bodyPr wrap="square" lIns="0" rIns="0" tIns="0" bIns="0" anchor="t">
+          <a:bodyPr wrap="square" lIns="0" tIns="0" rIns="0" bIns="0" anchor="t">
             <a:noAutofit/>
           </a:bodyPr>
           <a:lstStyle/>
@@ -8878,7 +8591,7 @@
           <a:noFill/>
         </p:spPr>
         <p:txBody>
-          <a:bodyPr wrap="square" lIns="0" rIns="0" tIns="0" bIns="0" anchor="t">
+          <a:bodyPr wrap="square" lIns="0" tIns="0" rIns="0" bIns="0" anchor="t">
             <a:noAutofit/>
           </a:bodyPr>
           <a:lstStyle/>
@@ -8924,7 +8637,7 @@
           <a:noFill/>
         </p:spPr>
         <p:txBody>
-          <a:bodyPr wrap="square" lIns="0" rIns="0" tIns="0" bIns="0" anchor="t">
+          <a:bodyPr wrap="square" lIns="0" tIns="0" rIns="0" bIns="0" anchor="t">
             <a:noAutofit/>
           </a:bodyPr>
           <a:lstStyle/>
@@ -8948,63 +8661,7 @@
                 <a:latin typeface="Segoe UI"/>
                 <a:ea typeface="Microsoft YaHei"/>
               </a:rPr>
-              <a:t>→ </a:t>
-            </a:r>
-            <a:r>
-              <a:rPr sz="900" b="0" i="0">
-                <a:solidFill>
-                  <a:srgbClr val="136C69"/>
-                </a:solidFill>
-                <a:latin typeface="Segoe UI"/>
-                <a:ea typeface="Microsoft YaHei"/>
-              </a:rPr>
-              <a:t>三格式可读、来源可查</a:t>
-            </a:r>
-          </a:p>
-        </p:txBody>
-      </p:sp>
-      <p:sp>
-        <p:nvSpPr>
-          <p:cNvPr id="35" name="TextBox 34"/>
-          <p:cNvSpPr txBox="1"/>
-          <p:nvPr/>
-        </p:nvSpPr>
-        <p:spPr>
-          <a:xfrm>
-            <a:off x="640080" y="6419088"/>
-            <a:ext cx="8869680" cy="237744"/>
-          </a:xfrm>
-          <a:prstGeom prst="rect">
-            <a:avLst/>
-          </a:prstGeom>
-          <a:noFill/>
-        </p:spPr>
-        <p:txBody>
-          <a:bodyPr wrap="square" lIns="0" rIns="0" tIns="0" bIns="0" anchor="t">
-            <a:noAutofit/>
-          </a:bodyPr>
-          <a:lstStyle/>
-          <a:p>
-            <a:pPr algn="l">
-              <a:lnSpc>
-                <a:spcPct val="115000"/>
-              </a:lnSpc>
-              <a:spcBef>
-                <a:spcPts val="0"/>
-              </a:spcBef>
-              <a:spcAft>
-                <a:spcPts val="0"/>
-              </a:spcAft>
-            </a:pPr>
-            <a:r>
-              <a:rPr sz="850" b="0" i="0">
-                <a:solidFill>
-                  <a:srgbClr val="53676D"/>
-                </a:solidFill>
-                <a:latin typeface="Segoe UI"/>
-                <a:ea typeface="Microsoft YaHei"/>
-              </a:rPr>
-              <a:t>详细内容见 理论学习资料/ 下五份专题文档</a:t>
+              <a:t>→ 三格式可读、来源可查</a:t>
             </a:r>
           </a:p>
         </p:txBody>
@@ -9026,7 +8683,7 @@
           <a:noFill/>
         </p:spPr>
         <p:txBody>
-          <a:bodyPr wrap="square" lIns="0" rIns="0" tIns="0" bIns="0" anchor="t">
+          <a:bodyPr wrap="square" lIns="0" tIns="0" rIns="0" bIns="0" anchor="t">
             <a:noAutofit/>
           </a:bodyPr>
           <a:lstStyle/>
@@ -9064,7 +8721,7 @@
 </file>
 
 <file path=ppt/slides/slide5.xml><?xml version="1.0" encoding="utf-8"?>
-<p:sld xmlns:a="http://schemas.openxmlformats.org/drawingml/2006/main" xmlns:p="http://schemas.openxmlformats.org/presentationml/2006/main" xmlns:r="http://schemas.openxmlformats.org/officeDocument/2006/relationships">
+<p:sld xmlns:a="http://schemas.openxmlformats.org/drawingml/2006/main" xmlns:r="http://schemas.openxmlformats.org/officeDocument/2006/relationships" xmlns:p="http://schemas.openxmlformats.org/presentationml/2006/main">
   <p:cSld>
     <p:bg>
       <p:bgPr>
@@ -9080,7 +8737,14 @@
         <p:cNvGrpSpPr/>
         <p:nvPr/>
       </p:nvGrpSpPr>
-      <p:grpSpPr/>
+      <p:grpSpPr>
+        <a:xfrm>
+          <a:off x="0" y="0"/>
+          <a:ext cx="0" cy="0"/>
+          <a:chOff x="0" y="0"/>
+          <a:chExt cx="0" cy="0"/>
+        </a:xfrm>
+      </p:grpSpPr>
       <p:sp>
         <p:nvSpPr>
           <p:cNvPr id="2" name="TextBox 1"/>
@@ -9098,7 +8762,7 @@
           <a:noFill/>
         </p:spPr>
         <p:txBody>
-          <a:bodyPr wrap="square" lIns="0" rIns="0" tIns="0" bIns="0" anchor="t">
+          <a:bodyPr wrap="square" lIns="0" tIns="0" rIns="0" bIns="0" anchor="t">
             <a:noAutofit/>
           </a:bodyPr>
           <a:lstStyle/>
@@ -9164,7 +8828,7 @@
           <a:noFill/>
         </p:spPr>
         <p:txBody>
-          <a:bodyPr wrap="square" lIns="0" rIns="0" tIns="0" bIns="0" anchor="ctr">
+          <a:bodyPr wrap="square" lIns="0" tIns="0" rIns="0" bIns="0" anchor="ctr">
             <a:noAutofit/>
           </a:bodyPr>
           <a:lstStyle/>
@@ -9188,17 +8852,7 @@
                 <a:latin typeface="Segoe UI"/>
                 <a:ea typeface="Microsoft YaHei"/>
               </a:rPr>
-              <a:t>面外是否有利，看 </a:t>
-            </a:r>
-            <a:r>
-              <a:rPr sz="2800" b="1" i="0">
-                <a:solidFill>
-                  <a:srgbClr val="172E36"/>
-                </a:solidFill>
-                <a:latin typeface="Segoe UI"/>
-                <a:ea typeface="Microsoft YaHei"/>
-              </a:rPr>
-              <a:t>K</a:t>
+              <a:t>面外是否有利，看 K</a:t>
             </a:r>
             <a:r>
               <a:rPr sz="2016" b="1" i="0" baseline="-25000">
@@ -9250,6 +8904,7 @@
           <a:lstStyle/>
           <a:p>
             <a:pPr algn="ctr"/>
+            <a:endParaRPr/>
           </a:p>
         </p:txBody>
       </p:sp>
@@ -9280,6 +8935,7 @@
           <a:lstStyle/>
           <a:p>
             <a:pPr algn="ctr"/>
+            <a:endParaRPr/>
           </a:p>
         </p:txBody>
       </p:sp>
@@ -9300,7 +8956,7 @@
           <a:noFill/>
         </p:spPr>
         <p:txBody>
-          <a:bodyPr wrap="square" lIns="0" rIns="0" tIns="0" bIns="0" anchor="t">
+          <a:bodyPr wrap="square" lIns="0" tIns="0" rIns="0" bIns="0" anchor="t">
             <a:noAutofit/>
           </a:bodyPr>
           <a:lstStyle/>
@@ -9346,7 +9002,7 @@
           <a:noFill/>
         </p:spPr>
         <p:txBody>
-          <a:bodyPr wrap="square" lIns="0" rIns="0" tIns="0" bIns="0" anchor="t">
+          <a:bodyPr wrap="square" lIns="0" tIns="0" rIns="0" bIns="0" anchor="t">
             <a:noAutofit/>
           </a:bodyPr>
           <a:lstStyle/>
@@ -9402,6 +9058,7 @@
           <a:lstStyle/>
           <a:p>
             <a:pPr algn="ctr"/>
+            <a:endParaRPr/>
           </a:p>
         </p:txBody>
       </p:sp>
@@ -9422,7 +9079,7 @@
           <a:noFill/>
         </p:spPr>
         <p:txBody>
-          <a:bodyPr wrap="square" lIns="0" rIns="0" tIns="0" bIns="0" anchor="t">
+          <a:bodyPr wrap="square" lIns="0" tIns="0" rIns="0" bIns="0" anchor="t">
             <a:noAutofit/>
           </a:bodyPr>
           <a:lstStyle/>
@@ -9468,7 +9125,7 @@
           <a:noFill/>
         </p:spPr>
         <p:txBody>
-          <a:bodyPr wrap="square" lIns="0" rIns="0" tIns="0" bIns="0" anchor="t">
+          <a:bodyPr wrap="square" lIns="0" tIns="0" rIns="0" bIns="0" anchor="t">
             <a:noAutofit/>
           </a:bodyPr>
           <a:lstStyle/>
@@ -9544,6 +9201,7 @@
           <a:lstStyle/>
           <a:p>
             <a:pPr algn="ctr"/>
+            <a:endParaRPr/>
           </a:p>
         </p:txBody>
       </p:sp>
@@ -9564,7 +9222,7 @@
           <a:noFill/>
         </p:spPr>
         <p:txBody>
-          <a:bodyPr wrap="square" lIns="0" rIns="0" tIns="0" bIns="0" anchor="t">
+          <a:bodyPr wrap="square" lIns="0" tIns="0" rIns="0" bIns="0" anchor="t">
             <a:noAutofit/>
           </a:bodyPr>
           <a:lstStyle/>
@@ -9610,7 +9268,7 @@
           <a:noFill/>
         </p:spPr>
         <p:txBody>
-          <a:bodyPr wrap="square" lIns="0" rIns="0" tIns="0" bIns="0" anchor="t">
+          <a:bodyPr wrap="square" lIns="0" tIns="0" rIns="0" bIns="0" anchor="t">
             <a:noAutofit/>
           </a:bodyPr>
           <a:lstStyle/>
@@ -9666,6 +9324,7 @@
           <a:lstStyle/>
           <a:p>
             <a:pPr algn="ctr"/>
+            <a:endParaRPr/>
           </a:p>
         </p:txBody>
       </p:sp>
@@ -9686,7 +9345,7 @@
           <a:noFill/>
         </p:spPr>
         <p:txBody>
-          <a:bodyPr wrap="square" lIns="0" rIns="0" tIns="0" bIns="0" anchor="t">
+          <a:bodyPr wrap="square" lIns="0" tIns="0" rIns="0" bIns="0" anchor="t">
             <a:noAutofit/>
           </a:bodyPr>
           <a:lstStyle/>
@@ -9732,7 +9391,7 @@
           <a:noFill/>
         </p:spPr>
         <p:txBody>
-          <a:bodyPr wrap="square" lIns="0" rIns="0" tIns="0" bIns="0" anchor="t">
+          <a:bodyPr wrap="square" lIns="0" tIns="0" rIns="0" bIns="0" anchor="t">
             <a:noAutofit/>
           </a:bodyPr>
           <a:lstStyle/>
@@ -9790,6 +9449,7 @@
           <a:lstStyle/>
           <a:p>
             <a:pPr algn="ctr"/>
+            <a:endParaRPr/>
           </a:p>
         </p:txBody>
       </p:sp>
@@ -9810,7 +9470,7 @@
           <a:noFill/>
         </p:spPr>
         <p:txBody>
-          <a:bodyPr wrap="square" lIns="0" rIns="0" tIns="0" bIns="0" anchor="t">
+          <a:bodyPr wrap="square" lIns="0" tIns="0" rIns="0" bIns="0" anchor="t">
             <a:noAutofit/>
           </a:bodyPr>
           <a:lstStyle/>
@@ -9856,7 +9516,7 @@
           <a:noFill/>
         </p:spPr>
         <p:txBody>
-          <a:bodyPr wrap="square" lIns="0" rIns="0" tIns="0" bIns="0" anchor="ctr">
+          <a:bodyPr wrap="square" lIns="0" tIns="0" rIns="0" bIns="0" anchor="ctr">
             <a:noAutofit/>
           </a:bodyPr>
           <a:lstStyle/>
@@ -10036,6 +9696,7 @@
           <a:lstStyle/>
           <a:p>
             <a:pPr algn="ctr"/>
+            <a:endParaRPr/>
           </a:p>
         </p:txBody>
       </p:sp>
@@ -10056,7 +9717,7 @@
           <a:noFill/>
         </p:spPr>
         <p:txBody>
-          <a:bodyPr wrap="square" lIns="0" rIns="0" tIns="0" bIns="0" anchor="t">
+          <a:bodyPr wrap="square" lIns="0" tIns="0" rIns="0" bIns="0" anchor="t">
             <a:noAutofit/>
           </a:bodyPr>
           <a:lstStyle/>
@@ -10102,7 +9763,7 @@
           <a:noFill/>
         </p:spPr>
         <p:txBody>
-          <a:bodyPr wrap="square" lIns="0" rIns="0" tIns="0" bIns="0" anchor="t">
+          <a:bodyPr wrap="square" lIns="0" tIns="0" rIns="0" bIns="0" anchor="t">
             <a:noAutofit/>
           </a:bodyPr>
           <a:lstStyle/>
@@ -10269,7 +9930,17 @@
                 <a:latin typeface="Segoe UI"/>
                 <a:ea typeface="Microsoft YaHei"/>
               </a:rPr>
-              <a:t>²/2 = </a:t>
+              <a:t>²/2 = 5.65×10</a:t>
+            </a:r>
+            <a:r>
+              <a:rPr sz="827" b="0" i="0" baseline="30000">
+                <a:solidFill>
+                  <a:srgbClr val="3A4A50"/>
+                </a:solidFill>
+                <a:latin typeface="Segoe UI"/>
+                <a:ea typeface="Microsoft YaHei"/>
+              </a:rPr>
+              <a:t>4</a:t>
             </a:r>
             <a:r>
               <a:rPr sz="1150" b="0" i="0">
@@ -10279,17 +9950,17 @@
                 <a:latin typeface="Segoe UI"/>
                 <a:ea typeface="Microsoft YaHei"/>
               </a:rPr>
-              <a:t>5.65×10</a:t>
-            </a:r>
-            <a:r>
-              <a:rPr sz="827" b="0" i="0" baseline="30000">
+              <a:t> J/m³，N</a:t>
+            </a:r>
+            <a:r>
+              <a:rPr sz="827" b="0" i="0" baseline="-25000">
                 <a:solidFill>
                   <a:srgbClr val="3A4A50"/>
                 </a:solidFill>
                 <a:latin typeface="Segoe UI"/>
                 <a:ea typeface="Microsoft YaHei"/>
               </a:rPr>
-              <a:t>4</a:t>
+              <a:t>z</a:t>
             </a:r>
             <a:r>
               <a:rPr sz="1150" b="0" i="0">
@@ -10299,7 +9970,7 @@
                 <a:latin typeface="Segoe UI"/>
                 <a:ea typeface="Microsoft YaHei"/>
               </a:rPr>
-              <a:t> J/m³，N</a:t>
+              <a:t> − N</a:t>
             </a:r>
             <a:r>
               <a:rPr sz="827" b="0" i="0" baseline="-25000">
@@ -10309,7 +9980,7 @@
                 <a:latin typeface="Segoe UI"/>
                 <a:ea typeface="Microsoft YaHei"/>
               </a:rPr>
-              <a:t>z</a:t>
+              <a:t>x</a:t>
             </a:r>
             <a:r>
               <a:rPr sz="1150" b="0" i="0">
@@ -10319,37 +9990,7 @@
                 <a:latin typeface="Segoe UI"/>
                 <a:ea typeface="Microsoft YaHei"/>
               </a:rPr>
-              <a:t> − N</a:t>
-            </a:r>
-            <a:r>
-              <a:rPr sz="827" b="0" i="0" baseline="-25000">
-                <a:solidFill>
-                  <a:srgbClr val="3A4A50"/>
-                </a:solidFill>
-                <a:latin typeface="Segoe UI"/>
-                <a:ea typeface="Microsoft YaHei"/>
-              </a:rPr>
-              <a:t>x</a:t>
-            </a:r>
-            <a:r>
-              <a:rPr sz="1150" b="0" i="0">
-                <a:solidFill>
-                  <a:srgbClr val="3A4A50"/>
-                </a:solidFill>
-                <a:latin typeface="Segoe UI"/>
-                <a:ea typeface="Microsoft YaHei"/>
-              </a:rPr>
-              <a:t> = </a:t>
-            </a:r>
-            <a:r>
-              <a:rPr sz="1150" b="0" i="0">
-                <a:solidFill>
-                  <a:srgbClr val="3A4A50"/>
-                </a:solidFill>
-                <a:latin typeface="Segoe UI"/>
-                <a:ea typeface="Microsoft YaHei"/>
-              </a:rPr>
-              <a:t>0.911</a:t>
+              <a:t> = 0.911</a:t>
             </a:r>
           </a:p>
           <a:p>
@@ -10372,7 +10013,17 @@
                 <a:latin typeface="Segoe UI"/>
                 <a:ea typeface="Microsoft YaHei"/>
               </a:rPr>
-              <a:t>阈值 </a:t>
+              <a:t>阈值 5.15×10</a:t>
+            </a:r>
+            <a:r>
+              <a:rPr sz="827" b="0" i="0" baseline="30000">
+                <a:solidFill>
+                  <a:srgbClr val="3A4A50"/>
+                </a:solidFill>
+                <a:latin typeface="Segoe UI"/>
+                <a:ea typeface="Microsoft YaHei"/>
+              </a:rPr>
+              <a:t>4</a:t>
             </a:r>
             <a:r>
               <a:rPr sz="1150" b="0" i="0">
@@ -10382,17 +10033,17 @@
                 <a:latin typeface="Segoe UI"/>
                 <a:ea typeface="Microsoft YaHei"/>
               </a:rPr>
-              <a:t>5.15×10</a:t>
-            </a:r>
-            <a:r>
-              <a:rPr sz="827" b="0" i="0" baseline="30000">
+              <a:t> &lt; K</a:t>
+            </a:r>
+            <a:r>
+              <a:rPr sz="827" b="0" i="0" baseline="-25000">
                 <a:solidFill>
                   <a:srgbClr val="3A4A50"/>
                 </a:solidFill>
                 <a:latin typeface="Segoe UI"/>
                 <a:ea typeface="Microsoft YaHei"/>
               </a:rPr>
-              <a:t>4</a:t>
+              <a:t>u</a:t>
             </a:r>
             <a:r>
               <a:rPr sz="1150" b="0" i="0">
@@ -10402,7 +10053,7 @@
                 <a:latin typeface="Segoe UI"/>
                 <a:ea typeface="Microsoft YaHei"/>
               </a:rPr>
-              <a:t> &lt; K</a:t>
+              <a:t>  ⇒  K</a:t>
             </a:r>
             <a:r>
               <a:rPr sz="827" b="0" i="0" baseline="-25000">
@@ -10412,7 +10063,7 @@
                 <a:latin typeface="Segoe UI"/>
                 <a:ea typeface="Microsoft YaHei"/>
               </a:rPr>
-              <a:t>u</a:t>
+              <a:t>eff</a:t>
             </a:r>
             <a:r>
               <a:rPr sz="1150" b="0" i="0">
@@ -10422,37 +10073,7 @@
                 <a:latin typeface="Segoe UI"/>
                 <a:ea typeface="Microsoft YaHei"/>
               </a:rPr>
-              <a:t>  ⇒  K</a:t>
-            </a:r>
-            <a:r>
-              <a:rPr sz="827" b="0" i="0" baseline="-25000">
-                <a:solidFill>
-                  <a:srgbClr val="3A4A50"/>
-                </a:solidFill>
-                <a:latin typeface="Segoe UI"/>
-                <a:ea typeface="Microsoft YaHei"/>
-              </a:rPr>
-              <a:t>eff</a:t>
-            </a:r>
-            <a:r>
-              <a:rPr sz="1150" b="0" i="0">
-                <a:solidFill>
-                  <a:srgbClr val="3A4A50"/>
-                </a:solidFill>
-                <a:latin typeface="Segoe UI"/>
-                <a:ea typeface="Microsoft YaHei"/>
-              </a:rPr>
-              <a:t> = </a:t>
-            </a:r>
-            <a:r>
-              <a:rPr sz="1150" b="0" i="0">
-                <a:solidFill>
-                  <a:srgbClr val="3A4A50"/>
-                </a:solidFill>
-                <a:latin typeface="Segoe UI"/>
-                <a:ea typeface="Microsoft YaHei"/>
-              </a:rPr>
-              <a:t>2.85×10</a:t>
+              <a:t> = 2.85×10</a:t>
             </a:r>
             <a:r>
               <a:rPr sz="827" b="0" i="0" baseline="30000">
@@ -10515,27 +10136,7 @@
                 <a:latin typeface="Segoe UI"/>
                 <a:ea typeface="Microsoft YaHei"/>
               </a:rPr>
-              <a:t> = </a:t>
-            </a:r>
-            <a:r>
-              <a:rPr sz="1150" b="0" i="0">
-                <a:solidFill>
-                  <a:srgbClr val="3A4A50"/>
-                </a:solidFill>
-                <a:latin typeface="Segoe UI"/>
-                <a:ea typeface="Microsoft YaHei"/>
-              </a:rPr>
-              <a:t>9.4</a:t>
-            </a:r>
-            <a:r>
-              <a:rPr sz="1150" b="0" i="0">
-                <a:solidFill>
-                  <a:srgbClr val="3A4A50"/>
-                </a:solidFill>
-                <a:latin typeface="Segoe UI"/>
-                <a:ea typeface="Microsoft YaHei"/>
-              </a:rPr>
-              <a:t> nm  ⇒ 网格 2 nm 起步，再以 1 nm 复算</a:t>
+              <a:t> = 9.4 nm  ⇒ 网格 2 nm 起步，再以 1 nm 复算</a:t>
             </a:r>
           </a:p>
         </p:txBody>
@@ -10557,7 +10158,7 @@
           <a:noFill/>
         </p:spPr>
         <p:txBody>
-          <a:bodyPr wrap="square" lIns="0" rIns="0" tIns="0" bIns="0" anchor="t">
+          <a:bodyPr wrap="square" lIns="0" tIns="0" rIns="0" bIns="0" anchor="t">
             <a:noAutofit/>
           </a:bodyPr>
           <a:lstStyle/>
@@ -10668,52 +10269,6 @@
       </p:sp>
       <p:sp>
         <p:nvSpPr>
-          <p:cNvPr id="24" name="TextBox 23"/>
-          <p:cNvSpPr txBox="1"/>
-          <p:nvPr/>
-        </p:nvSpPr>
-        <p:spPr>
-          <a:xfrm>
-            <a:off x="640080" y="6419088"/>
-            <a:ext cx="8869680" cy="237744"/>
-          </a:xfrm>
-          <a:prstGeom prst="rect">
-            <a:avLst/>
-          </a:prstGeom>
-          <a:noFill/>
-        </p:spPr>
-        <p:txBody>
-          <a:bodyPr wrap="square" lIns="0" rIns="0" tIns="0" bIns="0" anchor="t">
-            <a:noAutofit/>
-          </a:bodyPr>
-          <a:lstStyle/>
-          <a:p>
-            <a:pPr algn="l">
-              <a:lnSpc>
-                <a:spcPct val="115000"/>
-              </a:lnSpc>
-              <a:spcBef>
-                <a:spcPts val="0"/>
-              </a:spcBef>
-              <a:spcAft>
-                <a:spcPts val="0"/>
-              </a:spcAft>
-            </a:pPr>
-            <a:r>
-              <a:rPr sz="850" b="0" i="0">
-                <a:solidFill>
-                  <a:srgbClr val="53676D"/>
-                </a:solidFill>
-                <a:latin typeface="Segoe UI"/>
-                <a:ea typeface="Microsoft YaHei"/>
-              </a:rPr>
-              <a:t>推导见 2-微磁学四种能量竞争_学习笔记.md §8；参数见 3-Fidimag…md §7</a:t>
-            </a:r>
-          </a:p>
-        </p:txBody>
-      </p:sp>
-      <p:sp>
-        <p:nvSpPr>
           <p:cNvPr id="25" name="TextBox 24"/>
           <p:cNvSpPr txBox="1"/>
           <p:nvPr/>
@@ -10729,7 +10284,7 @@
           <a:noFill/>
         </p:spPr>
         <p:txBody>
-          <a:bodyPr wrap="square" lIns="0" rIns="0" tIns="0" bIns="0" anchor="t">
+          <a:bodyPr wrap="square" lIns="0" tIns="0" rIns="0" bIns="0" anchor="t">
             <a:noAutofit/>
           </a:bodyPr>
           <a:lstStyle/>
@@ -10767,7 +10322,7 @@
 </file>
 
 <file path=ppt/slides/slide6.xml><?xml version="1.0" encoding="utf-8"?>
-<p:sld xmlns:a="http://schemas.openxmlformats.org/drawingml/2006/main" xmlns:p="http://schemas.openxmlformats.org/presentationml/2006/main" xmlns:r="http://schemas.openxmlformats.org/officeDocument/2006/relationships">
+<p:sld xmlns:a="http://schemas.openxmlformats.org/drawingml/2006/main" xmlns:r="http://schemas.openxmlformats.org/officeDocument/2006/relationships" xmlns:p="http://schemas.openxmlformats.org/presentationml/2006/main">
   <p:cSld>
     <p:bg>
       <p:bgPr>
@@ -10783,7 +10338,14 @@
         <p:cNvGrpSpPr/>
         <p:nvPr/>
       </p:nvGrpSpPr>
-      <p:grpSpPr/>
+      <p:grpSpPr>
+        <a:xfrm>
+          <a:off x="0" y="0"/>
+          <a:ext cx="0" cy="0"/>
+          <a:chOff x="0" y="0"/>
+          <a:chExt cx="0" cy="0"/>
+        </a:xfrm>
+      </p:grpSpPr>
       <p:sp>
         <p:nvSpPr>
           <p:cNvPr id="2" name="TextBox 1"/>
@@ -10801,7 +10363,7 @@
           <a:noFill/>
         </p:spPr>
         <p:txBody>
-          <a:bodyPr wrap="square" lIns="0" rIns="0" tIns="0" bIns="0" anchor="t">
+          <a:bodyPr wrap="square" lIns="0" tIns="0" rIns="0" bIns="0" anchor="t">
             <a:noAutofit/>
           </a:bodyPr>
           <a:lstStyle/>
@@ -10867,7 +10429,7 @@
           <a:noFill/>
         </p:spPr>
         <p:txBody>
-          <a:bodyPr wrap="square" lIns="0" rIns="0" tIns="0" bIns="0" anchor="ctr">
+          <a:bodyPr wrap="square" lIns="0" tIns="0" rIns="0" bIns="0" anchor="ctr">
             <a:noAutofit/>
           </a:bodyPr>
           <a:lstStyle/>
@@ -10891,17 +10453,7 @@
                 <a:latin typeface="Segoe UI"/>
                 <a:ea typeface="Microsoft YaHei"/>
               </a:rPr>
-              <a:t>平面形状改的是面内各向异性，厚度才主导 </a:t>
-            </a:r>
-            <a:r>
-              <a:rPr sz="2800" b="1" i="0">
-                <a:solidFill>
-                  <a:srgbClr val="172E36"/>
-                </a:solidFill>
-                <a:latin typeface="Segoe UI"/>
-                <a:ea typeface="Microsoft YaHei"/>
-              </a:rPr>
-              <a:t>N</a:t>
+              <a:t>平面形状改的是面内各向异性，厚度才主导 N</a:t>
             </a:r>
             <a:r>
               <a:rPr sz="2016" b="1" i="0" baseline="-25000">
@@ -10943,6 +10495,7 @@
           <a:lstStyle/>
           <a:p>
             <a:pPr algn="ctr"/>
+            <a:endParaRPr/>
           </a:p>
         </p:txBody>
       </p:sp>
@@ -10963,15 +10516,39 @@
             <a:tbl>
               <a:tblPr firstRow="1" bandRow="1"/>
               <a:tblGrid>
-                <a:gridCol w="2194560"/>
-                <a:gridCol w="1371600"/>
-                <a:gridCol w="1371600"/>
-                <a:gridCol w="1371600"/>
+                <a:gridCol w="2194560">
+                  <a:extLst>
+                    <a:ext uri="{9D8B030D-6E8A-4147-A177-3AD203B41FA5}">
+                      <a16:colId xmlns:a16="http://schemas.microsoft.com/office/drawing/2014/main" val="20000"/>
+                    </a:ext>
+                  </a:extLst>
+                </a:gridCol>
+                <a:gridCol w="1371600">
+                  <a:extLst>
+                    <a:ext uri="{9D8B030D-6E8A-4147-A177-3AD203B41FA5}">
+                      <a16:colId xmlns:a16="http://schemas.microsoft.com/office/drawing/2014/main" val="20001"/>
+                    </a:ext>
+                  </a:extLst>
+                </a:gridCol>
+                <a:gridCol w="1371600">
+                  <a:extLst>
+                    <a:ext uri="{9D8B030D-6E8A-4147-A177-3AD203B41FA5}">
+                      <a16:colId xmlns:a16="http://schemas.microsoft.com/office/drawing/2014/main" val="20002"/>
+                    </a:ext>
+                  </a:extLst>
+                </a:gridCol>
+                <a:gridCol w="1371600">
+                  <a:extLst>
+                    <a:ext uri="{9D8B030D-6E8A-4147-A177-3AD203B41FA5}">
+                      <a16:colId xmlns:a16="http://schemas.microsoft.com/office/drawing/2014/main" val="20003"/>
+                    </a:ext>
+                  </a:extLst>
+                </a:gridCol>
               </a:tblGrid>
               <a:tr h="411480">
                 <a:tc>
                   <a:txBody>
-                    <a:bodyPr wrap="none"/>
+                    <a:bodyPr/>
                     <a:lstStyle/>
                     <a:p>
                       <a:pPr algn="l"/>
@@ -10995,7 +10572,7 @@
                 </a:tc>
                 <a:tc>
                   <a:txBody>
-                    <a:bodyPr wrap="none"/>
+                    <a:bodyPr/>
                     <a:lstStyle/>
                     <a:p>
                       <a:pPr algn="ctr"/>
@@ -11029,7 +10606,7 @@
                 </a:tc>
                 <a:tc>
                   <a:txBody>
-                    <a:bodyPr wrap="none"/>
+                    <a:bodyPr/>
                     <a:lstStyle/>
                     <a:p>
                       <a:pPr algn="ctr"/>
@@ -11063,7 +10640,7 @@
                 </a:tc>
                 <a:tc>
                   <a:txBody>
-                    <a:bodyPr wrap="none"/>
+                    <a:bodyPr/>
                     <a:lstStyle/>
                     <a:p>
                       <a:pPr algn="ctr"/>
@@ -11095,11 +10672,16 @@
                     </a:solidFill>
                   </a:tcPr>
                 </a:tc>
+                <a:extLst>
+                  <a:ext uri="{0D108BD9-81ED-4DB2-BD59-A6C34878D82A}">
+                    <a16:rowId xmlns:a16="http://schemas.microsoft.com/office/drawing/2014/main" val="10000"/>
+                  </a:ext>
+                </a:extLst>
               </a:tr>
               <a:tr h="411480">
                 <a:tc>
                   <a:txBody>
-                    <a:bodyPr wrap="none"/>
+                    <a:bodyPr/>
                     <a:lstStyle/>
                     <a:p>
                       <a:pPr algn="l"/>
@@ -11123,7 +10705,7 @@
                 </a:tc>
                 <a:tc>
                   <a:txBody>
-                    <a:bodyPr wrap="none"/>
+                    <a:bodyPr/>
                     <a:lstStyle/>
                     <a:p>
                       <a:pPr algn="ctr"/>
@@ -11147,7 +10729,7 @@
                 </a:tc>
                 <a:tc>
                   <a:txBody>
-                    <a:bodyPr wrap="none"/>
+                    <a:bodyPr/>
                     <a:lstStyle/>
                     <a:p>
                       <a:pPr algn="ctr"/>
@@ -11171,7 +10753,7 @@
                 </a:tc>
                 <a:tc>
                   <a:txBody>
-                    <a:bodyPr wrap="none"/>
+                    <a:bodyPr/>
                     <a:lstStyle/>
                     <a:p>
                       <a:pPr algn="ctr"/>
@@ -11193,11 +10775,16 @@
                     </a:solidFill>
                   </a:tcPr>
                 </a:tc>
+                <a:extLst>
+                  <a:ext uri="{0D108BD9-81ED-4DB2-BD59-A6C34878D82A}">
+                    <a16:rowId xmlns:a16="http://schemas.microsoft.com/office/drawing/2014/main" val="10001"/>
+                  </a:ext>
+                </a:extLst>
               </a:tr>
               <a:tr h="411480">
                 <a:tc>
                   <a:txBody>
-                    <a:bodyPr wrap="none"/>
+                    <a:bodyPr/>
                     <a:lstStyle/>
                     <a:p>
                       <a:pPr algn="l"/>
@@ -11221,7 +10808,7 @@
                 </a:tc>
                 <a:tc>
                   <a:txBody>
-                    <a:bodyPr wrap="none"/>
+                    <a:bodyPr/>
                     <a:lstStyle/>
                     <a:p>
                       <a:pPr algn="ctr"/>
@@ -11245,7 +10832,7 @@
                 </a:tc>
                 <a:tc>
                   <a:txBody>
-                    <a:bodyPr wrap="none"/>
+                    <a:bodyPr/>
                     <a:lstStyle/>
                     <a:p>
                       <a:pPr algn="ctr"/>
@@ -11269,7 +10856,7 @@
                 </a:tc>
                 <a:tc>
                   <a:txBody>
-                    <a:bodyPr wrap="none"/>
+                    <a:bodyPr/>
                     <a:lstStyle/>
                     <a:p>
                       <a:pPr algn="ctr"/>
@@ -11291,11 +10878,16 @@
                     </a:solidFill>
                   </a:tcPr>
                 </a:tc>
+                <a:extLst>
+                  <a:ext uri="{0D108BD9-81ED-4DB2-BD59-A6C34878D82A}">
+                    <a16:rowId xmlns:a16="http://schemas.microsoft.com/office/drawing/2014/main" val="10002"/>
+                  </a:ext>
+                </a:extLst>
               </a:tr>
               <a:tr h="411480">
                 <a:tc>
                   <a:txBody>
-                    <a:bodyPr wrap="none"/>
+                    <a:bodyPr/>
                     <a:lstStyle/>
                     <a:p>
                       <a:pPr algn="l"/>
@@ -11319,7 +10911,7 @@
                 </a:tc>
                 <a:tc>
                   <a:txBody>
-                    <a:bodyPr wrap="none"/>
+                    <a:bodyPr/>
                     <a:lstStyle/>
                     <a:p>
                       <a:pPr algn="ctr"/>
@@ -11343,7 +10935,7 @@
                 </a:tc>
                 <a:tc>
                   <a:txBody>
-                    <a:bodyPr wrap="none"/>
+                    <a:bodyPr/>
                     <a:lstStyle/>
                     <a:p>
                       <a:pPr algn="ctr"/>
@@ -11367,7 +10959,7 @@
                 </a:tc>
                 <a:tc>
                   <a:txBody>
-                    <a:bodyPr wrap="none"/>
+                    <a:bodyPr/>
                     <a:lstStyle/>
                     <a:p>
                       <a:pPr algn="ctr"/>
@@ -11389,6 +10981,11 @@
                     </a:solidFill>
                   </a:tcPr>
                 </a:tc>
+                <a:extLst>
+                  <a:ext uri="{0D108BD9-81ED-4DB2-BD59-A6C34878D82A}">
+                    <a16:rowId xmlns:a16="http://schemas.microsoft.com/office/drawing/2014/main" val="10003"/>
+                  </a:ext>
+                </a:extLst>
               </a:tr>
             </a:tbl>
           </a:graphicData>
@@ -11411,7 +11008,7 @@
           <a:noFill/>
         </p:spPr>
         <p:txBody>
-          <a:bodyPr wrap="square" lIns="0" rIns="0" tIns="0" bIns="0" anchor="t">
+          <a:bodyPr wrap="square" lIns="0" tIns="0" rIns="0" bIns="0" anchor="t">
             <a:noAutofit/>
           </a:bodyPr>
           <a:lstStyle/>
@@ -11467,6 +11064,7 @@
           <a:lstStyle/>
           <a:p>
             <a:pPr algn="ctr"/>
+            <a:endParaRPr/>
           </a:p>
         </p:txBody>
       </p:sp>
@@ -11497,6 +11095,7 @@
           <a:lstStyle/>
           <a:p>
             <a:pPr algn="ctr"/>
+            <a:endParaRPr/>
           </a:p>
         </p:txBody>
       </p:sp>
@@ -11527,6 +11126,7 @@
           <a:lstStyle/>
           <a:p>
             <a:pPr algn="ctr"/>
+            <a:endParaRPr/>
           </a:p>
         </p:txBody>
       </p:sp>
@@ -11547,7 +11147,7 @@
           <a:noFill/>
         </p:spPr>
         <p:txBody>
-          <a:bodyPr wrap="square" lIns="0" rIns="0" tIns="0" bIns="0" anchor="ctr">
+          <a:bodyPr wrap="square" lIns="0" tIns="0" rIns="0" bIns="0" anchor="ctr">
             <a:noAutofit/>
           </a:bodyPr>
           <a:lstStyle/>
@@ -11613,7 +11213,7 @@
           <a:noFill/>
         </p:spPr>
         <p:txBody>
-          <a:bodyPr wrap="square" lIns="0" rIns="0" tIns="0" bIns="0" anchor="t">
+          <a:bodyPr wrap="square" lIns="0" tIns="0" rIns="0" bIns="0" anchor="t">
             <a:noAutofit/>
           </a:bodyPr>
           <a:lstStyle/>
@@ -11699,7 +11299,7 @@
           <a:noFill/>
         </p:spPr>
         <p:txBody>
-          <a:bodyPr wrap="square" lIns="0" rIns="0" tIns="0" bIns="0" anchor="t">
+          <a:bodyPr wrap="square" lIns="0" tIns="0" rIns="0" bIns="0" anchor="t">
             <a:noAutofit/>
           </a:bodyPr>
           <a:lstStyle/>
@@ -11775,7 +11375,7 @@
           <a:noFill/>
         </p:spPr>
         <p:txBody>
-          <a:bodyPr wrap="square" lIns="0" rIns="0" tIns="0" bIns="0" anchor="t">
+          <a:bodyPr wrap="square" lIns="0" tIns="0" rIns="0" bIns="0" anchor="t">
             <a:noAutofit/>
           </a:bodyPr>
           <a:lstStyle/>
@@ -11821,7 +11421,7 @@
           <a:noFill/>
         </p:spPr>
         <p:txBody>
-          <a:bodyPr wrap="square" lIns="0" rIns="0" tIns="0" bIns="0" anchor="t">
+          <a:bodyPr wrap="square" lIns="0" tIns="0" rIns="0" bIns="0" anchor="t">
             <a:noAutofit/>
           </a:bodyPr>
           <a:lstStyle/>
@@ -11845,7 +11445,17 @@
                 <a:latin typeface="Segoe UI"/>
                 <a:ea typeface="Microsoft YaHei"/>
               </a:rPr>
-              <a:t>同面积同厚度，方形改长条：</a:t>
+              <a:t>同面积同厚度，方形改长条：N</a:t>
+            </a:r>
+            <a:r>
+              <a:rPr sz="756" b="0" i="0" baseline="-25000">
+                <a:solidFill>
+                  <a:srgbClr val="3A4A50"/>
+                </a:solidFill>
+                <a:latin typeface="Segoe UI"/>
+                <a:ea typeface="Microsoft YaHei"/>
+              </a:rPr>
+              <a:t>z</a:t>
             </a:r>
             <a:r>
               <a:rPr sz="1050" b="0" i="0">
@@ -11855,7 +11465,7 @@
                 <a:latin typeface="Segoe UI"/>
                 <a:ea typeface="Microsoft YaHei"/>
               </a:rPr>
-              <a:t>N</a:t>
+              <a:t> 几乎不变，变的是面内 N</a:t>
             </a:r>
             <a:r>
               <a:rPr sz="756" b="0" i="0" baseline="-25000">
@@ -11865,7 +11475,7 @@
                 <a:latin typeface="Segoe UI"/>
                 <a:ea typeface="Microsoft YaHei"/>
               </a:rPr>
-              <a:t>z</a:t>
+              <a:t>x</a:t>
             </a:r>
             <a:r>
               <a:rPr sz="1050" b="0" i="0">
@@ -11875,47 +11485,7 @@
                 <a:latin typeface="Segoe UI"/>
                 <a:ea typeface="Microsoft YaHei"/>
               </a:rPr>
-              <a:t> 几乎不变，变的是面内 </a:t>
-            </a:r>
-            <a:r>
-              <a:rPr sz="1050" b="0" i="0">
-                <a:solidFill>
-                  <a:srgbClr val="3A4A50"/>
-                </a:solidFill>
-                <a:latin typeface="Segoe UI"/>
-                <a:ea typeface="Microsoft YaHei"/>
-              </a:rPr>
-              <a:t>N</a:t>
-            </a:r>
-            <a:r>
-              <a:rPr sz="756" b="0" i="0" baseline="-25000">
-                <a:solidFill>
-                  <a:srgbClr val="3A4A50"/>
-                </a:solidFill>
-                <a:latin typeface="Segoe UI"/>
-                <a:ea typeface="Microsoft YaHei"/>
-              </a:rPr>
-              <a:t>x</a:t>
-            </a:r>
-            <a:r>
-              <a:rPr sz="1050" b="0" i="0">
-                <a:solidFill>
-                  <a:srgbClr val="3A4A50"/>
-                </a:solidFill>
-                <a:latin typeface="Segoe UI"/>
-                <a:ea typeface="Microsoft YaHei"/>
-              </a:rPr>
-              <a:t> 0.030→0.014、</a:t>
-            </a:r>
-            <a:r>
-              <a:rPr sz="1050" b="0" i="0">
-                <a:solidFill>
-                  <a:srgbClr val="3A4A50"/>
-                </a:solidFill>
-                <a:latin typeface="Segoe UI"/>
-                <a:ea typeface="Microsoft YaHei"/>
-              </a:rPr>
-              <a:t>N</a:t>
+              <a:t> 0.030→0.014、N</a:t>
             </a:r>
             <a:r>
               <a:rPr sz="756" b="0" i="0" baseline="-25000">
@@ -11967,6 +11537,7 @@
           <a:lstStyle/>
           <a:p>
             <a:pPr algn="ctr"/>
+            <a:endParaRPr/>
           </a:p>
         </p:txBody>
       </p:sp>
@@ -11987,7 +11558,7 @@
           <a:noFill/>
         </p:spPr>
         <p:txBody>
-          <a:bodyPr wrap="square" lIns="0" rIns="0" tIns="0" bIns="0" anchor="t">
+          <a:bodyPr wrap="square" lIns="0" tIns="0" rIns="0" bIns="0" anchor="t">
             <a:noAutofit/>
           </a:bodyPr>
           <a:lstStyle/>
@@ -12033,7 +11604,7 @@
           <a:noFill/>
         </p:spPr>
         <p:txBody>
-          <a:bodyPr wrap="square" lIns="0" rIns="0" tIns="0" bIns="0" anchor="t">
+          <a:bodyPr wrap="square" lIns="0" tIns="0" rIns="0" bIns="0" anchor="t">
             <a:noAutofit/>
           </a:bodyPr>
           <a:lstStyle/>
@@ -12057,7 +11628,17 @@
                 <a:latin typeface="Segoe UI"/>
                 <a:ea typeface="Microsoft YaHei"/>
               </a:rPr>
-              <a:t>厚度 4 → 20 nm：</a:t>
+              <a:t>厚度 4 → 20 nm：N</a:t>
+            </a:r>
+            <a:r>
+              <a:rPr sz="756" b="0" i="0" baseline="-25000">
+                <a:solidFill>
+                  <a:srgbClr val="3A4A50"/>
+                </a:solidFill>
+                <a:latin typeface="Segoe UI"/>
+                <a:ea typeface="Microsoft YaHei"/>
+              </a:rPr>
+              <a:t>z</a:t>
             </a:r>
             <a:r>
               <a:rPr sz="1050" b="0" i="0">
@@ -12067,37 +11648,7 @@
                 <a:latin typeface="Segoe UI"/>
                 <a:ea typeface="Microsoft YaHei"/>
               </a:rPr>
-              <a:t>N</a:t>
-            </a:r>
-            <a:r>
-              <a:rPr sz="756" b="0" i="0" baseline="-25000">
-                <a:solidFill>
-                  <a:srgbClr val="3A4A50"/>
-                </a:solidFill>
-                <a:latin typeface="Segoe UI"/>
-                <a:ea typeface="Microsoft YaHei"/>
-              </a:rPr>
-              <a:t>z</a:t>
-            </a:r>
-            <a:r>
-              <a:rPr sz="1050" b="0" i="0">
-                <a:solidFill>
-                  <a:srgbClr val="3A4A50"/>
-                </a:solidFill>
-                <a:latin typeface="Segoe UI"/>
-                <a:ea typeface="Microsoft YaHei"/>
-              </a:rPr>
-              <a:t> 明显下降，厚度才是 </a:t>
-            </a:r>
-            <a:r>
-              <a:rPr sz="1050" b="0" i="0">
-                <a:solidFill>
-                  <a:srgbClr val="3A4A50"/>
-                </a:solidFill>
-                <a:latin typeface="Segoe UI"/>
-                <a:ea typeface="Microsoft YaHei"/>
-              </a:rPr>
-              <a:t>N</a:t>
+              <a:t> 明显下降，厚度才是 N</a:t>
             </a:r>
             <a:r>
               <a:rPr sz="756" b="0" i="0" baseline="-25000">
@@ -12149,6 +11700,7 @@
           <a:lstStyle/>
           <a:p>
             <a:pPr algn="ctr"/>
+            <a:endParaRPr/>
           </a:p>
         </p:txBody>
       </p:sp>
@@ -12169,7 +11721,7 @@
           <a:noFill/>
         </p:spPr>
         <p:txBody>
-          <a:bodyPr wrap="square" lIns="0" rIns="0" tIns="0" bIns="0" anchor="t">
+          <a:bodyPr wrap="square" lIns="0" tIns="0" rIns="0" bIns="0" anchor="t">
             <a:noAutofit/>
           </a:bodyPr>
           <a:lstStyle/>
@@ -12215,7 +11767,7 @@
           <a:noFill/>
         </p:spPr>
         <p:txBody>
-          <a:bodyPr wrap="square" lIns="0" rIns="0" tIns="0" bIns="0" anchor="t">
+          <a:bodyPr wrap="square" lIns="0" tIns="0" rIns="0" bIns="0" anchor="t">
             <a:noAutofit/>
           </a:bodyPr>
           <a:lstStyle/>
@@ -12239,7 +11791,17 @@
                 <a:latin typeface="Segoe UI"/>
                 <a:ea typeface="Microsoft YaHei"/>
               </a:rPr>
-              <a:t>中心点 </a:t>
+              <a:t>中心点 N</a:t>
+            </a:r>
+            <a:r>
+              <a:rPr sz="756" b="0" i="0" baseline="-25000">
+                <a:solidFill>
+                  <a:srgbClr val="3A4A50"/>
+                </a:solidFill>
+                <a:latin typeface="Segoe UI"/>
+                <a:ea typeface="Microsoft YaHei"/>
+              </a:rPr>
+              <a:t>z</a:t>
             </a:r>
             <a:r>
               <a:rPr sz="1050" b="0" i="0">
@@ -12249,7 +11811,7 @@
                 <a:latin typeface="Segoe UI"/>
                 <a:ea typeface="Microsoft YaHei"/>
               </a:rPr>
-              <a:t>N</a:t>
+              <a:t> 比体积平均高 4.37%；用无限薄膜 N</a:t>
             </a:r>
             <a:r>
               <a:rPr sz="756" b="0" i="0" baseline="-25000">
@@ -12269,83 +11831,7 @@
                 <a:latin typeface="Segoe UI"/>
                 <a:ea typeface="Microsoft YaHei"/>
               </a:rPr>
-              <a:t> 比体积平均高 4.37%；用无限薄膜 </a:t>
-            </a:r>
-            <a:r>
-              <a:rPr sz="1050" b="0" i="0">
-                <a:solidFill>
-                  <a:srgbClr val="3A4A50"/>
-                </a:solidFill>
-                <a:latin typeface="Segoe UI"/>
-                <a:ea typeface="Microsoft YaHei"/>
-              </a:rPr>
-              <a:t>N</a:t>
-            </a:r>
-            <a:r>
-              <a:rPr sz="756" b="0" i="0" baseline="-25000">
-                <a:solidFill>
-                  <a:srgbClr val="3A4A50"/>
-                </a:solidFill>
-                <a:latin typeface="Segoe UI"/>
-                <a:ea typeface="Microsoft YaHei"/>
-              </a:rPr>
-              <a:t>z</a:t>
-            </a:r>
-            <a:r>
-              <a:rPr sz="1050" b="0" i="0">
-                <a:solidFill>
-                  <a:srgbClr val="3A4A50"/>
-                </a:solidFill>
-                <a:latin typeface="Segoe UI"/>
-                <a:ea typeface="Microsoft YaHei"/>
-              </a:rPr>
               <a:t>=1 会高估 6.29%。</a:t>
-            </a:r>
-          </a:p>
-        </p:txBody>
-      </p:sp>
-      <p:sp>
-        <p:nvSpPr>
-          <p:cNvPr id="21" name="TextBox 20"/>
-          <p:cNvSpPr txBox="1"/>
-          <p:nvPr/>
-        </p:nvSpPr>
-        <p:spPr>
-          <a:xfrm>
-            <a:off x="640080" y="6419088"/>
-            <a:ext cx="8869680" cy="237744"/>
-          </a:xfrm>
-          <a:prstGeom prst="rect">
-            <a:avLst/>
-          </a:prstGeom>
-          <a:noFill/>
-        </p:spPr>
-        <p:txBody>
-          <a:bodyPr wrap="square" lIns="0" rIns="0" tIns="0" bIns="0" anchor="t">
-            <a:noAutofit/>
-          </a:bodyPr>
-          <a:lstStyle/>
-          <a:p>
-            <a:pPr algn="l">
-              <a:lnSpc>
-                <a:spcPct val="115000"/>
-              </a:lnSpc>
-              <a:spcBef>
-                <a:spcPts val="0"/>
-              </a:spcBef>
-              <a:spcAft>
-                <a:spcPts val="0"/>
-              </a:spcAft>
-            </a:pPr>
-            <a:r>
-              <a:rPr sz="850" b="0" i="0">
-                <a:solidFill>
-                  <a:srgbClr val="53676D"/>
-                </a:solidFill>
-                <a:latin typeface="Segoe UI"/>
-                <a:ea typeface="Microsoft YaHei"/>
-              </a:rPr>
-              <a:t>固定均匀磁化下的解析值（Newell/Aharoni），不是微磁模拟结果</a:t>
             </a:r>
           </a:p>
         </p:txBody>
@@ -12367,7 +11853,7 @@
           <a:noFill/>
         </p:spPr>
         <p:txBody>
-          <a:bodyPr wrap="square" lIns="0" rIns="0" tIns="0" bIns="0" anchor="t">
+          <a:bodyPr wrap="square" lIns="0" tIns="0" rIns="0" bIns="0" anchor="t">
             <a:noAutofit/>
           </a:bodyPr>
           <a:lstStyle/>
@@ -12405,7 +11891,7 @@
 </file>
 
 <file path=ppt/slides/slide7.xml><?xml version="1.0" encoding="utf-8"?>
-<p:sld xmlns:a="http://schemas.openxmlformats.org/drawingml/2006/main" xmlns:p="http://schemas.openxmlformats.org/presentationml/2006/main" xmlns:r="http://schemas.openxmlformats.org/officeDocument/2006/relationships">
+<p:sld xmlns:a="http://schemas.openxmlformats.org/drawingml/2006/main" xmlns:r="http://schemas.openxmlformats.org/officeDocument/2006/relationships" xmlns:p="http://schemas.openxmlformats.org/presentationml/2006/main">
   <p:cSld>
     <p:bg>
       <p:bgPr>
@@ -12421,7 +11907,14 @@
         <p:cNvGrpSpPr/>
         <p:nvPr/>
       </p:nvGrpSpPr>
-      <p:grpSpPr/>
+      <p:grpSpPr>
+        <a:xfrm>
+          <a:off x="0" y="0"/>
+          <a:ext cx="0" cy="0"/>
+          <a:chOff x="0" y="0"/>
+          <a:chExt cx="0" cy="0"/>
+        </a:xfrm>
+      </p:grpSpPr>
       <p:sp>
         <p:nvSpPr>
           <p:cNvPr id="2" name="TextBox 1"/>
@@ -12439,7 +11932,7 @@
           <a:noFill/>
         </p:spPr>
         <p:txBody>
-          <a:bodyPr wrap="square" lIns="0" rIns="0" tIns="0" bIns="0" anchor="t">
+          <a:bodyPr wrap="square" lIns="0" tIns="0" rIns="0" bIns="0" anchor="t">
             <a:noAutofit/>
           </a:bodyPr>
           <a:lstStyle/>
@@ -12505,7 +11998,7 @@
           <a:noFill/>
         </p:spPr>
         <p:txBody>
-          <a:bodyPr wrap="square" lIns="0" rIns="0" tIns="0" bIns="0" anchor="ctr">
+          <a:bodyPr wrap="square" lIns="0" tIns="0" rIns="0" bIns="0" anchor="ctr">
             <a:noAutofit/>
           </a:bodyPr>
           <a:lstStyle/>
@@ -12561,6 +12054,7 @@
           <a:lstStyle/>
           <a:p>
             <a:pPr algn="ctr"/>
+            <a:endParaRPr/>
           </a:p>
         </p:txBody>
       </p:sp>
@@ -12595,6 +12089,7 @@
           <a:lstStyle/>
           <a:p>
             <a:pPr algn="ctr"/>
+            <a:endParaRPr/>
           </a:p>
         </p:txBody>
       </p:sp>
@@ -12625,6 +12120,7 @@
           <a:lstStyle/>
           <a:p>
             <a:pPr algn="ctr"/>
+            <a:endParaRPr/>
           </a:p>
         </p:txBody>
       </p:sp>
@@ -12645,7 +12141,7 @@
           <a:noFill/>
         </p:spPr>
         <p:txBody>
-          <a:bodyPr wrap="square" lIns="0" rIns="0" tIns="0" bIns="0" anchor="t">
+          <a:bodyPr wrap="square" lIns="0" tIns="0" rIns="0" bIns="0" anchor="t">
             <a:noAutofit/>
           </a:bodyPr>
           <a:lstStyle/>
@@ -12691,7 +12187,7 @@
           <a:noFill/>
         </p:spPr>
         <p:txBody>
-          <a:bodyPr wrap="square" lIns="0" rIns="0" tIns="0" bIns="0" anchor="t">
+          <a:bodyPr wrap="square" lIns="0" tIns="0" rIns="0" bIns="0" anchor="t">
             <a:noAutofit/>
           </a:bodyPr>
           <a:lstStyle/>
@@ -12737,7 +12233,7 @@
           <a:noFill/>
         </p:spPr>
         <p:txBody>
-          <a:bodyPr wrap="square" lIns="0" rIns="0" tIns="0" bIns="0" anchor="t">
+          <a:bodyPr wrap="square" lIns="0" tIns="0" rIns="0" bIns="0" anchor="t">
             <a:noAutofit/>
           </a:bodyPr>
           <a:lstStyle/>
@@ -12761,17 +12257,7 @@
                 <a:latin typeface="Segoe UI"/>
                 <a:ea typeface="Microsoft YaHei"/>
               </a:rPr>
-              <a:t>对 OOMMF 基准：</a:t>
-            </a:r>
-            <a:r>
-              <a:rPr sz="1150" b="0" i="0">
-                <a:solidFill>
-                  <a:srgbClr val="3A4A50"/>
-                </a:solidFill>
-                <a:latin typeface="Segoe UI"/>
-                <a:ea typeface="Microsoft YaHei"/>
-              </a:rPr>
-              <a:t>7.49×10</a:t>
+              <a:t>对 OOMMF 基准：7.49×10</a:t>
             </a:r>
             <a:r>
               <a:rPr sz="827" b="0" i="0" baseline="30000">
@@ -12804,17 +12290,7 @@
                 <a:latin typeface="Segoe UI"/>
                 <a:ea typeface="Microsoft YaHei"/>
               </a:rPr>
-              <a:t>迹误差：</a:t>
-            </a:r>
-            <a:r>
-              <a:rPr sz="1150" b="0" i="0">
-                <a:solidFill>
-                  <a:srgbClr val="3A4A50"/>
-                </a:solidFill>
-                <a:latin typeface="Segoe UI"/>
-                <a:ea typeface="Microsoft YaHei"/>
-              </a:rPr>
-              <a:t>4.02×10</a:t>
+              <a:t>迹误差：4.02×10</a:t>
             </a:r>
             <a:r>
               <a:rPr sz="827" b="0" i="0" baseline="30000">
@@ -12847,17 +12323,7 @@
                 <a:latin typeface="Segoe UI"/>
                 <a:ea typeface="Microsoft YaHei"/>
               </a:rPr>
-              <a:t>独立积分交叉验证：</a:t>
-            </a:r>
-            <a:r>
-              <a:rPr sz="1150" b="0" i="0">
-                <a:solidFill>
-                  <a:srgbClr val="3A4A50"/>
-                </a:solidFill>
-                <a:latin typeface="Segoe UI"/>
-                <a:ea typeface="Microsoft YaHei"/>
-              </a:rPr>
-              <a:t>1.84×10</a:t>
+              <a:t>独立积分交叉验证：1.84×10</a:t>
             </a:r>
             <a:r>
               <a:rPr sz="827" b="0" i="0" baseline="30000">
@@ -12889,7 +12355,7 @@
           <a:noFill/>
         </p:spPr>
         <p:txBody>
-          <a:bodyPr wrap="square" lIns="0" rIns="0" tIns="0" bIns="0" anchor="t">
+          <a:bodyPr wrap="square" lIns="0" tIns="0" rIns="0" bIns="0" anchor="t">
             <a:noAutofit/>
           </a:bodyPr>
           <a:lstStyle/>
@@ -12949,6 +12415,7 @@
           <a:lstStyle/>
           <a:p>
             <a:pPr algn="ctr"/>
+            <a:endParaRPr/>
           </a:p>
         </p:txBody>
       </p:sp>
@@ -12979,6 +12446,7 @@
           <a:lstStyle/>
           <a:p>
             <a:pPr algn="ctr"/>
+            <a:endParaRPr/>
           </a:p>
         </p:txBody>
       </p:sp>
@@ -12999,7 +12467,7 @@
           <a:noFill/>
         </p:spPr>
         <p:txBody>
-          <a:bodyPr wrap="square" lIns="0" rIns="0" tIns="0" bIns="0" anchor="t">
+          <a:bodyPr wrap="square" lIns="0" tIns="0" rIns="0" bIns="0" anchor="t">
             <a:noAutofit/>
           </a:bodyPr>
           <a:lstStyle/>
@@ -13045,7 +12513,7 @@
           <a:noFill/>
         </p:spPr>
         <p:txBody>
-          <a:bodyPr wrap="square" lIns="0" rIns="0" tIns="0" bIns="0" anchor="t">
+          <a:bodyPr wrap="square" lIns="0" tIns="0" rIns="0" bIns="0" anchor="t">
             <a:noAutofit/>
           </a:bodyPr>
           <a:lstStyle/>
@@ -13091,7 +12559,7 @@
           <a:noFill/>
         </p:spPr>
         <p:txBody>
-          <a:bodyPr wrap="square" lIns="0" rIns="0" tIns="0" bIns="0" anchor="t">
+          <a:bodyPr wrap="square" lIns="0" tIns="0" rIns="0" bIns="0" anchor="t">
             <a:noAutofit/>
           </a:bodyPr>
           <a:lstStyle/>
@@ -13115,17 +12583,7 @@
                 <a:latin typeface="Segoe UI"/>
                 <a:ea typeface="Microsoft YaHei"/>
               </a:rPr>
-              <a:t>与解析解：</a:t>
-            </a:r>
-            <a:r>
-              <a:rPr sz="1150" b="0" i="0">
-                <a:solidFill>
-                  <a:srgbClr val="3A4A50"/>
-                </a:solidFill>
-                <a:latin typeface="Segoe UI"/>
-                <a:ea typeface="Microsoft YaHei"/>
-              </a:rPr>
-              <a:t>2.76×10</a:t>
+              <a:t>与解析解：2.76×10</a:t>
             </a:r>
             <a:r>
               <a:rPr sz="827" b="0" i="0" baseline="30000">
@@ -13158,17 +12616,7 @@
                 <a:latin typeface="Segoe UI"/>
                 <a:ea typeface="Microsoft YaHei"/>
               </a:rPr>
-              <a:t>模长误差：</a:t>
-            </a:r>
-            <a:r>
-              <a:rPr sz="1150" b="0" i="0">
-                <a:solidFill>
-                  <a:srgbClr val="3A4A50"/>
-                </a:solidFill>
-                <a:latin typeface="Segoe UI"/>
-                <a:ea typeface="Microsoft YaHei"/>
-              </a:rPr>
-              <a:t>1.02×10</a:t>
+              <a:t>模长误差：1.02×10</a:t>
             </a:r>
             <a:r>
               <a:rPr sz="827" b="0" i="0" baseline="30000">
@@ -13201,17 +12649,7 @@
                 <a:latin typeface="Segoe UI"/>
                 <a:ea typeface="Microsoft YaHei"/>
               </a:rPr>
-              <a:t>步长减半差：</a:t>
-            </a:r>
-            <a:r>
-              <a:rPr sz="1150" b="0" i="0">
-                <a:solidFill>
-                  <a:srgbClr val="3A4A50"/>
-                </a:solidFill>
-                <a:latin typeface="Segoe UI"/>
-                <a:ea typeface="Microsoft YaHei"/>
-              </a:rPr>
-              <a:t>2.59×10</a:t>
+              <a:t>步长减半差：2.59×10</a:t>
             </a:r>
             <a:r>
               <a:rPr sz="827" b="0" i="0" baseline="30000">
@@ -13243,7 +12681,7 @@
           <a:noFill/>
         </p:spPr>
         <p:txBody>
-          <a:bodyPr wrap="square" lIns="0" rIns="0" tIns="0" bIns="0" anchor="t">
+          <a:bodyPr wrap="square" lIns="0" tIns="0" rIns="0" bIns="0" anchor="t">
             <a:noAutofit/>
           </a:bodyPr>
           <a:lstStyle/>
@@ -13301,6 +12739,7 @@
           <a:lstStyle/>
           <a:p>
             <a:pPr algn="ctr"/>
+            <a:endParaRPr/>
           </a:p>
         </p:txBody>
       </p:sp>
@@ -13331,6 +12770,7 @@
           <a:lstStyle/>
           <a:p>
             <a:pPr algn="ctr"/>
+            <a:endParaRPr/>
           </a:p>
         </p:txBody>
       </p:sp>
@@ -13351,7 +12791,7 @@
           <a:noFill/>
         </p:spPr>
         <p:txBody>
-          <a:bodyPr wrap="square" lIns="0" rIns="0" tIns="0" bIns="0" anchor="t">
+          <a:bodyPr wrap="square" lIns="0" tIns="0" rIns="0" bIns="0" anchor="t">
             <a:noAutofit/>
           </a:bodyPr>
           <a:lstStyle/>
@@ -13397,7 +12837,7 @@
           <a:noFill/>
         </p:spPr>
         <p:txBody>
-          <a:bodyPr wrap="square" lIns="0" rIns="0" tIns="0" bIns="0" anchor="t">
+          <a:bodyPr wrap="square" lIns="0" tIns="0" rIns="0" bIns="0" anchor="t">
             <a:noAutofit/>
           </a:bodyPr>
           <a:lstStyle/>
@@ -13443,7 +12883,7 @@
           <a:noFill/>
         </p:spPr>
         <p:txBody>
-          <a:bodyPr wrap="square" lIns="0" rIns="0" tIns="0" bIns="0" anchor="t">
+          <a:bodyPr wrap="square" lIns="0" tIns="0" rIns="0" bIns="0" anchor="t">
             <a:noAutofit/>
           </a:bodyPr>
           <a:lstStyle/>
@@ -13499,7 +12939,7 @@
           <a:noFill/>
         </p:spPr>
         <p:txBody>
-          <a:bodyPr wrap="square" lIns="0" rIns="0" tIns="0" bIns="0" anchor="t">
+          <a:bodyPr wrap="square" lIns="0" tIns="0" rIns="0" bIns="0" anchor="t">
             <a:noAutofit/>
           </a:bodyPr>
           <a:lstStyle/>
@@ -13530,52 +12970,6 @@
       </p:sp>
       <p:sp>
         <p:nvSpPr>
-          <p:cNvPr id="23" name="TextBox 22"/>
-          <p:cNvSpPr txBox="1"/>
-          <p:nvPr/>
-        </p:nvSpPr>
-        <p:spPr>
-          <a:xfrm>
-            <a:off x="640080" y="6419088"/>
-            <a:ext cx="8869680" cy="237744"/>
-          </a:xfrm>
-          <a:prstGeom prst="rect">
-            <a:avLst/>
-          </a:prstGeom>
-          <a:noFill/>
-        </p:spPr>
-        <p:txBody>
-          <a:bodyPr wrap="square" lIns="0" rIns="0" tIns="0" bIns="0" anchor="t">
-            <a:noAutofit/>
-          </a:bodyPr>
-          <a:lstStyle/>
-          <a:p>
-            <a:pPr algn="l">
-              <a:lnSpc>
-                <a:spcPct val="115000"/>
-              </a:lnSpc>
-              <a:spcBef>
-                <a:spcPts val="0"/>
-              </a:spcBef>
-              <a:spcAft>
-                <a:spcPts val="0"/>
-              </a:spcAft>
-            </a:pPr>
-            <a:r>
-              <a:rPr sz="850" b="0" i="0">
-                <a:solidFill>
-                  <a:srgbClr val="53676D"/>
-                </a:solidFill>
-                <a:latin typeface="Segoe UI"/>
-                <a:ea typeface="Microsoft YaHei"/>
-              </a:rPr>
-              <a:t>结果来自 rectangular_demag.py 与 macrospin_results/verification.json</a:t>
-            </a:r>
-          </a:p>
-        </p:txBody>
-      </p:sp>
-      <p:sp>
-        <p:nvSpPr>
           <p:cNvPr id="24" name="TextBox 23"/>
           <p:cNvSpPr txBox="1"/>
           <p:nvPr/>
@@ -13591,7 +12985,7 @@
           <a:noFill/>
         </p:spPr>
         <p:txBody>
-          <a:bodyPr wrap="square" lIns="0" rIns="0" tIns="0" bIns="0" anchor="t">
+          <a:bodyPr wrap="square" lIns="0" tIns="0" rIns="0" bIns="0" anchor="t">
             <a:noAutofit/>
           </a:bodyPr>
           <a:lstStyle/>
@@ -13629,7 +13023,7 @@
 </file>
 
 <file path=ppt/slides/slide8.xml><?xml version="1.0" encoding="utf-8"?>
-<p:sld xmlns:a="http://schemas.openxmlformats.org/drawingml/2006/main" xmlns:p="http://schemas.openxmlformats.org/presentationml/2006/main" xmlns:r="http://schemas.openxmlformats.org/officeDocument/2006/relationships">
+<p:sld xmlns:a="http://schemas.openxmlformats.org/drawingml/2006/main" xmlns:r="http://schemas.openxmlformats.org/officeDocument/2006/relationships" xmlns:p="http://schemas.openxmlformats.org/presentationml/2006/main">
   <p:cSld>
     <p:bg>
       <p:bgPr>
@@ -13645,7 +13039,14 @@
         <p:cNvGrpSpPr/>
         <p:nvPr/>
       </p:nvGrpSpPr>
-      <p:grpSpPr/>
+      <p:grpSpPr>
+        <a:xfrm>
+          <a:off x="0" y="0"/>
+          <a:ext cx="0" cy="0"/>
+          <a:chOff x="0" y="0"/>
+          <a:chExt cx="0" cy="0"/>
+        </a:xfrm>
+      </p:grpSpPr>
       <p:sp>
         <p:nvSpPr>
           <p:cNvPr id="2" name="TextBox 1"/>
@@ -13663,7 +13064,7 @@
           <a:noFill/>
         </p:spPr>
         <p:txBody>
-          <a:bodyPr wrap="square" lIns="0" rIns="0" tIns="0" bIns="0" anchor="t">
+          <a:bodyPr wrap="square" lIns="0" tIns="0" rIns="0" bIns="0" anchor="t">
             <a:noAutofit/>
           </a:bodyPr>
           <a:lstStyle/>
@@ -13729,7 +13130,7 @@
           <a:noFill/>
         </p:spPr>
         <p:txBody>
-          <a:bodyPr wrap="square" lIns="0" rIns="0" tIns="0" bIns="0" anchor="ctr">
+          <a:bodyPr wrap="square" lIns="0" tIns="0" rIns="0" bIns="0" anchor="ctr">
             <a:noAutofit/>
           </a:bodyPr>
           <a:lstStyle/>
@@ -13785,6 +13186,7 @@
           <a:lstStyle/>
           <a:p>
             <a:pPr algn="ctr"/>
+            <a:endParaRPr/>
           </a:p>
         </p:txBody>
       </p:sp>
@@ -13805,7 +13207,7 @@
           <a:noFill/>
         </p:spPr>
         <p:txBody>
-          <a:bodyPr wrap="square" lIns="0" rIns="0" tIns="0" bIns="0" anchor="t">
+          <a:bodyPr wrap="square" lIns="0" tIns="0" rIns="0" bIns="0" anchor="t">
             <a:noAutofit/>
           </a:bodyPr>
           <a:lstStyle/>
@@ -13851,7 +13253,7 @@
           <a:noFill/>
         </p:spPr>
         <p:txBody>
-          <a:bodyPr wrap="square" lIns="0" rIns="0" tIns="0" bIns="0" anchor="t">
+          <a:bodyPr wrap="square" lIns="0" tIns="0" rIns="0" bIns="0" anchor="t">
             <a:noAutofit/>
           </a:bodyPr>
           <a:lstStyle/>
@@ -13897,7 +13299,7 @@
           <a:noFill/>
         </p:spPr>
         <p:txBody>
-          <a:bodyPr wrap="square" lIns="0" rIns="0" tIns="0" bIns="0" anchor="t">
+          <a:bodyPr wrap="square" lIns="0" tIns="0" rIns="0" bIns="0" anchor="t">
             <a:noAutofit/>
           </a:bodyPr>
           <a:lstStyle/>
@@ -13953,6 +13355,7 @@
           <a:lstStyle/>
           <a:p>
             <a:pPr algn="ctr"/>
+            <a:endParaRPr/>
           </a:p>
         </p:txBody>
       </p:sp>
@@ -13973,7 +13376,7 @@
           <a:noFill/>
         </p:spPr>
         <p:txBody>
-          <a:bodyPr wrap="square" lIns="0" rIns="0" tIns="0" bIns="0" anchor="t">
+          <a:bodyPr wrap="square" lIns="0" tIns="0" rIns="0" bIns="0" anchor="t">
             <a:noAutofit/>
           </a:bodyPr>
           <a:lstStyle/>
@@ -14019,7 +13422,7 @@
           <a:noFill/>
         </p:spPr>
         <p:txBody>
-          <a:bodyPr wrap="square" lIns="0" rIns="0" tIns="0" bIns="0" anchor="t">
+          <a:bodyPr wrap="square" lIns="0" tIns="0" rIns="0" bIns="0" anchor="t">
             <a:noAutofit/>
           </a:bodyPr>
           <a:lstStyle/>
@@ -14065,7 +13468,7 @@
           <a:noFill/>
         </p:spPr>
         <p:txBody>
-          <a:bodyPr wrap="square" lIns="0" rIns="0" tIns="0" bIns="0" anchor="t">
+          <a:bodyPr wrap="square" lIns="0" tIns="0" rIns="0" bIns="0" anchor="t">
             <a:noAutofit/>
           </a:bodyPr>
           <a:lstStyle/>
@@ -14121,6 +13524,7 @@
           <a:lstStyle/>
           <a:p>
             <a:pPr algn="ctr"/>
+            <a:endParaRPr/>
           </a:p>
         </p:txBody>
       </p:sp>
@@ -14141,7 +13545,7 @@
           <a:noFill/>
         </p:spPr>
         <p:txBody>
-          <a:bodyPr wrap="square" lIns="0" rIns="0" tIns="0" bIns="0" anchor="t">
+          <a:bodyPr wrap="square" lIns="0" tIns="0" rIns="0" bIns="0" anchor="t">
             <a:noAutofit/>
           </a:bodyPr>
           <a:lstStyle/>
@@ -14187,7 +13591,7 @@
           <a:noFill/>
         </p:spPr>
         <p:txBody>
-          <a:bodyPr wrap="square" lIns="0" rIns="0" tIns="0" bIns="0" anchor="t">
+          <a:bodyPr wrap="square" lIns="0" tIns="0" rIns="0" bIns="0" anchor="t">
             <a:noAutofit/>
           </a:bodyPr>
           <a:lstStyle/>
@@ -14233,7 +13637,7 @@
           <a:noFill/>
         </p:spPr>
         <p:txBody>
-          <a:bodyPr wrap="square" lIns="0" rIns="0" tIns="0" bIns="0" anchor="t">
+          <a:bodyPr wrap="square" lIns="0" tIns="0" rIns="0" bIns="0" anchor="t">
             <a:noAutofit/>
           </a:bodyPr>
           <a:lstStyle/>
@@ -14309,6 +13713,7 @@
           <a:lstStyle/>
           <a:p>
             <a:pPr algn="ctr"/>
+            <a:endParaRPr/>
           </a:p>
         </p:txBody>
       </p:sp>
@@ -14329,7 +13734,7 @@
           <a:noFill/>
         </p:spPr>
         <p:txBody>
-          <a:bodyPr wrap="square" lIns="0" rIns="0" tIns="0" bIns="0" anchor="t">
+          <a:bodyPr wrap="square" lIns="0" tIns="0" rIns="0" bIns="0" anchor="t">
             <a:noAutofit/>
           </a:bodyPr>
           <a:lstStyle/>
@@ -14375,7 +13780,7 @@
           <a:noFill/>
         </p:spPr>
         <p:txBody>
-          <a:bodyPr wrap="square" lIns="0" rIns="0" tIns="0" bIns="0" anchor="t">
+          <a:bodyPr wrap="square" lIns="0" tIns="0" rIns="0" bIns="0" anchor="t">
             <a:noAutofit/>
           </a:bodyPr>
           <a:lstStyle/>
@@ -14421,7 +13826,7 @@
           <a:noFill/>
         </p:spPr>
         <p:txBody>
-          <a:bodyPr wrap="square" lIns="0" rIns="0" tIns="0" bIns="0" anchor="t">
+          <a:bodyPr wrap="square" lIns="0" tIns="0" rIns="0" bIns="0" anchor="t">
             <a:noAutofit/>
           </a:bodyPr>
           <a:lstStyle/>
@@ -14479,6 +13884,7 @@
           <a:lstStyle/>
           <a:p>
             <a:pPr algn="ctr"/>
+            <a:endParaRPr/>
           </a:p>
         </p:txBody>
       </p:sp>
@@ -14499,7 +13905,7 @@
           <a:noFill/>
         </p:spPr>
         <p:txBody>
-          <a:bodyPr wrap="square" lIns="0" rIns="0" tIns="0" bIns="0" anchor="ctr">
+          <a:bodyPr wrap="square" lIns="0" tIns="0" rIns="0" bIns="0" anchor="ctr">
             <a:noAutofit/>
           </a:bodyPr>
           <a:lstStyle/>
@@ -14545,7 +13951,7 @@
           <a:noFill/>
         </p:spPr>
         <p:txBody>
-          <a:bodyPr wrap="square" lIns="0" rIns="0" tIns="0" bIns="0" anchor="t">
+          <a:bodyPr wrap="square" lIns="0" tIns="0" rIns="0" bIns="0" anchor="t">
             <a:noAutofit/>
           </a:bodyPr>
           <a:lstStyle/>
@@ -14903,7 +14309,7 @@
 </file>
 
 <file path=ppt/theme/theme2.xml><?xml version="1.0" encoding="utf-8"?>
-<a:theme xmlns:a="http://schemas.openxmlformats.org/drawingml/2006/main" name="Office Theme">
+<a:theme xmlns:a="http://schemas.openxmlformats.org/drawingml/2006/main" name="Office 主题​​">
   <a:themeElements>
     <a:clrScheme name="Office">
       <a:dk1>
@@ -14913,44 +14319,44 @@
         <a:sysClr val="window" lastClr="FFFFFF"/>
       </a:lt1>
       <a:dk2>
-        <a:srgbClr val="1F497D"/>
+        <a:srgbClr val="0E2841"/>
       </a:dk2>
       <a:lt2>
-        <a:srgbClr val="EEECE1"/>
+        <a:srgbClr val="E8E8E8"/>
       </a:lt2>
       <a:accent1>
-        <a:srgbClr val="4F81BD"/>
+        <a:srgbClr val="156082"/>
       </a:accent1>
       <a:accent2>
-        <a:srgbClr val="C0504D"/>
+        <a:srgbClr val="E97132"/>
       </a:accent2>
       <a:accent3>
-        <a:srgbClr val="9BBB59"/>
+        <a:srgbClr val="196B24"/>
       </a:accent3>
       <a:accent4>
-        <a:srgbClr val="8064A2"/>
+        <a:srgbClr val="0F9ED5"/>
       </a:accent4>
       <a:accent5>
-        <a:srgbClr val="4BACC6"/>
+        <a:srgbClr val="A02B93"/>
       </a:accent5>
       <a:accent6>
-        <a:srgbClr val="F79646"/>
+        <a:srgbClr val="4EA72E"/>
       </a:accent6>
       <a:hlink>
-        <a:srgbClr val="0000FF"/>
+        <a:srgbClr val="467886"/>
       </a:hlink>
       <a:folHlink>
-        <a:srgbClr val="800080"/>
+        <a:srgbClr val="96607D"/>
       </a:folHlink>
     </a:clrScheme>
     <a:fontScheme name="Office">
       <a:majorFont>
-        <a:latin typeface="Calibri"/>
+        <a:latin typeface="等线 Light" panose="02110004020202020204"/>
         <a:ea typeface=""/>
         <a:cs typeface=""/>
-        <a:font script="Jpan" typeface="ＭＳ Ｐゴシック"/>
+        <a:font script="Jpan" typeface="游ゴシック Light"/>
         <a:font script="Hang" typeface="맑은 고딕"/>
-        <a:font script="Hans" typeface="宋体"/>
+        <a:font script="Hans" typeface="等线 Light"/>
         <a:font script="Hant" typeface="新細明體"/>
         <a:font script="Arab" typeface="Times New Roman"/>
         <a:font script="Hebr" typeface="Times New Roman"/>
@@ -14978,14 +14384,31 @@
         <a:font script="Viet" typeface="Times New Roman"/>
         <a:font script="Uigh" typeface="Microsoft Uighur"/>
         <a:font script="Geor" typeface="Sylfaen"/>
+        <a:font script="Armn" typeface="Arial"/>
+        <a:font script="Bugi" typeface="Leelawadee UI"/>
+        <a:font script="Bopo" typeface="Microsoft JhengHei"/>
+        <a:font script="Java" typeface="Javanese Text"/>
+        <a:font script="Lisu" typeface="Segoe UI"/>
+        <a:font script="Mymr" typeface="Myanmar Text"/>
+        <a:font script="Nkoo" typeface="Ebrima"/>
+        <a:font script="Olck" typeface="Nirmala UI"/>
+        <a:font script="Osma" typeface="Ebrima"/>
+        <a:font script="Phag" typeface="Phagspa"/>
+        <a:font script="Syrn" typeface="Estrangelo Edessa"/>
+        <a:font script="Syrj" typeface="Estrangelo Edessa"/>
+        <a:font script="Syre" typeface="Estrangelo Edessa"/>
+        <a:font script="Sora" typeface="Nirmala UI"/>
+        <a:font script="Tale" typeface="Microsoft Tai Le"/>
+        <a:font script="Talu" typeface="Microsoft New Tai Lue"/>
+        <a:font script="Tfng" typeface="Ebrima"/>
       </a:majorFont>
       <a:minorFont>
-        <a:latin typeface="Calibri"/>
+        <a:latin typeface="等线" panose="02110004020202020204"/>
         <a:ea typeface=""/>
         <a:cs typeface=""/>
-        <a:font script="Jpan" typeface="ＭＳ Ｐゴシック"/>
+        <a:font script="Jpan" typeface="游ゴシック"/>
         <a:font script="Hang" typeface="맑은 고딕"/>
-        <a:font script="Hans" typeface="宋体"/>
+        <a:font script="Hans" typeface="等线"/>
         <a:font script="Hant" typeface="新細明體"/>
         <a:font script="Arab" typeface="Arial"/>
         <a:font script="Hebr" typeface="Arial"/>
@@ -15013,6 +14436,23 @@
         <a:font script="Viet" typeface="Arial"/>
         <a:font script="Uigh" typeface="Microsoft Uighur"/>
         <a:font script="Geor" typeface="Sylfaen"/>
+        <a:font script="Armn" typeface="Arial"/>
+        <a:font script="Bugi" typeface="Leelawadee UI"/>
+        <a:font script="Bopo" typeface="Microsoft JhengHei"/>
+        <a:font script="Java" typeface="Javanese Text"/>
+        <a:font script="Lisu" typeface="Segoe UI"/>
+        <a:font script="Mymr" typeface="Myanmar Text"/>
+        <a:font script="Nkoo" typeface="Ebrima"/>
+        <a:font script="Olck" typeface="Nirmala UI"/>
+        <a:font script="Osma" typeface="Ebrima"/>
+        <a:font script="Phag" typeface="Phagspa"/>
+        <a:font script="Syrn" typeface="Estrangelo Edessa"/>
+        <a:font script="Syrj" typeface="Estrangelo Edessa"/>
+        <a:font script="Syre" typeface="Estrangelo Edessa"/>
+        <a:font script="Sora" typeface="Nirmala UI"/>
+        <a:font script="Tale" typeface="Microsoft Tai Le"/>
+        <a:font script="Talu" typeface="Microsoft New Tai Lue"/>
+        <a:font script="Tfng" typeface="Ebrima"/>
       </a:minorFont>
     </a:fontScheme>
     <a:fmtScheme name="Office">
@@ -15024,180 +14464,136 @@
           <a:gsLst>
             <a:gs pos="0">
               <a:schemeClr val="phClr">
-                <a:tint val="50000"/>
-                <a:satMod val="300000"/>
+                <a:lumMod val="110000"/>
+                <a:satMod val="105000"/>
+                <a:tint val="67000"/>
               </a:schemeClr>
             </a:gs>
-            <a:gs pos="35000">
+            <a:gs pos="50000">
               <a:schemeClr val="phClr">
-                <a:tint val="37000"/>
-                <a:satMod val="300000"/>
+                <a:lumMod val="105000"/>
+                <a:satMod val="103000"/>
+                <a:tint val="73000"/>
               </a:schemeClr>
             </a:gs>
             <a:gs pos="100000">
               <a:schemeClr val="phClr">
-                <a:tint val="15000"/>
-                <a:satMod val="350000"/>
+                <a:lumMod val="105000"/>
+                <a:satMod val="109000"/>
+                <a:tint val="81000"/>
               </a:schemeClr>
             </a:gs>
           </a:gsLst>
-          <a:lin ang="16200000" scaled="1"/>
+          <a:lin ang="5400000" scaled="0"/>
         </a:gradFill>
         <a:gradFill rotWithShape="1">
           <a:gsLst>
             <a:gs pos="0">
               <a:schemeClr val="phClr">
-                <a:tint val="100000"/>
+                <a:satMod val="103000"/>
+                <a:lumMod val="102000"/>
+                <a:tint val="94000"/>
+              </a:schemeClr>
+            </a:gs>
+            <a:gs pos="50000">
+              <a:schemeClr val="phClr">
+                <a:satMod val="110000"/>
+                <a:lumMod val="100000"/>
                 <a:shade val="100000"/>
-                <a:satMod val="130000"/>
               </a:schemeClr>
             </a:gs>
             <a:gs pos="100000">
               <a:schemeClr val="phClr">
-                <a:tint val="50000"/>
-                <a:shade val="100000"/>
-                <a:satMod val="350000"/>
+                <a:lumMod val="99000"/>
+                <a:satMod val="120000"/>
+                <a:shade val="78000"/>
               </a:schemeClr>
             </a:gs>
           </a:gsLst>
-          <a:lin ang="16200000" scaled="0"/>
+          <a:lin ang="5400000" scaled="0"/>
         </a:gradFill>
       </a:fillStyleLst>
       <a:lnStyleLst>
-        <a:ln w="9525" cap="flat" cmpd="sng" algn="ctr">
+        <a:ln w="12700" cap="flat" cmpd="sng" algn="ctr">
           <a:solidFill>
-            <a:schemeClr val="phClr">
-              <a:shade val="95000"/>
-              <a:satMod val="105000"/>
-            </a:schemeClr>
+            <a:schemeClr val="phClr"/>
           </a:solidFill>
           <a:prstDash val="solid"/>
+          <a:miter lim="800000"/>
+        </a:ln>
+        <a:ln w="19050" cap="flat" cmpd="sng" algn="ctr">
+          <a:solidFill>
+            <a:schemeClr val="phClr"/>
+          </a:solidFill>
+          <a:prstDash val="solid"/>
+          <a:miter lim="800000"/>
         </a:ln>
         <a:ln w="25400" cap="flat" cmpd="sng" algn="ctr">
           <a:solidFill>
             <a:schemeClr val="phClr"/>
           </a:solidFill>
           <a:prstDash val="solid"/>
-        </a:ln>
-        <a:ln w="38100" cap="flat" cmpd="sng" algn="ctr">
-          <a:solidFill>
-            <a:schemeClr val="phClr"/>
-          </a:solidFill>
-          <a:prstDash val="solid"/>
+          <a:miter lim="800000"/>
         </a:ln>
       </a:lnStyleLst>
       <a:effectStyleLst>
         <a:effectStyle>
+          <a:effectLst/>
+        </a:effectStyle>
+        <a:effectStyle>
+          <a:effectLst/>
+        </a:effectStyle>
+        <a:effectStyle>
           <a:effectLst>
-            <a:outerShdw blurRad="40000" dist="20000" dir="5400000" rotWithShape="0">
+            <a:outerShdw blurRad="57150" dist="19050" dir="5400000" algn="ctr" rotWithShape="0">
               <a:srgbClr val="000000">
-                <a:alpha val="38000"/>
+                <a:alpha val="63000"/>
               </a:srgbClr>
             </a:outerShdw>
           </a:effectLst>
-        </a:effectStyle>
-        <a:effectStyle>
-          <a:effectLst>
-            <a:outerShdw blurRad="40000" dist="23000" dir="5400000" rotWithShape="0">
-              <a:srgbClr val="000000">
-                <a:alpha val="35000"/>
-              </a:srgbClr>
-            </a:outerShdw>
-          </a:effectLst>
-        </a:effectStyle>
-        <a:effectStyle>
-          <a:effectLst>
-            <a:outerShdw blurRad="40000" dist="23000" dir="5400000" rotWithShape="0">
-              <a:srgbClr val="000000">
-                <a:alpha val="35000"/>
-              </a:srgbClr>
-            </a:outerShdw>
-          </a:effectLst>
-          <a:scene3d>
-            <a:camera prst="orthographicFront">
-              <a:rot lat="0" lon="0" rev="0"/>
-            </a:camera>
-            <a:lightRig rig="threePt" dir="t">
-              <a:rot lat="0" lon="0" rev="1200000"/>
-            </a:lightRig>
-          </a:scene3d>
-          <a:sp3d>
-            <a:bevelT w="63500" h="25400"/>
-          </a:sp3d>
         </a:effectStyle>
       </a:effectStyleLst>
       <a:bgFillStyleLst>
         <a:solidFill>
           <a:schemeClr val="phClr"/>
         </a:solidFill>
+        <a:solidFill>
+          <a:schemeClr val="phClr">
+            <a:tint val="95000"/>
+            <a:satMod val="170000"/>
+          </a:schemeClr>
+        </a:solidFill>
         <a:gradFill rotWithShape="1">
           <a:gsLst>
             <a:gs pos="0">
               <a:schemeClr val="phClr">
-                <a:tint val="40000"/>
-                <a:satMod val="350000"/>
+                <a:tint val="93000"/>
+                <a:satMod val="150000"/>
+                <a:shade val="98000"/>
+                <a:lumMod val="102000"/>
               </a:schemeClr>
             </a:gs>
-            <a:gs pos="40000">
+            <a:gs pos="50000">
               <a:schemeClr val="phClr">
-                <a:tint val="45000"/>
-                <a:shade val="99000"/>
-                <a:satMod val="350000"/>
+                <a:tint val="98000"/>
+                <a:satMod val="130000"/>
+                <a:shade val="90000"/>
+                <a:lumMod val="103000"/>
               </a:schemeClr>
             </a:gs>
             <a:gs pos="100000">
               <a:schemeClr val="phClr">
-                <a:shade val="20000"/>
-                <a:satMod val="255000"/>
+                <a:shade val="63000"/>
+                <a:satMod val="120000"/>
               </a:schemeClr>
             </a:gs>
           </a:gsLst>
-          <a:path path="circle">
-            <a:fillToRect l="50000" t="-80000" r="50000" b="180000"/>
-          </a:path>
-        </a:gradFill>
-        <a:gradFill rotWithShape="1">
-          <a:gsLst>
-            <a:gs pos="0">
-              <a:schemeClr val="phClr">
-                <a:tint val="80000"/>
-                <a:satMod val="300000"/>
-              </a:schemeClr>
-            </a:gs>
-            <a:gs pos="100000">
-              <a:schemeClr val="phClr">
-                <a:shade val="30000"/>
-                <a:satMod val="200000"/>
-              </a:schemeClr>
-            </a:gs>
-          </a:gsLst>
-          <a:path path="circle">
-            <a:fillToRect l="50000" t="50000" r="50000" b="50000"/>
-          </a:path>
+          <a:lin ang="5400000" scaled="0"/>
         </a:gradFill>
       </a:bgFillStyleLst>
     </a:fmtScheme>
   </a:themeElements>
   <a:objectDefaults>
-    <a:spDef>
-      <a:spPr/>
-      <a:bodyPr/>
-      <a:lstStyle/>
-      <a:style>
-        <a:lnRef idx="1">
-          <a:schemeClr val="accent1"/>
-        </a:lnRef>
-        <a:fillRef idx="3">
-          <a:schemeClr val="accent1"/>
-        </a:fillRef>
-        <a:effectRef idx="2">
-          <a:schemeClr val="accent1"/>
-        </a:effectRef>
-        <a:fontRef idx="minor">
-          <a:schemeClr val="lt1"/>
-        </a:fontRef>
-      </a:style>
-    </a:spDef>
     <a:lnDef>
       <a:spPr/>
       <a:bodyPr/>
@@ -15219,5 +14615,10 @@
     </a:lnDef>
   </a:objectDefaults>
   <a:extraClrSchemeLst/>
+  <a:extLst>
+    <a:ext uri="{05A4C25C-085E-4340-85A3-A5531E510DB2}">
+      <thm15:themeFamily xmlns:thm15="http://schemas.microsoft.com/office/thememl/2012/main" name="Office Theme" id="{2E142A2C-CD16-42D6-873A-C26D2A0506FA}" vid="{1BDDFF52-6CD6-40A5-AB3C-68EB2F1E4D0A}"/>
+    </a:ext>
+  </a:extLst>
 </a:theme>
 </file>